--- a/partners/institutional-partnership/KOWO_Institutional_Partnership_Brief_v2_Premium.pptx
+++ b/partners/institutional-partnership/KOWO_Institutional_Partnership_Brief_v2_Premium.pptx
@@ -4,6 +4,9 @@
   <p:sldMasterIdLst>
     <p:sldMasterId id="2147483648" r:id="rId1"/>
   </p:sldMasterIdLst>
+  <p:notesMasterIdLst>
+    <p:notesMasterId r:id="rId15"/>
+  </p:notesMasterIdLst>
   <p:sldIdLst>
     <p:sldId id="256" r:id="rId2"/>
     <p:sldId id="257" r:id="rId3"/>
@@ -19,11 +22,8 @@
     <p:sldId id="267" r:id="rId13"/>
     <p:sldId id="268" r:id="rId14"/>
   </p:sldIdLst>
-  <p:notesMasterIdLst>
-    <p:notesMasterId r:id="rId15"/>
-  </p:notesMasterIdLst>
-  <p:sldSz cx="12191695" cy="6858000"/>
-  <p:notesSz cx="6858000" cy="12191695"/>
+  <p:sldSz cx="12192000" cy="6858000"/>
+  <p:notesSz cx="6858000" cy="12192000"/>
   <p:defaultTextStyle>
     <a:lvl1pPr marL="0" algn="l" defTabSz="914400" rtl="0" eaLnBrk="1" latinLnBrk="0" hangingPunct="1">
       <a:defRPr sz="1800" kern="1200">
@@ -116,7 +116,20 @@
       </a:defRPr>
     </a:lvl9pPr>
   </p:defaultTextStyle>
+  <p:extLst>
+    <p:ext uri="{EFAFB233-063F-42B5-8137-9DF3F51BA10A}">
+      <p15:sldGuideLst xmlns:p15="http://schemas.microsoft.com/office/powerpoint/2012/main"/>
+    </p:ext>
+  </p:extLst>
 </p:presentation>
+</file>
+
+<file path=ppt/revisionInfo.xml><?xml version="1.0" encoding="utf-8"?>
+<p1510:revInfo xmlns:a="http://schemas.openxmlformats.org/drawingml/2006/main" xmlns:r="http://schemas.openxmlformats.org/officeDocument/2006/relationships" xmlns:p1510="http://schemas.microsoft.com/office/powerpoint/2015/10/main">
+  <p1510:revLst>
+    <p1510:client id="{6090890E-0E50-4350-9AC2-D6921418EA18}" v="549" dt="2026-06-28T19:36:04.305"/>
+  </p1510:revLst>
+</p1510:revInfo>
 </file>
 
 <file path=ppt/notesMasters/notesMaster1.xml><?xml version="1.0" encoding="utf-8"?>
@@ -143,7 +156,7 @@
       </p:grpSpPr>
       <p:sp>
         <p:nvSpPr>
-          <p:cNvPr id="2" name="Header Placeholder 1"/>
+          <p:cNvPr id="2" name="Espace réservé de l'en-tête 1"/>
           <p:cNvSpPr>
             <a:spLocks noGrp="1"/>
           </p:cNvSpPr>
@@ -154,7 +167,7 @@
         <p:spPr>
           <a:xfrm>
             <a:off x="0" y="0"/>
-            <a:ext cx="2971800" cy="458788"/>
+            <a:ext cx="2971800" cy="611188"/>
           </a:xfrm>
           <a:prstGeom prst="rect">
             <a:avLst/>
@@ -168,13 +181,13 @@
             </a:lvl1pPr>
           </a:lstStyle>
           <a:p>
-            <a:endParaRPr lang="en-US"/>
-          </a:p>
-        </p:txBody>
-      </p:sp>
-      <p:sp>
-        <p:nvSpPr>
-          <p:cNvPr id="3" name="Date Placeholder 2"/>
+            <a:endParaRPr lang="fr-FR"/>
+          </a:p>
+        </p:txBody>
+      </p:sp>
+      <p:sp>
+        <p:nvSpPr>
+          <p:cNvPr id="3" name="Espace réservé de la date 2"/>
           <p:cNvSpPr>
             <a:spLocks noGrp="1"/>
           </p:cNvSpPr>
@@ -185,7 +198,7 @@
         <p:spPr>
           <a:xfrm>
             <a:off x="3884613" y="0"/>
-            <a:ext cx="2971800" cy="458788"/>
+            <a:ext cx="2971800" cy="611188"/>
           </a:xfrm>
           <a:prstGeom prst="rect">
             <a:avLst/>
@@ -199,17 +212,16 @@
             </a:lvl1pPr>
           </a:lstStyle>
           <a:p>
-            <a:fld id="{5282F153-3F37-0F45-9E97-73ACFA13230C}" type="datetimeFigureOut">
-              <a:rPr lang="en-US"/>
-              <a:t>7/23/19</a:t>
+            <a:fld id="{09CCB1A4-7164-4FB7-9602-28F96A9B7EEE}" type="datetimeFigureOut">
+              <a:t>28/06/2026</a:t>
             </a:fld>
-            <a:endParaRPr lang="en-US"/>
-          </a:p>
-        </p:txBody>
-      </p:sp>
-      <p:sp>
-        <p:nvSpPr>
-          <p:cNvPr id="4" name="Slide Image Placeholder 3"/>
+            <a:endParaRPr lang="fr-FR"/>
+          </a:p>
+        </p:txBody>
+      </p:sp>
+      <p:sp>
+        <p:nvSpPr>
+          <p:cNvPr id="4" name="Espace réservé de l'image des diapositives 3"/>
           <p:cNvSpPr>
             <a:spLocks noGrp="1" noRot="1" noChangeAspect="1"/>
           </p:cNvSpPr>
@@ -219,8 +231,8 @@
         </p:nvSpPr>
         <p:spPr>
           <a:xfrm>
-            <a:off x="685800" y="1143000"/>
-            <a:ext cx="5486400" cy="3086100"/>
+            <a:off x="-228600" y="1524000"/>
+            <a:ext cx="7315200" cy="4114800"/>
           </a:xfrm>
           <a:prstGeom prst="rect">
             <a:avLst/>
@@ -236,13 +248,13 @@
           <a:bodyPr vert="horz" lIns="91440" tIns="45720" rIns="91440" bIns="45720" rtlCol="0" anchor="ctr"/>
           <a:lstStyle/>
           <a:p>
-            <a:endParaRPr lang="en-US"/>
-          </a:p>
-        </p:txBody>
-      </p:sp>
-      <p:sp>
-        <p:nvSpPr>
-          <p:cNvPr id="5" name="Notes Placeholder 4"/>
+            <a:endParaRPr lang="fr-FR"/>
+          </a:p>
+        </p:txBody>
+      </p:sp>
+      <p:sp>
+        <p:nvSpPr>
+          <p:cNvPr id="5" name="Espace réservé des notes 4"/>
           <p:cNvSpPr>
             <a:spLocks noGrp="1"/>
           </p:cNvSpPr>
@@ -252,8 +264,8 @@
         </p:nvSpPr>
         <p:spPr>
           <a:xfrm>
-            <a:off x="685800" y="4400550"/>
-            <a:ext cx="5486400" cy="3600450"/>
+            <a:off x="685800" y="5867400"/>
+            <a:ext cx="5486400" cy="4800600"/>
           </a:xfrm>
           <a:prstGeom prst="rect">
             <a:avLst/>
@@ -265,43 +277,43 @@
           <a:p>
             <a:pPr lvl="0"/>
             <a:r>
-              <a:rPr lang="en-US"/>
-              <a:t>Click to edit Master text styles</a:t>
+              <a:rPr lang="fr-FR"/>
+              <a:t>Cliquez pour modifier les styles du texte du masque</a:t>
             </a:r>
           </a:p>
           <a:p>
             <a:pPr lvl="1"/>
             <a:r>
-              <a:rPr lang="en-US"/>
-              <a:t>Second level</a:t>
+              <a:rPr lang="fr-FR"/>
+              <a:t>Deuxième niveau</a:t>
             </a:r>
           </a:p>
           <a:p>
             <a:pPr lvl="2"/>
             <a:r>
-              <a:rPr lang="en-US"/>
-              <a:t>Third level</a:t>
+              <a:rPr lang="fr-FR"/>
+              <a:t>Troisième niveau</a:t>
             </a:r>
           </a:p>
           <a:p>
             <a:pPr lvl="3"/>
             <a:r>
-              <a:rPr lang="en-US"/>
-              <a:t>Fourth level</a:t>
+              <a:rPr lang="fr-FR"/>
+              <a:t>Quatrième niveau</a:t>
             </a:r>
           </a:p>
           <a:p>
             <a:pPr lvl="4"/>
             <a:r>
-              <a:rPr lang="en-US"/>
-              <a:t>Fifth level</a:t>
-            </a:r>
-          </a:p>
-        </p:txBody>
-      </p:sp>
-      <p:sp>
-        <p:nvSpPr>
-          <p:cNvPr id="6" name="Footer Placeholder 5"/>
+              <a:rPr lang="fr-FR"/>
+              <a:t>Cinquième niveau</a:t>
+            </a:r>
+          </a:p>
+        </p:txBody>
+      </p:sp>
+      <p:sp>
+        <p:nvSpPr>
+          <p:cNvPr id="6" name="Espace réservé du pied de page 5"/>
           <p:cNvSpPr>
             <a:spLocks noGrp="1"/>
           </p:cNvSpPr>
@@ -311,8 +323,8 @@
         </p:nvSpPr>
         <p:spPr>
           <a:xfrm>
-            <a:off x="0" y="8685213"/>
-            <a:ext cx="2971800" cy="458787"/>
+            <a:off x="0" y="11580813"/>
+            <a:ext cx="2971800" cy="611187"/>
           </a:xfrm>
           <a:prstGeom prst="rect">
             <a:avLst/>
@@ -326,13 +338,13 @@
             </a:lvl1pPr>
           </a:lstStyle>
           <a:p>
-            <a:endParaRPr lang="en-US"/>
-          </a:p>
-        </p:txBody>
-      </p:sp>
-      <p:sp>
-        <p:nvSpPr>
-          <p:cNvPr id="7" name="Slide Number Placeholder 6"/>
+            <a:endParaRPr lang="fr-FR"/>
+          </a:p>
+        </p:txBody>
+      </p:sp>
+      <p:sp>
+        <p:nvSpPr>
+          <p:cNvPr id="7" name="Espace réservé du numéro de diapositive 6"/>
           <p:cNvSpPr>
             <a:spLocks noGrp="1"/>
           </p:cNvSpPr>
@@ -342,8 +354,8 @@
         </p:nvSpPr>
         <p:spPr>
           <a:xfrm>
-            <a:off x="3884613" y="8685213"/>
-            <a:ext cx="2971800" cy="458787"/>
+            <a:off x="3884613" y="11580813"/>
+            <a:ext cx="2971800" cy="611187"/>
           </a:xfrm>
           <a:prstGeom prst="rect">
             <a:avLst/>
@@ -357,18 +369,17 @@
             </a:lvl1pPr>
           </a:lstStyle>
           <a:p>
-            <a:fld id="{CE5E9CC1-C706-0F49-92D6-E571CC5EEA8F}" type="slidenum">
-              <a:rPr lang="en-US"/>
-              <a:t>‹#›</a:t>
+            <a:fld id="{09E6D25F-46ED-4C0D-BDB4-DE6BF78EA6E2}" type="slidenum">
+              <a:t>‹N°›</a:t>
             </a:fld>
-            <a:endParaRPr lang="en-US"/>
+            <a:endParaRPr lang="fr-FR"/>
           </a:p>
         </p:txBody>
       </p:sp>
     </p:spTree>
     <p:extLst>
       <p:ext uri="{BB962C8B-B14F-4D97-AF65-F5344CB8AC3E}">
-        <p14:creationId xmlns:p14="http://schemas.microsoft.com/office/powerpoint/2010/main" val="1024086991"/>
+        <p14:creationId xmlns:p14="http://schemas.microsoft.com/office/powerpoint/2010/main" val="4138912729"/>
       </p:ext>
     </p:extLst>
   </p:cSld>
@@ -512,10 +523,6 @@
           <a:bodyPr/>
           <a:lstStyle/>
           <a:p>
-            <a:r>
-              <a:rPr lang="en-US" dirty="0"/>
-              <a:t/>
-            </a:r>
             <a:endParaRPr lang="en-US" dirty="0"/>
           </a:p>
         </p:txBody>
@@ -600,10 +607,6 @@
           <a:bodyPr/>
           <a:lstStyle/>
           <a:p>
-            <a:r>
-              <a:rPr lang="en-US" dirty="0"/>
-              <a:t/>
-            </a:r>
             <a:endParaRPr lang="en-US" dirty="0"/>
           </a:p>
         </p:txBody>
@@ -688,10 +691,6 @@
           <a:bodyPr/>
           <a:lstStyle/>
           <a:p>
-            <a:r>
-              <a:rPr lang="en-US" dirty="0"/>
-              <a:t/>
-            </a:r>
             <a:endParaRPr lang="en-US" dirty="0"/>
           </a:p>
         </p:txBody>
@@ -776,10 +775,6 @@
           <a:bodyPr/>
           <a:lstStyle/>
           <a:p>
-            <a:r>
-              <a:rPr lang="en-US" dirty="0"/>
-              <a:t/>
-            </a:r>
             <a:endParaRPr lang="en-US" dirty="0"/>
           </a:p>
         </p:txBody>
@@ -864,10 +859,6 @@
           <a:bodyPr/>
           <a:lstStyle/>
           <a:p>
-            <a:r>
-              <a:rPr lang="en-US" dirty="0"/>
-              <a:t/>
-            </a:r>
             <a:endParaRPr lang="en-US" dirty="0"/>
           </a:p>
         </p:txBody>
@@ -952,10 +943,6 @@
           <a:bodyPr/>
           <a:lstStyle/>
           <a:p>
-            <a:r>
-              <a:rPr lang="en-US" dirty="0"/>
-              <a:t/>
-            </a:r>
             <a:endParaRPr lang="en-US" dirty="0"/>
           </a:p>
         </p:txBody>
@@ -1040,10 +1027,6 @@
           <a:bodyPr/>
           <a:lstStyle/>
           <a:p>
-            <a:r>
-              <a:rPr lang="en-US" dirty="0"/>
-              <a:t/>
-            </a:r>
             <a:endParaRPr lang="en-US" dirty="0"/>
           </a:p>
         </p:txBody>
@@ -1128,10 +1111,6 @@
           <a:bodyPr/>
           <a:lstStyle/>
           <a:p>
-            <a:r>
-              <a:rPr lang="en-US" dirty="0"/>
-              <a:t/>
-            </a:r>
             <a:endParaRPr lang="en-US" dirty="0"/>
           </a:p>
         </p:txBody>
@@ -1216,10 +1195,6 @@
           <a:bodyPr/>
           <a:lstStyle/>
           <a:p>
-            <a:r>
-              <a:rPr lang="en-US" dirty="0"/>
-              <a:t/>
-            </a:r>
             <a:endParaRPr lang="en-US" dirty="0"/>
           </a:p>
         </p:txBody>
@@ -1304,10 +1279,6 @@
           <a:bodyPr/>
           <a:lstStyle/>
           <a:p>
-            <a:r>
-              <a:rPr lang="en-US" dirty="0"/>
-              <a:t/>
-            </a:r>
             <a:endParaRPr lang="en-US" dirty="0"/>
           </a:p>
         </p:txBody>
@@ -1392,10 +1363,6 @@
           <a:bodyPr/>
           <a:lstStyle/>
           <a:p>
-            <a:r>
-              <a:rPr lang="en-US" dirty="0"/>
-              <a:t/>
-            </a:r>
             <a:endParaRPr lang="en-US" dirty="0"/>
           </a:p>
         </p:txBody>
@@ -1480,10 +1447,6 @@
           <a:bodyPr/>
           <a:lstStyle/>
           <a:p>
-            <a:r>
-              <a:rPr lang="en-US" dirty="0"/>
-              <a:t/>
-            </a:r>
             <a:endParaRPr lang="en-US" dirty="0"/>
           </a:p>
         </p:txBody>
@@ -1568,10 +1531,6 @@
           <a:bodyPr/>
           <a:lstStyle/>
           <a:p>
-            <a:r>
-              <a:rPr lang="en-US" dirty="0"/>
-              <a:t/>
-            </a:r>
             <a:endParaRPr lang="en-US" dirty="0"/>
           </a:p>
         </p:txBody>
@@ -1645,6 +1604,11 @@
 <file path=ppt/slideMasters/slideMaster1.xml><?xml version="1.0" encoding="utf-8"?>
 <p:sldMaster xmlns:a="http://schemas.openxmlformats.org/drawingml/2006/main" xmlns:r="http://schemas.openxmlformats.org/officeDocument/2006/relationships" xmlns:p="http://schemas.openxmlformats.org/presentationml/2006/main">
   <p:cSld>
+    <p:bg>
+      <p:bgRef idx="1001">
+        <a:schemeClr val="bg1"/>
+      </p:bgRef>
+    </p:bg>
     <p:spTree>
       <p:nvGrpSpPr>
         <p:cNvPr id="1" name=""/>
@@ -1927,6 +1891,7 @@
         <a:solidFill>
           <a:srgbClr val="07150F"/>
         </a:solidFill>
+        <a:effectLst/>
       </p:bgPr>
     </p:bg>
     <p:spTree>
@@ -2701,14 +2666,14 @@
       </p:sp>
       <p:pic>
         <p:nvPicPr>
-          <p:cNvPr id="32" name="Image 0" descr="/mnt/data/kowo-institutional-partnership-v2/assets/kowo-logo.jpg">    </p:cNvPr>
+          <p:cNvPr id="32" name="Image 0" descr="/mnt/data/kowo-institutional-partnership-v2/assets/kowo-logo.jpg"/>
           <p:cNvPicPr>
             <a:picLocks noChangeAspect="1"/>
           </p:cNvPicPr>
           <p:nvPr/>
         </p:nvPicPr>
         <p:blipFill>
-          <a:blip r:embed="rId1"/>
+          <a:blip r:embed="rId3"/>
           <a:stretch>
             <a:fillRect/>
           </a:stretch>
@@ -2744,7 +2709,7 @@
           <a:bodyPr wrap="square" lIns="0" tIns="0" rIns="0" bIns="0" rtlCol="0" anchor="ctr"/>
           <a:lstStyle/>
           <a:p>
-            <a:pPr indent="0" marL="0">
+            <a:pPr marL="0" indent="0">
               <a:buNone/>
             </a:pPr>
             <a:r>
@@ -2752,13 +2717,15 @@
                 <a:solidFill>
                   <a:srgbClr val="123B2B"/>
                 </a:solidFill>
-                <a:latin typeface="Aptos Display" pitchFamily="34" charset="0"/>
+                <a:latin typeface="Garamond"/>
                 <a:ea typeface="Aptos Display" pitchFamily="34" charset="-122"/>
                 <a:cs typeface="Aptos Display" pitchFamily="34" charset="-120"/>
               </a:rPr>
               <a:t>KOWO</a:t>
             </a:r>
-            <a:endParaRPr lang="en-US" sz="1000" dirty="0"/>
+            <a:endParaRPr lang="en-US" sz="1000" dirty="0">
+              <a:latin typeface="Garamond"/>
+            </a:endParaRPr>
           </a:p>
         </p:txBody>
       </p:sp>
@@ -2783,7 +2750,7 @@
           <a:bodyPr wrap="square" lIns="0" tIns="0" rIns="0" bIns="0" rtlCol="0" anchor="ctr"/>
           <a:lstStyle/>
           <a:p>
-            <a:pPr algn="r" indent="0" marL="0">
+            <a:pPr marL="0" indent="0" algn="r">
               <a:buNone/>
             </a:pPr>
             <a:r>
@@ -2791,23 +2758,26 @@
                 <a:solidFill>
                   <a:srgbClr val="123B2B"/>
                 </a:solidFill>
+                <a:latin typeface="Garamond"/>
               </a:rPr>
               <a:t>Institutional Partnership Brief</a:t>
             </a:r>
-            <a:endParaRPr lang="en-US" sz="800" dirty="0"/>
+            <a:endParaRPr lang="en-US" sz="800" dirty="0">
+              <a:latin typeface="Garamond"/>
+            </a:endParaRPr>
           </a:p>
         </p:txBody>
       </p:sp>
       <p:pic>
         <p:nvPicPr>
-          <p:cNvPr id="35" name="Image 1" descr="/mnt/data/kowo-institutional-partnership-v2/assets/kowo-logo.jpg">    </p:cNvPr>
+          <p:cNvPr id="35" name="Image 1" descr="/mnt/data/kowo-institutional-partnership-v2/assets/kowo-logo.jpg"/>
           <p:cNvPicPr>
             <a:picLocks noChangeAspect="1"/>
           </p:cNvPicPr>
           <p:nvPr/>
         </p:nvPicPr>
         <p:blipFill>
-          <a:blip r:embed="rId2"/>
+          <a:blip r:embed="rId3"/>
           <a:stretch>
             <a:fillRect/>
           </a:stretch>
@@ -2843,7 +2813,7 @@
           <a:bodyPr wrap="square" lIns="0" tIns="0" rIns="0" bIns="0" rtlCol="0" anchor="ctr"/>
           <a:lstStyle/>
           <a:p>
-            <a:pPr indent="0" marL="0">
+            <a:pPr marL="0" indent="0">
               <a:buNone/>
             </a:pPr>
             <a:r>
@@ -2851,13 +2821,15 @@
                 <a:solidFill>
                   <a:srgbClr val="FFFFFF"/>
                 </a:solidFill>
-                <a:latin typeface="Aptos Display" pitchFamily="34" charset="0"/>
+                <a:latin typeface="Garamond"/>
                 <a:ea typeface="Aptos Display" pitchFamily="34" charset="-122"/>
                 <a:cs typeface="Aptos Display" pitchFamily="34" charset="-120"/>
               </a:rPr>
               <a:t>KOWO</a:t>
             </a:r>
-            <a:endParaRPr lang="en-US" sz="2200" dirty="0"/>
+            <a:endParaRPr lang="en-US" sz="2200" dirty="0">
+              <a:latin typeface="Garamond"/>
+            </a:endParaRPr>
           </a:p>
         </p:txBody>
       </p:sp>
@@ -2884,7 +2856,7 @@
           </a:bodyPr>
           <a:lstStyle/>
           <a:p>
-            <a:pPr indent="0" marL="0">
+            <a:pPr marL="0" indent="0">
               <a:buNone/>
             </a:pPr>
             <a:r>
@@ -2892,16 +2864,18 @@
                 <a:solidFill>
                   <a:srgbClr val="FFFFFF"/>
                 </a:solidFill>
-                <a:latin typeface="Aptos Display" pitchFamily="34" charset="0"/>
+                <a:latin typeface="Garamond"/>
                 <a:ea typeface="Aptos Display" pitchFamily="34" charset="-122"/>
                 <a:cs typeface="Aptos Display" pitchFamily="34" charset="-120"/>
               </a:rPr>
               <a:t>Institutional</a:t>
             </a:r>
-            <a:endParaRPr lang="en-US" sz="5000" dirty="0"/>
-          </a:p>
-          <a:p>
-            <a:pPr indent="0" marL="0">
+            <a:endParaRPr lang="en-US" sz="5000" dirty="0">
+              <a:latin typeface="Garamond"/>
+            </a:endParaRPr>
+          </a:p>
+          <a:p>
+            <a:pPr marL="0" indent="0">
               <a:buNone/>
             </a:pPr>
             <a:r>
@@ -2909,16 +2883,18 @@
                 <a:solidFill>
                   <a:srgbClr val="FFFFFF"/>
                 </a:solidFill>
-                <a:latin typeface="Aptos Display" pitchFamily="34" charset="0"/>
+                <a:latin typeface="Garamond"/>
                 <a:ea typeface="Aptos Display" pitchFamily="34" charset="-122"/>
                 <a:cs typeface="Aptos Display" pitchFamily="34" charset="-120"/>
               </a:rPr>
               <a:t>Partnership</a:t>
             </a:r>
-            <a:endParaRPr lang="en-US" sz="5000" dirty="0"/>
-          </a:p>
-          <a:p>
-            <a:pPr indent="0" marL="0">
+            <a:endParaRPr lang="en-US" sz="5000" dirty="0">
+              <a:latin typeface="Garamond"/>
+            </a:endParaRPr>
+          </a:p>
+          <a:p>
+            <a:pPr marL="0" indent="0">
               <a:buNone/>
             </a:pPr>
             <a:r>
@@ -2926,13 +2902,15 @@
                 <a:solidFill>
                   <a:srgbClr val="FFFFFF"/>
                 </a:solidFill>
-                <a:latin typeface="Aptos Display" pitchFamily="34" charset="0"/>
+                <a:latin typeface="Garamond"/>
                 <a:ea typeface="Aptos Display" pitchFamily="34" charset="-122"/>
                 <a:cs typeface="Aptos Display" pitchFamily="34" charset="-120"/>
               </a:rPr>
               <a:t>Brief</a:t>
             </a:r>
-            <a:endParaRPr lang="en-US" sz="5000" dirty="0"/>
+            <a:endParaRPr lang="en-US" sz="5000" dirty="0">
+              <a:latin typeface="Garamond"/>
+            </a:endParaRPr>
           </a:p>
         </p:txBody>
       </p:sp>
@@ -2959,7 +2937,7 @@
           </a:bodyPr>
           <a:lstStyle/>
           <a:p>
-            <a:pPr indent="0" marL="0">
+            <a:pPr marL="0" indent="0">
               <a:buNone/>
             </a:pPr>
             <a:r>
@@ -2967,10 +2945,13 @@
                 <a:solidFill>
                   <a:srgbClr val="C7D8CF"/>
                 </a:solidFill>
+                <a:latin typeface="Garamond"/>
               </a:rPr>
               <a:t>Une note de présentation premium destinée aux institutions financières, microfinances, banques et partenaires réglementés.</a:t>
             </a:r>
-            <a:endParaRPr lang="en-US" sz="1600" dirty="0"/>
+            <a:endParaRPr lang="en-US" sz="1600" dirty="0">
+              <a:latin typeface="Garamond"/>
+            </a:endParaRPr>
           </a:p>
         </p:txBody>
       </p:sp>
@@ -3024,7 +3005,7 @@
           <a:bodyPr wrap="square" lIns="0" tIns="0" rIns="0" bIns="0" rtlCol="0" anchor="ctr"/>
           <a:lstStyle/>
           <a:p>
-            <a:pPr algn="ctr" indent="0" marL="0">
+            <a:pPr marL="0" indent="0" algn="ctr">
               <a:buNone/>
             </a:pPr>
             <a:r>
@@ -3032,10 +3013,13 @@
                 <a:solidFill>
                   <a:srgbClr val="8DFFD3"/>
                 </a:solidFill>
+                <a:latin typeface="Garamond"/>
               </a:rPr>
               <a:t>BUILDING COMMUNITY FINANCE · AFRICA &amp; DIASPORA</a:t>
             </a:r>
-            <a:endParaRPr lang="en-US" sz="850" dirty="0"/>
+            <a:endParaRPr lang="en-US" sz="850" dirty="0">
+              <a:latin typeface="Garamond"/>
+            </a:endParaRPr>
           </a:p>
         </p:txBody>
       </p:sp>
@@ -3093,7 +3077,7 @@
           </a:bodyPr>
           <a:lstStyle/>
           <a:p>
-            <a:pPr indent="0" marL="0">
+            <a:pPr marL="0" indent="0">
               <a:buNone/>
             </a:pPr>
             <a:r>
@@ -3101,10 +3085,13 @@
                 <a:solidFill>
                   <a:srgbClr val="FFFFFF"/>
                 </a:solidFill>
+                <a:latin typeface="Garamond"/>
               </a:rPr>
               <a:t>Le bon partenaire financier permet à KOWO de rester une plateforme technologique pendant que les fonds restent portés par un acteur réglementé.</a:t>
             </a:r>
-            <a:endParaRPr lang="en-US" sz="1700" dirty="0"/>
+            <a:endParaRPr lang="en-US" sz="1700" dirty="0">
+              <a:latin typeface="Garamond"/>
+            </a:endParaRPr>
           </a:p>
         </p:txBody>
       </p:sp>
@@ -3129,7 +3116,7 @@
           <a:bodyPr wrap="square" lIns="0" tIns="0" rIns="0" bIns="0" rtlCol="0" anchor="ctr"/>
           <a:lstStyle/>
           <a:p>
-            <a:pPr indent="0" marL="0">
+            <a:pPr marL="0" indent="0">
               <a:buNone/>
             </a:pPr>
             <a:r>
@@ -3137,10 +3124,13 @@
                 <a:solidFill>
                   <a:srgbClr val="8DFFD3"/>
                 </a:solidFill>
+                <a:latin typeface="Garamond"/>
               </a:rPr>
               <a:t>Version 2.0 · 2026</a:t>
             </a:r>
-            <a:endParaRPr lang="en-US" sz="900" dirty="0"/>
+            <a:endParaRPr lang="en-US" sz="900" dirty="0">
+              <a:latin typeface="Garamond"/>
+            </a:endParaRPr>
           </a:p>
         </p:txBody>
       </p:sp>
@@ -3165,7 +3155,7 @@
           <a:bodyPr wrap="square" lIns="0" tIns="0" rIns="0" bIns="0" rtlCol="0" anchor="ctr"/>
           <a:lstStyle/>
           <a:p>
-            <a:pPr indent="0" marL="0">
+            <a:pPr marL="0" indent="0">
               <a:buNone/>
             </a:pPr>
             <a:r>
@@ -3173,10 +3163,13 @@
                 <a:solidFill>
                   <a:srgbClr val="9DB7AA"/>
                 </a:solidFill>
+                <a:latin typeface="Garamond"/>
               </a:rPr>
               <a:t>© 2026 KOWO · contact@getkowo.com · getkowo.com</a:t>
             </a:r>
-            <a:endParaRPr lang="en-US" sz="750" dirty="0"/>
+            <a:endParaRPr lang="en-US" sz="750" dirty="0">
+              <a:latin typeface="Garamond"/>
+            </a:endParaRPr>
           </a:p>
         </p:txBody>
       </p:sp>
@@ -3196,6 +3189,7 @@
         <a:solidFill>
           <a:srgbClr val="07150F"/>
         </a:solidFill>
+        <a:effectLst/>
       </p:bgPr>
     </p:bg>
     <p:spTree>
@@ -3970,14 +3964,14 @@
       </p:sp>
       <p:pic>
         <p:nvPicPr>
-          <p:cNvPr id="32" name="Image 0" descr="/mnt/data/kowo-institutional-partnership-v2/assets/kowo-logo.jpg">    </p:cNvPr>
+          <p:cNvPr id="32" name="Image 0" descr="/mnt/data/kowo-institutional-partnership-v2/assets/kowo-logo.jpg"/>
           <p:cNvPicPr>
             <a:picLocks noChangeAspect="1"/>
           </p:cNvPicPr>
           <p:nvPr/>
         </p:nvPicPr>
         <p:blipFill>
-          <a:blip r:embed="rId1"/>
+          <a:blip r:embed="rId3"/>
           <a:stretch>
             <a:fillRect/>
           </a:stretch>
@@ -4000,7 +3994,7 @@
         </p:nvSpPr>
         <p:spPr>
           <a:xfrm>
-            <a:off x="960120" y="356616"/>
+            <a:off x="960120" y="400159"/>
             <a:ext cx="1097280" cy="256032"/>
           </a:xfrm>
           <a:prstGeom prst="rect">
@@ -4013,7 +4007,7 @@
           <a:bodyPr wrap="square" lIns="0" tIns="0" rIns="0" bIns="0" rtlCol="0" anchor="ctr"/>
           <a:lstStyle/>
           <a:p>
-            <a:pPr indent="0" marL="0">
+            <a:pPr marL="0" indent="0">
               <a:buNone/>
             </a:pPr>
             <a:r>
@@ -4021,13 +4015,15 @@
                 <a:solidFill>
                   <a:srgbClr val="123B2B"/>
                 </a:solidFill>
-                <a:latin typeface="Aptos Display" pitchFamily="34" charset="0"/>
+                <a:latin typeface="Garamond"/>
                 <a:ea typeface="Aptos Display" pitchFamily="34" charset="-122"/>
                 <a:cs typeface="Aptos Display" pitchFamily="34" charset="-120"/>
               </a:rPr>
               <a:t>KOWO</a:t>
             </a:r>
-            <a:endParaRPr lang="en-US" sz="1000" dirty="0"/>
+            <a:endParaRPr lang="en-US" sz="1000" dirty="0">
+              <a:latin typeface="Garamond"/>
+            </a:endParaRPr>
           </a:p>
         </p:txBody>
       </p:sp>
@@ -4052,7 +4048,7 @@
           <a:bodyPr wrap="square" lIns="0" tIns="0" rIns="0" bIns="0" rtlCol="0" anchor="ctr"/>
           <a:lstStyle/>
           <a:p>
-            <a:pPr algn="r" indent="0" marL="0">
+            <a:pPr marL="0" indent="0" algn="r">
               <a:buNone/>
             </a:pPr>
             <a:r>
@@ -4060,10 +4056,13 @@
                 <a:solidFill>
                   <a:srgbClr val="123B2B"/>
                 </a:solidFill>
+                <a:latin typeface="Garamond"/>
               </a:rPr>
               <a:t>Institutional Partnership Brief</a:t>
             </a:r>
-            <a:endParaRPr lang="en-US" sz="800" dirty="0"/>
+            <a:endParaRPr lang="en-US" sz="800" dirty="0">
+              <a:latin typeface="Garamond"/>
+            </a:endParaRPr>
           </a:p>
         </p:txBody>
       </p:sp>
@@ -4117,7 +4116,7 @@
           <a:bodyPr wrap="square" lIns="0" tIns="0" rIns="0" bIns="0" rtlCol="0" anchor="ctr"/>
           <a:lstStyle/>
           <a:p>
-            <a:pPr algn="ctr" indent="0" marL="0">
+            <a:pPr marL="0" indent="0" algn="ctr">
               <a:buNone/>
             </a:pPr>
             <a:r>
@@ -4125,10 +4124,13 @@
                 <a:solidFill>
                   <a:srgbClr val="8DFFD3"/>
                 </a:solidFill>
+                <a:latin typeface="Garamond"/>
               </a:rPr>
               <a:t>10 · PILOTE PROPOSÉ</a:t>
             </a:r>
-            <a:endParaRPr lang="en-US" sz="850" dirty="0"/>
+            <a:endParaRPr lang="en-US" sz="850" dirty="0">
+              <a:latin typeface="Garamond"/>
+            </a:endParaRPr>
           </a:p>
         </p:txBody>
       </p:sp>
@@ -4155,7 +4157,7 @@
           </a:bodyPr>
           <a:lstStyle/>
           <a:p>
-            <a:pPr indent="0" marL="0">
+            <a:pPr marL="0" indent="0">
               <a:buNone/>
             </a:pPr>
             <a:r>
@@ -4163,13 +4165,15 @@
                 <a:solidFill>
                   <a:srgbClr val="FFFFFF"/>
                 </a:solidFill>
-                <a:latin typeface="Aptos Display" pitchFamily="34" charset="0"/>
+                <a:latin typeface="Garamond"/>
                 <a:ea typeface="Aptos Display" pitchFamily="34" charset="-122"/>
                 <a:cs typeface="Aptos Display" pitchFamily="34" charset="-120"/>
               </a:rPr>
               <a:t>Commencer petit, contrôler les risques, prouver la valeur.</a:t>
             </a:r>
-            <a:endParaRPr lang="en-US" sz="3600" dirty="0"/>
+            <a:endParaRPr lang="en-US" sz="3600" dirty="0">
+              <a:latin typeface="Garamond"/>
+            </a:endParaRPr>
           </a:p>
         </p:txBody>
       </p:sp>
@@ -4196,7 +4200,7 @@
           </a:bodyPr>
           <a:lstStyle/>
           <a:p>
-            <a:pPr indent="0" marL="0">
+            <a:pPr marL="0" indent="0">
               <a:buNone/>
             </a:pPr>
             <a:r>
@@ -4204,10 +4208,13 @@
                 <a:solidFill>
                   <a:srgbClr val="C7D8CF"/>
                 </a:solidFill>
+                <a:latin typeface="Garamond"/>
               </a:rPr>
               <a:t>Un pilote encadré permet de tester les flux, la conformité et l’adoption avant extension.</a:t>
             </a:r>
-            <a:endParaRPr lang="en-US" sz="1500" dirty="0"/>
+            <a:endParaRPr lang="en-US" sz="1500" dirty="0">
+              <a:latin typeface="Garamond"/>
+            </a:endParaRPr>
           </a:p>
         </p:txBody>
       </p:sp>
@@ -4259,7 +4266,7 @@
           <a:bodyPr wrap="square" lIns="0" tIns="0" rIns="0" bIns="0" rtlCol="0" anchor="ctr"/>
           <a:lstStyle/>
           <a:p>
-            <a:pPr indent="0" marL="0">
+            <a:pPr marL="0" indent="0">
               <a:buNone/>
             </a:pPr>
             <a:r>
@@ -4267,10 +4274,13 @@
                 <a:solidFill>
                   <a:srgbClr val="07150F"/>
                 </a:solidFill>
+                <a:latin typeface="Garamond"/>
               </a:rPr>
               <a:t>1</a:t>
             </a:r>
-            <a:endParaRPr lang="en-US" sz="1800" dirty="0"/>
+            <a:endParaRPr lang="en-US" sz="1800" dirty="0">
+              <a:latin typeface="Garamond"/>
+            </a:endParaRPr>
           </a:p>
         </p:txBody>
       </p:sp>
@@ -4295,7 +4305,7 @@
           <a:bodyPr wrap="square" lIns="0" tIns="0" rIns="0" bIns="0" rtlCol="0" anchor="ctr"/>
           <a:lstStyle/>
           <a:p>
-            <a:pPr indent="0" marL="0">
+            <a:pPr marL="0" indent="0">
               <a:buNone/>
             </a:pPr>
             <a:r>
@@ -4303,10 +4313,13 @@
                 <a:solidFill>
                   <a:srgbClr val="07150F"/>
                 </a:solidFill>
+                <a:latin typeface="Garamond"/>
               </a:rPr>
               <a:t>Cadrage</a:t>
             </a:r>
-            <a:endParaRPr lang="en-US" sz="1400" dirty="0"/>
+            <a:endParaRPr lang="en-US" sz="1400" dirty="0">
+              <a:latin typeface="Garamond"/>
+            </a:endParaRPr>
           </a:p>
         </p:txBody>
       </p:sp>
@@ -4333,7 +4346,7 @@
           </a:bodyPr>
           <a:lstStyle/>
           <a:p>
-            <a:pPr indent="0" marL="0">
+            <a:pPr marL="0" indent="0">
               <a:buNone/>
             </a:pPr>
             <a:r>
@@ -4341,10 +4354,13 @@
                 <a:solidFill>
                   <a:srgbClr val="07150F"/>
                 </a:solidFill>
+                <a:latin typeface="Garamond"/>
               </a:rPr>
               <a:t>Validation modèle, responsabilités, documents et objectifs.</a:t>
             </a:r>
-            <a:endParaRPr lang="en-US" sz="880" dirty="0"/>
+            <a:endParaRPr lang="en-US" sz="880" dirty="0">
+              <a:latin typeface="Garamond"/>
+            </a:endParaRPr>
           </a:p>
         </p:txBody>
       </p:sp>
@@ -4396,7 +4412,7 @@
           <a:bodyPr wrap="square" lIns="0" tIns="0" rIns="0" bIns="0" rtlCol="0" anchor="ctr"/>
           <a:lstStyle/>
           <a:p>
-            <a:pPr indent="0" marL="0">
+            <a:pPr marL="0" indent="0">
               <a:buNone/>
             </a:pPr>
             <a:r>
@@ -4404,10 +4420,13 @@
                 <a:solidFill>
                   <a:srgbClr val="8DFFD3"/>
                 </a:solidFill>
+                <a:latin typeface="Garamond"/>
               </a:rPr>
               <a:t>2</a:t>
             </a:r>
-            <a:endParaRPr lang="en-US" sz="1800" dirty="0"/>
+            <a:endParaRPr lang="en-US" sz="1800" dirty="0">
+              <a:latin typeface="Garamond"/>
+            </a:endParaRPr>
           </a:p>
         </p:txBody>
       </p:sp>
@@ -4432,7 +4451,7 @@
           <a:bodyPr wrap="square" lIns="0" tIns="0" rIns="0" bIns="0" rtlCol="0" anchor="ctr"/>
           <a:lstStyle/>
           <a:p>
-            <a:pPr indent="0" marL="0">
+            <a:pPr marL="0" indent="0">
               <a:buNone/>
             </a:pPr>
             <a:r>
@@ -4440,10 +4459,13 @@
                 <a:solidFill>
                   <a:srgbClr val="FFFFFF"/>
                 </a:solidFill>
+                <a:latin typeface="Garamond"/>
               </a:rPr>
               <a:t>Intégration</a:t>
             </a:r>
-            <a:endParaRPr lang="en-US" sz="1400" dirty="0"/>
+            <a:endParaRPr lang="en-US" sz="1400" dirty="0">
+              <a:latin typeface="Garamond"/>
+            </a:endParaRPr>
           </a:p>
         </p:txBody>
       </p:sp>
@@ -4470,7 +4492,7 @@
           </a:bodyPr>
           <a:lstStyle/>
           <a:p>
-            <a:pPr indent="0" marL="0">
+            <a:pPr marL="0" indent="0">
               <a:buNone/>
             </a:pPr>
             <a:r>
@@ -4478,10 +4500,13 @@
                 <a:solidFill>
                   <a:srgbClr val="C7D8CF"/>
                 </a:solidFill>
+                <a:latin typeface="Garamond"/>
               </a:rPr>
               <a:t>API, wallets, KYC, tests de paiement et réconciliation.</a:t>
             </a:r>
-            <a:endParaRPr lang="en-US" sz="880" dirty="0"/>
+            <a:endParaRPr lang="en-US" sz="880" dirty="0">
+              <a:latin typeface="Garamond"/>
+            </a:endParaRPr>
           </a:p>
         </p:txBody>
       </p:sp>
@@ -4533,7 +4558,7 @@
           <a:bodyPr wrap="square" lIns="0" tIns="0" rIns="0" bIns="0" rtlCol="0" anchor="ctr"/>
           <a:lstStyle/>
           <a:p>
-            <a:pPr indent="0" marL="0">
+            <a:pPr marL="0" indent="0">
               <a:buNone/>
             </a:pPr>
             <a:r>
@@ -4541,10 +4566,13 @@
                 <a:solidFill>
                   <a:srgbClr val="8DFFD3"/>
                 </a:solidFill>
+                <a:latin typeface="Garamond"/>
               </a:rPr>
               <a:t>3</a:t>
             </a:r>
-            <a:endParaRPr lang="en-US" sz="1800" dirty="0"/>
+            <a:endParaRPr lang="en-US" sz="1800" dirty="0">
+              <a:latin typeface="Garamond"/>
+            </a:endParaRPr>
           </a:p>
         </p:txBody>
       </p:sp>
@@ -4569,7 +4597,7 @@
           <a:bodyPr wrap="square" lIns="0" tIns="0" rIns="0" bIns="0" rtlCol="0" anchor="ctr"/>
           <a:lstStyle/>
           <a:p>
-            <a:pPr indent="0" marL="0">
+            <a:pPr marL="0" indent="0">
               <a:buNone/>
             </a:pPr>
             <a:r>
@@ -4577,10 +4605,13 @@
                 <a:solidFill>
                   <a:srgbClr val="FFFFFF"/>
                 </a:solidFill>
+                <a:latin typeface="Garamond"/>
               </a:rPr>
               <a:t>Pilote</a:t>
             </a:r>
-            <a:endParaRPr lang="en-US" sz="1400" dirty="0"/>
+            <a:endParaRPr lang="en-US" sz="1400" dirty="0">
+              <a:latin typeface="Garamond"/>
+            </a:endParaRPr>
           </a:p>
         </p:txBody>
       </p:sp>
@@ -4607,7 +4638,7 @@
           </a:bodyPr>
           <a:lstStyle/>
           <a:p>
-            <a:pPr indent="0" marL="0">
+            <a:pPr marL="0" indent="0">
               <a:buNone/>
             </a:pPr>
             <a:r>
@@ -4615,10 +4646,13 @@
                 <a:solidFill>
                   <a:srgbClr val="C7D8CF"/>
                 </a:solidFill>
+                <a:latin typeface="Garamond"/>
               </a:rPr>
               <a:t>Groupes limités, plafonds de volume, suivi opérationnel.</a:t>
             </a:r>
-            <a:endParaRPr lang="en-US" sz="880" dirty="0"/>
+            <a:endParaRPr lang="en-US" sz="880" dirty="0">
+              <a:latin typeface="Garamond"/>
+            </a:endParaRPr>
           </a:p>
         </p:txBody>
       </p:sp>
@@ -4670,7 +4704,7 @@
           <a:bodyPr wrap="square" lIns="0" tIns="0" rIns="0" bIns="0" rtlCol="0" anchor="ctr"/>
           <a:lstStyle/>
           <a:p>
-            <a:pPr indent="0" marL="0">
+            <a:pPr marL="0" indent="0">
               <a:buNone/>
             </a:pPr>
             <a:r>
@@ -4678,10 +4712,13 @@
                 <a:solidFill>
                   <a:srgbClr val="8DFFD3"/>
                 </a:solidFill>
+                <a:latin typeface="Garamond"/>
               </a:rPr>
               <a:t>4</a:t>
             </a:r>
-            <a:endParaRPr lang="en-US" sz="1800" dirty="0"/>
+            <a:endParaRPr lang="en-US" sz="1800" dirty="0">
+              <a:latin typeface="Garamond"/>
+            </a:endParaRPr>
           </a:p>
         </p:txBody>
       </p:sp>
@@ -4706,7 +4743,7 @@
           <a:bodyPr wrap="square" lIns="0" tIns="0" rIns="0" bIns="0" rtlCol="0" anchor="ctr"/>
           <a:lstStyle/>
           <a:p>
-            <a:pPr indent="0" marL="0">
+            <a:pPr marL="0" indent="0">
               <a:buNone/>
             </a:pPr>
             <a:r>
@@ -4714,10 +4751,13 @@
                 <a:solidFill>
                   <a:srgbClr val="FFFFFF"/>
                 </a:solidFill>
+                <a:latin typeface="Garamond"/>
               </a:rPr>
               <a:t>Scale</a:t>
             </a:r>
-            <a:endParaRPr lang="en-US" sz="1400" dirty="0"/>
+            <a:endParaRPr lang="en-US" sz="1400" dirty="0">
+              <a:latin typeface="Garamond"/>
+            </a:endParaRPr>
           </a:p>
         </p:txBody>
       </p:sp>
@@ -4744,7 +4784,7 @@
           </a:bodyPr>
           <a:lstStyle/>
           <a:p>
-            <a:pPr indent="0" marL="0">
+            <a:pPr marL="0" indent="0">
               <a:buNone/>
             </a:pPr>
             <a:r>
@@ -4752,10 +4792,13 @@
                 <a:solidFill>
                   <a:srgbClr val="C7D8CF"/>
                 </a:solidFill>
+                <a:latin typeface="Garamond"/>
               </a:rPr>
               <a:t>Extension progressive selon résultats et validation conformité.</a:t>
             </a:r>
-            <a:endParaRPr lang="en-US" sz="880" dirty="0"/>
+            <a:endParaRPr lang="en-US" sz="880" dirty="0">
+              <a:latin typeface="Garamond"/>
+            </a:endParaRPr>
           </a:p>
         </p:txBody>
       </p:sp>
@@ -4780,7 +4823,7 @@
           <a:bodyPr wrap="square" lIns="0" tIns="0" rIns="0" bIns="0" rtlCol="0" anchor="ctr"/>
           <a:lstStyle/>
           <a:p>
-            <a:pPr indent="0" marL="0">
+            <a:pPr marL="0" indent="0">
               <a:buNone/>
             </a:pPr>
             <a:r>
@@ -4788,10 +4831,13 @@
                 <a:solidFill>
                   <a:srgbClr val="9DB7AA"/>
                 </a:solidFill>
+                <a:latin typeface="Garamond"/>
               </a:rPr>
               <a:t>© 2026 KOWO · contact@getkowo.com · getkowo.com</a:t>
             </a:r>
-            <a:endParaRPr lang="en-US" sz="750" dirty="0"/>
+            <a:endParaRPr lang="en-US" sz="750" dirty="0">
+              <a:latin typeface="Garamond"/>
+            </a:endParaRPr>
           </a:p>
         </p:txBody>
       </p:sp>
@@ -4811,6 +4857,7 @@
         <a:solidFill>
           <a:srgbClr val="F6F1E7"/>
         </a:solidFill>
+        <a:effectLst/>
       </p:bgPr>
     </p:bg>
     <p:spTree>
@@ -4860,14 +4907,14 @@
       </p:sp>
       <p:pic>
         <p:nvPicPr>
-          <p:cNvPr id="3" name="Image 0" descr="/mnt/data/kowo-institutional-partnership-v2/assets/kowo-logo.jpg">    </p:cNvPr>
+          <p:cNvPr id="3" name="Image 0" descr="/mnt/data/kowo-institutional-partnership-v2/assets/kowo-logo.jpg"/>
           <p:cNvPicPr>
             <a:picLocks noChangeAspect="1"/>
           </p:cNvPicPr>
           <p:nvPr/>
         </p:nvPicPr>
         <p:blipFill>
-          <a:blip r:embed="rId1"/>
+          <a:blip r:embed="rId3"/>
           <a:stretch>
             <a:fillRect/>
           </a:stretch>
@@ -4890,7 +4937,7 @@
         </p:nvSpPr>
         <p:spPr>
           <a:xfrm>
-            <a:off x="960120" y="356616"/>
+            <a:off x="960120" y="400159"/>
             <a:ext cx="1097280" cy="256032"/>
           </a:xfrm>
           <a:prstGeom prst="rect">
@@ -4903,7 +4950,7 @@
           <a:bodyPr wrap="square" lIns="0" tIns="0" rIns="0" bIns="0" rtlCol="0" anchor="ctr"/>
           <a:lstStyle/>
           <a:p>
-            <a:pPr indent="0" marL="0">
+            <a:pPr marL="0" indent="0">
               <a:buNone/>
             </a:pPr>
             <a:r>
@@ -4911,13 +4958,15 @@
                 <a:solidFill>
                   <a:srgbClr val="123B2B"/>
                 </a:solidFill>
-                <a:latin typeface="Aptos Display" pitchFamily="34" charset="0"/>
+                <a:latin typeface="Garamond"/>
                 <a:ea typeface="Aptos Display" pitchFamily="34" charset="-122"/>
                 <a:cs typeface="Aptos Display" pitchFamily="34" charset="-120"/>
               </a:rPr>
               <a:t>KOWO</a:t>
             </a:r>
-            <a:endParaRPr lang="en-US" sz="1000" dirty="0"/>
+            <a:endParaRPr lang="en-US" sz="1000" dirty="0">
+              <a:latin typeface="Garamond"/>
+            </a:endParaRPr>
           </a:p>
         </p:txBody>
       </p:sp>
@@ -4942,7 +4991,7 @@
           <a:bodyPr wrap="square" lIns="0" tIns="0" rIns="0" bIns="0" rtlCol="0" anchor="ctr"/>
           <a:lstStyle/>
           <a:p>
-            <a:pPr algn="r" indent="0" marL="0">
+            <a:pPr marL="0" indent="0" algn="r">
               <a:buNone/>
             </a:pPr>
             <a:r>
@@ -4950,10 +4999,13 @@
                 <a:solidFill>
                   <a:srgbClr val="6B786E"/>
                 </a:solidFill>
+                <a:latin typeface="Garamond"/>
               </a:rPr>
               <a:t>Institutional Partnership Brief</a:t>
             </a:r>
-            <a:endParaRPr lang="en-US" sz="800" dirty="0"/>
+            <a:endParaRPr lang="en-US" sz="800" dirty="0">
+              <a:latin typeface="Garamond"/>
+            </a:endParaRPr>
           </a:p>
         </p:txBody>
       </p:sp>
@@ -5007,7 +5059,7 @@
           <a:bodyPr wrap="square" lIns="0" tIns="0" rIns="0" bIns="0" rtlCol="0" anchor="ctr"/>
           <a:lstStyle/>
           <a:p>
-            <a:pPr algn="ctr" indent="0" marL="0">
+            <a:pPr marL="0" indent="0" algn="ctr">
               <a:buNone/>
             </a:pPr>
             <a:r>
@@ -5015,10 +5067,13 @@
                 <a:solidFill>
                   <a:srgbClr val="123B2B"/>
                 </a:solidFill>
+                <a:latin typeface="Garamond"/>
               </a:rPr>
               <a:t>11 · ROADMAP</a:t>
             </a:r>
-            <a:endParaRPr lang="en-US" sz="850" dirty="0"/>
+            <a:endParaRPr lang="en-US" sz="850" dirty="0">
+              <a:latin typeface="Garamond"/>
+            </a:endParaRPr>
           </a:p>
         </p:txBody>
       </p:sp>
@@ -5045,7 +5100,7 @@
           </a:bodyPr>
           <a:lstStyle/>
           <a:p>
-            <a:pPr indent="0" marL="0">
+            <a:pPr marL="0" indent="0">
               <a:buNone/>
             </a:pPr>
             <a:r>
@@ -5053,13 +5108,15 @@
                 <a:solidFill>
                   <a:srgbClr val="0E1712"/>
                 </a:solidFill>
-                <a:latin typeface="Aptos Display" pitchFamily="34" charset="0"/>
+                <a:latin typeface="Garamond"/>
                 <a:ea typeface="Aptos Display" pitchFamily="34" charset="-122"/>
                 <a:cs typeface="Aptos Display" pitchFamily="34" charset="-120"/>
               </a:rPr>
               <a:t>Une trajectoire progressive : Bénin, UEMOA, diaspora.</a:t>
             </a:r>
-            <a:endParaRPr lang="en-US" sz="3600" dirty="0"/>
+            <a:endParaRPr lang="en-US" sz="3600" dirty="0">
+              <a:latin typeface="Garamond"/>
+            </a:endParaRPr>
           </a:p>
         </p:txBody>
       </p:sp>
@@ -5086,7 +5143,7 @@
           </a:bodyPr>
           <a:lstStyle/>
           <a:p>
-            <a:pPr indent="0" marL="0">
+            <a:pPr marL="0" indent="0">
               <a:buNone/>
             </a:pPr>
             <a:r>
@@ -5094,10 +5151,13 @@
                 <a:solidFill>
                   <a:srgbClr val="6B786E"/>
                 </a:solidFill>
+                <a:latin typeface="Garamond"/>
               </a:rPr>
               <a:t>La priorité est de bâtir un modèle conforme et reproductible avant l’expansion.</a:t>
             </a:r>
-            <a:endParaRPr lang="en-US" sz="1500" dirty="0"/>
+            <a:endParaRPr lang="en-US" sz="1500" dirty="0">
+              <a:latin typeface="Garamond"/>
+            </a:endParaRPr>
           </a:p>
         </p:txBody>
       </p:sp>
@@ -5109,7 +5169,7 @@
         </p:nvSpPr>
         <p:spPr>
           <a:xfrm>
-            <a:off x="960120" y="2743200"/>
+            <a:off x="960120" y="3323771"/>
             <a:ext cx="2834640" cy="1828800"/>
           </a:xfrm>
           <a:prstGeom prst="roundRect">
@@ -5136,7 +5196,7 @@
         </p:nvSpPr>
         <p:spPr>
           <a:xfrm>
-            <a:off x="1188720" y="3063240"/>
+            <a:off x="1188720" y="3643811"/>
             <a:ext cx="1005840" cy="292608"/>
           </a:xfrm>
           <a:prstGeom prst="rect">
@@ -5149,7 +5209,7 @@
           <a:bodyPr wrap="square" lIns="0" tIns="0" rIns="0" bIns="0" rtlCol="0" anchor="ctr"/>
           <a:lstStyle/>
           <a:p>
-            <a:pPr indent="0" marL="0">
+            <a:pPr marL="0" indent="0">
               <a:buNone/>
             </a:pPr>
             <a:r>
@@ -5157,10 +5217,13 @@
                 <a:solidFill>
                   <a:srgbClr val="8DFFD3"/>
                 </a:solidFill>
+                <a:latin typeface="Garamond"/>
               </a:rPr>
               <a:t>2026</a:t>
             </a:r>
-            <a:endParaRPr lang="en-US" sz="2200" dirty="0"/>
+            <a:endParaRPr lang="en-US" sz="2200" dirty="0">
+              <a:latin typeface="Garamond"/>
+            </a:endParaRPr>
           </a:p>
         </p:txBody>
       </p:sp>
@@ -5172,7 +5235,7 @@
         </p:nvSpPr>
         <p:spPr>
           <a:xfrm>
-            <a:off x="1188720" y="3611880"/>
+            <a:off x="1188720" y="4192451"/>
             <a:ext cx="2286000" cy="594360"/>
           </a:xfrm>
           <a:prstGeom prst="rect">
@@ -5187,7 +5250,7 @@
           </a:bodyPr>
           <a:lstStyle/>
           <a:p>
-            <a:pPr indent="0" marL="0">
+            <a:pPr marL="0" indent="0">
               <a:buNone/>
             </a:pPr>
             <a:r>
@@ -5195,13 +5258,16 @@
                 <a:solidFill>
                   <a:srgbClr val="FFFFFF"/>
                 </a:solidFill>
+                <a:latin typeface="Garamond"/>
               </a:rPr>
               <a:t>Partenaire institutionnel</a:t>
             </a:r>
-            <a:endParaRPr lang="en-US" sz="1250" dirty="0"/>
-          </a:p>
-          <a:p>
-            <a:pPr indent="0" marL="0">
+            <a:endParaRPr lang="en-US" sz="1250" dirty="0">
+              <a:latin typeface="Garamond"/>
+            </a:endParaRPr>
+          </a:p>
+          <a:p>
+            <a:pPr marL="0" indent="0">
               <a:buNone/>
             </a:pPr>
             <a:r>
@@ -5209,13 +5275,16 @@
                 <a:solidFill>
                   <a:srgbClr val="FFFFFF"/>
                 </a:solidFill>
+                <a:latin typeface="Garamond"/>
               </a:rPr>
               <a:t>Pilote contrôlé</a:t>
             </a:r>
-            <a:endParaRPr lang="en-US" sz="1250" dirty="0"/>
-          </a:p>
-          <a:p>
-            <a:pPr indent="0" marL="0">
+            <a:endParaRPr lang="en-US" sz="1250" dirty="0">
+              <a:latin typeface="Garamond"/>
+            </a:endParaRPr>
+          </a:p>
+          <a:p>
+            <a:pPr marL="0" indent="0">
               <a:buNone/>
             </a:pPr>
             <a:r>
@@ -5223,10 +5292,13 @@
                 <a:solidFill>
                   <a:srgbClr val="FFFFFF"/>
                 </a:solidFill>
+                <a:latin typeface="Garamond"/>
               </a:rPr>
               <a:t>Premiers groupes</a:t>
             </a:r>
-            <a:endParaRPr lang="en-US" sz="1250" dirty="0"/>
+            <a:endParaRPr lang="en-US" sz="1250" dirty="0">
+              <a:latin typeface="Garamond"/>
+            </a:endParaRPr>
           </a:p>
         </p:txBody>
       </p:sp>
@@ -5238,7 +5310,7 @@
         </p:nvSpPr>
         <p:spPr>
           <a:xfrm>
-            <a:off x="3867912" y="3657600"/>
+            <a:off x="3867912" y="4238171"/>
             <a:ext cx="658368" cy="0"/>
           </a:xfrm>
           <a:prstGeom prst="line">
@@ -5263,7 +5335,7 @@
         </p:nvSpPr>
         <p:spPr>
           <a:xfrm>
-            <a:off x="4663440" y="2743200"/>
+            <a:off x="4663440" y="3323771"/>
             <a:ext cx="2834640" cy="1828800"/>
           </a:xfrm>
           <a:prstGeom prst="roundRect">
@@ -5290,7 +5362,7 @@
         </p:nvSpPr>
         <p:spPr>
           <a:xfrm>
-            <a:off x="4892040" y="3063240"/>
+            <a:off x="4892040" y="3643811"/>
             <a:ext cx="1005840" cy="292608"/>
           </a:xfrm>
           <a:prstGeom prst="rect">
@@ -5303,7 +5375,7 @@
           <a:bodyPr wrap="square" lIns="0" tIns="0" rIns="0" bIns="0" rtlCol="0" anchor="ctr"/>
           <a:lstStyle/>
           <a:p>
-            <a:pPr indent="0" marL="0">
+            <a:pPr marL="0" indent="0">
               <a:buNone/>
             </a:pPr>
             <a:r>
@@ -5311,10 +5383,13 @@
                 <a:solidFill>
                   <a:srgbClr val="123B2B"/>
                 </a:solidFill>
+                <a:latin typeface="Garamond"/>
               </a:rPr>
               <a:t>2027</a:t>
             </a:r>
-            <a:endParaRPr lang="en-US" sz="2200" dirty="0"/>
+            <a:endParaRPr lang="en-US" sz="2200" dirty="0">
+              <a:latin typeface="Garamond"/>
+            </a:endParaRPr>
           </a:p>
         </p:txBody>
       </p:sp>
@@ -5326,7 +5401,7 @@
         </p:nvSpPr>
         <p:spPr>
           <a:xfrm>
-            <a:off x="4892040" y="3611880"/>
+            <a:off x="4892040" y="4192451"/>
             <a:ext cx="2286000" cy="594360"/>
           </a:xfrm>
           <a:prstGeom prst="rect">
@@ -5341,7 +5416,7 @@
           </a:bodyPr>
           <a:lstStyle/>
           <a:p>
-            <a:pPr indent="0" marL="0">
+            <a:pPr marL="0" indent="0">
               <a:buNone/>
             </a:pPr>
             <a:r>
@@ -5349,13 +5424,16 @@
                 <a:solidFill>
                   <a:srgbClr val="0E1712"/>
                 </a:solidFill>
+                <a:latin typeface="Garamond"/>
               </a:rPr>
               <a:t>Extension Bénin</a:t>
             </a:r>
-            <a:endParaRPr lang="en-US" sz="1250" dirty="0"/>
-          </a:p>
-          <a:p>
-            <a:pPr indent="0" marL="0">
+            <a:endParaRPr lang="en-US" sz="1250" dirty="0">
+              <a:latin typeface="Garamond"/>
+            </a:endParaRPr>
+          </a:p>
+          <a:p>
+            <a:pPr marL="0" indent="0">
               <a:buNone/>
             </a:pPr>
             <a:r>
@@ -5363,13 +5441,16 @@
                 <a:solidFill>
                   <a:srgbClr val="0E1712"/>
                 </a:solidFill>
+                <a:latin typeface="Garamond"/>
               </a:rPr>
               <a:t>Partenariats microfinance</a:t>
             </a:r>
-            <a:endParaRPr lang="en-US" sz="1250" dirty="0"/>
-          </a:p>
-          <a:p>
-            <a:pPr indent="0" marL="0">
+            <a:endParaRPr lang="en-US" sz="1250" dirty="0">
+              <a:latin typeface="Garamond"/>
+            </a:endParaRPr>
+          </a:p>
+          <a:p>
+            <a:pPr marL="0" indent="0">
               <a:buNone/>
             </a:pPr>
             <a:r>
@@ -5377,10 +5458,13 @@
                 <a:solidFill>
                   <a:srgbClr val="0E1712"/>
                 </a:solidFill>
+                <a:latin typeface="Garamond"/>
               </a:rPr>
               <a:t>Version iOS</a:t>
             </a:r>
-            <a:endParaRPr lang="en-US" sz="1250" dirty="0"/>
+            <a:endParaRPr lang="en-US" sz="1250" dirty="0">
+              <a:latin typeface="Garamond"/>
+            </a:endParaRPr>
           </a:p>
         </p:txBody>
       </p:sp>
@@ -5392,7 +5476,7 @@
         </p:nvSpPr>
         <p:spPr>
           <a:xfrm>
-            <a:off x="7571232" y="3657600"/>
+            <a:off x="7571232" y="4238171"/>
             <a:ext cx="658368" cy="0"/>
           </a:xfrm>
           <a:prstGeom prst="line">
@@ -5417,7 +5501,7 @@
         </p:nvSpPr>
         <p:spPr>
           <a:xfrm>
-            <a:off x="8366760" y="2743200"/>
+            <a:off x="8366760" y="3323771"/>
             <a:ext cx="2834640" cy="1828800"/>
           </a:xfrm>
           <a:prstGeom prst="roundRect">
@@ -5444,7 +5528,7 @@
         </p:nvSpPr>
         <p:spPr>
           <a:xfrm>
-            <a:off x="8595360" y="3063240"/>
+            <a:off x="8595360" y="3643811"/>
             <a:ext cx="1005840" cy="292608"/>
           </a:xfrm>
           <a:prstGeom prst="rect">
@@ -5457,7 +5541,7 @@
           <a:bodyPr wrap="square" lIns="0" tIns="0" rIns="0" bIns="0" rtlCol="0" anchor="ctr"/>
           <a:lstStyle/>
           <a:p>
-            <a:pPr indent="0" marL="0">
+            <a:pPr marL="0" indent="0">
               <a:buNone/>
             </a:pPr>
             <a:r>
@@ -5465,10 +5549,13 @@
                 <a:solidFill>
                   <a:srgbClr val="123B2B"/>
                 </a:solidFill>
+                <a:latin typeface="Garamond"/>
               </a:rPr>
               <a:t>2028</a:t>
             </a:r>
-            <a:endParaRPr lang="en-US" sz="2200" dirty="0"/>
+            <a:endParaRPr lang="en-US" sz="2200" dirty="0">
+              <a:latin typeface="Garamond"/>
+            </a:endParaRPr>
           </a:p>
         </p:txBody>
       </p:sp>
@@ -5480,7 +5567,7 @@
         </p:nvSpPr>
         <p:spPr>
           <a:xfrm>
-            <a:off x="8595360" y="3611880"/>
+            <a:off x="8595360" y="4192451"/>
             <a:ext cx="2286000" cy="594360"/>
           </a:xfrm>
           <a:prstGeom prst="rect">
@@ -5495,7 +5582,7 @@
           </a:bodyPr>
           <a:lstStyle/>
           <a:p>
-            <a:pPr indent="0" marL="0">
+            <a:pPr marL="0" indent="0">
               <a:buNone/>
             </a:pPr>
             <a:r>
@@ -5503,13 +5590,16 @@
                 <a:solidFill>
                   <a:srgbClr val="0E1712"/>
                 </a:solidFill>
+                <a:latin typeface="Garamond"/>
               </a:rPr>
               <a:t>UEMOA</a:t>
             </a:r>
-            <a:endParaRPr lang="en-US" sz="1250" dirty="0"/>
-          </a:p>
-          <a:p>
-            <a:pPr indent="0" marL="0">
+            <a:endParaRPr lang="en-US" sz="1250" dirty="0">
+              <a:latin typeface="Garamond"/>
+            </a:endParaRPr>
+          </a:p>
+          <a:p>
+            <a:pPr marL="0" indent="0">
               <a:buNone/>
             </a:pPr>
             <a:r>
@@ -5517,13 +5607,16 @@
                 <a:solidFill>
                   <a:srgbClr val="0E1712"/>
                 </a:solidFill>
+                <a:latin typeface="Garamond"/>
               </a:rPr>
               <a:t>Diaspora</a:t>
             </a:r>
-            <a:endParaRPr lang="en-US" sz="1250" dirty="0"/>
-          </a:p>
-          <a:p>
-            <a:pPr indent="0" marL="0">
+            <a:endParaRPr lang="en-US" sz="1250" dirty="0">
+              <a:latin typeface="Garamond"/>
+            </a:endParaRPr>
+          </a:p>
+          <a:p>
+            <a:pPr marL="0" indent="0">
               <a:buNone/>
             </a:pPr>
             <a:r>
@@ -5531,10 +5624,13 @@
                 <a:solidFill>
                   <a:srgbClr val="0E1712"/>
                 </a:solidFill>
+                <a:latin typeface="Garamond"/>
               </a:rPr>
               <a:t>Services financiers via partenaires agréés</a:t>
             </a:r>
-            <a:endParaRPr lang="en-US" sz="1250" dirty="0"/>
+            <a:endParaRPr lang="en-US" sz="1250" dirty="0">
+              <a:latin typeface="Garamond"/>
+            </a:endParaRPr>
           </a:p>
         </p:txBody>
       </p:sp>
@@ -5559,7 +5655,7 @@
           <a:bodyPr wrap="square" lIns="0" tIns="0" rIns="0" bIns="0" rtlCol="0" anchor="ctr"/>
           <a:lstStyle/>
           <a:p>
-            <a:pPr indent="0" marL="0">
+            <a:pPr marL="0" indent="0">
               <a:buNone/>
             </a:pPr>
             <a:r>
@@ -5567,10 +5663,13 @@
                 <a:solidFill>
                   <a:srgbClr val="6B786E"/>
                 </a:solidFill>
+                <a:latin typeface="Garamond"/>
               </a:rPr>
               <a:t>© 2026 KOWO · contact@getkowo.com · getkowo.com</a:t>
             </a:r>
-            <a:endParaRPr lang="en-US" sz="750" dirty="0"/>
+            <a:endParaRPr lang="en-US" sz="750" dirty="0">
+              <a:latin typeface="Garamond"/>
+            </a:endParaRPr>
           </a:p>
         </p:txBody>
       </p:sp>
@@ -5590,6 +5689,7 @@
         <a:solidFill>
           <a:srgbClr val="F6F1E7"/>
         </a:solidFill>
+        <a:effectLst/>
       </p:bgPr>
     </p:bg>
     <p:spTree>
@@ -5639,14 +5739,14 @@
       </p:sp>
       <p:pic>
         <p:nvPicPr>
-          <p:cNvPr id="3" name="Image 0" descr="/mnt/data/kowo-institutional-partnership-v2/assets/kowo-logo.jpg">    </p:cNvPr>
+          <p:cNvPr id="3" name="Image 0" descr="/mnt/data/kowo-institutional-partnership-v2/assets/kowo-logo.jpg"/>
           <p:cNvPicPr>
             <a:picLocks noChangeAspect="1"/>
           </p:cNvPicPr>
           <p:nvPr/>
         </p:nvPicPr>
         <p:blipFill>
-          <a:blip r:embed="rId1"/>
+          <a:blip r:embed="rId3"/>
           <a:stretch>
             <a:fillRect/>
           </a:stretch>
@@ -5669,7 +5769,7 @@
         </p:nvSpPr>
         <p:spPr>
           <a:xfrm>
-            <a:off x="960120" y="356616"/>
+            <a:off x="960120" y="392902"/>
             <a:ext cx="1097280" cy="256032"/>
           </a:xfrm>
           <a:prstGeom prst="rect">
@@ -5682,7 +5782,7 @@
           <a:bodyPr wrap="square" lIns="0" tIns="0" rIns="0" bIns="0" rtlCol="0" anchor="ctr"/>
           <a:lstStyle/>
           <a:p>
-            <a:pPr indent="0" marL="0">
+            <a:pPr marL="0" indent="0">
               <a:buNone/>
             </a:pPr>
             <a:r>
@@ -5690,13 +5790,15 @@
                 <a:solidFill>
                   <a:srgbClr val="123B2B"/>
                 </a:solidFill>
-                <a:latin typeface="Aptos Display" pitchFamily="34" charset="0"/>
+                <a:latin typeface="Garamond"/>
                 <a:ea typeface="Aptos Display" pitchFamily="34" charset="-122"/>
                 <a:cs typeface="Aptos Display" pitchFamily="34" charset="-120"/>
               </a:rPr>
               <a:t>KOWO</a:t>
             </a:r>
-            <a:endParaRPr lang="en-US" sz="1000" dirty="0"/>
+            <a:endParaRPr lang="en-US" sz="1000" dirty="0">
+              <a:latin typeface="Garamond"/>
+            </a:endParaRPr>
           </a:p>
         </p:txBody>
       </p:sp>
@@ -5721,7 +5823,7 @@
           <a:bodyPr wrap="square" lIns="0" tIns="0" rIns="0" bIns="0" rtlCol="0" anchor="ctr"/>
           <a:lstStyle/>
           <a:p>
-            <a:pPr algn="r" indent="0" marL="0">
+            <a:pPr marL="0" indent="0" algn="r">
               <a:buNone/>
             </a:pPr>
             <a:r>
@@ -5729,10 +5831,13 @@
                 <a:solidFill>
                   <a:srgbClr val="6B786E"/>
                 </a:solidFill>
+                <a:latin typeface="Garamond"/>
               </a:rPr>
               <a:t>Institutional Partnership Brief</a:t>
             </a:r>
-            <a:endParaRPr lang="en-US" sz="800" dirty="0"/>
+            <a:endParaRPr lang="en-US" sz="800" dirty="0">
+              <a:latin typeface="Garamond"/>
+            </a:endParaRPr>
           </a:p>
         </p:txBody>
       </p:sp>
@@ -5786,7 +5891,7 @@
           <a:bodyPr wrap="square" lIns="0" tIns="0" rIns="0" bIns="0" rtlCol="0" anchor="ctr"/>
           <a:lstStyle/>
           <a:p>
-            <a:pPr algn="ctr" indent="0" marL="0">
+            <a:pPr marL="0" indent="0" algn="ctr">
               <a:buNone/>
             </a:pPr>
             <a:r>
@@ -5794,10 +5899,13 @@
                 <a:solidFill>
                   <a:srgbClr val="123B2B"/>
                 </a:solidFill>
+                <a:latin typeface="Garamond"/>
               </a:rPr>
               <a:t>12 · DISCUSSION SOUHAITÉE</a:t>
             </a:r>
-            <a:endParaRPr lang="en-US" sz="850" dirty="0"/>
+            <a:endParaRPr lang="en-US" sz="850" dirty="0">
+              <a:latin typeface="Garamond"/>
+            </a:endParaRPr>
           </a:p>
         </p:txBody>
       </p:sp>
@@ -5824,7 +5932,7 @@
           </a:bodyPr>
           <a:lstStyle/>
           <a:p>
-            <a:pPr indent="0" marL="0">
+            <a:pPr marL="0" indent="0">
               <a:buNone/>
             </a:pPr>
             <a:r>
@@ -5832,13 +5940,15 @@
                 <a:solidFill>
                   <a:srgbClr val="0E1712"/>
                 </a:solidFill>
-                <a:latin typeface="Aptos Display" pitchFamily="34" charset="0"/>
+                <a:latin typeface="Garamond"/>
                 <a:ea typeface="Aptos Display" pitchFamily="34" charset="-122"/>
                 <a:cs typeface="Aptos Display" pitchFamily="34" charset="-120"/>
               </a:rPr>
               <a:t>Ce que nous aimerions explorer avec vous.</a:t>
             </a:r>
-            <a:endParaRPr lang="en-US" sz="3600" dirty="0"/>
+            <a:endParaRPr lang="en-US" sz="3600" dirty="0">
+              <a:latin typeface="Garamond"/>
+            </a:endParaRPr>
           </a:p>
         </p:txBody>
       </p:sp>
@@ -5865,7 +5975,7 @@
           </a:bodyPr>
           <a:lstStyle/>
           <a:p>
-            <a:pPr indent="0" marL="0">
+            <a:pPr marL="0" indent="0">
               <a:buNone/>
             </a:pPr>
             <a:r>
@@ -5873,10 +5983,13 @@
                 <a:solidFill>
                   <a:srgbClr val="6B786E"/>
                 </a:solidFill>
+                <a:latin typeface="Garamond"/>
               </a:rPr>
               <a:t>L’objectif est d’identifier ensemble le meilleur cadre de partenariat, sans transférer le risque réglementaire vers KOWO.</a:t>
             </a:r>
-            <a:endParaRPr lang="en-US" sz="1500" dirty="0"/>
+            <a:endParaRPr lang="en-US" sz="1500" dirty="0">
+              <a:latin typeface="Garamond"/>
+            </a:endParaRPr>
           </a:p>
         </p:txBody>
       </p:sp>
@@ -5888,7 +6001,7 @@
         </p:nvSpPr>
         <p:spPr>
           <a:xfrm>
-            <a:off x="822960" y="2743200"/>
+            <a:off x="822960" y="3381829"/>
             <a:ext cx="2606040" cy="1417320"/>
           </a:xfrm>
           <a:prstGeom prst="roundRect">
@@ -5917,7 +6030,7 @@
         </p:nvSpPr>
         <p:spPr>
           <a:xfrm>
-            <a:off x="1033272" y="2944368"/>
+            <a:off x="1033272" y="3582997"/>
             <a:ext cx="320040" cy="320040"/>
           </a:xfrm>
           <a:prstGeom prst="rect">
@@ -5930,7 +6043,7 @@
           <a:bodyPr wrap="square" lIns="0" tIns="0" rIns="0" bIns="0" rtlCol="0" anchor="ctr"/>
           <a:lstStyle/>
           <a:p>
-            <a:pPr indent="0" marL="0">
+            <a:pPr marL="0" indent="0">
               <a:buNone/>
             </a:pPr>
             <a:r>
@@ -5938,10 +6051,13 @@
                 <a:solidFill>
                   <a:srgbClr val="000000"/>
                 </a:solidFill>
+                <a:latin typeface="Garamond"/>
               </a:rPr>
               <a:t>⚖️</a:t>
             </a:r>
-            <a:endParaRPr lang="en-US" sz="1700" dirty="0"/>
+            <a:endParaRPr lang="en-US" sz="1700" dirty="0">
+              <a:latin typeface="Garamond"/>
+            </a:endParaRPr>
           </a:p>
         </p:txBody>
       </p:sp>
@@ -5953,7 +6069,7 @@
         </p:nvSpPr>
         <p:spPr>
           <a:xfrm>
-            <a:off x="1417320" y="2944368"/>
+            <a:off x="1417320" y="3582997"/>
             <a:ext cx="1810512" cy="256032"/>
           </a:xfrm>
           <a:prstGeom prst="rect">
@@ -5966,7 +6082,7 @@
           <a:bodyPr wrap="square" lIns="0" tIns="0" rIns="0" bIns="0" rtlCol="0" anchor="ctr"/>
           <a:lstStyle/>
           <a:p>
-            <a:pPr indent="0" marL="0">
+            <a:pPr marL="0" indent="0">
               <a:buNone/>
             </a:pPr>
             <a:r>
@@ -5974,10 +6090,13 @@
                 <a:solidFill>
                   <a:srgbClr val="0E1712"/>
                 </a:solidFill>
+                <a:latin typeface="Garamond"/>
               </a:rPr>
               <a:t>Cadre juridique</a:t>
             </a:r>
-            <a:endParaRPr lang="en-US" sz="1500" dirty="0"/>
+            <a:endParaRPr lang="en-US" sz="1500" dirty="0">
+              <a:latin typeface="Garamond"/>
+            </a:endParaRPr>
           </a:p>
         </p:txBody>
       </p:sp>
@@ -5989,7 +6108,7 @@
         </p:nvSpPr>
         <p:spPr>
           <a:xfrm>
-            <a:off x="1033272" y="3383280"/>
+            <a:off x="1033272" y="4021909"/>
             <a:ext cx="384048" cy="32004"/>
           </a:xfrm>
           <a:prstGeom prst="rect">
@@ -6016,7 +6135,7 @@
         </p:nvSpPr>
         <p:spPr>
           <a:xfrm>
-            <a:off x="1033272" y="3520440"/>
+            <a:off x="1033272" y="4159069"/>
             <a:ext cx="2185416" cy="457200"/>
           </a:xfrm>
           <a:prstGeom prst="rect">
@@ -6031,7 +6150,7 @@
           </a:bodyPr>
           <a:lstStyle/>
           <a:p>
-            <a:pPr indent="0" marL="0">
+            <a:pPr marL="0" indent="0">
               <a:buNone/>
             </a:pPr>
             <a:r>
@@ -6039,10 +6158,13 @@
                 <a:solidFill>
                   <a:srgbClr val="6B786E"/>
                 </a:solidFill>
+                <a:latin typeface="Garamond"/>
               </a:rPr>
               <a:t>Modèle contractuel, responsabilités et limites de rôle.</a:t>
             </a:r>
-            <a:endParaRPr lang="en-US" sz="1050" dirty="0"/>
+            <a:endParaRPr lang="en-US" sz="1050" dirty="0">
+              <a:latin typeface="Garamond"/>
+            </a:endParaRPr>
           </a:p>
         </p:txBody>
       </p:sp>
@@ -6054,7 +6176,7 @@
         </p:nvSpPr>
         <p:spPr>
           <a:xfrm>
-            <a:off x="3749040" y="2743200"/>
+            <a:off x="3749040" y="3381829"/>
             <a:ext cx="2606040" cy="1417320"/>
           </a:xfrm>
           <a:prstGeom prst="roundRect">
@@ -6083,7 +6205,7 @@
         </p:nvSpPr>
         <p:spPr>
           <a:xfrm>
-            <a:off x="3959352" y="2944368"/>
+            <a:off x="3959352" y="3582997"/>
             <a:ext cx="320040" cy="320040"/>
           </a:xfrm>
           <a:prstGeom prst="rect">
@@ -6096,7 +6218,7 @@
           <a:bodyPr wrap="square" lIns="0" tIns="0" rIns="0" bIns="0" rtlCol="0" anchor="ctr"/>
           <a:lstStyle/>
           <a:p>
-            <a:pPr indent="0" marL="0">
+            <a:pPr marL="0" indent="0">
               <a:buNone/>
             </a:pPr>
             <a:r>
@@ -6104,10 +6226,13 @@
                 <a:solidFill>
                   <a:srgbClr val="000000"/>
                 </a:solidFill>
+                <a:latin typeface="Garamond"/>
               </a:rPr>
               <a:t>💼</a:t>
             </a:r>
-            <a:endParaRPr lang="en-US" sz="1700" dirty="0"/>
+            <a:endParaRPr lang="en-US" sz="1700" dirty="0">
+              <a:latin typeface="Garamond"/>
+            </a:endParaRPr>
           </a:p>
         </p:txBody>
       </p:sp>
@@ -6119,7 +6244,7 @@
         </p:nvSpPr>
         <p:spPr>
           <a:xfrm>
-            <a:off x="4343400" y="2944368"/>
+            <a:off x="4343400" y="3582997"/>
             <a:ext cx="1810512" cy="256032"/>
           </a:xfrm>
           <a:prstGeom prst="rect">
@@ -6132,7 +6257,7 @@
           <a:bodyPr wrap="square" lIns="0" tIns="0" rIns="0" bIns="0" rtlCol="0" anchor="ctr"/>
           <a:lstStyle/>
           <a:p>
-            <a:pPr indent="0" marL="0">
+            <a:pPr marL="0" indent="0">
               <a:buNone/>
             </a:pPr>
             <a:r>
@@ -6140,10 +6265,13 @@
                 <a:solidFill>
                   <a:srgbClr val="0E1712"/>
                 </a:solidFill>
+                <a:latin typeface="Garamond"/>
               </a:rPr>
               <a:t>Wallets / comptes</a:t>
             </a:r>
-            <a:endParaRPr lang="en-US" sz="1500" dirty="0"/>
+            <a:endParaRPr lang="en-US" sz="1500" dirty="0">
+              <a:latin typeface="Garamond"/>
+            </a:endParaRPr>
           </a:p>
         </p:txBody>
       </p:sp>
@@ -6155,7 +6283,7 @@
         </p:nvSpPr>
         <p:spPr>
           <a:xfrm>
-            <a:off x="3959352" y="3383280"/>
+            <a:off x="3959352" y="4021909"/>
             <a:ext cx="384048" cy="32004"/>
           </a:xfrm>
           <a:prstGeom prst="rect">
@@ -6182,7 +6310,7 @@
         </p:nvSpPr>
         <p:spPr>
           <a:xfrm>
-            <a:off x="3959352" y="3520440"/>
+            <a:off x="3959352" y="4159069"/>
             <a:ext cx="2185416" cy="457200"/>
           </a:xfrm>
           <a:prstGeom prst="rect">
@@ -6197,7 +6325,7 @@
           </a:bodyPr>
           <a:lstStyle/>
           <a:p>
-            <a:pPr indent="0" marL="0">
+            <a:pPr marL="0" indent="0">
               <a:buNone/>
             </a:pPr>
             <a:r>
@@ -6205,10 +6333,13 @@
                 <a:solidFill>
                   <a:srgbClr val="6B786E"/>
                 </a:solidFill>
+                <a:latin typeface="Garamond"/>
               </a:rPr>
               <a:t>Ouverture, tenue, plafonds et règles de fonctionnement.</a:t>
             </a:r>
-            <a:endParaRPr lang="en-US" sz="1050" dirty="0"/>
+            <a:endParaRPr lang="en-US" sz="1050" dirty="0">
+              <a:latin typeface="Garamond"/>
+            </a:endParaRPr>
           </a:p>
         </p:txBody>
       </p:sp>
@@ -6220,7 +6351,7 @@
         </p:nvSpPr>
         <p:spPr>
           <a:xfrm>
-            <a:off x="6675120" y="2743200"/>
+            <a:off x="6675120" y="3381829"/>
             <a:ext cx="2606040" cy="1417320"/>
           </a:xfrm>
           <a:prstGeom prst="roundRect">
@@ -6249,7 +6380,7 @@
         </p:nvSpPr>
         <p:spPr>
           <a:xfrm>
-            <a:off x="6885432" y="2944368"/>
+            <a:off x="6885432" y="3582997"/>
             <a:ext cx="320040" cy="320040"/>
           </a:xfrm>
           <a:prstGeom prst="rect">
@@ -6262,7 +6393,7 @@
           <a:bodyPr wrap="square" lIns="0" tIns="0" rIns="0" bIns="0" rtlCol="0" anchor="ctr"/>
           <a:lstStyle/>
           <a:p>
-            <a:pPr indent="0" marL="0">
+            <a:pPr marL="0" indent="0">
               <a:buNone/>
             </a:pPr>
             <a:r>
@@ -6270,10 +6401,13 @@
                 <a:solidFill>
                   <a:srgbClr val="000000"/>
                 </a:solidFill>
+                <a:latin typeface="Garamond"/>
               </a:rPr>
               <a:t>🔁</a:t>
             </a:r>
-            <a:endParaRPr lang="en-US" sz="1700" dirty="0"/>
+            <a:endParaRPr lang="en-US" sz="1700" dirty="0">
+              <a:latin typeface="Garamond"/>
+            </a:endParaRPr>
           </a:p>
         </p:txBody>
       </p:sp>
@@ -6285,7 +6419,7 @@
         </p:nvSpPr>
         <p:spPr>
           <a:xfrm>
-            <a:off x="7269480" y="2944368"/>
+            <a:off x="7269480" y="3582997"/>
             <a:ext cx="1810512" cy="256032"/>
           </a:xfrm>
           <a:prstGeom prst="rect">
@@ -6298,7 +6432,7 @@
           <a:bodyPr wrap="square" lIns="0" tIns="0" rIns="0" bIns="0" rtlCol="0" anchor="ctr"/>
           <a:lstStyle/>
           <a:p>
-            <a:pPr indent="0" marL="0">
+            <a:pPr marL="0" indent="0">
               <a:buNone/>
             </a:pPr>
             <a:r>
@@ -6306,10 +6440,13 @@
                 <a:solidFill>
                   <a:srgbClr val="0E1712"/>
                 </a:solidFill>
+                <a:latin typeface="Garamond"/>
               </a:rPr>
               <a:t>API &amp; flux</a:t>
             </a:r>
-            <a:endParaRPr lang="en-US" sz="1500" dirty="0"/>
+            <a:endParaRPr lang="en-US" sz="1500" dirty="0">
+              <a:latin typeface="Garamond"/>
+            </a:endParaRPr>
           </a:p>
         </p:txBody>
       </p:sp>
@@ -6321,7 +6458,7 @@
         </p:nvSpPr>
         <p:spPr>
           <a:xfrm>
-            <a:off x="6885432" y="3383280"/>
+            <a:off x="6885432" y="4021909"/>
             <a:ext cx="384048" cy="32004"/>
           </a:xfrm>
           <a:prstGeom prst="rect">
@@ -6348,7 +6485,7 @@
         </p:nvSpPr>
         <p:spPr>
           <a:xfrm>
-            <a:off x="6885432" y="3520440"/>
+            <a:off x="6885432" y="4159069"/>
             <a:ext cx="2185416" cy="457200"/>
           </a:xfrm>
           <a:prstGeom prst="rect">
@@ -6363,7 +6500,7 @@
           </a:bodyPr>
           <a:lstStyle/>
           <a:p>
-            <a:pPr indent="0" marL="0">
+            <a:pPr marL="0" indent="0">
               <a:buNone/>
             </a:pPr>
             <a:r>
@@ -6371,10 +6508,13 @@
                 <a:solidFill>
                   <a:srgbClr val="6B786E"/>
                 </a:solidFill>
+                <a:latin typeface="Garamond"/>
               </a:rPr>
               <a:t>Paiements, webhooks, commissions et réconciliation.</a:t>
             </a:r>
-            <a:endParaRPr lang="en-US" sz="1050" dirty="0"/>
+            <a:endParaRPr lang="en-US" sz="1050" dirty="0">
+              <a:latin typeface="Garamond"/>
+            </a:endParaRPr>
           </a:p>
         </p:txBody>
       </p:sp>
@@ -6386,7 +6526,7 @@
         </p:nvSpPr>
         <p:spPr>
           <a:xfrm>
-            <a:off x="9601200" y="2743200"/>
+            <a:off x="9601200" y="3381829"/>
             <a:ext cx="1783080" cy="1417320"/>
           </a:xfrm>
           <a:prstGeom prst="roundRect">
@@ -6415,7 +6555,7 @@
         </p:nvSpPr>
         <p:spPr>
           <a:xfrm>
-            <a:off x="9811512" y="2944368"/>
+            <a:off x="9811512" y="3582997"/>
             <a:ext cx="320040" cy="320040"/>
           </a:xfrm>
           <a:prstGeom prst="rect">
@@ -6428,7 +6568,7 @@
           <a:bodyPr wrap="square" lIns="0" tIns="0" rIns="0" bIns="0" rtlCol="0" anchor="ctr"/>
           <a:lstStyle/>
           <a:p>
-            <a:pPr indent="0" marL="0">
+            <a:pPr marL="0" indent="0">
               <a:buNone/>
             </a:pPr>
             <a:r>
@@ -6436,10 +6576,13 @@
                 <a:solidFill>
                   <a:srgbClr val="000000"/>
                 </a:solidFill>
+                <a:latin typeface="Garamond"/>
               </a:rPr>
               <a:t>🚀</a:t>
             </a:r>
-            <a:endParaRPr lang="en-US" sz="1700" dirty="0"/>
+            <a:endParaRPr lang="en-US" sz="1700" dirty="0">
+              <a:latin typeface="Garamond"/>
+            </a:endParaRPr>
           </a:p>
         </p:txBody>
       </p:sp>
@@ -6451,7 +6594,7 @@
         </p:nvSpPr>
         <p:spPr>
           <a:xfrm>
-            <a:off x="10195560" y="2944368"/>
+            <a:off x="10195560" y="3582997"/>
             <a:ext cx="987552" cy="256032"/>
           </a:xfrm>
           <a:prstGeom prst="rect">
@@ -6464,7 +6607,7 @@
           <a:bodyPr wrap="square" lIns="0" tIns="0" rIns="0" bIns="0" rtlCol="0" anchor="ctr"/>
           <a:lstStyle/>
           <a:p>
-            <a:pPr indent="0" marL="0">
+            <a:pPr marL="0" indent="0">
               <a:buNone/>
             </a:pPr>
             <a:r>
@@ -6472,10 +6615,13 @@
                 <a:solidFill>
                   <a:srgbClr val="0E1712"/>
                 </a:solidFill>
+                <a:latin typeface="Garamond"/>
               </a:rPr>
               <a:t>Pilote</a:t>
             </a:r>
-            <a:endParaRPr lang="en-US" sz="1500" dirty="0"/>
+            <a:endParaRPr lang="en-US" sz="1500" dirty="0">
+              <a:latin typeface="Garamond"/>
+            </a:endParaRPr>
           </a:p>
         </p:txBody>
       </p:sp>
@@ -6487,7 +6633,7 @@
         </p:nvSpPr>
         <p:spPr>
           <a:xfrm>
-            <a:off x="9811512" y="3383280"/>
+            <a:off x="9811512" y="4021909"/>
             <a:ext cx="384048" cy="32004"/>
           </a:xfrm>
           <a:prstGeom prst="rect">
@@ -6514,7 +6660,7 @@
         </p:nvSpPr>
         <p:spPr>
           <a:xfrm>
-            <a:off x="9811512" y="3520440"/>
+            <a:off x="9811512" y="4159069"/>
             <a:ext cx="1362456" cy="457200"/>
           </a:xfrm>
           <a:prstGeom prst="rect">
@@ -6529,7 +6675,7 @@
           </a:bodyPr>
           <a:lstStyle/>
           <a:p>
-            <a:pPr indent="0" marL="0">
+            <a:pPr marL="0" indent="0">
               <a:buNone/>
             </a:pPr>
             <a:r>
@@ -6537,10 +6683,13 @@
                 <a:solidFill>
                   <a:srgbClr val="6B786E"/>
                 </a:solidFill>
+                <a:latin typeface="Garamond"/>
               </a:rPr>
               <a:t>Périmètre, calendrier et critères de succès.</a:t>
             </a:r>
-            <a:endParaRPr lang="en-US" sz="1050" dirty="0"/>
+            <a:endParaRPr lang="en-US" sz="1050" dirty="0">
+              <a:latin typeface="Garamond"/>
+            </a:endParaRPr>
           </a:p>
         </p:txBody>
       </p:sp>
@@ -6565,7 +6714,7 @@
           <a:bodyPr wrap="square" lIns="0" tIns="0" rIns="0" bIns="0" rtlCol="0" anchor="ctr"/>
           <a:lstStyle/>
           <a:p>
-            <a:pPr indent="0" marL="0">
+            <a:pPr marL="0" indent="0">
               <a:buNone/>
             </a:pPr>
             <a:r>
@@ -6573,10 +6722,13 @@
                 <a:solidFill>
                   <a:srgbClr val="6B786E"/>
                 </a:solidFill>
+                <a:latin typeface="Garamond"/>
               </a:rPr>
               <a:t>© 2026 KOWO · contact@getkowo.com · getkowo.com</a:t>
             </a:r>
-            <a:endParaRPr lang="en-US" sz="750" dirty="0"/>
+            <a:endParaRPr lang="en-US" sz="750" dirty="0">
+              <a:latin typeface="Garamond"/>
+            </a:endParaRPr>
           </a:p>
         </p:txBody>
       </p:sp>
@@ -6596,6 +6748,7 @@
         <a:solidFill>
           <a:srgbClr val="07150F"/>
         </a:solidFill>
+        <a:effectLst/>
       </p:bgPr>
     </p:bg>
     <p:spTree>
@@ -7370,14 +7523,14 @@
       </p:sp>
       <p:pic>
         <p:nvPicPr>
-          <p:cNvPr id="32" name="Image 0" descr="/mnt/data/kowo-institutional-partnership-v2/assets/kowo-logo.jpg">    </p:cNvPr>
+          <p:cNvPr id="32" name="Image 0" descr="/mnt/data/kowo-institutional-partnership-v2/assets/kowo-logo.jpg"/>
           <p:cNvPicPr>
             <a:picLocks noChangeAspect="1"/>
           </p:cNvPicPr>
           <p:nvPr/>
         </p:nvPicPr>
         <p:blipFill>
-          <a:blip r:embed="rId1"/>
+          <a:blip r:embed="rId3"/>
           <a:stretch>
             <a:fillRect/>
           </a:stretch>
@@ -7400,7 +7553,7 @@
         </p:nvSpPr>
         <p:spPr>
           <a:xfrm>
-            <a:off x="960120" y="356616"/>
+            <a:off x="960120" y="392902"/>
             <a:ext cx="1097280" cy="256032"/>
           </a:xfrm>
           <a:prstGeom prst="rect">
@@ -7413,7 +7566,7 @@
           <a:bodyPr wrap="square" lIns="0" tIns="0" rIns="0" bIns="0" rtlCol="0" anchor="ctr"/>
           <a:lstStyle/>
           <a:p>
-            <a:pPr indent="0" marL="0">
+            <a:pPr marL="0" indent="0">
               <a:buNone/>
             </a:pPr>
             <a:r>
@@ -7421,13 +7574,15 @@
                 <a:solidFill>
                   <a:srgbClr val="123B2B"/>
                 </a:solidFill>
-                <a:latin typeface="Aptos Display" pitchFamily="34" charset="0"/>
+                <a:latin typeface="Garamond"/>
                 <a:ea typeface="Aptos Display" pitchFamily="34" charset="-122"/>
                 <a:cs typeface="Aptos Display" pitchFamily="34" charset="-120"/>
               </a:rPr>
               <a:t>KOWO</a:t>
             </a:r>
-            <a:endParaRPr lang="en-US" sz="1000" dirty="0"/>
+            <a:endParaRPr lang="en-US" sz="1000" dirty="0">
+              <a:latin typeface="Garamond"/>
+            </a:endParaRPr>
           </a:p>
         </p:txBody>
       </p:sp>
@@ -7452,7 +7607,7 @@
           <a:bodyPr wrap="square" lIns="0" tIns="0" rIns="0" bIns="0" rtlCol="0" anchor="ctr"/>
           <a:lstStyle/>
           <a:p>
-            <a:pPr algn="r" indent="0" marL="0">
+            <a:pPr marL="0" indent="0" algn="r">
               <a:buNone/>
             </a:pPr>
             <a:r>
@@ -7460,23 +7615,26 @@
                 <a:solidFill>
                   <a:srgbClr val="123B2B"/>
                 </a:solidFill>
+                <a:latin typeface="Garamond"/>
               </a:rPr>
               <a:t>Institutional Partnership Brief</a:t>
             </a:r>
-            <a:endParaRPr lang="en-US" sz="800" dirty="0"/>
+            <a:endParaRPr lang="en-US" sz="800" dirty="0">
+              <a:latin typeface="Garamond"/>
+            </a:endParaRPr>
           </a:p>
         </p:txBody>
       </p:sp>
       <p:pic>
         <p:nvPicPr>
-          <p:cNvPr id="35" name="Image 1" descr="/mnt/data/kowo-institutional-partnership-v2/assets/kowo-logo.jpg">    </p:cNvPr>
+          <p:cNvPr id="35" name="Image 1" descr="/mnt/data/kowo-institutional-partnership-v2/assets/kowo-logo.jpg"/>
           <p:cNvPicPr>
             <a:picLocks noChangeAspect="1"/>
           </p:cNvPicPr>
           <p:nvPr/>
         </p:nvPicPr>
         <p:blipFill>
-          <a:blip r:embed="rId2"/>
+          <a:blip r:embed="rId3"/>
           <a:stretch>
             <a:fillRect/>
           </a:stretch>
@@ -7499,7 +7657,7 @@
         </p:nvSpPr>
         <p:spPr>
           <a:xfrm>
-            <a:off x="1783080" y="1627632"/>
+            <a:off x="1848394" y="1721975"/>
             <a:ext cx="1554480" cy="292608"/>
           </a:xfrm>
           <a:prstGeom prst="rect">
@@ -7512,7 +7670,7 @@
           <a:bodyPr wrap="square" lIns="0" tIns="0" rIns="0" bIns="0" rtlCol="0" anchor="ctr"/>
           <a:lstStyle/>
           <a:p>
-            <a:pPr indent="0" marL="0">
+            <a:pPr marL="0" indent="0">
               <a:buNone/>
             </a:pPr>
             <a:r>
@@ -7520,10 +7678,13 @@
                 <a:solidFill>
                   <a:srgbClr val="FFFFFF"/>
                 </a:solidFill>
+                <a:latin typeface="Garamond"/>
               </a:rPr>
               <a:t>KOWO</a:t>
             </a:r>
-            <a:endParaRPr lang="en-US" sz="2400" dirty="0"/>
+            <a:endParaRPr lang="en-US" sz="2400" dirty="0">
+              <a:latin typeface="Garamond"/>
+            </a:endParaRPr>
           </a:p>
         </p:txBody>
       </p:sp>
@@ -7550,7 +7711,7 @@
           </a:bodyPr>
           <a:lstStyle/>
           <a:p>
-            <a:pPr indent="0" marL="0">
+            <a:pPr marL="0" indent="0">
               <a:buNone/>
             </a:pPr>
             <a:r>
@@ -7558,10 +7719,13 @@
                 <a:solidFill>
                   <a:srgbClr val="FFFFFF"/>
                 </a:solidFill>
+                <a:latin typeface="Garamond"/>
               </a:rPr>
               <a:t>Construisons l’épargne communautaire numérique avec un partenaire réglementé de confiance.</a:t>
             </a:r>
-            <a:endParaRPr lang="en-US" sz="3100" dirty="0"/>
+            <a:endParaRPr lang="en-US" sz="3100" dirty="0">
+              <a:latin typeface="Garamond"/>
+            </a:endParaRPr>
           </a:p>
         </p:txBody>
       </p:sp>
@@ -7615,7 +7779,7 @@
           <a:bodyPr wrap="square" lIns="0" tIns="0" rIns="0" bIns="0" rtlCol="0" anchor="ctr"/>
           <a:lstStyle/>
           <a:p>
-            <a:pPr indent="0" marL="0">
+            <a:pPr marL="0" indent="0">
               <a:buNone/>
             </a:pPr>
             <a:r>
@@ -7623,10 +7787,13 @@
                 <a:solidFill>
                   <a:srgbClr val="FFFFFF"/>
                 </a:solidFill>
+                <a:latin typeface="Garamond"/>
               </a:rPr>
               <a:t>Fayçol SALAMI</a:t>
             </a:r>
-            <a:endParaRPr lang="en-US" sz="1800" dirty="0"/>
+            <a:endParaRPr lang="en-US" sz="1800" dirty="0">
+              <a:latin typeface="Garamond"/>
+            </a:endParaRPr>
           </a:p>
         </p:txBody>
       </p:sp>
@@ -7653,7 +7820,7 @@
           </a:bodyPr>
           <a:lstStyle/>
           <a:p>
-            <a:pPr indent="0" marL="0">
+            <a:pPr marL="0" indent="0">
               <a:buNone/>
             </a:pPr>
             <a:r>
@@ -7661,13 +7828,16 @@
                 <a:solidFill>
                   <a:srgbClr val="C7D8CF"/>
                 </a:solidFill>
+                <a:latin typeface="Garamond"/>
               </a:rPr>
               <a:t>Fondateur — KOWO SARL</a:t>
             </a:r>
-            <a:endParaRPr lang="en-US" sz="1230" dirty="0"/>
-          </a:p>
-          <a:p>
-            <a:pPr indent="0" marL="0">
+            <a:endParaRPr lang="en-US" sz="1230" dirty="0">
+              <a:latin typeface="Garamond"/>
+            </a:endParaRPr>
+          </a:p>
+          <a:p>
+            <a:pPr marL="0" indent="0">
               <a:buNone/>
             </a:pPr>
             <a:r>
@@ -7675,19 +7845,24 @@
                 <a:solidFill>
                   <a:srgbClr val="C7D8CF"/>
                 </a:solidFill>
+                <a:latin typeface="Garamond"/>
               </a:rPr>
               <a:t>Fondateur — YandaTech EI (France)</a:t>
             </a:r>
-            <a:endParaRPr lang="en-US" sz="1230" dirty="0"/>
-          </a:p>
-          <a:p>
-            <a:pPr indent="0" marL="0">
-              <a:buNone/>
-            </a:pPr>
-            <a:endParaRPr lang="en-US" sz="1230" dirty="0"/>
-          </a:p>
-          <a:p>
-            <a:pPr indent="0" marL="0">
+            <a:endParaRPr lang="en-US" sz="1230" dirty="0">
+              <a:latin typeface="Garamond"/>
+            </a:endParaRPr>
+          </a:p>
+          <a:p>
+            <a:pPr marL="0" indent="0">
+              <a:buNone/>
+            </a:pPr>
+            <a:endParaRPr lang="en-US" sz="1230" dirty="0">
+              <a:latin typeface="Garamond"/>
+            </a:endParaRPr>
+          </a:p>
+          <a:p>
+            <a:pPr marL="0" indent="0">
               <a:buNone/>
             </a:pPr>
             <a:r>
@@ -7695,13 +7870,16 @@
                 <a:solidFill>
                   <a:srgbClr val="C7D8CF"/>
                 </a:solidFill>
+                <a:latin typeface="Garamond"/>
               </a:rPr>
               <a:t>contact@getkowo.com</a:t>
             </a:r>
-            <a:endParaRPr lang="en-US" sz="1230" dirty="0"/>
-          </a:p>
-          <a:p>
-            <a:pPr indent="0" marL="0">
+            <a:endParaRPr lang="en-US" sz="1230" dirty="0">
+              <a:latin typeface="Garamond"/>
+            </a:endParaRPr>
+          </a:p>
+          <a:p>
+            <a:pPr marL="0" indent="0">
               <a:buNone/>
             </a:pPr>
             <a:r>
@@ -7709,13 +7887,16 @@
                 <a:solidFill>
                   <a:srgbClr val="C7D8CF"/>
                 </a:solidFill>
+                <a:latin typeface="Garamond"/>
               </a:rPr>
               <a:t>faycol.salami@getkowo.com</a:t>
             </a:r>
-            <a:endParaRPr lang="en-US" sz="1230" dirty="0"/>
-          </a:p>
-          <a:p>
-            <a:pPr indent="0" marL="0">
+            <a:endParaRPr lang="en-US" sz="1230" dirty="0">
+              <a:latin typeface="Garamond"/>
+            </a:endParaRPr>
+          </a:p>
+          <a:p>
+            <a:pPr marL="0" indent="0">
               <a:buNone/>
             </a:pPr>
             <a:r>
@@ -7723,10 +7904,13 @@
                 <a:solidFill>
                   <a:srgbClr val="C7D8CF"/>
                 </a:solidFill>
+                <a:latin typeface="Garamond"/>
               </a:rPr>
               <a:t>www.getkowo.com</a:t>
             </a:r>
-            <a:endParaRPr lang="en-US" sz="1230" dirty="0"/>
+            <a:endParaRPr lang="en-US" sz="1230" dirty="0">
+              <a:latin typeface="Garamond"/>
+            </a:endParaRPr>
           </a:p>
         </p:txBody>
       </p:sp>
@@ -7780,7 +7964,7 @@
           <a:bodyPr wrap="square" lIns="0" tIns="0" rIns="0" bIns="0" rtlCol="0" anchor="ctr"/>
           <a:lstStyle/>
           <a:p>
-            <a:pPr algn="ctr" indent="0" marL="0">
+            <a:pPr marL="0" indent="0" algn="ctr">
               <a:buNone/>
             </a:pPr>
             <a:r>
@@ -7788,10 +7972,13 @@
                 <a:solidFill>
                   <a:srgbClr val="8DFFD3"/>
                 </a:solidFill>
+                <a:latin typeface="Garamond"/>
               </a:rPr>
               <a:t>PARTNER PORTAL · GETKOWO.COM/PARTNERS</a:t>
             </a:r>
-            <a:endParaRPr lang="en-US" sz="850" dirty="0"/>
+            <a:endParaRPr lang="en-US" sz="850" dirty="0">
+              <a:latin typeface="Garamond"/>
+            </a:endParaRPr>
           </a:p>
         </p:txBody>
       </p:sp>
@@ -7816,7 +8003,7 @@
           <a:bodyPr wrap="square" lIns="0" tIns="0" rIns="0" bIns="0" rtlCol="0" anchor="ctr"/>
           <a:lstStyle/>
           <a:p>
-            <a:pPr indent="0" marL="0">
+            <a:pPr marL="0" indent="0">
               <a:buNone/>
             </a:pPr>
             <a:r>
@@ -7824,10 +8011,13 @@
                 <a:solidFill>
                   <a:srgbClr val="9DB7AA"/>
                 </a:solidFill>
+                <a:latin typeface="Garamond"/>
               </a:rPr>
               <a:t>© 2026 KOWO · contact@getkowo.com · getkowo.com</a:t>
             </a:r>
-            <a:endParaRPr lang="en-US" sz="750" dirty="0"/>
+            <a:endParaRPr lang="en-US" sz="750" dirty="0">
+              <a:latin typeface="Garamond"/>
+            </a:endParaRPr>
           </a:p>
         </p:txBody>
       </p:sp>
@@ -7847,6 +8037,7 @@
         <a:solidFill>
           <a:srgbClr val="F6F1E7"/>
         </a:solidFill>
+        <a:effectLst/>
       </p:bgPr>
     </p:bg>
     <p:spTree>
@@ -7896,14 +8087,14 @@
       </p:sp>
       <p:pic>
         <p:nvPicPr>
-          <p:cNvPr id="3" name="Image 0" descr="/mnt/data/kowo-institutional-partnership-v2/assets/kowo-logo.jpg">    </p:cNvPr>
+          <p:cNvPr id="3" name="Image 0" descr="/mnt/data/kowo-institutional-partnership-v2/assets/kowo-logo.jpg"/>
           <p:cNvPicPr>
             <a:picLocks noChangeAspect="1"/>
           </p:cNvPicPr>
           <p:nvPr/>
         </p:nvPicPr>
         <p:blipFill>
-          <a:blip r:embed="rId1"/>
+          <a:blip r:embed="rId3"/>
           <a:stretch>
             <a:fillRect/>
           </a:stretch>
@@ -7926,7 +8117,7 @@
         </p:nvSpPr>
         <p:spPr>
           <a:xfrm>
-            <a:off x="960120" y="356616"/>
+            <a:off x="996406" y="421930"/>
             <a:ext cx="1097280" cy="256032"/>
           </a:xfrm>
           <a:prstGeom prst="rect">
@@ -7939,7 +8130,7 @@
           <a:bodyPr wrap="square" lIns="0" tIns="0" rIns="0" bIns="0" rtlCol="0" anchor="ctr"/>
           <a:lstStyle/>
           <a:p>
-            <a:pPr indent="0" marL="0">
+            <a:pPr marL="0" indent="0">
               <a:buNone/>
             </a:pPr>
             <a:r>
@@ -7947,13 +8138,15 @@
                 <a:solidFill>
                   <a:srgbClr val="123B2B"/>
                 </a:solidFill>
-                <a:latin typeface="Aptos Display" pitchFamily="34" charset="0"/>
+                <a:latin typeface="Garamond"/>
                 <a:ea typeface="Aptos Display" pitchFamily="34" charset="-122"/>
                 <a:cs typeface="Aptos Display" pitchFamily="34" charset="-120"/>
               </a:rPr>
               <a:t>KOWO</a:t>
             </a:r>
-            <a:endParaRPr lang="en-US" sz="1000" dirty="0"/>
+            <a:endParaRPr lang="en-US" sz="1000" dirty="0">
+              <a:latin typeface="Garamond"/>
+            </a:endParaRPr>
           </a:p>
         </p:txBody>
       </p:sp>
@@ -7978,7 +8171,7 @@
           <a:bodyPr wrap="square" lIns="0" tIns="0" rIns="0" bIns="0" rtlCol="0" anchor="ctr"/>
           <a:lstStyle/>
           <a:p>
-            <a:pPr algn="r" indent="0" marL="0">
+            <a:pPr marL="0" indent="0" algn="r">
               <a:buNone/>
             </a:pPr>
             <a:r>
@@ -7986,10 +8179,13 @@
                 <a:solidFill>
                   <a:srgbClr val="6B786E"/>
                 </a:solidFill>
+                <a:latin typeface="Garamond"/>
               </a:rPr>
               <a:t>Institutional Partnership Brief</a:t>
             </a:r>
-            <a:endParaRPr lang="en-US" sz="800" dirty="0"/>
+            <a:endParaRPr lang="en-US" sz="800" dirty="0">
+              <a:latin typeface="Garamond"/>
+            </a:endParaRPr>
           </a:p>
         </p:txBody>
       </p:sp>
@@ -8043,7 +8239,7 @@
           <a:bodyPr wrap="square" lIns="0" tIns="0" rIns="0" bIns="0" rtlCol="0" anchor="ctr"/>
           <a:lstStyle/>
           <a:p>
-            <a:pPr algn="ctr" indent="0" marL="0">
+            <a:pPr marL="0" indent="0" algn="ctr">
               <a:buNone/>
             </a:pPr>
             <a:r>
@@ -8051,10 +8247,13 @@
                 <a:solidFill>
                   <a:srgbClr val="123B2B"/>
                 </a:solidFill>
+                <a:latin typeface="Garamond"/>
               </a:rPr>
               <a:t>02 · OPPORTUNITÉ</a:t>
             </a:r>
-            <a:endParaRPr lang="en-US" sz="850" dirty="0"/>
+            <a:endParaRPr lang="en-US" sz="850" dirty="0">
+              <a:latin typeface="Garamond"/>
+            </a:endParaRPr>
           </a:p>
         </p:txBody>
       </p:sp>
@@ -8066,8 +8265,70 @@
         </p:nvSpPr>
         <p:spPr>
           <a:xfrm>
-            <a:off x="658368" y="1335024"/>
-            <a:ext cx="5669280" cy="960120"/>
+            <a:off x="658368" y="1327767"/>
+            <a:ext cx="5669280" cy="1402805"/>
+          </a:xfrm>
+          <a:prstGeom prst="rect">
+            <a:avLst/>
+          </a:prstGeom>
+          <a:noFill/>
+          <a:ln/>
+        </p:spPr>
+        <p:txBody>
+          <a:bodyPr wrap="square" lIns="0" tIns="0" rIns="0" bIns="0" rtlCol="0" anchor="ctr">
+            <a:normAutofit fontScale="92500" lnSpcReduction="10000"/>
+          </a:bodyPr>
+          <a:lstStyle/>
+          <a:p>
+            <a:pPr marL="0" indent="0">
+              <a:buNone/>
+            </a:pPr>
+            <a:r>
+              <a:rPr lang="en-US" sz="3600" b="1" dirty="0">
+                <a:solidFill>
+                  <a:srgbClr val="0E1712"/>
+                </a:solidFill>
+                <a:latin typeface="Garamond"/>
+                <a:ea typeface="Aptos Display" pitchFamily="34" charset="-122"/>
+                <a:cs typeface="Aptos Display" pitchFamily="34" charset="-120"/>
+              </a:rPr>
+              <a:t>Le marché existe déjà.</a:t>
+            </a:r>
+            <a:endParaRPr lang="en-US" sz="3600" dirty="0">
+              <a:latin typeface="Garamond"/>
+            </a:endParaRPr>
+          </a:p>
+          <a:p>
+            <a:pPr marL="0" indent="0">
+              <a:buNone/>
+            </a:pPr>
+            <a:r>
+              <a:rPr lang="en-US" sz="3600" b="1" dirty="0">
+                <a:solidFill>
+                  <a:srgbClr val="0E1712"/>
+                </a:solidFill>
+                <a:latin typeface="Garamond"/>
+                <a:ea typeface="Aptos Display" pitchFamily="34" charset="-122"/>
+                <a:cs typeface="Aptos Display" pitchFamily="34" charset="-120"/>
+              </a:rPr>
+              <a:t>Il manque une couche technologique de confiance.</a:t>
+            </a:r>
+            <a:endParaRPr lang="en-US" sz="3600" dirty="0">
+              <a:latin typeface="Garamond"/>
+            </a:endParaRPr>
+          </a:p>
+        </p:txBody>
+      </p:sp>
+      <p:sp>
+        <p:nvSpPr>
+          <p:cNvPr id="9" name="Text 6"/>
+          <p:cNvSpPr/>
+          <p:nvPr/>
+        </p:nvSpPr>
+        <p:spPr>
+          <a:xfrm>
+            <a:off x="656772" y="3176306"/>
+            <a:ext cx="5303520" cy="621792"/>
           </a:xfrm>
           <a:prstGeom prst="rect">
             <a:avLst/>
@@ -8081,65 +8342,7 @@
           </a:bodyPr>
           <a:lstStyle/>
           <a:p>
-            <a:pPr indent="0" marL="0">
-              <a:buNone/>
-            </a:pPr>
-            <a:r>
-              <a:rPr lang="en-US" sz="3600" b="1" dirty="0">
-                <a:solidFill>
-                  <a:srgbClr val="0E1712"/>
-                </a:solidFill>
-                <a:latin typeface="Aptos Display" pitchFamily="34" charset="0"/>
-                <a:ea typeface="Aptos Display" pitchFamily="34" charset="-122"/>
-                <a:cs typeface="Aptos Display" pitchFamily="34" charset="-120"/>
-              </a:rPr>
-              <a:t>Le marché existe déjà.</a:t>
-            </a:r>
-            <a:endParaRPr lang="en-US" sz="3600" dirty="0"/>
-          </a:p>
-          <a:p>
-            <a:pPr indent="0" marL="0">
-              <a:buNone/>
-            </a:pPr>
-            <a:r>
-              <a:rPr lang="en-US" sz="3600" b="1" dirty="0">
-                <a:solidFill>
-                  <a:srgbClr val="0E1712"/>
-                </a:solidFill>
-                <a:latin typeface="Aptos Display" pitchFamily="34" charset="0"/>
-                <a:ea typeface="Aptos Display" pitchFamily="34" charset="-122"/>
-                <a:cs typeface="Aptos Display" pitchFamily="34" charset="-120"/>
-              </a:rPr>
-              <a:t>Il manque une couche technologique de confiance.</a:t>
-            </a:r>
-            <a:endParaRPr lang="en-US" sz="3600" dirty="0"/>
-          </a:p>
-        </p:txBody>
-      </p:sp>
-      <p:sp>
-        <p:nvSpPr>
-          <p:cNvPr id="9" name="Text 6"/>
-          <p:cNvSpPr/>
-          <p:nvPr/>
-        </p:nvSpPr>
-        <p:spPr>
-          <a:xfrm>
-            <a:off x="685800" y="2450592"/>
-            <a:ext cx="5303520" cy="621792"/>
-          </a:xfrm>
-          <a:prstGeom prst="rect">
-            <a:avLst/>
-          </a:prstGeom>
-          <a:noFill/>
-          <a:ln/>
-        </p:spPr>
-        <p:txBody>
-          <a:bodyPr wrap="square" lIns="0" tIns="0" rIns="0" bIns="0" rtlCol="0" anchor="ctr">
-            <a:normAutofit/>
-          </a:bodyPr>
-          <a:lstStyle/>
-          <a:p>
-            <a:pPr indent="0" marL="0">
+            <a:pPr marL="0" indent="0">
               <a:buNone/>
             </a:pPr>
             <a:r>
@@ -8147,10 +8350,13 @@
                 <a:solidFill>
                   <a:srgbClr val="6B786E"/>
                 </a:solidFill>
+                <a:latin typeface="Garamond"/>
               </a:rPr>
               <a:t>Les communautés africaines cotisent, épargnent et financent déjà ensemble. KOWO digitalise ces usages sans se substituer aux institutions réglementées.</a:t>
             </a:r>
-            <a:endParaRPr lang="en-US" sz="1500" dirty="0"/>
+            <a:endParaRPr lang="en-US" sz="1500" dirty="0">
+              <a:latin typeface="Garamond"/>
+            </a:endParaRPr>
           </a:p>
         </p:txBody>
       </p:sp>
@@ -8204,7 +8410,7 @@
           <a:bodyPr wrap="square" lIns="0" tIns="0" rIns="0" bIns="0" rtlCol="0" anchor="ctr"/>
           <a:lstStyle/>
           <a:p>
-            <a:pPr indent="0" marL="0">
+            <a:pPr marL="0" indent="0">
               <a:buNone/>
             </a:pPr>
             <a:r>
@@ -8212,10 +8418,13 @@
                 <a:solidFill>
                   <a:srgbClr val="000000"/>
                 </a:solidFill>
+                <a:latin typeface="Garamond"/>
               </a:rPr>
               <a:t>🤝</a:t>
             </a:r>
-            <a:endParaRPr lang="en-US" sz="1700" dirty="0"/>
+            <a:endParaRPr lang="en-US" sz="1700" dirty="0">
+              <a:latin typeface="Garamond"/>
+            </a:endParaRPr>
           </a:p>
         </p:txBody>
       </p:sp>
@@ -8240,7 +8449,7 @@
           <a:bodyPr wrap="square" lIns="0" tIns="0" rIns="0" bIns="0" rtlCol="0" anchor="ctr"/>
           <a:lstStyle/>
           <a:p>
-            <a:pPr indent="0" marL="0">
+            <a:pPr marL="0" indent="0">
               <a:buNone/>
             </a:pPr>
             <a:r>
@@ -8248,10 +8457,13 @@
                 <a:solidFill>
                   <a:srgbClr val="0E1712"/>
                 </a:solidFill>
+                <a:latin typeface="Garamond"/>
               </a:rPr>
               <a:t>Usages existants</a:t>
             </a:r>
-            <a:endParaRPr lang="en-US" sz="1500" dirty="0"/>
+            <a:endParaRPr lang="en-US" sz="1500" dirty="0">
+              <a:latin typeface="Garamond"/>
+            </a:endParaRPr>
           </a:p>
         </p:txBody>
       </p:sp>
@@ -8305,7 +8517,7 @@
           </a:bodyPr>
           <a:lstStyle/>
           <a:p>
-            <a:pPr indent="0" marL="0">
+            <a:pPr marL="0" indent="0">
               <a:buNone/>
             </a:pPr>
             <a:r>
@@ -8313,10 +8525,13 @@
                 <a:solidFill>
                   <a:srgbClr val="6B786E"/>
                 </a:solidFill>
+                <a:latin typeface="Garamond"/>
               </a:rPr>
               <a:t>Tontines, associations, caisses communautaires, cotisations familiales et projets collaboratifs.</a:t>
             </a:r>
-            <a:endParaRPr lang="en-US" sz="1050" dirty="0"/>
+            <a:endParaRPr lang="en-US" sz="1050" dirty="0">
+              <a:latin typeface="Garamond"/>
+            </a:endParaRPr>
           </a:p>
         </p:txBody>
       </p:sp>
@@ -8370,7 +8585,7 @@
           <a:bodyPr wrap="square" lIns="0" tIns="0" rIns="0" bIns="0" rtlCol="0" anchor="ctr"/>
           <a:lstStyle/>
           <a:p>
-            <a:pPr indent="0" marL="0">
+            <a:pPr marL="0" indent="0">
               <a:buNone/>
             </a:pPr>
             <a:r>
@@ -8378,10 +8593,13 @@
                 <a:solidFill>
                   <a:srgbClr val="000000"/>
                 </a:solidFill>
+                <a:latin typeface="Garamond"/>
               </a:rPr>
               <a:t>⚠️</a:t>
             </a:r>
-            <a:endParaRPr lang="en-US" sz="1700" dirty="0"/>
+            <a:endParaRPr lang="en-US" sz="1700" dirty="0">
+              <a:latin typeface="Garamond"/>
+            </a:endParaRPr>
           </a:p>
         </p:txBody>
       </p:sp>
@@ -8406,7 +8624,7 @@
           <a:bodyPr wrap="square" lIns="0" tIns="0" rIns="0" bIns="0" rtlCol="0" anchor="ctr"/>
           <a:lstStyle/>
           <a:p>
-            <a:pPr indent="0" marL="0">
+            <a:pPr marL="0" indent="0">
               <a:buNone/>
             </a:pPr>
             <a:r>
@@ -8414,10 +8632,13 @@
                 <a:solidFill>
                   <a:srgbClr val="0E1712"/>
                 </a:solidFill>
+                <a:latin typeface="Garamond"/>
               </a:rPr>
               <a:t>Limites actuelles</a:t>
             </a:r>
-            <a:endParaRPr lang="en-US" sz="1500" dirty="0"/>
+            <a:endParaRPr lang="en-US" sz="1500" dirty="0">
+              <a:latin typeface="Garamond"/>
+            </a:endParaRPr>
           </a:p>
         </p:txBody>
       </p:sp>
@@ -8471,7 +8692,7 @@
           </a:bodyPr>
           <a:lstStyle/>
           <a:p>
-            <a:pPr indent="0" marL="0">
+            <a:pPr marL="0" indent="0">
               <a:buNone/>
             </a:pPr>
             <a:r>
@@ -8479,10 +8700,13 @@
                 <a:solidFill>
                   <a:srgbClr val="6B786E"/>
                 </a:solidFill>
+                <a:latin typeface="Garamond"/>
               </a:rPr>
               <a:t>WhatsApp, Excel, espèces, litiges, manque de traçabilité et faible visibilité des cycles.</a:t>
             </a:r>
-            <a:endParaRPr lang="en-US" sz="1050" dirty="0"/>
+            <a:endParaRPr lang="en-US" sz="1050" dirty="0">
+              <a:latin typeface="Garamond"/>
+            </a:endParaRPr>
           </a:p>
         </p:txBody>
       </p:sp>
@@ -8536,7 +8760,7 @@
           <a:bodyPr wrap="square" lIns="0" tIns="0" rIns="0" bIns="0" rtlCol="0" anchor="ctr"/>
           <a:lstStyle/>
           <a:p>
-            <a:pPr indent="0" marL="0">
+            <a:pPr marL="0" indent="0">
               <a:buNone/>
             </a:pPr>
             <a:r>
@@ -8544,10 +8768,13 @@
                 <a:solidFill>
                   <a:srgbClr val="000000"/>
                 </a:solidFill>
+                <a:latin typeface="Garamond"/>
               </a:rPr>
               <a:t>📱</a:t>
             </a:r>
-            <a:endParaRPr lang="en-US" sz="1700" dirty="0"/>
+            <a:endParaRPr lang="en-US" sz="1700" dirty="0">
+              <a:latin typeface="Garamond"/>
+            </a:endParaRPr>
           </a:p>
         </p:txBody>
       </p:sp>
@@ -8572,7 +8799,7 @@
           <a:bodyPr wrap="square" lIns="0" tIns="0" rIns="0" bIns="0" rtlCol="0" anchor="ctr"/>
           <a:lstStyle/>
           <a:p>
-            <a:pPr indent="0" marL="0">
+            <a:pPr marL="0" indent="0">
               <a:buNone/>
             </a:pPr>
             <a:r>
@@ -8580,10 +8807,13 @@
                 <a:solidFill>
                   <a:srgbClr val="0E1712"/>
                 </a:solidFill>
+                <a:latin typeface="Garamond"/>
               </a:rPr>
               <a:t>Solution KOWO</a:t>
             </a:r>
-            <a:endParaRPr lang="en-US" sz="1500" dirty="0"/>
+            <a:endParaRPr lang="en-US" sz="1500" dirty="0">
+              <a:latin typeface="Garamond"/>
+            </a:endParaRPr>
           </a:p>
         </p:txBody>
       </p:sp>
@@ -8637,7 +8867,7 @@
           </a:bodyPr>
           <a:lstStyle/>
           <a:p>
-            <a:pPr indent="0" marL="0">
+            <a:pPr marL="0" indent="0">
               <a:buNone/>
             </a:pPr>
             <a:r>
@@ -8645,10 +8875,13 @@
                 <a:solidFill>
                   <a:srgbClr val="6B786E"/>
                 </a:solidFill>
+                <a:latin typeface="Garamond"/>
               </a:rPr>
               <a:t>Application mobile, règles du groupe, historique, notifications, reporting et parcours utilisateurs.</a:t>
             </a:r>
-            <a:endParaRPr lang="en-US" sz="1050" dirty="0"/>
+            <a:endParaRPr lang="en-US" sz="1050" dirty="0">
+              <a:latin typeface="Garamond"/>
+            </a:endParaRPr>
           </a:p>
         </p:txBody>
       </p:sp>
@@ -8702,7 +8935,7 @@
           <a:bodyPr wrap="square" lIns="0" tIns="0" rIns="0" bIns="0" rtlCol="0" anchor="ctr"/>
           <a:lstStyle/>
           <a:p>
-            <a:pPr indent="0" marL="0">
+            <a:pPr marL="0" indent="0">
               <a:buNone/>
             </a:pPr>
             <a:r>
@@ -8710,10 +8943,13 @@
                 <a:solidFill>
                   <a:srgbClr val="000000"/>
                 </a:solidFill>
+                <a:latin typeface="Garamond"/>
               </a:rPr>
               <a:t>🏦</a:t>
             </a:r>
-            <a:endParaRPr lang="en-US" sz="1700" dirty="0"/>
+            <a:endParaRPr lang="en-US" sz="1700" dirty="0">
+              <a:latin typeface="Garamond"/>
+            </a:endParaRPr>
           </a:p>
         </p:txBody>
       </p:sp>
@@ -8738,7 +8974,7 @@
           <a:bodyPr wrap="square" lIns="0" tIns="0" rIns="0" bIns="0" rtlCol="0" anchor="ctr"/>
           <a:lstStyle/>
           <a:p>
-            <a:pPr indent="0" marL="0">
+            <a:pPr marL="0" indent="0">
               <a:buNone/>
             </a:pPr>
             <a:r>
@@ -8746,10 +8982,13 @@
                 <a:solidFill>
                   <a:srgbClr val="0E1712"/>
                 </a:solidFill>
+                <a:latin typeface="Garamond"/>
               </a:rPr>
               <a:t>Partenaire financier</a:t>
             </a:r>
-            <a:endParaRPr lang="en-US" sz="1500" dirty="0"/>
+            <a:endParaRPr lang="en-US" sz="1500" dirty="0">
+              <a:latin typeface="Garamond"/>
+            </a:endParaRPr>
           </a:p>
         </p:txBody>
       </p:sp>
@@ -8803,7 +9042,7 @@
           </a:bodyPr>
           <a:lstStyle/>
           <a:p>
-            <a:pPr indent="0" marL="0">
+            <a:pPr marL="0" indent="0">
               <a:buNone/>
             </a:pPr>
             <a:r>
@@ -8811,10 +9050,13 @@
                 <a:solidFill>
                   <a:srgbClr val="6B786E"/>
                 </a:solidFill>
+                <a:latin typeface="Garamond"/>
               </a:rPr>
               <a:t>Comptes, wallets, conservation des fonds, exigences réglementaires et confiance utilisateur.</a:t>
             </a:r>
-            <a:endParaRPr lang="en-US" sz="1050" dirty="0"/>
+            <a:endParaRPr lang="en-US" sz="1050" dirty="0">
+              <a:latin typeface="Garamond"/>
+            </a:endParaRPr>
           </a:p>
         </p:txBody>
       </p:sp>
@@ -8868,7 +9110,7 @@
           </a:bodyPr>
           <a:lstStyle/>
           <a:p>
-            <a:pPr indent="0" marL="0">
+            <a:pPr marL="0" indent="0">
               <a:buNone/>
             </a:pPr>
             <a:r>
@@ -8876,10 +9118,13 @@
                 <a:solidFill>
                   <a:srgbClr val="FFFFFF"/>
                 </a:solidFill>
+                <a:latin typeface="Garamond"/>
               </a:rPr>
               <a:t>Positionnement : KOWO ne cherche pas à devenir une microfinance, mais à devenir son interface digitale communautaire.</a:t>
             </a:r>
-            <a:endParaRPr lang="en-US" sz="1400" dirty="0"/>
+            <a:endParaRPr lang="en-US" sz="1400" dirty="0">
+              <a:latin typeface="Garamond"/>
+            </a:endParaRPr>
           </a:p>
         </p:txBody>
       </p:sp>
@@ -8904,7 +9149,7 @@
           <a:bodyPr wrap="square" lIns="0" tIns="0" rIns="0" bIns="0" rtlCol="0" anchor="ctr"/>
           <a:lstStyle/>
           <a:p>
-            <a:pPr indent="0" marL="0">
+            <a:pPr marL="0" indent="0">
               <a:buNone/>
             </a:pPr>
             <a:r>
@@ -8912,10 +9157,13 @@
                 <a:solidFill>
                   <a:srgbClr val="6B786E"/>
                 </a:solidFill>
+                <a:latin typeface="Garamond"/>
               </a:rPr>
               <a:t>© 2026 KOWO · contact@getkowo.com · getkowo.com</a:t>
             </a:r>
-            <a:endParaRPr lang="en-US" sz="750" dirty="0"/>
+            <a:endParaRPr lang="en-US" sz="750" dirty="0">
+              <a:latin typeface="Garamond"/>
+            </a:endParaRPr>
           </a:p>
         </p:txBody>
       </p:sp>
@@ -8935,6 +9183,7 @@
         <a:solidFill>
           <a:srgbClr val="07150F"/>
         </a:solidFill>
+        <a:effectLst/>
       </p:bgPr>
     </p:bg>
     <p:spTree>
@@ -8984,7 +9233,7 @@
         </p:nvSpPr>
         <p:spPr>
           <a:xfrm>
-            <a:off x="685800" y="0"/>
+            <a:off x="685800" y="123371"/>
             <a:ext cx="0" cy="6858000"/>
           </a:xfrm>
           <a:prstGeom prst="line">
@@ -9009,7 +9258,7 @@
         </p:nvSpPr>
         <p:spPr>
           <a:xfrm>
-            <a:off x="1371600" y="0"/>
+            <a:off x="1371600" y="123371"/>
             <a:ext cx="0" cy="6858000"/>
           </a:xfrm>
           <a:prstGeom prst="line">
@@ -9034,7 +9283,7 @@
         </p:nvSpPr>
         <p:spPr>
           <a:xfrm>
-            <a:off x="2057400" y="0"/>
+            <a:off x="2057400" y="123371"/>
             <a:ext cx="0" cy="6858000"/>
           </a:xfrm>
           <a:prstGeom prst="line">
@@ -9059,7 +9308,7 @@
         </p:nvSpPr>
         <p:spPr>
           <a:xfrm>
-            <a:off x="2743200" y="0"/>
+            <a:off x="2743200" y="123371"/>
             <a:ext cx="0" cy="6858000"/>
           </a:xfrm>
           <a:prstGeom prst="line">
@@ -9084,7 +9333,7 @@
         </p:nvSpPr>
         <p:spPr>
           <a:xfrm>
-            <a:off x="3429000" y="0"/>
+            <a:off x="3429000" y="123371"/>
             <a:ext cx="0" cy="6858000"/>
           </a:xfrm>
           <a:prstGeom prst="line">
@@ -9109,7 +9358,7 @@
         </p:nvSpPr>
         <p:spPr>
           <a:xfrm>
-            <a:off x="4114800" y="0"/>
+            <a:off x="4114800" y="123371"/>
             <a:ext cx="0" cy="6858000"/>
           </a:xfrm>
           <a:prstGeom prst="line">
@@ -9134,7 +9383,7 @@
         </p:nvSpPr>
         <p:spPr>
           <a:xfrm>
-            <a:off x="4800600" y="0"/>
+            <a:off x="4800600" y="123371"/>
             <a:ext cx="0" cy="6858000"/>
           </a:xfrm>
           <a:prstGeom prst="line">
@@ -9159,7 +9408,7 @@
         </p:nvSpPr>
         <p:spPr>
           <a:xfrm>
-            <a:off x="5486400" y="0"/>
+            <a:off x="5486400" y="123371"/>
             <a:ext cx="0" cy="6858000"/>
           </a:xfrm>
           <a:prstGeom prst="line">
@@ -9184,7 +9433,7 @@
         </p:nvSpPr>
         <p:spPr>
           <a:xfrm>
-            <a:off x="6172200" y="0"/>
+            <a:off x="6172200" y="123371"/>
             <a:ext cx="0" cy="6858000"/>
           </a:xfrm>
           <a:prstGeom prst="line">
@@ -9209,7 +9458,7 @@
         </p:nvSpPr>
         <p:spPr>
           <a:xfrm>
-            <a:off x="6858000" y="0"/>
+            <a:off x="6858000" y="123371"/>
             <a:ext cx="0" cy="6858000"/>
           </a:xfrm>
           <a:prstGeom prst="line">
@@ -9234,7 +9483,7 @@
         </p:nvSpPr>
         <p:spPr>
           <a:xfrm>
-            <a:off x="7543800" y="0"/>
+            <a:off x="7543800" y="123371"/>
             <a:ext cx="0" cy="6858000"/>
           </a:xfrm>
           <a:prstGeom prst="line">
@@ -9259,7 +9508,7 @@
         </p:nvSpPr>
         <p:spPr>
           <a:xfrm>
-            <a:off x="8229600" y="0"/>
+            <a:off x="8229600" y="123371"/>
             <a:ext cx="0" cy="6858000"/>
           </a:xfrm>
           <a:prstGeom prst="line">
@@ -9284,7 +9533,7 @@
         </p:nvSpPr>
         <p:spPr>
           <a:xfrm>
-            <a:off x="8915400" y="0"/>
+            <a:off x="8915400" y="123371"/>
             <a:ext cx="0" cy="6858000"/>
           </a:xfrm>
           <a:prstGeom prst="line">
@@ -9309,7 +9558,7 @@
         </p:nvSpPr>
         <p:spPr>
           <a:xfrm>
-            <a:off x="9601200" y="0"/>
+            <a:off x="9601200" y="123371"/>
             <a:ext cx="0" cy="6858000"/>
           </a:xfrm>
           <a:prstGeom prst="line">
@@ -9334,7 +9583,7 @@
         </p:nvSpPr>
         <p:spPr>
           <a:xfrm>
-            <a:off x="10287000" y="0"/>
+            <a:off x="10287000" y="123371"/>
             <a:ext cx="0" cy="6858000"/>
           </a:xfrm>
           <a:prstGeom prst="line">
@@ -9559,7 +9808,7 @@
         </p:nvSpPr>
         <p:spPr>
           <a:xfrm>
-            <a:off x="0" y="4114800"/>
+            <a:off x="0" y="4238171"/>
             <a:ext cx="12191695" cy="0"/>
           </a:xfrm>
           <a:prstGeom prst="line">
@@ -9584,7 +9833,7 @@
         </p:nvSpPr>
         <p:spPr>
           <a:xfrm>
-            <a:off x="0" y="4800600"/>
+            <a:off x="0" y="4923971"/>
             <a:ext cx="12191695" cy="0"/>
           </a:xfrm>
           <a:prstGeom prst="line">
@@ -9709,14 +9958,14 @@
       </p:sp>
       <p:pic>
         <p:nvPicPr>
-          <p:cNvPr id="32" name="Image 0" descr="/mnt/data/kowo-institutional-partnership-v2/assets/kowo-logo.jpg">    </p:cNvPr>
+          <p:cNvPr id="32" name="Image 0" descr="/mnt/data/kowo-institutional-partnership-v2/assets/kowo-logo.jpg"/>
           <p:cNvPicPr>
             <a:picLocks noChangeAspect="1"/>
           </p:cNvPicPr>
           <p:nvPr/>
         </p:nvPicPr>
         <p:blipFill>
-          <a:blip r:embed="rId1"/>
+          <a:blip r:embed="rId3"/>
           <a:stretch>
             <a:fillRect/>
           </a:stretch>
@@ -9739,7 +9988,7 @@
         </p:nvSpPr>
         <p:spPr>
           <a:xfrm>
-            <a:off x="960120" y="356616"/>
+            <a:off x="960120" y="400159"/>
             <a:ext cx="1097280" cy="256032"/>
           </a:xfrm>
           <a:prstGeom prst="rect">
@@ -9752,7 +10001,7 @@
           <a:bodyPr wrap="square" lIns="0" tIns="0" rIns="0" bIns="0" rtlCol="0" anchor="ctr"/>
           <a:lstStyle/>
           <a:p>
-            <a:pPr indent="0" marL="0">
+            <a:pPr marL="0" indent="0">
               <a:buNone/>
             </a:pPr>
             <a:r>
@@ -9760,13 +10009,15 @@
                 <a:solidFill>
                   <a:srgbClr val="123B2B"/>
                 </a:solidFill>
-                <a:latin typeface="Aptos Display" pitchFamily="34" charset="0"/>
+                <a:latin typeface="Garamond"/>
                 <a:ea typeface="Aptos Display" pitchFamily="34" charset="-122"/>
                 <a:cs typeface="Aptos Display" pitchFamily="34" charset="-120"/>
               </a:rPr>
               <a:t>KOWO</a:t>
             </a:r>
-            <a:endParaRPr lang="en-US" sz="1000" dirty="0"/>
+            <a:endParaRPr lang="en-US" sz="1000" dirty="0">
+              <a:latin typeface="Garamond"/>
+            </a:endParaRPr>
           </a:p>
         </p:txBody>
       </p:sp>
@@ -9791,7 +10042,7 @@
           <a:bodyPr wrap="square" lIns="0" tIns="0" rIns="0" bIns="0" rtlCol="0" anchor="ctr"/>
           <a:lstStyle/>
           <a:p>
-            <a:pPr algn="r" indent="0" marL="0">
+            <a:pPr marL="0" indent="0" algn="r">
               <a:buNone/>
             </a:pPr>
             <a:r>
@@ -9799,10 +10050,13 @@
                 <a:solidFill>
                   <a:srgbClr val="123B2B"/>
                 </a:solidFill>
+                <a:latin typeface="Garamond"/>
               </a:rPr>
               <a:t>Institutional Partnership Brief</a:t>
             </a:r>
-            <a:endParaRPr lang="en-US" sz="800" dirty="0"/>
+            <a:endParaRPr lang="en-US" sz="800" dirty="0">
+              <a:latin typeface="Garamond"/>
+            </a:endParaRPr>
           </a:p>
         </p:txBody>
       </p:sp>
@@ -9856,7 +10110,7 @@
           <a:bodyPr wrap="square" lIns="0" tIns="0" rIns="0" bIns="0" rtlCol="0" anchor="ctr"/>
           <a:lstStyle/>
           <a:p>
-            <a:pPr algn="ctr" indent="0" marL="0">
+            <a:pPr marL="0" indent="0" algn="ctr">
               <a:buNone/>
             </a:pPr>
             <a:r>
@@ -9864,10 +10118,13 @@
                 <a:solidFill>
                   <a:srgbClr val="8DFFD3"/>
                 </a:solidFill>
+                <a:latin typeface="Garamond"/>
               </a:rPr>
               <a:t>03 · VISION</a:t>
             </a:r>
-            <a:endParaRPr lang="en-US" sz="850" dirty="0"/>
+            <a:endParaRPr lang="en-US" sz="850" dirty="0">
+              <a:latin typeface="Garamond"/>
+            </a:endParaRPr>
           </a:p>
         </p:txBody>
       </p:sp>
@@ -9879,7 +10136,7 @@
         </p:nvSpPr>
         <p:spPr>
           <a:xfrm>
-            <a:off x="658368" y="1335024"/>
+            <a:off x="658368" y="1581767"/>
             <a:ext cx="5669280" cy="960120"/>
           </a:xfrm>
           <a:prstGeom prst="rect">
@@ -9894,7 +10151,7 @@
           </a:bodyPr>
           <a:lstStyle/>
           <a:p>
-            <a:pPr indent="0" marL="0">
+            <a:pPr marL="0" indent="0">
               <a:buNone/>
             </a:pPr>
             <a:r>
@@ -9902,13 +10159,15 @@
                 <a:solidFill>
                   <a:srgbClr val="FFFFFF"/>
                 </a:solidFill>
-                <a:latin typeface="Aptos Display" pitchFamily="34" charset="0"/>
+                <a:latin typeface="Garamond"/>
                 <a:ea typeface="Aptos Display" pitchFamily="34" charset="-122"/>
                 <a:cs typeface="Aptos Display" pitchFamily="34" charset="-120"/>
               </a:rPr>
               <a:t>Construire l’infrastructure panafricaine de l’épargne communautaire numérique.</a:t>
             </a:r>
-            <a:endParaRPr lang="en-US" sz="3600" dirty="0"/>
+            <a:endParaRPr lang="en-US" sz="3600" dirty="0">
+              <a:latin typeface="Garamond"/>
+            </a:endParaRPr>
           </a:p>
         </p:txBody>
       </p:sp>
@@ -9920,7 +10179,7 @@
         </p:nvSpPr>
         <p:spPr>
           <a:xfrm>
-            <a:off x="685800" y="2450592"/>
+            <a:off x="656772" y="2958592"/>
             <a:ext cx="5303520" cy="621792"/>
           </a:xfrm>
           <a:prstGeom prst="rect">
@@ -9935,7 +10194,7 @@
           </a:bodyPr>
           <a:lstStyle/>
           <a:p>
-            <a:pPr indent="0" marL="0">
+            <a:pPr marL="0" indent="0">
               <a:buNone/>
             </a:pPr>
             <a:r>
@@ -9943,10 +10202,13 @@
                 <a:solidFill>
                   <a:srgbClr val="C7D8CF"/>
                 </a:solidFill>
+                <a:latin typeface="Garamond"/>
               </a:rPr>
               <a:t>Une plateforme pensée pour l’Afrique d’abord, mais naturellement ouverte à la diaspora.</a:t>
             </a:r>
-            <a:endParaRPr lang="en-US" sz="1500" dirty="0"/>
+            <a:endParaRPr lang="en-US" sz="1500" dirty="0">
+              <a:latin typeface="Garamond"/>
+            </a:endParaRPr>
           </a:p>
         </p:txBody>
       </p:sp>
@@ -9958,7 +10220,7 @@
         </p:nvSpPr>
         <p:spPr>
           <a:xfrm>
-            <a:off x="914400" y="3657600"/>
+            <a:off x="914400" y="3780971"/>
             <a:ext cx="2834640" cy="1234440"/>
           </a:xfrm>
           <a:prstGeom prst="roundRect">
@@ -9985,7 +10247,7 @@
         </p:nvSpPr>
         <p:spPr>
           <a:xfrm>
-            <a:off x="1143000" y="3886200"/>
+            <a:off x="1143000" y="4009571"/>
             <a:ext cx="2286000" cy="274320"/>
           </a:xfrm>
           <a:prstGeom prst="rect">
@@ -9998,7 +10260,7 @@
           <a:bodyPr wrap="square" lIns="0" tIns="0" rIns="0" bIns="0" rtlCol="0" anchor="ctr"/>
           <a:lstStyle/>
           <a:p>
-            <a:pPr indent="0" marL="0">
+            <a:pPr marL="0" indent="0">
               <a:buNone/>
             </a:pPr>
             <a:r>
@@ -10006,10 +10268,13 @@
                 <a:solidFill>
                   <a:srgbClr val="FFFFFF"/>
                 </a:solidFill>
+                <a:latin typeface="Garamond"/>
               </a:rPr>
               <a:t>Afrique</a:t>
             </a:r>
-            <a:endParaRPr lang="en-US" sz="1900" dirty="0"/>
+            <a:endParaRPr lang="en-US" sz="1900" dirty="0">
+              <a:latin typeface="Garamond"/>
+            </a:endParaRPr>
           </a:p>
         </p:txBody>
       </p:sp>
@@ -10021,7 +10286,7 @@
         </p:nvSpPr>
         <p:spPr>
           <a:xfrm>
-            <a:off x="1143000" y="4224528"/>
+            <a:off x="1143000" y="4347899"/>
             <a:ext cx="2286000" cy="384048"/>
           </a:xfrm>
           <a:prstGeom prst="rect">
@@ -10036,7 +10301,7 @@
           </a:bodyPr>
           <a:lstStyle/>
           <a:p>
-            <a:pPr indent="0" marL="0">
+            <a:pPr marL="0" indent="0">
               <a:buNone/>
             </a:pPr>
             <a:r>
@@ -10044,10 +10309,13 @@
                 <a:solidFill>
                   <a:srgbClr val="C7D8CF"/>
                 </a:solidFill>
+                <a:latin typeface="Garamond"/>
               </a:rPr>
               <a:t>Marchés locaux, usages communautaires, mobile money</a:t>
             </a:r>
-            <a:endParaRPr lang="en-US" sz="1050" dirty="0"/>
+            <a:endParaRPr lang="en-US" sz="1050" dirty="0">
+              <a:latin typeface="Garamond"/>
+            </a:endParaRPr>
           </a:p>
         </p:txBody>
       </p:sp>
@@ -10059,7 +10327,7 @@
         </p:nvSpPr>
         <p:spPr>
           <a:xfrm>
-            <a:off x="3794760" y="4270248"/>
+            <a:off x="3794760" y="4393619"/>
             <a:ext cx="484632" cy="0"/>
           </a:xfrm>
           <a:prstGeom prst="line">
@@ -10084,7 +10352,7 @@
         </p:nvSpPr>
         <p:spPr>
           <a:xfrm>
-            <a:off x="4389120" y="3657600"/>
+            <a:off x="4389120" y="3780971"/>
             <a:ext cx="2834640" cy="1234440"/>
           </a:xfrm>
           <a:prstGeom prst="roundRect">
@@ -10111,7 +10379,7 @@
         </p:nvSpPr>
         <p:spPr>
           <a:xfrm>
-            <a:off x="4617720" y="3886200"/>
+            <a:off x="4617720" y="4009571"/>
             <a:ext cx="2286000" cy="274320"/>
           </a:xfrm>
           <a:prstGeom prst="rect">
@@ -10124,7 +10392,7 @@
           <a:bodyPr wrap="square" lIns="0" tIns="0" rIns="0" bIns="0" rtlCol="0" anchor="ctr"/>
           <a:lstStyle/>
           <a:p>
-            <a:pPr indent="0" marL="0">
+            <a:pPr marL="0" indent="0">
               <a:buNone/>
             </a:pPr>
             <a:r>
@@ -10132,10 +10400,13 @@
                 <a:solidFill>
                   <a:srgbClr val="07150F"/>
                 </a:solidFill>
+                <a:latin typeface="Garamond"/>
               </a:rPr>
               <a:t>Diaspora</a:t>
             </a:r>
-            <a:endParaRPr lang="en-US" sz="1900" dirty="0"/>
+            <a:endParaRPr lang="en-US" sz="1900" dirty="0">
+              <a:latin typeface="Garamond"/>
+            </a:endParaRPr>
           </a:p>
         </p:txBody>
       </p:sp>
@@ -10147,7 +10418,7 @@
         </p:nvSpPr>
         <p:spPr>
           <a:xfrm>
-            <a:off x="4617720" y="4224528"/>
+            <a:off x="4617720" y="4347899"/>
             <a:ext cx="2286000" cy="384048"/>
           </a:xfrm>
           <a:prstGeom prst="rect">
@@ -10162,7 +10433,7 @@
           </a:bodyPr>
           <a:lstStyle/>
           <a:p>
-            <a:pPr indent="0" marL="0">
+            <a:pPr marL="0" indent="0">
               <a:buNone/>
             </a:pPr>
             <a:r>
@@ -10170,10 +10441,13 @@
                 <a:solidFill>
                   <a:srgbClr val="07150F"/>
                 </a:solidFill>
+                <a:latin typeface="Garamond"/>
               </a:rPr>
               <a:t>Contribution à distance, projets familiaux, confiance</a:t>
             </a:r>
-            <a:endParaRPr lang="en-US" sz="1050" dirty="0"/>
+            <a:endParaRPr lang="en-US" sz="1050" dirty="0">
+              <a:latin typeface="Garamond"/>
+            </a:endParaRPr>
           </a:p>
         </p:txBody>
       </p:sp>
@@ -10185,7 +10459,7 @@
         </p:nvSpPr>
         <p:spPr>
           <a:xfrm>
-            <a:off x="7269480" y="4270248"/>
+            <a:off x="7269480" y="4393619"/>
             <a:ext cx="484632" cy="0"/>
           </a:xfrm>
           <a:prstGeom prst="line">
@@ -10210,7 +10484,7 @@
         </p:nvSpPr>
         <p:spPr>
           <a:xfrm>
-            <a:off x="7863840" y="3657600"/>
+            <a:off x="7863840" y="3780971"/>
             <a:ext cx="2834640" cy="1234440"/>
           </a:xfrm>
           <a:prstGeom prst="roundRect">
@@ -10237,7 +10511,7 @@
         </p:nvSpPr>
         <p:spPr>
           <a:xfrm>
-            <a:off x="8092440" y="3886200"/>
+            <a:off x="8092440" y="4009571"/>
             <a:ext cx="2286000" cy="274320"/>
           </a:xfrm>
           <a:prstGeom prst="rect">
@@ -10250,7 +10524,7 @@
           <a:bodyPr wrap="square" lIns="0" tIns="0" rIns="0" bIns="0" rtlCol="0" anchor="ctr"/>
           <a:lstStyle/>
           <a:p>
-            <a:pPr indent="0" marL="0">
+            <a:pPr marL="0" indent="0">
               <a:buNone/>
             </a:pPr>
             <a:r>
@@ -10258,10 +10532,13 @@
                 <a:solidFill>
                   <a:srgbClr val="FFFFFF"/>
                 </a:solidFill>
+                <a:latin typeface="Garamond"/>
               </a:rPr>
               <a:t>Institutions</a:t>
             </a:r>
-            <a:endParaRPr lang="en-US" sz="1900" dirty="0"/>
+            <a:endParaRPr lang="en-US" sz="1900" dirty="0">
+              <a:latin typeface="Garamond"/>
+            </a:endParaRPr>
           </a:p>
         </p:txBody>
       </p:sp>
@@ -10273,7 +10550,7 @@
         </p:nvSpPr>
         <p:spPr>
           <a:xfrm>
-            <a:off x="8092440" y="4224528"/>
+            <a:off x="8092440" y="4347899"/>
             <a:ext cx="2286000" cy="384048"/>
           </a:xfrm>
           <a:prstGeom prst="rect">
@@ -10288,7 +10565,7 @@
           </a:bodyPr>
           <a:lstStyle/>
           <a:p>
-            <a:pPr indent="0" marL="0">
+            <a:pPr marL="0" indent="0">
               <a:buNone/>
             </a:pPr>
             <a:r>
@@ -10296,10 +10573,13 @@
                 <a:solidFill>
                   <a:srgbClr val="C7D8CF"/>
                 </a:solidFill>
+                <a:latin typeface="Garamond"/>
               </a:rPr>
               <a:t>Microfinances, banques, EME, PSP et SGI agréés</a:t>
             </a:r>
-            <a:endParaRPr lang="en-US" sz="1050" dirty="0"/>
+            <a:endParaRPr lang="en-US" sz="1050" dirty="0">
+              <a:latin typeface="Garamond"/>
+            </a:endParaRPr>
           </a:p>
         </p:txBody>
       </p:sp>
@@ -10324,7 +10604,7 @@
           <a:bodyPr wrap="square" lIns="0" tIns="0" rIns="0" bIns="0" rtlCol="0" anchor="ctr"/>
           <a:lstStyle/>
           <a:p>
-            <a:pPr indent="0" marL="0">
+            <a:pPr marL="0" indent="0">
               <a:buNone/>
             </a:pPr>
             <a:r>
@@ -10332,10 +10612,13 @@
                 <a:solidFill>
                   <a:srgbClr val="9DB7AA"/>
                 </a:solidFill>
+                <a:latin typeface="Garamond"/>
               </a:rPr>
               <a:t>© 2026 KOWO · contact@getkowo.com · getkowo.com</a:t>
             </a:r>
-            <a:endParaRPr lang="en-US" sz="750" dirty="0"/>
+            <a:endParaRPr lang="en-US" sz="750" dirty="0">
+              <a:latin typeface="Garamond"/>
+            </a:endParaRPr>
           </a:p>
         </p:txBody>
       </p:sp>
@@ -10355,6 +10638,7 @@
         <a:solidFill>
           <a:srgbClr val="F6F1E7"/>
         </a:solidFill>
+        <a:effectLst/>
       </p:bgPr>
     </p:bg>
     <p:spTree>
@@ -10404,14 +10688,14 @@
       </p:sp>
       <p:pic>
         <p:nvPicPr>
-          <p:cNvPr id="3" name="Image 0" descr="/mnt/data/kowo-institutional-partnership-v2/assets/kowo-logo.jpg">    </p:cNvPr>
+          <p:cNvPr id="3" name="Image 0" descr="/mnt/data/kowo-institutional-partnership-v2/assets/kowo-logo.jpg"/>
           <p:cNvPicPr>
             <a:picLocks noChangeAspect="1"/>
           </p:cNvPicPr>
           <p:nvPr/>
         </p:nvPicPr>
         <p:blipFill>
-          <a:blip r:embed="rId1"/>
+          <a:blip r:embed="rId3"/>
           <a:stretch>
             <a:fillRect/>
           </a:stretch>
@@ -10434,7 +10718,7 @@
         </p:nvSpPr>
         <p:spPr>
           <a:xfrm>
-            <a:off x="960120" y="356616"/>
+            <a:off x="960120" y="400159"/>
             <a:ext cx="1097280" cy="256032"/>
           </a:xfrm>
           <a:prstGeom prst="rect">
@@ -10447,7 +10731,7 @@
           <a:bodyPr wrap="square" lIns="0" tIns="0" rIns="0" bIns="0" rtlCol="0" anchor="ctr"/>
           <a:lstStyle/>
           <a:p>
-            <a:pPr indent="0" marL="0">
+            <a:pPr marL="0" indent="0">
               <a:buNone/>
             </a:pPr>
             <a:r>
@@ -10455,13 +10739,15 @@
                 <a:solidFill>
                   <a:srgbClr val="123B2B"/>
                 </a:solidFill>
-                <a:latin typeface="Aptos Display" pitchFamily="34" charset="0"/>
+                <a:latin typeface="Garamond"/>
                 <a:ea typeface="Aptos Display" pitchFamily="34" charset="-122"/>
                 <a:cs typeface="Aptos Display" pitchFamily="34" charset="-120"/>
               </a:rPr>
               <a:t>KOWO</a:t>
             </a:r>
-            <a:endParaRPr lang="en-US" sz="1000" dirty="0"/>
+            <a:endParaRPr lang="en-US" sz="1000" dirty="0">
+              <a:latin typeface="Garamond"/>
+            </a:endParaRPr>
           </a:p>
         </p:txBody>
       </p:sp>
@@ -10486,7 +10772,7 @@
           <a:bodyPr wrap="square" lIns="0" tIns="0" rIns="0" bIns="0" rtlCol="0" anchor="ctr"/>
           <a:lstStyle/>
           <a:p>
-            <a:pPr algn="r" indent="0" marL="0">
+            <a:pPr marL="0" indent="0" algn="r">
               <a:buNone/>
             </a:pPr>
             <a:r>
@@ -10494,10 +10780,13 @@
                 <a:solidFill>
                   <a:srgbClr val="6B786E"/>
                 </a:solidFill>
+                <a:latin typeface="Garamond"/>
               </a:rPr>
               <a:t>Institutional Partnership Brief</a:t>
             </a:r>
-            <a:endParaRPr lang="en-US" sz="800" dirty="0"/>
+            <a:endParaRPr lang="en-US" sz="800" dirty="0">
+              <a:latin typeface="Garamond"/>
+            </a:endParaRPr>
           </a:p>
         </p:txBody>
       </p:sp>
@@ -10551,7 +10840,7 @@
           <a:bodyPr wrap="square" lIns="0" tIns="0" rIns="0" bIns="0" rtlCol="0" anchor="ctr"/>
           <a:lstStyle/>
           <a:p>
-            <a:pPr algn="ctr" indent="0" marL="0">
+            <a:pPr marL="0" indent="0" algn="ctr">
               <a:buNone/>
             </a:pPr>
             <a:r>
@@ -10559,10 +10848,13 @@
                 <a:solidFill>
                   <a:srgbClr val="123B2B"/>
                 </a:solidFill>
+                <a:latin typeface="Garamond"/>
               </a:rPr>
               <a:t>04 · MODÈLE CIBLE</a:t>
             </a:r>
-            <a:endParaRPr lang="en-US" sz="850" dirty="0"/>
+            <a:endParaRPr lang="en-US" sz="850" dirty="0">
+              <a:latin typeface="Garamond"/>
+            </a:endParaRPr>
           </a:p>
         </p:txBody>
       </p:sp>
@@ -10574,8 +10866,70 @@
         </p:nvSpPr>
         <p:spPr>
           <a:xfrm>
-            <a:off x="658368" y="1335024"/>
-            <a:ext cx="5669280" cy="960120"/>
+            <a:off x="680139" y="1335024"/>
+            <a:ext cx="6605451" cy="960120"/>
+          </a:xfrm>
+          <a:prstGeom prst="rect">
+            <a:avLst/>
+          </a:prstGeom>
+          <a:noFill/>
+          <a:ln/>
+        </p:spPr>
+        <p:txBody>
+          <a:bodyPr wrap="square" lIns="0" tIns="0" rIns="0" bIns="0" rtlCol="0" anchor="ctr">
+            <a:normAutofit fontScale="92500" lnSpcReduction="10000"/>
+          </a:bodyPr>
+          <a:lstStyle/>
+          <a:p>
+            <a:pPr marL="0" indent="0">
+              <a:buNone/>
+            </a:pPr>
+            <a:r>
+              <a:rPr lang="en-US" sz="3600" b="1" dirty="0">
+                <a:solidFill>
+                  <a:srgbClr val="0E1712"/>
+                </a:solidFill>
+                <a:latin typeface="Garamond"/>
+                <a:ea typeface="Aptos Display" pitchFamily="34" charset="-122"/>
+                <a:cs typeface="Aptos Display" pitchFamily="34" charset="-120"/>
+              </a:rPr>
+              <a:t>Le partenaire porte les comptes.</a:t>
+            </a:r>
+            <a:endParaRPr lang="en-US" sz="3600" dirty="0">
+              <a:latin typeface="Garamond"/>
+            </a:endParaRPr>
+          </a:p>
+          <a:p>
+            <a:pPr marL="0" indent="0">
+              <a:buNone/>
+            </a:pPr>
+            <a:r>
+              <a:rPr lang="en-US" sz="3600" b="1" dirty="0">
+                <a:solidFill>
+                  <a:srgbClr val="0E1712"/>
+                </a:solidFill>
+                <a:latin typeface="Garamond"/>
+                <a:ea typeface="Aptos Display" pitchFamily="34" charset="-122"/>
+                <a:cs typeface="Aptos Display" pitchFamily="34" charset="-120"/>
+              </a:rPr>
+              <a:t>KOWO porte l’expérience.</a:t>
+            </a:r>
+            <a:endParaRPr lang="en-US" sz="3600" dirty="0">
+              <a:latin typeface="Garamond"/>
+            </a:endParaRPr>
+          </a:p>
+        </p:txBody>
+      </p:sp>
+      <p:sp>
+        <p:nvSpPr>
+          <p:cNvPr id="9" name="Text 6"/>
+          <p:cNvSpPr/>
+          <p:nvPr/>
+        </p:nvSpPr>
+        <p:spPr>
+          <a:xfrm>
+            <a:off x="685800" y="2450592"/>
+            <a:ext cx="5303520" cy="621792"/>
           </a:xfrm>
           <a:prstGeom prst="rect">
             <a:avLst/>
@@ -10589,65 +10943,7 @@
           </a:bodyPr>
           <a:lstStyle/>
           <a:p>
-            <a:pPr indent="0" marL="0">
-              <a:buNone/>
-            </a:pPr>
-            <a:r>
-              <a:rPr lang="en-US" sz="3600" b="1" dirty="0">
-                <a:solidFill>
-                  <a:srgbClr val="0E1712"/>
-                </a:solidFill>
-                <a:latin typeface="Aptos Display" pitchFamily="34" charset="0"/>
-                <a:ea typeface="Aptos Display" pitchFamily="34" charset="-122"/>
-                <a:cs typeface="Aptos Display" pitchFamily="34" charset="-120"/>
-              </a:rPr>
-              <a:t>Le partenaire porte les comptes.</a:t>
-            </a:r>
-            <a:endParaRPr lang="en-US" sz="3600" dirty="0"/>
-          </a:p>
-          <a:p>
-            <a:pPr indent="0" marL="0">
-              <a:buNone/>
-            </a:pPr>
-            <a:r>
-              <a:rPr lang="en-US" sz="3600" b="1" dirty="0">
-                <a:solidFill>
-                  <a:srgbClr val="0E1712"/>
-                </a:solidFill>
-                <a:latin typeface="Aptos Display" pitchFamily="34" charset="0"/>
-                <a:ea typeface="Aptos Display" pitchFamily="34" charset="-122"/>
-                <a:cs typeface="Aptos Display" pitchFamily="34" charset="-120"/>
-              </a:rPr>
-              <a:t>KOWO porte l’expérience.</a:t>
-            </a:r>
-            <a:endParaRPr lang="en-US" sz="3600" dirty="0"/>
-          </a:p>
-        </p:txBody>
-      </p:sp>
-      <p:sp>
-        <p:nvSpPr>
-          <p:cNvPr id="9" name="Text 6"/>
-          <p:cNvSpPr/>
-          <p:nvPr/>
-        </p:nvSpPr>
-        <p:spPr>
-          <a:xfrm>
-            <a:off x="685800" y="2450592"/>
-            <a:ext cx="5303520" cy="621792"/>
-          </a:xfrm>
-          <a:prstGeom prst="rect">
-            <a:avLst/>
-          </a:prstGeom>
-          <a:noFill/>
-          <a:ln/>
-        </p:spPr>
-        <p:txBody>
-          <a:bodyPr wrap="square" lIns="0" tIns="0" rIns="0" bIns="0" rtlCol="0" anchor="ctr">
-            <a:normAutofit/>
-          </a:bodyPr>
-          <a:lstStyle/>
-          <a:p>
-            <a:pPr indent="0" marL="0">
+            <a:pPr marL="0" indent="0">
               <a:buNone/>
             </a:pPr>
             <a:r>
@@ -10655,10 +10951,13 @@
                 <a:solidFill>
                   <a:srgbClr val="6B786E"/>
                 </a:solidFill>
+                <a:latin typeface="Garamond"/>
               </a:rPr>
               <a:t>La séparation des rôles est au cœur du modèle recherché.</a:t>
             </a:r>
-            <a:endParaRPr lang="en-US" sz="1500" dirty="0"/>
+            <a:endParaRPr lang="en-US" sz="1500" dirty="0">
+              <a:latin typeface="Garamond"/>
+            </a:endParaRPr>
           </a:p>
         </p:txBody>
       </p:sp>
@@ -10670,7 +10969,7 @@
         </p:nvSpPr>
         <p:spPr>
           <a:xfrm>
-            <a:off x="822960" y="2834640"/>
+            <a:off x="822960" y="3197497"/>
             <a:ext cx="1828800" cy="1078992"/>
           </a:xfrm>
           <a:prstGeom prst="roundRect">
@@ -10697,7 +10996,7 @@
         </p:nvSpPr>
         <p:spPr>
           <a:xfrm>
-            <a:off x="960120" y="3035808"/>
+            <a:off x="960120" y="3398665"/>
             <a:ext cx="1554480" cy="201168"/>
           </a:xfrm>
           <a:prstGeom prst="rect">
@@ -10710,7 +11009,7 @@
           <a:bodyPr wrap="square" lIns="0" tIns="0" rIns="0" bIns="0" rtlCol="0" anchor="ctr"/>
           <a:lstStyle/>
           <a:p>
-            <a:pPr indent="0" marL="0">
+            <a:pPr marL="0" indent="0">
               <a:buNone/>
             </a:pPr>
             <a:r>
@@ -10718,10 +11017,13 @@
                 <a:solidFill>
                   <a:srgbClr val="0E1712"/>
                 </a:solidFill>
+                <a:latin typeface="Garamond"/>
               </a:rPr>
               <a:t>Utilisateurs</a:t>
             </a:r>
-            <a:endParaRPr lang="en-US" sz="1400" dirty="0"/>
+            <a:endParaRPr lang="en-US" sz="1400" dirty="0">
+              <a:latin typeface="Garamond"/>
+            </a:endParaRPr>
           </a:p>
         </p:txBody>
       </p:sp>
@@ -10733,7 +11035,7 @@
         </p:nvSpPr>
         <p:spPr>
           <a:xfrm>
-            <a:off x="960120" y="3337560"/>
+            <a:off x="960120" y="3700417"/>
             <a:ext cx="1554480" cy="320040"/>
           </a:xfrm>
           <a:prstGeom prst="rect">
@@ -10748,7 +11050,7 @@
           </a:bodyPr>
           <a:lstStyle/>
           <a:p>
-            <a:pPr indent="0" marL="0">
+            <a:pPr marL="0" indent="0">
               <a:buNone/>
             </a:pPr>
             <a:r>
@@ -10756,10 +11058,13 @@
                 <a:solidFill>
                   <a:srgbClr val="6B786E"/>
                 </a:solidFill>
+                <a:latin typeface="Garamond"/>
               </a:rPr>
               <a:t>Familles, associations, groupes, diaspora</a:t>
             </a:r>
-            <a:endParaRPr lang="en-US" sz="870" dirty="0"/>
+            <a:endParaRPr lang="en-US" sz="870" dirty="0">
+              <a:latin typeface="Garamond"/>
+            </a:endParaRPr>
           </a:p>
         </p:txBody>
       </p:sp>
@@ -10771,7 +11076,7 @@
         </p:nvSpPr>
         <p:spPr>
           <a:xfrm>
-            <a:off x="3200400" y="2834640"/>
+            <a:off x="3200400" y="3197497"/>
             <a:ext cx="1828800" cy="1078992"/>
           </a:xfrm>
           <a:prstGeom prst="roundRect">
@@ -10798,7 +11103,7 @@
         </p:nvSpPr>
         <p:spPr>
           <a:xfrm>
-            <a:off x="3337560" y="3035808"/>
+            <a:off x="3337560" y="3398665"/>
             <a:ext cx="1554480" cy="201168"/>
           </a:xfrm>
           <a:prstGeom prst="rect">
@@ -10811,7 +11116,7 @@
           <a:bodyPr wrap="square" lIns="0" tIns="0" rIns="0" bIns="0" rtlCol="0" anchor="ctr"/>
           <a:lstStyle/>
           <a:p>
-            <a:pPr indent="0" marL="0">
+            <a:pPr marL="0" indent="0">
               <a:buNone/>
             </a:pPr>
             <a:r>
@@ -10819,10 +11124,13 @@
                 <a:solidFill>
                   <a:srgbClr val="0E1712"/>
                 </a:solidFill>
+                <a:latin typeface="Garamond"/>
               </a:rPr>
               <a:t>Wallets / comptes</a:t>
             </a:r>
-            <a:endParaRPr lang="en-US" sz="1400" dirty="0"/>
+            <a:endParaRPr lang="en-US" sz="1400" dirty="0">
+              <a:latin typeface="Garamond"/>
+            </a:endParaRPr>
           </a:p>
         </p:txBody>
       </p:sp>
@@ -10834,7 +11142,7 @@
         </p:nvSpPr>
         <p:spPr>
           <a:xfrm>
-            <a:off x="3337560" y="3337560"/>
+            <a:off x="3337560" y="3700417"/>
             <a:ext cx="1554480" cy="320040"/>
           </a:xfrm>
           <a:prstGeom prst="rect">
@@ -10849,7 +11157,7 @@
           </a:bodyPr>
           <a:lstStyle/>
           <a:p>
-            <a:pPr indent="0" marL="0">
+            <a:pPr marL="0" indent="0">
               <a:buNone/>
             </a:pPr>
             <a:r>
@@ -10857,10 +11165,13 @@
                 <a:solidFill>
                   <a:srgbClr val="6B786E"/>
                 </a:solidFill>
+                <a:latin typeface="Garamond"/>
               </a:rPr>
               <a:t>Ouverts chez l’institution partenaire</a:t>
             </a:r>
-            <a:endParaRPr lang="en-US" sz="870" dirty="0"/>
+            <a:endParaRPr lang="en-US" sz="870" dirty="0">
+              <a:latin typeface="Garamond"/>
+            </a:endParaRPr>
           </a:p>
         </p:txBody>
       </p:sp>
@@ -10872,7 +11183,7 @@
         </p:nvSpPr>
         <p:spPr>
           <a:xfrm>
-            <a:off x="5577840" y="2834640"/>
+            <a:off x="5577840" y="3197497"/>
             <a:ext cx="1828800" cy="1078992"/>
           </a:xfrm>
           <a:prstGeom prst="roundRect">
@@ -10899,7 +11210,7 @@
         </p:nvSpPr>
         <p:spPr>
           <a:xfrm>
-            <a:off x="5715000" y="3035808"/>
+            <a:off x="5715000" y="3398665"/>
             <a:ext cx="1554480" cy="201168"/>
           </a:xfrm>
           <a:prstGeom prst="rect">
@@ -10912,7 +11223,7 @@
           <a:bodyPr wrap="square" lIns="0" tIns="0" rIns="0" bIns="0" rtlCol="0" anchor="ctr"/>
           <a:lstStyle/>
           <a:p>
-            <a:pPr indent="0" marL="0">
+            <a:pPr marL="0" indent="0">
               <a:buNone/>
             </a:pPr>
             <a:r>
@@ -10920,10 +11231,13 @@
                 <a:solidFill>
                   <a:srgbClr val="FFFFFF"/>
                 </a:solidFill>
+                <a:latin typeface="Garamond"/>
               </a:rPr>
               <a:t>Institution partenaire</a:t>
             </a:r>
-            <a:endParaRPr lang="en-US" sz="1400" dirty="0"/>
+            <a:endParaRPr lang="en-US" sz="1400" dirty="0">
+              <a:latin typeface="Garamond"/>
+            </a:endParaRPr>
           </a:p>
         </p:txBody>
       </p:sp>
@@ -10935,7 +11249,7 @@
         </p:nvSpPr>
         <p:spPr>
           <a:xfrm>
-            <a:off x="5715000" y="3337560"/>
+            <a:off x="5715000" y="3700417"/>
             <a:ext cx="1554480" cy="320040"/>
           </a:xfrm>
           <a:prstGeom prst="rect">
@@ -10950,7 +11264,7 @@
           </a:bodyPr>
           <a:lstStyle/>
           <a:p>
-            <a:pPr indent="0" marL="0">
+            <a:pPr marL="0" indent="0">
               <a:buNone/>
             </a:pPr>
             <a:r>
@@ -10958,10 +11272,13 @@
                 <a:solidFill>
                   <a:srgbClr val="C7D8CF"/>
                 </a:solidFill>
+                <a:latin typeface="Garamond"/>
               </a:rPr>
               <a:t>Conservation des fonds &amp; conformité</a:t>
             </a:r>
-            <a:endParaRPr lang="en-US" sz="870" dirty="0"/>
+            <a:endParaRPr lang="en-US" sz="870" dirty="0">
+              <a:latin typeface="Garamond"/>
+            </a:endParaRPr>
           </a:p>
         </p:txBody>
       </p:sp>
@@ -10973,7 +11290,7 @@
         </p:nvSpPr>
         <p:spPr>
           <a:xfrm>
-            <a:off x="7955280" y="2834640"/>
+            <a:off x="7955280" y="3197497"/>
             <a:ext cx="1828800" cy="1078992"/>
           </a:xfrm>
           <a:prstGeom prst="roundRect">
@@ -11000,7 +11317,7 @@
         </p:nvSpPr>
         <p:spPr>
           <a:xfrm>
-            <a:off x="8092440" y="3035808"/>
+            <a:off x="8092440" y="3398665"/>
             <a:ext cx="1554480" cy="201168"/>
           </a:xfrm>
           <a:prstGeom prst="rect">
@@ -11013,7 +11330,7 @@
           <a:bodyPr wrap="square" lIns="0" tIns="0" rIns="0" bIns="0" rtlCol="0" anchor="ctr"/>
           <a:lstStyle/>
           <a:p>
-            <a:pPr indent="0" marL="0">
+            <a:pPr marL="0" indent="0">
               <a:buNone/>
             </a:pPr>
             <a:r>
@@ -11021,10 +11338,13 @@
                 <a:solidFill>
                   <a:srgbClr val="0E1712"/>
                 </a:solidFill>
+                <a:latin typeface="Garamond"/>
               </a:rPr>
               <a:t>KOWO</a:t>
             </a:r>
-            <a:endParaRPr lang="en-US" sz="1400" dirty="0"/>
+            <a:endParaRPr lang="en-US" sz="1400" dirty="0">
+              <a:latin typeface="Garamond"/>
+            </a:endParaRPr>
           </a:p>
         </p:txBody>
       </p:sp>
@@ -11036,7 +11356,7 @@
         </p:nvSpPr>
         <p:spPr>
           <a:xfrm>
-            <a:off x="8092440" y="3337560"/>
+            <a:off x="8092440" y="3700417"/>
             <a:ext cx="1554480" cy="320040"/>
           </a:xfrm>
           <a:prstGeom prst="rect">
@@ -11051,7 +11371,7 @@
           </a:bodyPr>
           <a:lstStyle/>
           <a:p>
-            <a:pPr indent="0" marL="0">
+            <a:pPr marL="0" indent="0">
               <a:buNone/>
             </a:pPr>
             <a:r>
@@ -11059,10 +11379,13 @@
                 <a:solidFill>
                   <a:srgbClr val="6B786E"/>
                 </a:solidFill>
+                <a:latin typeface="Garamond"/>
               </a:rPr>
               <a:t>App, UX, règles, notifications, analytics</a:t>
             </a:r>
-            <a:endParaRPr lang="en-US" sz="870" dirty="0"/>
+            <a:endParaRPr lang="en-US" sz="870" dirty="0">
+              <a:latin typeface="Garamond"/>
+            </a:endParaRPr>
           </a:p>
         </p:txBody>
       </p:sp>
@@ -11074,7 +11397,7 @@
         </p:nvSpPr>
         <p:spPr>
           <a:xfrm>
-            <a:off x="10058400" y="2834640"/>
+            <a:off x="10058400" y="3197497"/>
             <a:ext cx="1828800" cy="1078992"/>
           </a:xfrm>
           <a:prstGeom prst="roundRect">
@@ -11101,7 +11424,7 @@
         </p:nvSpPr>
         <p:spPr>
           <a:xfrm>
-            <a:off x="10195560" y="3035808"/>
+            <a:off x="10195560" y="3398665"/>
             <a:ext cx="1554480" cy="201168"/>
           </a:xfrm>
           <a:prstGeom prst="rect">
@@ -11114,7 +11437,7 @@
           <a:bodyPr wrap="square" lIns="0" tIns="0" rIns="0" bIns="0" rtlCol="0" anchor="ctr"/>
           <a:lstStyle/>
           <a:p>
-            <a:pPr indent="0" marL="0">
+            <a:pPr marL="0" indent="0">
               <a:buNone/>
             </a:pPr>
             <a:r>
@@ -11122,10 +11445,13 @@
                 <a:solidFill>
                   <a:srgbClr val="0E1712"/>
                 </a:solidFill>
+                <a:latin typeface="Garamond"/>
               </a:rPr>
               <a:t>Commission</a:t>
             </a:r>
-            <a:endParaRPr lang="en-US" sz="1400" dirty="0"/>
+            <a:endParaRPr lang="en-US" sz="1400" dirty="0">
+              <a:latin typeface="Garamond"/>
+            </a:endParaRPr>
           </a:p>
         </p:txBody>
       </p:sp>
@@ -11137,7 +11463,7 @@
         </p:nvSpPr>
         <p:spPr>
           <a:xfrm>
-            <a:off x="10195560" y="3337560"/>
+            <a:off x="10195560" y="3700417"/>
             <a:ext cx="1554480" cy="320040"/>
           </a:xfrm>
           <a:prstGeom prst="rect">
@@ -11152,7 +11478,7 @@
           </a:bodyPr>
           <a:lstStyle/>
           <a:p>
-            <a:pPr indent="0" marL="0">
+            <a:pPr marL="0" indent="0">
               <a:buNone/>
             </a:pPr>
             <a:r>
@@ -11160,10 +11486,13 @@
                 <a:solidFill>
                   <a:srgbClr val="6B786E"/>
                 </a:solidFill>
+                <a:latin typeface="Garamond"/>
               </a:rPr>
               <a:t>Revenu de plateforme uniquement</a:t>
             </a:r>
-            <a:endParaRPr lang="en-US" sz="870" dirty="0"/>
+            <a:endParaRPr lang="en-US" sz="870" dirty="0">
+              <a:latin typeface="Garamond"/>
+            </a:endParaRPr>
           </a:p>
         </p:txBody>
       </p:sp>
@@ -11175,7 +11504,7 @@
         </p:nvSpPr>
         <p:spPr>
           <a:xfrm>
-            <a:off x="2688336" y="3374136"/>
+            <a:off x="2688336" y="3736993"/>
             <a:ext cx="402336" cy="0"/>
           </a:xfrm>
           <a:prstGeom prst="line">
@@ -11200,7 +11529,7 @@
         </p:nvSpPr>
         <p:spPr>
           <a:xfrm>
-            <a:off x="5065776" y="3374136"/>
+            <a:off x="5065776" y="3736993"/>
             <a:ext cx="402336" cy="0"/>
           </a:xfrm>
           <a:prstGeom prst="line">
@@ -11225,7 +11554,7 @@
         </p:nvSpPr>
         <p:spPr>
           <a:xfrm>
-            <a:off x="7443216" y="3374136"/>
+            <a:off x="7443216" y="3736993"/>
             <a:ext cx="402336" cy="0"/>
           </a:xfrm>
           <a:prstGeom prst="line">
@@ -11250,7 +11579,7 @@
         </p:nvSpPr>
         <p:spPr>
           <a:xfrm>
-            <a:off x="9820656" y="3374136"/>
+            <a:off x="9820656" y="3736993"/>
             <a:ext cx="128016" cy="0"/>
           </a:xfrm>
           <a:prstGeom prst="line">
@@ -11315,7 +11644,7 @@
           <a:bodyPr wrap="square" lIns="0" tIns="0" rIns="0" bIns="0" rtlCol="0" anchor="ctr"/>
           <a:lstStyle/>
           <a:p>
-            <a:pPr algn="ctr" indent="0" marL="0">
+            <a:pPr marL="0" indent="0" algn="ctr">
               <a:buNone/>
             </a:pPr>
             <a:r>
@@ -11323,10 +11652,13 @@
                 <a:solidFill>
                   <a:srgbClr val="07150F"/>
                 </a:solidFill>
+                <a:latin typeface="Garamond"/>
               </a:rPr>
               <a:t>Principe clé : les fonds des utilisateurs ne sont pas mélangés aux revenus de KOWO.</a:t>
             </a:r>
-            <a:endParaRPr lang="en-US" sz="1300" dirty="0"/>
+            <a:endParaRPr lang="en-US" sz="1300" dirty="0">
+              <a:latin typeface="Garamond"/>
+            </a:endParaRPr>
           </a:p>
         </p:txBody>
       </p:sp>
@@ -11351,7 +11683,7 @@
           <a:bodyPr wrap="square" lIns="0" tIns="0" rIns="0" bIns="0" rtlCol="0" anchor="ctr"/>
           <a:lstStyle/>
           <a:p>
-            <a:pPr indent="0" marL="0">
+            <a:pPr marL="0" indent="0">
               <a:buNone/>
             </a:pPr>
             <a:r>
@@ -11359,10 +11691,13 @@
                 <a:solidFill>
                   <a:srgbClr val="6B786E"/>
                 </a:solidFill>
+                <a:latin typeface="Garamond"/>
               </a:rPr>
               <a:t>© 2026 KOWO · contact@getkowo.com · getkowo.com</a:t>
             </a:r>
-            <a:endParaRPr lang="en-US" sz="750" dirty="0"/>
+            <a:endParaRPr lang="en-US" sz="750" dirty="0">
+              <a:latin typeface="Garamond"/>
+            </a:endParaRPr>
           </a:p>
         </p:txBody>
       </p:sp>
@@ -11382,6 +11717,7 @@
         <a:solidFill>
           <a:srgbClr val="F6F1E7"/>
         </a:solidFill>
+        <a:effectLst/>
       </p:bgPr>
     </p:bg>
     <p:spTree>
@@ -11431,14 +11767,14 @@
       </p:sp>
       <p:pic>
         <p:nvPicPr>
-          <p:cNvPr id="3" name="Image 0" descr="/mnt/data/kowo-institutional-partnership-v2/assets/kowo-logo.jpg">    </p:cNvPr>
+          <p:cNvPr id="3" name="Image 0" descr="/mnt/data/kowo-institutional-partnership-v2/assets/kowo-logo.jpg"/>
           <p:cNvPicPr>
             <a:picLocks noChangeAspect="1"/>
           </p:cNvPicPr>
           <p:nvPr/>
         </p:nvPicPr>
         <p:blipFill>
-          <a:blip r:embed="rId1"/>
+          <a:blip r:embed="rId3"/>
           <a:stretch>
             <a:fillRect/>
           </a:stretch>
@@ -11461,7 +11797,7 @@
         </p:nvSpPr>
         <p:spPr>
           <a:xfrm>
-            <a:off x="960120" y="356616"/>
+            <a:off x="960120" y="414673"/>
             <a:ext cx="1097280" cy="256032"/>
           </a:xfrm>
           <a:prstGeom prst="rect">
@@ -11474,7 +11810,7 @@
           <a:bodyPr wrap="square" lIns="0" tIns="0" rIns="0" bIns="0" rtlCol="0" anchor="ctr"/>
           <a:lstStyle/>
           <a:p>
-            <a:pPr indent="0" marL="0">
+            <a:pPr marL="0" indent="0">
               <a:buNone/>
             </a:pPr>
             <a:r>
@@ -11482,13 +11818,15 @@
                 <a:solidFill>
                   <a:srgbClr val="123B2B"/>
                 </a:solidFill>
-                <a:latin typeface="Aptos Display" pitchFamily="34" charset="0"/>
+                <a:latin typeface="Garamond"/>
                 <a:ea typeface="Aptos Display" pitchFamily="34" charset="-122"/>
                 <a:cs typeface="Aptos Display" pitchFamily="34" charset="-120"/>
               </a:rPr>
               <a:t>KOWO</a:t>
             </a:r>
-            <a:endParaRPr lang="en-US" sz="1000" dirty="0"/>
+            <a:endParaRPr lang="en-US" sz="1000" dirty="0">
+              <a:latin typeface="Garamond"/>
+            </a:endParaRPr>
           </a:p>
         </p:txBody>
       </p:sp>
@@ -11513,7 +11851,7 @@
           <a:bodyPr wrap="square" lIns="0" tIns="0" rIns="0" bIns="0" rtlCol="0" anchor="ctr"/>
           <a:lstStyle/>
           <a:p>
-            <a:pPr algn="r" indent="0" marL="0">
+            <a:pPr marL="0" indent="0" algn="r">
               <a:buNone/>
             </a:pPr>
             <a:r>
@@ -11521,10 +11859,13 @@
                 <a:solidFill>
                   <a:srgbClr val="6B786E"/>
                 </a:solidFill>
+                <a:latin typeface="Garamond"/>
               </a:rPr>
               <a:t>Institutional Partnership Brief</a:t>
             </a:r>
-            <a:endParaRPr lang="en-US" sz="800" dirty="0"/>
+            <a:endParaRPr lang="en-US" sz="800" dirty="0">
+              <a:latin typeface="Garamond"/>
+            </a:endParaRPr>
           </a:p>
         </p:txBody>
       </p:sp>
@@ -11578,7 +11919,7 @@
           <a:bodyPr wrap="square" lIns="0" tIns="0" rIns="0" bIns="0" rtlCol="0" anchor="ctr"/>
           <a:lstStyle/>
           <a:p>
-            <a:pPr algn="ctr" indent="0" marL="0">
+            <a:pPr marL="0" indent="0" algn="ctr">
               <a:buNone/>
             </a:pPr>
             <a:r>
@@ -11586,10 +11927,13 @@
                 <a:solidFill>
                   <a:srgbClr val="123B2B"/>
                 </a:solidFill>
+                <a:latin typeface="Garamond"/>
               </a:rPr>
               <a:t>05 · RÉPARTITION DES RÔLES</a:t>
             </a:r>
-            <a:endParaRPr lang="en-US" sz="850" dirty="0"/>
+            <a:endParaRPr lang="en-US" sz="850" dirty="0">
+              <a:latin typeface="Garamond"/>
+            </a:endParaRPr>
           </a:p>
         </p:txBody>
       </p:sp>
@@ -11601,8 +11945,51 @@
         </p:nvSpPr>
         <p:spPr>
           <a:xfrm>
-            <a:off x="658368" y="1335024"/>
-            <a:ext cx="5669280" cy="960120"/>
+            <a:off x="680139" y="1335024"/>
+            <a:ext cx="6307909" cy="960120"/>
+          </a:xfrm>
+          <a:prstGeom prst="rect">
+            <a:avLst/>
+          </a:prstGeom>
+          <a:noFill/>
+          <a:ln/>
+        </p:spPr>
+        <p:txBody>
+          <a:bodyPr wrap="square" lIns="0" tIns="0" rIns="0" bIns="0" rtlCol="0" anchor="ctr">
+            <a:normAutofit fontScale="70000" lnSpcReduction="20000"/>
+          </a:bodyPr>
+          <a:lstStyle/>
+          <a:p>
+            <a:pPr marL="0" indent="0">
+              <a:buNone/>
+            </a:pPr>
+            <a:r>
+              <a:rPr lang="en-US" sz="3600" b="1" dirty="0">
+                <a:solidFill>
+                  <a:srgbClr val="0E1712"/>
+                </a:solidFill>
+                <a:latin typeface="Garamond"/>
+                <a:ea typeface="Aptos Display" pitchFamily="34" charset="-122"/>
+                <a:cs typeface="Aptos Display" pitchFamily="34" charset="-120"/>
+              </a:rPr>
+              <a:t>Une collaboration claire, lisible et compatible avec les attentes réglementaires.</a:t>
+            </a:r>
+            <a:endParaRPr lang="en-US" sz="3600" dirty="0">
+              <a:latin typeface="Garamond"/>
+            </a:endParaRPr>
+          </a:p>
+        </p:txBody>
+      </p:sp>
+      <p:sp>
+        <p:nvSpPr>
+          <p:cNvPr id="9" name="Text 6"/>
+          <p:cNvSpPr/>
+          <p:nvPr/>
+        </p:nvSpPr>
+        <p:spPr>
+          <a:xfrm>
+            <a:off x="685800" y="2624763"/>
+            <a:ext cx="5303520" cy="621792"/>
           </a:xfrm>
           <a:prstGeom prst="rect">
             <a:avLst/>
@@ -11616,48 +12003,7 @@
           </a:bodyPr>
           <a:lstStyle/>
           <a:p>
-            <a:pPr indent="0" marL="0">
-              <a:buNone/>
-            </a:pPr>
-            <a:r>
-              <a:rPr lang="en-US" sz="3600" b="1" dirty="0">
-                <a:solidFill>
-                  <a:srgbClr val="0E1712"/>
-                </a:solidFill>
-                <a:latin typeface="Aptos Display" pitchFamily="34" charset="0"/>
-                <a:ea typeface="Aptos Display" pitchFamily="34" charset="-122"/>
-                <a:cs typeface="Aptos Display" pitchFamily="34" charset="-120"/>
-              </a:rPr>
-              <a:t>Une collaboration claire, lisible et compatible avec les attentes réglementaires.</a:t>
-            </a:r>
-            <a:endParaRPr lang="en-US" sz="3600" dirty="0"/>
-          </a:p>
-        </p:txBody>
-      </p:sp>
-      <p:sp>
-        <p:nvSpPr>
-          <p:cNvPr id="9" name="Text 6"/>
-          <p:cNvSpPr/>
-          <p:nvPr/>
-        </p:nvSpPr>
-        <p:spPr>
-          <a:xfrm>
-            <a:off x="685800" y="2450592"/>
-            <a:ext cx="5303520" cy="621792"/>
-          </a:xfrm>
-          <a:prstGeom prst="rect">
-            <a:avLst/>
-          </a:prstGeom>
-          <a:noFill/>
-          <a:ln/>
-        </p:spPr>
-        <p:txBody>
-          <a:bodyPr wrap="square" lIns="0" tIns="0" rIns="0" bIns="0" rtlCol="0" anchor="ctr">
-            <a:normAutofit/>
-          </a:bodyPr>
-          <a:lstStyle/>
-          <a:p>
-            <a:pPr indent="0" marL="0">
+            <a:pPr marL="0" indent="0">
               <a:buNone/>
             </a:pPr>
             <a:r>
@@ -11665,10 +12011,13 @@
                 <a:solidFill>
                   <a:srgbClr val="6B786E"/>
                 </a:solidFill>
+                <a:latin typeface="Garamond"/>
               </a:rPr>
               <a:t>Chaque partie reste dans son cœur de métier.</a:t>
             </a:r>
-            <a:endParaRPr lang="en-US" sz="1500" dirty="0"/>
+            <a:endParaRPr lang="en-US" sz="1500" dirty="0">
+              <a:latin typeface="Garamond"/>
+            </a:endParaRPr>
           </a:p>
         </p:txBody>
       </p:sp>
@@ -11680,7 +12029,7 @@
         </p:nvSpPr>
         <p:spPr>
           <a:xfrm>
-            <a:off x="731520" y="2743200"/>
+            <a:off x="731520" y="3548743"/>
             <a:ext cx="3200400" cy="2148840"/>
           </a:xfrm>
           <a:prstGeom prst="roundRect">
@@ -11709,7 +12058,7 @@
         </p:nvSpPr>
         <p:spPr>
           <a:xfrm>
-            <a:off x="941832" y="2944368"/>
+            <a:off x="941832" y="3749911"/>
             <a:ext cx="320040" cy="320040"/>
           </a:xfrm>
           <a:prstGeom prst="rect">
@@ -11722,7 +12071,7 @@
           <a:bodyPr wrap="square" lIns="0" tIns="0" rIns="0" bIns="0" rtlCol="0" anchor="ctr"/>
           <a:lstStyle/>
           <a:p>
-            <a:pPr indent="0" marL="0">
+            <a:pPr marL="0" indent="0">
               <a:buNone/>
             </a:pPr>
             <a:r>
@@ -11730,10 +12079,13 @@
                 <a:solidFill>
                   <a:srgbClr val="000000"/>
                 </a:solidFill>
+                <a:latin typeface="Garamond"/>
               </a:rPr>
               <a:t>🏦</a:t>
             </a:r>
-            <a:endParaRPr lang="en-US" sz="1700" dirty="0"/>
+            <a:endParaRPr lang="en-US" sz="1700" dirty="0">
+              <a:latin typeface="Garamond"/>
+            </a:endParaRPr>
           </a:p>
         </p:txBody>
       </p:sp>
@@ -11745,7 +12097,7 @@
         </p:nvSpPr>
         <p:spPr>
           <a:xfrm>
-            <a:off x="1325880" y="2944368"/>
+            <a:off x="1325880" y="3749911"/>
             <a:ext cx="2404872" cy="256032"/>
           </a:xfrm>
           <a:prstGeom prst="rect">
@@ -11758,7 +12110,7 @@
           <a:bodyPr wrap="square" lIns="0" tIns="0" rIns="0" bIns="0" rtlCol="0" anchor="ctr"/>
           <a:lstStyle/>
           <a:p>
-            <a:pPr indent="0" marL="0">
+            <a:pPr marL="0" indent="0">
               <a:buNone/>
             </a:pPr>
             <a:r>
@@ -11766,10 +12118,13 @@
                 <a:solidFill>
                   <a:srgbClr val="0E1712"/>
                 </a:solidFill>
+                <a:latin typeface="Garamond"/>
               </a:rPr>
               <a:t>Institution partenaire</a:t>
             </a:r>
-            <a:endParaRPr lang="en-US" sz="1500" dirty="0"/>
+            <a:endParaRPr lang="en-US" sz="1500" dirty="0">
+              <a:latin typeface="Garamond"/>
+            </a:endParaRPr>
           </a:p>
         </p:txBody>
       </p:sp>
@@ -11781,7 +12136,7 @@
         </p:nvSpPr>
         <p:spPr>
           <a:xfrm>
-            <a:off x="941832" y="3383280"/>
+            <a:off x="941832" y="4188823"/>
             <a:ext cx="384048" cy="32004"/>
           </a:xfrm>
           <a:prstGeom prst="rect">
@@ -11808,7 +12163,7 @@
         </p:nvSpPr>
         <p:spPr>
           <a:xfrm>
-            <a:off x="941832" y="3520440"/>
+            <a:off x="941832" y="4325983"/>
             <a:ext cx="2779776" cy="1188720"/>
           </a:xfrm>
           <a:prstGeom prst="rect">
@@ -11823,7 +12178,7 @@
           </a:bodyPr>
           <a:lstStyle/>
           <a:p>
-            <a:pPr indent="0" marL="0">
+            <a:pPr marL="0" indent="0">
               <a:buNone/>
             </a:pPr>
             <a:r>
@@ -11831,13 +12186,16 @@
                 <a:solidFill>
                   <a:srgbClr val="6B786E"/>
                 </a:solidFill>
+                <a:latin typeface="Garamond"/>
               </a:rPr>
               <a:t>• Ouverture des comptes / wallets</a:t>
             </a:r>
-            <a:endParaRPr lang="en-US" sz="1050" dirty="0"/>
-          </a:p>
-          <a:p>
-            <a:pPr indent="0" marL="0">
+            <a:endParaRPr lang="en-US" sz="1050" dirty="0">
+              <a:latin typeface="Garamond"/>
+            </a:endParaRPr>
+          </a:p>
+          <a:p>
+            <a:pPr marL="0" indent="0">
               <a:buNone/>
             </a:pPr>
             <a:r>
@@ -11845,13 +12203,16 @@
                 <a:solidFill>
                   <a:srgbClr val="6B786E"/>
                 </a:solidFill>
+                <a:latin typeface="Garamond"/>
               </a:rPr>
               <a:t>• Conservation des fonds</a:t>
             </a:r>
-            <a:endParaRPr lang="en-US" sz="1050" dirty="0"/>
-          </a:p>
-          <a:p>
-            <a:pPr indent="0" marL="0">
+            <a:endParaRPr lang="en-US" sz="1050" dirty="0">
+              <a:latin typeface="Garamond"/>
+            </a:endParaRPr>
+          </a:p>
+          <a:p>
+            <a:pPr marL="0" indent="0">
               <a:buNone/>
             </a:pPr>
             <a:r>
@@ -11859,13 +12220,16 @@
                 <a:solidFill>
                   <a:srgbClr val="6B786E"/>
                 </a:solidFill>
+                <a:latin typeface="Garamond"/>
               </a:rPr>
               <a:t>• Conformité financière</a:t>
             </a:r>
-            <a:endParaRPr lang="en-US" sz="1050" dirty="0"/>
-          </a:p>
-          <a:p>
-            <a:pPr indent="0" marL="0">
+            <a:endParaRPr lang="en-US" sz="1050" dirty="0">
+              <a:latin typeface="Garamond"/>
+            </a:endParaRPr>
+          </a:p>
+          <a:p>
+            <a:pPr marL="0" indent="0">
               <a:buNone/>
             </a:pPr>
             <a:r>
@@ -11873,13 +12237,16 @@
                 <a:solidFill>
                   <a:srgbClr val="6B786E"/>
                 </a:solidFill>
+                <a:latin typeface="Garamond"/>
               </a:rPr>
               <a:t>• Obligations réglementaires</a:t>
             </a:r>
-            <a:endParaRPr lang="en-US" sz="1050" dirty="0"/>
-          </a:p>
-          <a:p>
-            <a:pPr indent="0" marL="0">
+            <a:endParaRPr lang="en-US" sz="1050" dirty="0">
+              <a:latin typeface="Garamond"/>
+            </a:endParaRPr>
+          </a:p>
+          <a:p>
+            <a:pPr marL="0" indent="0">
               <a:buNone/>
             </a:pPr>
             <a:r>
@@ -11887,10 +12254,13 @@
                 <a:solidFill>
                   <a:srgbClr val="6B786E"/>
                 </a:solidFill>
+                <a:latin typeface="Garamond"/>
               </a:rPr>
               <a:t>• Supervision des opérations</a:t>
             </a:r>
-            <a:endParaRPr lang="en-US" sz="1050" dirty="0"/>
+            <a:endParaRPr lang="en-US" sz="1050" dirty="0">
+              <a:latin typeface="Garamond"/>
+            </a:endParaRPr>
           </a:p>
         </p:txBody>
       </p:sp>
@@ -11902,7 +12272,7 @@
         </p:nvSpPr>
         <p:spPr>
           <a:xfrm>
-            <a:off x="4480560" y="2743200"/>
+            <a:off x="4480560" y="3548743"/>
             <a:ext cx="3200400" cy="2148840"/>
           </a:xfrm>
           <a:prstGeom prst="roundRect">
@@ -11931,7 +12301,7 @@
         </p:nvSpPr>
         <p:spPr>
           <a:xfrm>
-            <a:off x="4690872" y="2944368"/>
+            <a:off x="4690872" y="3749911"/>
             <a:ext cx="320040" cy="320040"/>
           </a:xfrm>
           <a:prstGeom prst="rect">
@@ -11944,7 +12314,7 @@
           <a:bodyPr wrap="square" lIns="0" tIns="0" rIns="0" bIns="0" rtlCol="0" anchor="ctr"/>
           <a:lstStyle/>
           <a:p>
-            <a:pPr indent="0" marL="0">
+            <a:pPr marL="0" indent="0">
               <a:buNone/>
             </a:pPr>
             <a:r>
@@ -11952,10 +12322,13 @@
                 <a:solidFill>
                   <a:srgbClr val="000000"/>
                 </a:solidFill>
+                <a:latin typeface="Garamond"/>
               </a:rPr>
               <a:t>📱</a:t>
             </a:r>
-            <a:endParaRPr lang="en-US" sz="1700" dirty="0"/>
+            <a:endParaRPr lang="en-US" sz="1700" dirty="0">
+              <a:latin typeface="Garamond"/>
+            </a:endParaRPr>
           </a:p>
         </p:txBody>
       </p:sp>
@@ -11967,7 +12340,7 @@
         </p:nvSpPr>
         <p:spPr>
           <a:xfrm>
-            <a:off x="5074920" y="2944368"/>
+            <a:off x="5074920" y="3749911"/>
             <a:ext cx="2404872" cy="256032"/>
           </a:xfrm>
           <a:prstGeom prst="rect">
@@ -11980,7 +12353,7 @@
           <a:bodyPr wrap="square" lIns="0" tIns="0" rIns="0" bIns="0" rtlCol="0" anchor="ctr"/>
           <a:lstStyle/>
           <a:p>
-            <a:pPr indent="0" marL="0">
+            <a:pPr marL="0" indent="0">
               <a:buNone/>
             </a:pPr>
             <a:r>
@@ -11988,10 +12361,13 @@
                 <a:solidFill>
                   <a:srgbClr val="0E1712"/>
                 </a:solidFill>
+                <a:latin typeface="Garamond"/>
               </a:rPr>
               <a:t>KOWO</a:t>
             </a:r>
-            <a:endParaRPr lang="en-US" sz="1500" dirty="0"/>
+            <a:endParaRPr lang="en-US" sz="1500" dirty="0">
+              <a:latin typeface="Garamond"/>
+            </a:endParaRPr>
           </a:p>
         </p:txBody>
       </p:sp>
@@ -12003,7 +12379,7 @@
         </p:nvSpPr>
         <p:spPr>
           <a:xfrm>
-            <a:off x="4690872" y="3383280"/>
+            <a:off x="4690872" y="4188823"/>
             <a:ext cx="384048" cy="32004"/>
           </a:xfrm>
           <a:prstGeom prst="rect">
@@ -12030,7 +12406,7 @@
         </p:nvSpPr>
         <p:spPr>
           <a:xfrm>
-            <a:off x="4690872" y="3520440"/>
+            <a:off x="4690872" y="4325983"/>
             <a:ext cx="2779776" cy="1188720"/>
           </a:xfrm>
           <a:prstGeom prst="rect">
@@ -12045,7 +12421,7 @@
           </a:bodyPr>
           <a:lstStyle/>
           <a:p>
-            <a:pPr indent="0" marL="0">
+            <a:pPr marL="0" indent="0">
               <a:buNone/>
             </a:pPr>
             <a:r>
@@ -12053,13 +12429,16 @@
                 <a:solidFill>
                   <a:srgbClr val="6B786E"/>
                 </a:solidFill>
+                <a:latin typeface="Garamond"/>
               </a:rPr>
               <a:t>• Application mobile</a:t>
             </a:r>
-            <a:endParaRPr lang="en-US" sz="1050" dirty="0"/>
-          </a:p>
-          <a:p>
-            <a:pPr indent="0" marL="0">
+            <a:endParaRPr lang="en-US" sz="1050" dirty="0">
+              <a:latin typeface="Garamond"/>
+            </a:endParaRPr>
+          </a:p>
+          <a:p>
+            <a:pPr marL="0" indent="0">
               <a:buNone/>
             </a:pPr>
             <a:r>
@@ -12067,13 +12446,16 @@
                 <a:solidFill>
                   <a:srgbClr val="6B786E"/>
                 </a:solidFill>
+                <a:latin typeface="Garamond"/>
               </a:rPr>
               <a:t>• Gestion des communautés</a:t>
             </a:r>
-            <a:endParaRPr lang="en-US" sz="1050" dirty="0"/>
-          </a:p>
-          <a:p>
-            <a:pPr indent="0" marL="0">
+            <a:endParaRPr lang="en-US" sz="1050" dirty="0">
+              <a:latin typeface="Garamond"/>
+            </a:endParaRPr>
+          </a:p>
+          <a:p>
+            <a:pPr marL="0" indent="0">
               <a:buNone/>
             </a:pPr>
             <a:r>
@@ -12081,13 +12463,16 @@
                 <a:solidFill>
                   <a:srgbClr val="6B786E"/>
                 </a:solidFill>
+                <a:latin typeface="Garamond"/>
               </a:rPr>
               <a:t>• Interfaces API</a:t>
             </a:r>
-            <a:endParaRPr lang="en-US" sz="1050" dirty="0"/>
-          </a:p>
-          <a:p>
-            <a:pPr indent="0" marL="0">
+            <a:endParaRPr lang="en-US" sz="1050" dirty="0">
+              <a:latin typeface="Garamond"/>
+            </a:endParaRPr>
+          </a:p>
+          <a:p>
+            <a:pPr marL="0" indent="0">
               <a:buNone/>
             </a:pPr>
             <a:r>
@@ -12095,13 +12480,16 @@
                 <a:solidFill>
                   <a:srgbClr val="6B786E"/>
                 </a:solidFill>
+                <a:latin typeface="Garamond"/>
               </a:rPr>
               <a:t>• Notifications &amp; historiques</a:t>
             </a:r>
-            <a:endParaRPr lang="en-US" sz="1050" dirty="0"/>
-          </a:p>
-          <a:p>
-            <a:pPr indent="0" marL="0">
+            <a:endParaRPr lang="en-US" sz="1050" dirty="0">
+              <a:latin typeface="Garamond"/>
+            </a:endParaRPr>
+          </a:p>
+          <a:p>
+            <a:pPr marL="0" indent="0">
               <a:buNone/>
             </a:pPr>
             <a:r>
@@ -12109,10 +12497,13 @@
                 <a:solidFill>
                   <a:srgbClr val="6B786E"/>
                 </a:solidFill>
+                <a:latin typeface="Garamond"/>
               </a:rPr>
               <a:t>• Support et reporting</a:t>
             </a:r>
-            <a:endParaRPr lang="en-US" sz="1050" dirty="0"/>
+            <a:endParaRPr lang="en-US" sz="1050" dirty="0">
+              <a:latin typeface="Garamond"/>
+            </a:endParaRPr>
           </a:p>
         </p:txBody>
       </p:sp>
@@ -12124,7 +12515,7 @@
         </p:nvSpPr>
         <p:spPr>
           <a:xfrm>
-            <a:off x="8229600" y="2743200"/>
+            <a:off x="8229600" y="3548743"/>
             <a:ext cx="3200400" cy="2148840"/>
           </a:xfrm>
           <a:prstGeom prst="roundRect">
@@ -12153,7 +12544,7 @@
         </p:nvSpPr>
         <p:spPr>
           <a:xfrm>
-            <a:off x="8439912" y="2944368"/>
+            <a:off x="8439912" y="3749911"/>
             <a:ext cx="320040" cy="320040"/>
           </a:xfrm>
           <a:prstGeom prst="rect">
@@ -12166,7 +12557,7 @@
           <a:bodyPr wrap="square" lIns="0" tIns="0" rIns="0" bIns="0" rtlCol="0" anchor="ctr"/>
           <a:lstStyle/>
           <a:p>
-            <a:pPr indent="0" marL="0">
+            <a:pPr marL="0" indent="0">
               <a:buNone/>
             </a:pPr>
             <a:r>
@@ -12174,10 +12565,13 @@
                 <a:solidFill>
                   <a:srgbClr val="000000"/>
                 </a:solidFill>
+                <a:latin typeface="Garamond"/>
               </a:rPr>
               <a:t>🔌</a:t>
             </a:r>
-            <a:endParaRPr lang="en-US" sz="1700" dirty="0"/>
+            <a:endParaRPr lang="en-US" sz="1700" dirty="0">
+              <a:latin typeface="Garamond"/>
+            </a:endParaRPr>
           </a:p>
         </p:txBody>
       </p:sp>
@@ -12189,7 +12583,7 @@
         </p:nvSpPr>
         <p:spPr>
           <a:xfrm>
-            <a:off x="8823960" y="2944368"/>
+            <a:off x="8823960" y="3749911"/>
             <a:ext cx="2404872" cy="256032"/>
           </a:xfrm>
           <a:prstGeom prst="rect">
@@ -12202,7 +12596,7 @@
           <a:bodyPr wrap="square" lIns="0" tIns="0" rIns="0" bIns="0" rtlCol="0" anchor="ctr"/>
           <a:lstStyle/>
           <a:p>
-            <a:pPr indent="0" marL="0">
+            <a:pPr marL="0" indent="0">
               <a:buNone/>
             </a:pPr>
             <a:r>
@@ -12210,10 +12604,13 @@
                 <a:solidFill>
                   <a:srgbClr val="0E1712"/>
                 </a:solidFill>
+                <a:latin typeface="Garamond"/>
               </a:rPr>
               <a:t>PSP / rails</a:t>
             </a:r>
-            <a:endParaRPr lang="en-US" sz="1500" dirty="0"/>
+            <a:endParaRPr lang="en-US" sz="1500" dirty="0">
+              <a:latin typeface="Garamond"/>
+            </a:endParaRPr>
           </a:p>
         </p:txBody>
       </p:sp>
@@ -12225,7 +12622,7 @@
         </p:nvSpPr>
         <p:spPr>
           <a:xfrm>
-            <a:off x="8439912" y="3383280"/>
+            <a:off x="8439912" y="4188823"/>
             <a:ext cx="384048" cy="32004"/>
           </a:xfrm>
           <a:prstGeom prst="rect">
@@ -12252,7 +12649,7 @@
         </p:nvSpPr>
         <p:spPr>
           <a:xfrm>
-            <a:off x="8439912" y="3520440"/>
+            <a:off x="8439912" y="4325983"/>
             <a:ext cx="2779776" cy="1188720"/>
           </a:xfrm>
           <a:prstGeom prst="rect">
@@ -12267,7 +12664,7 @@
           </a:bodyPr>
           <a:lstStyle/>
           <a:p>
-            <a:pPr indent="0" marL="0">
+            <a:pPr marL="0" indent="0">
               <a:buNone/>
             </a:pPr>
             <a:r>
@@ -12275,13 +12672,16 @@
                 <a:solidFill>
                   <a:srgbClr val="6B786E"/>
                 </a:solidFill>
+                <a:latin typeface="Garamond"/>
               </a:rPr>
               <a:t>• Mobile Money</a:t>
             </a:r>
-            <a:endParaRPr lang="en-US" sz="1050" dirty="0"/>
-          </a:p>
-          <a:p>
-            <a:pPr indent="0" marL="0">
+            <a:endParaRPr lang="en-US" sz="1050" dirty="0">
+              <a:latin typeface="Garamond"/>
+            </a:endParaRPr>
+          </a:p>
+          <a:p>
+            <a:pPr marL="0" indent="0">
               <a:buNone/>
             </a:pPr>
             <a:r>
@@ -12289,13 +12689,16 @@
                 <a:solidFill>
                   <a:srgbClr val="6B786E"/>
                 </a:solidFill>
+                <a:latin typeface="Garamond"/>
               </a:rPr>
               <a:t>• Cartes / virements</a:t>
             </a:r>
-            <a:endParaRPr lang="en-US" sz="1050" dirty="0"/>
-          </a:p>
-          <a:p>
-            <a:pPr indent="0" marL="0">
+            <a:endParaRPr lang="en-US" sz="1050" dirty="0">
+              <a:latin typeface="Garamond"/>
+            </a:endParaRPr>
+          </a:p>
+          <a:p>
+            <a:pPr marL="0" indent="0">
               <a:buNone/>
             </a:pPr>
             <a:r>
@@ -12303,13 +12706,16 @@
                 <a:solidFill>
                   <a:srgbClr val="6B786E"/>
                 </a:solidFill>
+                <a:latin typeface="Garamond"/>
               </a:rPr>
               <a:t>• Webhooks</a:t>
             </a:r>
-            <a:endParaRPr lang="en-US" sz="1050" dirty="0"/>
-          </a:p>
-          <a:p>
-            <a:pPr indent="0" marL="0">
+            <a:endParaRPr lang="en-US" sz="1050" dirty="0">
+              <a:latin typeface="Garamond"/>
+            </a:endParaRPr>
+          </a:p>
+          <a:p>
+            <a:pPr marL="0" indent="0">
               <a:buNone/>
             </a:pPr>
             <a:r>
@@ -12317,13 +12723,16 @@
                 <a:solidFill>
                   <a:srgbClr val="6B786E"/>
                 </a:solidFill>
+                <a:latin typeface="Garamond"/>
               </a:rPr>
               <a:t>• Payouts</a:t>
             </a:r>
-            <a:endParaRPr lang="en-US" sz="1050" dirty="0"/>
-          </a:p>
-          <a:p>
-            <a:pPr indent="0" marL="0">
+            <a:endParaRPr lang="en-US" sz="1050" dirty="0">
+              <a:latin typeface="Garamond"/>
+            </a:endParaRPr>
+          </a:p>
+          <a:p>
+            <a:pPr marL="0" indent="0">
               <a:buNone/>
             </a:pPr>
             <a:r>
@@ -12331,10 +12740,13 @@
                 <a:solidFill>
                   <a:srgbClr val="6B786E"/>
                 </a:solidFill>
+                <a:latin typeface="Garamond"/>
               </a:rPr>
               <a:t>• Réconciliation technique</a:t>
             </a:r>
-            <a:endParaRPr lang="en-US" sz="1050" dirty="0"/>
+            <a:endParaRPr lang="en-US" sz="1050" dirty="0">
+              <a:latin typeface="Garamond"/>
+            </a:endParaRPr>
           </a:p>
         </p:txBody>
       </p:sp>
@@ -12359,7 +12771,7 @@
           <a:bodyPr wrap="square" lIns="0" tIns="0" rIns="0" bIns="0" rtlCol="0" anchor="ctr"/>
           <a:lstStyle/>
           <a:p>
-            <a:pPr indent="0" marL="0">
+            <a:pPr marL="0" indent="0">
               <a:buNone/>
             </a:pPr>
             <a:r>
@@ -12367,10 +12779,13 @@
                 <a:solidFill>
                   <a:srgbClr val="6B786E"/>
                 </a:solidFill>
+                <a:latin typeface="Garamond"/>
               </a:rPr>
               <a:t>© 2026 KOWO · contact@getkowo.com · getkowo.com</a:t>
             </a:r>
-            <a:endParaRPr lang="en-US" sz="750" dirty="0"/>
+            <a:endParaRPr lang="en-US" sz="750" dirty="0">
+              <a:latin typeface="Garamond"/>
+            </a:endParaRPr>
           </a:p>
         </p:txBody>
       </p:sp>
@@ -12390,6 +12805,7 @@
         <a:solidFill>
           <a:srgbClr val="07150F"/>
         </a:solidFill>
+        <a:effectLst/>
       </p:bgPr>
     </p:bg>
     <p:spTree>
@@ -12439,7 +12855,7 @@
         </p:nvSpPr>
         <p:spPr>
           <a:xfrm>
-            <a:off x="685800" y="0"/>
+            <a:off x="685800" y="370114"/>
             <a:ext cx="0" cy="6858000"/>
           </a:xfrm>
           <a:prstGeom prst="line">
@@ -12464,7 +12880,7 @@
         </p:nvSpPr>
         <p:spPr>
           <a:xfrm>
-            <a:off x="1371600" y="0"/>
+            <a:off x="1371600" y="370114"/>
             <a:ext cx="0" cy="6858000"/>
           </a:xfrm>
           <a:prstGeom prst="line">
@@ -12489,7 +12905,7 @@
         </p:nvSpPr>
         <p:spPr>
           <a:xfrm>
-            <a:off x="2057400" y="0"/>
+            <a:off x="2057400" y="370114"/>
             <a:ext cx="0" cy="6858000"/>
           </a:xfrm>
           <a:prstGeom prst="line">
@@ -12514,7 +12930,7 @@
         </p:nvSpPr>
         <p:spPr>
           <a:xfrm>
-            <a:off x="2743200" y="0"/>
+            <a:off x="2743200" y="370114"/>
             <a:ext cx="0" cy="6858000"/>
           </a:xfrm>
           <a:prstGeom prst="line">
@@ -12539,7 +12955,7 @@
         </p:nvSpPr>
         <p:spPr>
           <a:xfrm>
-            <a:off x="3429000" y="0"/>
+            <a:off x="3429000" y="370114"/>
             <a:ext cx="0" cy="6858000"/>
           </a:xfrm>
           <a:prstGeom prst="line">
@@ -12564,7 +12980,7 @@
         </p:nvSpPr>
         <p:spPr>
           <a:xfrm>
-            <a:off x="4114800" y="0"/>
+            <a:off x="4114800" y="370114"/>
             <a:ext cx="0" cy="6858000"/>
           </a:xfrm>
           <a:prstGeom prst="line">
@@ -12589,7 +13005,7 @@
         </p:nvSpPr>
         <p:spPr>
           <a:xfrm>
-            <a:off x="4800600" y="0"/>
+            <a:off x="4800600" y="370114"/>
             <a:ext cx="0" cy="6858000"/>
           </a:xfrm>
           <a:prstGeom prst="line">
@@ -12614,7 +13030,7 @@
         </p:nvSpPr>
         <p:spPr>
           <a:xfrm>
-            <a:off x="5486400" y="0"/>
+            <a:off x="5486400" y="370114"/>
             <a:ext cx="0" cy="6858000"/>
           </a:xfrm>
           <a:prstGeom prst="line">
@@ -12639,7 +13055,7 @@
         </p:nvSpPr>
         <p:spPr>
           <a:xfrm>
-            <a:off x="6172200" y="0"/>
+            <a:off x="6172200" y="370114"/>
             <a:ext cx="0" cy="6858000"/>
           </a:xfrm>
           <a:prstGeom prst="line">
@@ -12664,7 +13080,7 @@
         </p:nvSpPr>
         <p:spPr>
           <a:xfrm>
-            <a:off x="6858000" y="0"/>
+            <a:off x="6858000" y="370114"/>
             <a:ext cx="0" cy="6858000"/>
           </a:xfrm>
           <a:prstGeom prst="line">
@@ -12689,7 +13105,7 @@
         </p:nvSpPr>
         <p:spPr>
           <a:xfrm>
-            <a:off x="7543800" y="0"/>
+            <a:off x="7543800" y="370114"/>
             <a:ext cx="0" cy="6858000"/>
           </a:xfrm>
           <a:prstGeom prst="line">
@@ -12714,7 +13130,7 @@
         </p:nvSpPr>
         <p:spPr>
           <a:xfrm>
-            <a:off x="8229600" y="0"/>
+            <a:off x="8229600" y="370114"/>
             <a:ext cx="0" cy="6858000"/>
           </a:xfrm>
           <a:prstGeom prst="line">
@@ -12739,7 +13155,7 @@
         </p:nvSpPr>
         <p:spPr>
           <a:xfrm>
-            <a:off x="8915400" y="0"/>
+            <a:off x="8915400" y="370114"/>
             <a:ext cx="0" cy="6858000"/>
           </a:xfrm>
           <a:prstGeom prst="line">
@@ -12764,7 +13180,7 @@
         </p:nvSpPr>
         <p:spPr>
           <a:xfrm>
-            <a:off x="9601200" y="0"/>
+            <a:off x="9601200" y="370114"/>
             <a:ext cx="0" cy="6858000"/>
           </a:xfrm>
           <a:prstGeom prst="line">
@@ -12789,7 +13205,7 @@
         </p:nvSpPr>
         <p:spPr>
           <a:xfrm>
-            <a:off x="10287000" y="0"/>
+            <a:off x="10287000" y="370114"/>
             <a:ext cx="0" cy="6858000"/>
           </a:xfrm>
           <a:prstGeom prst="line">
@@ -12814,7 +13230,7 @@
         </p:nvSpPr>
         <p:spPr>
           <a:xfrm>
-            <a:off x="10972800" y="0"/>
+            <a:off x="10972800" y="370114"/>
             <a:ext cx="0" cy="6858000"/>
           </a:xfrm>
           <a:prstGeom prst="line">
@@ -12989,7 +13405,7 @@
         </p:nvSpPr>
         <p:spPr>
           <a:xfrm>
-            <a:off x="0" y="3429000"/>
+            <a:off x="0" y="3799114"/>
             <a:ext cx="12191695" cy="0"/>
           </a:xfrm>
           <a:prstGeom prst="line">
@@ -13014,7 +13430,7 @@
         </p:nvSpPr>
         <p:spPr>
           <a:xfrm>
-            <a:off x="0" y="4114800"/>
+            <a:off x="0" y="4484914"/>
             <a:ext cx="12191695" cy="0"/>
           </a:xfrm>
           <a:prstGeom prst="line">
@@ -13039,7 +13455,7 @@
         </p:nvSpPr>
         <p:spPr>
           <a:xfrm>
-            <a:off x="0" y="4800600"/>
+            <a:off x="0" y="5170714"/>
             <a:ext cx="12191695" cy="0"/>
           </a:xfrm>
           <a:prstGeom prst="line">
@@ -13064,7 +13480,7 @@
         </p:nvSpPr>
         <p:spPr>
           <a:xfrm>
-            <a:off x="0" y="5486400"/>
+            <a:off x="0" y="5856514"/>
             <a:ext cx="12191695" cy="0"/>
           </a:xfrm>
           <a:prstGeom prst="line">
@@ -13164,14 +13580,14 @@
       </p:sp>
       <p:pic>
         <p:nvPicPr>
-          <p:cNvPr id="32" name="Image 0" descr="/mnt/data/kowo-institutional-partnership-v2/assets/kowo-logo.jpg">    </p:cNvPr>
+          <p:cNvPr id="32" name="Image 0" descr="/mnt/data/kowo-institutional-partnership-v2/assets/kowo-logo.jpg"/>
           <p:cNvPicPr>
             <a:picLocks noChangeAspect="1"/>
           </p:cNvPicPr>
           <p:nvPr/>
         </p:nvPicPr>
         <p:blipFill>
-          <a:blip r:embed="rId1"/>
+          <a:blip r:embed="rId3"/>
           <a:stretch>
             <a:fillRect/>
           </a:stretch>
@@ -13194,7 +13610,7 @@
         </p:nvSpPr>
         <p:spPr>
           <a:xfrm>
-            <a:off x="960120" y="356616"/>
+            <a:off x="960120" y="414673"/>
             <a:ext cx="1097280" cy="256032"/>
           </a:xfrm>
           <a:prstGeom prst="rect">
@@ -13207,7 +13623,7 @@
           <a:bodyPr wrap="square" lIns="0" tIns="0" rIns="0" bIns="0" rtlCol="0" anchor="ctr"/>
           <a:lstStyle/>
           <a:p>
-            <a:pPr indent="0" marL="0">
+            <a:pPr marL="0" indent="0">
               <a:buNone/>
             </a:pPr>
             <a:r>
@@ -13215,13 +13631,15 @@
                 <a:solidFill>
                   <a:srgbClr val="123B2B"/>
                 </a:solidFill>
-                <a:latin typeface="Aptos Display" pitchFamily="34" charset="0"/>
+                <a:latin typeface="Garamond"/>
                 <a:ea typeface="Aptos Display" pitchFamily="34" charset="-122"/>
                 <a:cs typeface="Aptos Display" pitchFamily="34" charset="-120"/>
               </a:rPr>
               <a:t>KOWO</a:t>
             </a:r>
-            <a:endParaRPr lang="en-US" sz="1000" dirty="0"/>
+            <a:endParaRPr lang="en-US" sz="1000" dirty="0">
+              <a:latin typeface="Garamond"/>
+            </a:endParaRPr>
           </a:p>
         </p:txBody>
       </p:sp>
@@ -13246,7 +13664,7 @@
           <a:bodyPr wrap="square" lIns="0" tIns="0" rIns="0" bIns="0" rtlCol="0" anchor="ctr"/>
           <a:lstStyle/>
           <a:p>
-            <a:pPr algn="r" indent="0" marL="0">
+            <a:pPr marL="0" indent="0" algn="r">
               <a:buNone/>
             </a:pPr>
             <a:r>
@@ -13254,10 +13672,13 @@
                 <a:solidFill>
                   <a:srgbClr val="123B2B"/>
                 </a:solidFill>
+                <a:latin typeface="Garamond"/>
               </a:rPr>
               <a:t>Institutional Partnership Brief</a:t>
             </a:r>
-            <a:endParaRPr lang="en-US" sz="800" dirty="0"/>
+            <a:endParaRPr lang="en-US" sz="800" dirty="0">
+              <a:latin typeface="Garamond"/>
+            </a:endParaRPr>
           </a:p>
         </p:txBody>
       </p:sp>
@@ -13311,7 +13732,7 @@
           <a:bodyPr wrap="square" lIns="0" tIns="0" rIns="0" bIns="0" rtlCol="0" anchor="ctr"/>
           <a:lstStyle/>
           <a:p>
-            <a:pPr algn="ctr" indent="0" marL="0">
+            <a:pPr marL="0" indent="0" algn="ctr">
               <a:buNone/>
             </a:pPr>
             <a:r>
@@ -13319,10 +13740,13 @@
                 <a:solidFill>
                   <a:srgbClr val="8DFFD3"/>
                 </a:solidFill>
+                <a:latin typeface="Garamond"/>
               </a:rPr>
               <a:t>06 · VALEUR PARTENAIRE</a:t>
             </a:r>
-            <a:endParaRPr lang="en-US" sz="850" dirty="0"/>
+            <a:endParaRPr lang="en-US" sz="850" dirty="0">
+              <a:latin typeface="Garamond"/>
+            </a:endParaRPr>
           </a:p>
         </p:txBody>
       </p:sp>
@@ -13334,8 +13758,51 @@
         </p:nvSpPr>
         <p:spPr>
           <a:xfrm>
-            <a:off x="658368" y="1335024"/>
-            <a:ext cx="5669280" cy="960120"/>
+            <a:off x="680139" y="1364052"/>
+            <a:ext cx="6126480" cy="931092"/>
+          </a:xfrm>
+          <a:prstGeom prst="rect">
+            <a:avLst/>
+          </a:prstGeom>
+          <a:noFill/>
+          <a:ln/>
+        </p:spPr>
+        <p:txBody>
+          <a:bodyPr wrap="square" lIns="0" tIns="0" rIns="0" bIns="0" rtlCol="0" anchor="ctr">
+            <a:normAutofit fontScale="92500" lnSpcReduction="10000"/>
+          </a:bodyPr>
+          <a:lstStyle/>
+          <a:p>
+            <a:pPr marL="0" indent="0">
+              <a:buNone/>
+            </a:pPr>
+            <a:r>
+              <a:rPr lang="en-US" sz="3600" b="1" dirty="0">
+                <a:solidFill>
+                  <a:srgbClr val="FFFFFF"/>
+                </a:solidFill>
+                <a:latin typeface="Garamond"/>
+                <a:ea typeface="Aptos Display" pitchFamily="34" charset="-122"/>
+                <a:cs typeface="Aptos Display" pitchFamily="34" charset="-120"/>
+              </a:rPr>
+              <a:t>Pourquoi devenir le partenaire financier historique de KOWO ?</a:t>
+            </a:r>
+            <a:endParaRPr lang="en-US" sz="3600" dirty="0">
+              <a:latin typeface="Garamond"/>
+            </a:endParaRPr>
+          </a:p>
+        </p:txBody>
+      </p:sp>
+      <p:sp>
+        <p:nvSpPr>
+          <p:cNvPr id="38" name="Text 35"/>
+          <p:cNvSpPr/>
+          <p:nvPr/>
+        </p:nvSpPr>
+        <p:spPr>
+          <a:xfrm>
+            <a:off x="685800" y="2450592"/>
+            <a:ext cx="5303520" cy="621792"/>
           </a:xfrm>
           <a:prstGeom prst="rect">
             <a:avLst/>
@@ -13349,48 +13816,7 @@
           </a:bodyPr>
           <a:lstStyle/>
           <a:p>
-            <a:pPr indent="0" marL="0">
-              <a:buNone/>
-            </a:pPr>
-            <a:r>
-              <a:rPr lang="en-US" sz="3600" b="1" dirty="0">
-                <a:solidFill>
-                  <a:srgbClr val="FFFFFF"/>
-                </a:solidFill>
-                <a:latin typeface="Aptos Display" pitchFamily="34" charset="0"/>
-                <a:ea typeface="Aptos Display" pitchFamily="34" charset="-122"/>
-                <a:cs typeface="Aptos Display" pitchFamily="34" charset="-120"/>
-              </a:rPr>
-              <a:t>Pourquoi devenir le partenaire financier historique de KOWO ?</a:t>
-            </a:r>
-            <a:endParaRPr lang="en-US" sz="3600" dirty="0"/>
-          </a:p>
-        </p:txBody>
-      </p:sp>
-      <p:sp>
-        <p:nvSpPr>
-          <p:cNvPr id="38" name="Text 35"/>
-          <p:cNvSpPr/>
-          <p:nvPr/>
-        </p:nvSpPr>
-        <p:spPr>
-          <a:xfrm>
-            <a:off x="685800" y="2450592"/>
-            <a:ext cx="5303520" cy="621792"/>
-          </a:xfrm>
-          <a:prstGeom prst="rect">
-            <a:avLst/>
-          </a:prstGeom>
-          <a:noFill/>
-          <a:ln/>
-        </p:spPr>
-        <p:txBody>
-          <a:bodyPr wrap="square" lIns="0" tIns="0" rIns="0" bIns="0" rtlCol="0" anchor="ctr">
-            <a:normAutofit/>
-          </a:bodyPr>
-          <a:lstStyle/>
-          <a:p>
-            <a:pPr indent="0" marL="0">
+            <a:pPr marL="0" indent="0">
               <a:buNone/>
             </a:pPr>
             <a:r>
@@ -13398,10 +13824,13 @@
                 <a:solidFill>
                   <a:srgbClr val="C7D8CF"/>
                 </a:solidFill>
+                <a:latin typeface="Garamond"/>
               </a:rPr>
               <a:t>KOWO apporte une nouvelle interface d’acquisition, de fidélisation et de digitalisation pour une institution financière.</a:t>
             </a:r>
-            <a:endParaRPr lang="en-US" sz="1500" dirty="0"/>
+            <a:endParaRPr lang="en-US" sz="1500" dirty="0">
+              <a:latin typeface="Garamond"/>
+            </a:endParaRPr>
           </a:p>
         </p:txBody>
       </p:sp>
@@ -13413,7 +13842,7 @@
         </p:nvSpPr>
         <p:spPr>
           <a:xfrm>
-            <a:off x="777240" y="3063240"/>
+            <a:off x="777240" y="3433354"/>
             <a:ext cx="4572000" cy="804672"/>
           </a:xfrm>
           <a:prstGeom prst="roundRect">
@@ -13442,7 +13871,7 @@
         </p:nvSpPr>
         <p:spPr>
           <a:xfrm>
-            <a:off x="978408" y="3209544"/>
+            <a:off x="978408" y="3579658"/>
             <a:ext cx="1508760" cy="182880"/>
           </a:xfrm>
           <a:prstGeom prst="rect">
@@ -13455,7 +13884,7 @@
           <a:bodyPr wrap="square" lIns="0" tIns="0" rIns="0" bIns="0" rtlCol="0" anchor="ctr"/>
           <a:lstStyle/>
           <a:p>
-            <a:pPr indent="0" marL="0">
+            <a:pPr marL="0" indent="0">
               <a:buNone/>
             </a:pPr>
             <a:r>
@@ -13463,10 +13892,13 @@
                 <a:solidFill>
                   <a:srgbClr val="8DFFD3"/>
                 </a:solidFill>
+                <a:latin typeface="Garamond"/>
               </a:rPr>
               <a:t>Acquisition clients</a:t>
             </a:r>
-            <a:endParaRPr lang="en-US" sz="1400" dirty="0"/>
+            <a:endParaRPr lang="en-US" sz="1400" dirty="0">
+              <a:latin typeface="Garamond"/>
+            </a:endParaRPr>
           </a:p>
         </p:txBody>
       </p:sp>
@@ -13478,7 +13910,7 @@
         </p:nvSpPr>
         <p:spPr>
           <a:xfrm>
-            <a:off x="2560320" y="3227832"/>
+            <a:off x="2560320" y="3597946"/>
             <a:ext cx="2560320" cy="274320"/>
           </a:xfrm>
           <a:prstGeom prst="rect">
@@ -13493,7 +13925,7 @@
           </a:bodyPr>
           <a:lstStyle/>
           <a:p>
-            <a:pPr indent="0" marL="0">
+            <a:pPr marL="0" indent="0">
               <a:buNone/>
             </a:pPr>
             <a:r>
@@ -13501,10 +13933,13 @@
                 <a:solidFill>
                   <a:srgbClr val="C7D8CF"/>
                 </a:solidFill>
+                <a:latin typeface="Garamond"/>
               </a:rPr>
               <a:t>Accès à de nouveaux utilisateurs via les communautés et la diaspora.</a:t>
             </a:r>
-            <a:endParaRPr lang="en-US" sz="950" dirty="0"/>
+            <a:endParaRPr lang="en-US" sz="950" dirty="0">
+              <a:latin typeface="Garamond"/>
+            </a:endParaRPr>
           </a:p>
         </p:txBody>
       </p:sp>
@@ -13516,7 +13951,7 @@
         </p:nvSpPr>
         <p:spPr>
           <a:xfrm>
-            <a:off x="6080760" y="3063240"/>
+            <a:off x="6080760" y="3433354"/>
             <a:ext cx="4572000" cy="804672"/>
           </a:xfrm>
           <a:prstGeom prst="roundRect">
@@ -13545,7 +13980,7 @@
         </p:nvSpPr>
         <p:spPr>
           <a:xfrm>
-            <a:off x="6281928" y="3209544"/>
+            <a:off x="6281928" y="3579658"/>
             <a:ext cx="1508760" cy="182880"/>
           </a:xfrm>
           <a:prstGeom prst="rect">
@@ -13558,7 +13993,7 @@
           <a:bodyPr wrap="square" lIns="0" tIns="0" rIns="0" bIns="0" rtlCol="0" anchor="ctr"/>
           <a:lstStyle/>
           <a:p>
-            <a:pPr indent="0" marL="0">
+            <a:pPr marL="0" indent="0">
               <a:buNone/>
             </a:pPr>
             <a:r>
@@ -13566,10 +14001,13 @@
                 <a:solidFill>
                   <a:srgbClr val="8DFFD3"/>
                 </a:solidFill>
+                <a:latin typeface="Garamond"/>
               </a:rPr>
               <a:t>Digitalisation</a:t>
             </a:r>
-            <a:endParaRPr lang="en-US" sz="1400" dirty="0"/>
+            <a:endParaRPr lang="en-US" sz="1400" dirty="0">
+              <a:latin typeface="Garamond"/>
+            </a:endParaRPr>
           </a:p>
         </p:txBody>
       </p:sp>
@@ -13581,7 +14019,7 @@
         </p:nvSpPr>
         <p:spPr>
           <a:xfrm>
-            <a:off x="7863840" y="3227832"/>
+            <a:off x="7863840" y="3597946"/>
             <a:ext cx="2560320" cy="274320"/>
           </a:xfrm>
           <a:prstGeom prst="rect">
@@ -13596,7 +14034,7 @@
           </a:bodyPr>
           <a:lstStyle/>
           <a:p>
-            <a:pPr indent="0" marL="0">
+            <a:pPr marL="0" indent="0">
               <a:buNone/>
             </a:pPr>
             <a:r>
@@ -13604,10 +14042,13 @@
                 <a:solidFill>
                   <a:srgbClr val="C7D8CF"/>
                 </a:solidFill>
+                <a:latin typeface="Garamond"/>
               </a:rPr>
               <a:t>Modernisation de l’épargne communautaire sans développer toute l’UX en interne.</a:t>
             </a:r>
-            <a:endParaRPr lang="en-US" sz="950" dirty="0"/>
+            <a:endParaRPr lang="en-US" sz="950" dirty="0">
+              <a:latin typeface="Garamond"/>
+            </a:endParaRPr>
           </a:p>
         </p:txBody>
       </p:sp>
@@ -13619,7 +14060,7 @@
         </p:nvSpPr>
         <p:spPr>
           <a:xfrm>
-            <a:off x="777240" y="4160520"/>
+            <a:off x="777240" y="4530634"/>
             <a:ext cx="4572000" cy="804672"/>
           </a:xfrm>
           <a:prstGeom prst="roundRect">
@@ -13648,7 +14089,7 @@
         </p:nvSpPr>
         <p:spPr>
           <a:xfrm>
-            <a:off x="978408" y="4306824"/>
+            <a:off x="978408" y="4676938"/>
             <a:ext cx="1508760" cy="182880"/>
           </a:xfrm>
           <a:prstGeom prst="rect">
@@ -13661,7 +14102,7 @@
           <a:bodyPr wrap="square" lIns="0" tIns="0" rIns="0" bIns="0" rtlCol="0" anchor="ctr"/>
           <a:lstStyle/>
           <a:p>
-            <a:pPr indent="0" marL="0">
+            <a:pPr marL="0" indent="0">
               <a:buNone/>
             </a:pPr>
             <a:r>
@@ -13669,10 +14110,13 @@
                 <a:solidFill>
                   <a:srgbClr val="8DFFD3"/>
                 </a:solidFill>
+                <a:latin typeface="Garamond"/>
               </a:rPr>
               <a:t>Revenus partagés</a:t>
             </a:r>
-            <a:endParaRPr lang="en-US" sz="1400" dirty="0"/>
+            <a:endParaRPr lang="en-US" sz="1400" dirty="0">
+              <a:latin typeface="Garamond"/>
+            </a:endParaRPr>
           </a:p>
         </p:txBody>
       </p:sp>
@@ -13684,7 +14128,7 @@
         </p:nvSpPr>
         <p:spPr>
           <a:xfrm>
-            <a:off x="2560320" y="4325112"/>
+            <a:off x="2560320" y="4695226"/>
             <a:ext cx="2560320" cy="274320"/>
           </a:xfrm>
           <a:prstGeom prst="rect">
@@ -13699,7 +14143,7 @@
           </a:bodyPr>
           <a:lstStyle/>
           <a:p>
-            <a:pPr indent="0" marL="0">
+            <a:pPr marL="0" indent="0">
               <a:buNone/>
             </a:pPr>
             <a:r>
@@ -13707,10 +14151,13 @@
                 <a:solidFill>
                   <a:srgbClr val="C7D8CF"/>
                 </a:solidFill>
+                <a:latin typeface="Garamond"/>
               </a:rPr>
               <a:t>Commissions, frais d’usage et nouveaux produits financiers à terme.</a:t>
             </a:r>
-            <a:endParaRPr lang="en-US" sz="950" dirty="0"/>
+            <a:endParaRPr lang="en-US" sz="950" dirty="0">
+              <a:latin typeface="Garamond"/>
+            </a:endParaRPr>
           </a:p>
         </p:txBody>
       </p:sp>
@@ -13722,7 +14169,7 @@
         </p:nvSpPr>
         <p:spPr>
           <a:xfrm>
-            <a:off x="6080760" y="4160520"/>
+            <a:off x="6080760" y="4530634"/>
             <a:ext cx="4572000" cy="804672"/>
           </a:xfrm>
           <a:prstGeom prst="roundRect">
@@ -13751,7 +14198,7 @@
         </p:nvSpPr>
         <p:spPr>
           <a:xfrm>
-            <a:off x="6281928" y="4306824"/>
+            <a:off x="6281928" y="4676938"/>
             <a:ext cx="1508760" cy="182880"/>
           </a:xfrm>
           <a:prstGeom prst="rect">
@@ -13764,7 +14211,7 @@
           <a:bodyPr wrap="square" lIns="0" tIns="0" rIns="0" bIns="0" rtlCol="0" anchor="ctr"/>
           <a:lstStyle/>
           <a:p>
-            <a:pPr indent="0" marL="0">
+            <a:pPr marL="0" indent="0">
               <a:buNone/>
             </a:pPr>
             <a:r>
@@ -13772,10 +14219,13 @@
                 <a:solidFill>
                   <a:srgbClr val="8DFFD3"/>
                 </a:solidFill>
+                <a:latin typeface="Garamond"/>
               </a:rPr>
               <a:t>Confiance</a:t>
             </a:r>
-            <a:endParaRPr lang="en-US" sz="1400" dirty="0"/>
+            <a:endParaRPr lang="en-US" sz="1400" dirty="0">
+              <a:latin typeface="Garamond"/>
+            </a:endParaRPr>
           </a:p>
         </p:txBody>
       </p:sp>
@@ -13787,7 +14237,7 @@
         </p:nvSpPr>
         <p:spPr>
           <a:xfrm>
-            <a:off x="7863840" y="4325112"/>
+            <a:off x="7863840" y="4695226"/>
             <a:ext cx="2560320" cy="274320"/>
           </a:xfrm>
           <a:prstGeom prst="rect">
@@ -13802,7 +14252,7 @@
           </a:bodyPr>
           <a:lstStyle/>
           <a:p>
-            <a:pPr indent="0" marL="0">
+            <a:pPr marL="0" indent="0">
               <a:buNone/>
             </a:pPr>
             <a:r>
@@ -13810,10 +14260,13 @@
                 <a:solidFill>
                   <a:srgbClr val="C7D8CF"/>
                 </a:solidFill>
+                <a:latin typeface="Garamond"/>
               </a:rPr>
               <a:t>Une architecture où l’institution porte la partie réglementée.</a:t>
             </a:r>
-            <a:endParaRPr lang="en-US" sz="950" dirty="0"/>
+            <a:endParaRPr lang="en-US" sz="950" dirty="0">
+              <a:latin typeface="Garamond"/>
+            </a:endParaRPr>
           </a:p>
         </p:txBody>
       </p:sp>
@@ -13838,7 +14291,7 @@
           <a:bodyPr wrap="square" lIns="0" tIns="0" rIns="0" bIns="0" rtlCol="0" anchor="ctr"/>
           <a:lstStyle/>
           <a:p>
-            <a:pPr indent="0" marL="0">
+            <a:pPr marL="0" indent="0">
               <a:buNone/>
             </a:pPr>
             <a:r>
@@ -13846,10 +14299,13 @@
                 <a:solidFill>
                   <a:srgbClr val="9DB7AA"/>
                 </a:solidFill>
+                <a:latin typeface="Garamond"/>
               </a:rPr>
               <a:t>© 2026 KOWO · contact@getkowo.com · getkowo.com</a:t>
             </a:r>
-            <a:endParaRPr lang="en-US" sz="750" dirty="0"/>
+            <a:endParaRPr lang="en-US" sz="750" dirty="0">
+              <a:latin typeface="Garamond"/>
+            </a:endParaRPr>
           </a:p>
         </p:txBody>
       </p:sp>
@@ -13869,6 +14325,7 @@
         <a:solidFill>
           <a:srgbClr val="F6F1E7"/>
         </a:solidFill>
+        <a:effectLst/>
       </p:bgPr>
     </p:bg>
     <p:spTree>
@@ -13918,14 +14375,14 @@
       </p:sp>
       <p:pic>
         <p:nvPicPr>
-          <p:cNvPr id="3" name="Image 0" descr="/mnt/data/kowo-institutional-partnership-v2/assets/kowo-logo.jpg">    </p:cNvPr>
+          <p:cNvPr id="3" name="Image 0" descr="/mnt/data/kowo-institutional-partnership-v2/assets/kowo-logo.jpg"/>
           <p:cNvPicPr>
             <a:picLocks noChangeAspect="1"/>
           </p:cNvPicPr>
           <p:nvPr/>
         </p:nvPicPr>
         <p:blipFill>
-          <a:blip r:embed="rId1"/>
+          <a:blip r:embed="rId3"/>
           <a:stretch>
             <a:fillRect/>
           </a:stretch>
@@ -13948,7 +14405,7 @@
         </p:nvSpPr>
         <p:spPr>
           <a:xfrm>
-            <a:off x="960120" y="356616"/>
+            <a:off x="960120" y="414673"/>
             <a:ext cx="1097280" cy="256032"/>
           </a:xfrm>
           <a:prstGeom prst="rect">
@@ -13961,7 +14418,7 @@
           <a:bodyPr wrap="square" lIns="0" tIns="0" rIns="0" bIns="0" rtlCol="0" anchor="ctr"/>
           <a:lstStyle/>
           <a:p>
-            <a:pPr indent="0" marL="0">
+            <a:pPr marL="0" indent="0">
               <a:buNone/>
             </a:pPr>
             <a:r>
@@ -13969,13 +14426,15 @@
                 <a:solidFill>
                   <a:srgbClr val="123B2B"/>
                 </a:solidFill>
-                <a:latin typeface="Aptos Display" pitchFamily="34" charset="0"/>
+                <a:latin typeface="Garamond"/>
                 <a:ea typeface="Aptos Display" pitchFamily="34" charset="-122"/>
                 <a:cs typeface="Aptos Display" pitchFamily="34" charset="-120"/>
               </a:rPr>
               <a:t>KOWO</a:t>
             </a:r>
-            <a:endParaRPr lang="en-US" sz="1000" dirty="0"/>
+            <a:endParaRPr lang="en-US" sz="1000" dirty="0">
+              <a:latin typeface="Garamond"/>
+            </a:endParaRPr>
           </a:p>
         </p:txBody>
       </p:sp>
@@ -14000,7 +14459,7 @@
           <a:bodyPr wrap="square" lIns="0" tIns="0" rIns="0" bIns="0" rtlCol="0" anchor="ctr"/>
           <a:lstStyle/>
           <a:p>
-            <a:pPr algn="r" indent="0" marL="0">
+            <a:pPr marL="0" indent="0" algn="r">
               <a:buNone/>
             </a:pPr>
             <a:r>
@@ -14008,10 +14467,13 @@
                 <a:solidFill>
                   <a:srgbClr val="6B786E"/>
                 </a:solidFill>
+                <a:latin typeface="Garamond"/>
               </a:rPr>
               <a:t>Institutional Partnership Brief</a:t>
             </a:r>
-            <a:endParaRPr lang="en-US" sz="800" dirty="0"/>
+            <a:endParaRPr lang="en-US" sz="800" dirty="0">
+              <a:latin typeface="Garamond"/>
+            </a:endParaRPr>
           </a:p>
         </p:txBody>
       </p:sp>
@@ -14065,7 +14527,7 @@
           <a:bodyPr wrap="square" lIns="0" tIns="0" rIns="0" bIns="0" rtlCol="0" anchor="ctr"/>
           <a:lstStyle/>
           <a:p>
-            <a:pPr algn="ctr" indent="0" marL="0">
+            <a:pPr marL="0" indent="0" algn="ctr">
               <a:buNone/>
             </a:pPr>
             <a:r>
@@ -14073,10 +14535,13 @@
                 <a:solidFill>
                   <a:srgbClr val="123B2B"/>
                 </a:solidFill>
+                <a:latin typeface="Garamond"/>
               </a:rPr>
               <a:t>07 · ÉTAT D’AVANCEMENT</a:t>
             </a:r>
-            <a:endParaRPr lang="en-US" sz="850" dirty="0"/>
+            <a:endParaRPr lang="en-US" sz="850" dirty="0">
+              <a:latin typeface="Garamond"/>
+            </a:endParaRPr>
           </a:p>
         </p:txBody>
       </p:sp>
@@ -14088,8 +14553,70 @@
         </p:nvSpPr>
         <p:spPr>
           <a:xfrm>
-            <a:off x="658368" y="1335024"/>
-            <a:ext cx="5669280" cy="960120"/>
+            <a:off x="680139" y="1335024"/>
+            <a:ext cx="6249851" cy="960120"/>
+          </a:xfrm>
+          <a:prstGeom prst="rect">
+            <a:avLst/>
+          </a:prstGeom>
+          <a:noFill/>
+          <a:ln/>
+        </p:spPr>
+        <p:txBody>
+          <a:bodyPr wrap="square" lIns="0" tIns="0" rIns="0" bIns="0" rtlCol="0" anchor="ctr">
+            <a:normAutofit fontScale="70000" lnSpcReduction="20000"/>
+          </a:bodyPr>
+          <a:lstStyle/>
+          <a:p>
+            <a:pPr marL="0" indent="0">
+              <a:buNone/>
+            </a:pPr>
+            <a:r>
+              <a:rPr lang="en-US" sz="3600" b="1" dirty="0">
+                <a:solidFill>
+                  <a:srgbClr val="0E1712"/>
+                </a:solidFill>
+                <a:latin typeface="Garamond"/>
+                <a:ea typeface="Aptos Display" pitchFamily="34" charset="-122"/>
+                <a:cs typeface="Aptos Display" pitchFamily="34" charset="-120"/>
+              </a:rPr>
+              <a:t>KOWO n’est plus une idée.</a:t>
+            </a:r>
+            <a:endParaRPr lang="en-US" sz="3600" dirty="0">
+              <a:latin typeface="Garamond"/>
+            </a:endParaRPr>
+          </a:p>
+          <a:p>
+            <a:pPr marL="0" indent="0">
+              <a:buNone/>
+            </a:pPr>
+            <a:r>
+              <a:rPr lang="en-US" sz="3600" b="1" dirty="0">
+                <a:solidFill>
+                  <a:srgbClr val="0E1712"/>
+                </a:solidFill>
+                <a:latin typeface="Garamond"/>
+                <a:ea typeface="Aptos Display" pitchFamily="34" charset="-122"/>
+                <a:cs typeface="Aptos Display" pitchFamily="34" charset="-120"/>
+              </a:rPr>
+              <a:t>Le socle produit et documentaire existe déjà.</a:t>
+            </a:r>
+            <a:endParaRPr lang="en-US" sz="3600" dirty="0">
+              <a:latin typeface="Garamond"/>
+            </a:endParaRPr>
+          </a:p>
+        </p:txBody>
+      </p:sp>
+      <p:sp>
+        <p:nvSpPr>
+          <p:cNvPr id="9" name="Text 6"/>
+          <p:cNvSpPr/>
+          <p:nvPr/>
+        </p:nvSpPr>
+        <p:spPr>
+          <a:xfrm>
+            <a:off x="664029" y="2450592"/>
+            <a:ext cx="6239690" cy="621792"/>
           </a:xfrm>
           <a:prstGeom prst="rect">
             <a:avLst/>
@@ -14103,112 +14630,60 @@
           </a:bodyPr>
           <a:lstStyle/>
           <a:p>
-            <a:pPr indent="0" marL="0">
-              <a:buNone/>
-            </a:pPr>
-            <a:r>
-              <a:rPr lang="en-US" sz="3600" b="1" dirty="0">
+            <a:pPr marL="0" indent="0">
+              <a:buNone/>
+            </a:pPr>
+            <a:r>
+              <a:rPr lang="en-US" sz="1500" dirty="0">
+                <a:solidFill>
+                  <a:srgbClr val="6B786E"/>
+                </a:solidFill>
+                <a:latin typeface="Garamond"/>
+              </a:rPr>
+              <a:t>Le partenariat recherché vise à sécuriser le déploiement financier et réglementaire.</a:t>
+            </a:r>
+            <a:endParaRPr lang="en-US" sz="1500" dirty="0">
+              <a:latin typeface="Garamond"/>
+            </a:endParaRPr>
+          </a:p>
+        </p:txBody>
+      </p:sp>
+      <p:sp>
+        <p:nvSpPr>
+          <p:cNvPr id="10" name="Text 7"/>
+          <p:cNvSpPr/>
+          <p:nvPr/>
+        </p:nvSpPr>
+        <p:spPr>
+          <a:xfrm>
+            <a:off x="822960" y="3251200"/>
+            <a:ext cx="3017520" cy="182880"/>
+          </a:xfrm>
+          <a:prstGeom prst="rect">
+            <a:avLst/>
+          </a:prstGeom>
+          <a:noFill/>
+          <a:ln/>
+        </p:spPr>
+        <p:txBody>
+          <a:bodyPr wrap="square" lIns="0" tIns="0" rIns="0" bIns="0" rtlCol="0" anchor="ctr"/>
+          <a:lstStyle/>
+          <a:p>
+            <a:pPr marL="0" indent="0">
+              <a:buNone/>
+            </a:pPr>
+            <a:r>
+              <a:rPr lang="en-US" sz="1100" b="1" dirty="0">
                 <a:solidFill>
                   <a:srgbClr val="0E1712"/>
                 </a:solidFill>
-                <a:latin typeface="Aptos Display" pitchFamily="34" charset="0"/>
-                <a:ea typeface="Aptos Display" pitchFamily="34" charset="-122"/>
-                <a:cs typeface="Aptos Display" pitchFamily="34" charset="-120"/>
-              </a:rPr>
-              <a:t>KOWO n’est plus une idée.</a:t>
-            </a:r>
-            <a:endParaRPr lang="en-US" sz="3600" dirty="0"/>
-          </a:p>
-          <a:p>
-            <a:pPr indent="0" marL="0">
-              <a:buNone/>
-            </a:pPr>
-            <a:r>
-              <a:rPr lang="en-US" sz="3600" b="1" dirty="0">
-                <a:solidFill>
-                  <a:srgbClr val="0E1712"/>
-                </a:solidFill>
-                <a:latin typeface="Aptos Display" pitchFamily="34" charset="0"/>
-                <a:ea typeface="Aptos Display" pitchFamily="34" charset="-122"/>
-                <a:cs typeface="Aptos Display" pitchFamily="34" charset="-120"/>
-              </a:rPr>
-              <a:t>Le socle produit et documentaire existe déjà.</a:t>
-            </a:r>
-            <a:endParaRPr lang="en-US" sz="3600" dirty="0"/>
-          </a:p>
-        </p:txBody>
-      </p:sp>
-      <p:sp>
-        <p:nvSpPr>
-          <p:cNvPr id="9" name="Text 6"/>
-          <p:cNvSpPr/>
-          <p:nvPr/>
-        </p:nvSpPr>
-        <p:spPr>
-          <a:xfrm>
-            <a:off x="685800" y="2450592"/>
-            <a:ext cx="5303520" cy="621792"/>
-          </a:xfrm>
-          <a:prstGeom prst="rect">
-            <a:avLst/>
-          </a:prstGeom>
-          <a:noFill/>
-          <a:ln/>
-        </p:spPr>
-        <p:txBody>
-          <a:bodyPr wrap="square" lIns="0" tIns="0" rIns="0" bIns="0" rtlCol="0" anchor="ctr">
-            <a:normAutofit/>
-          </a:bodyPr>
-          <a:lstStyle/>
-          <a:p>
-            <a:pPr indent="0" marL="0">
-              <a:buNone/>
-            </a:pPr>
-            <a:r>
-              <a:rPr lang="en-US" sz="1500" dirty="0">
-                <a:solidFill>
-                  <a:srgbClr val="6B786E"/>
-                </a:solidFill>
-              </a:rPr>
-              <a:t>Le partenariat recherché vise à sécuriser le déploiement financier et réglementaire.</a:t>
-            </a:r>
-            <a:endParaRPr lang="en-US" sz="1500" dirty="0"/>
-          </a:p>
-        </p:txBody>
-      </p:sp>
-      <p:sp>
-        <p:nvSpPr>
-          <p:cNvPr id="10" name="Text 7"/>
-          <p:cNvSpPr/>
-          <p:nvPr/>
-        </p:nvSpPr>
-        <p:spPr>
-          <a:xfrm>
-            <a:off x="822960" y="2743200"/>
-            <a:ext cx="3017520" cy="182880"/>
-          </a:xfrm>
-          <a:prstGeom prst="rect">
-            <a:avLst/>
-          </a:prstGeom>
-          <a:noFill/>
-          <a:ln/>
-        </p:spPr>
-        <p:txBody>
-          <a:bodyPr wrap="square" lIns="0" tIns="0" rIns="0" bIns="0" rtlCol="0" anchor="ctr"/>
-          <a:lstStyle/>
-          <a:p>
-            <a:pPr indent="0" marL="0">
-              <a:buNone/>
-            </a:pPr>
-            <a:r>
-              <a:rPr lang="en-US" sz="1100" b="1" dirty="0">
-                <a:solidFill>
-                  <a:srgbClr val="0E1712"/>
-                </a:solidFill>
+                <a:latin typeface="Garamond"/>
               </a:rPr>
               <a:t>Application mobile</a:t>
             </a:r>
-            <a:endParaRPr lang="en-US" sz="1100" dirty="0"/>
+            <a:endParaRPr lang="en-US" sz="1100" dirty="0">
+              <a:latin typeface="Garamond"/>
+            </a:endParaRPr>
           </a:p>
         </p:txBody>
       </p:sp>
@@ -14220,7 +14695,7 @@
         </p:nvSpPr>
         <p:spPr>
           <a:xfrm>
-            <a:off x="4069080" y="2779776"/>
+            <a:off x="4069080" y="3287776"/>
             <a:ext cx="4572000" cy="109728"/>
           </a:xfrm>
           <a:prstGeom prst="roundRect">
@@ -14247,7 +14722,7 @@
         </p:nvSpPr>
         <p:spPr>
           <a:xfrm>
-            <a:off x="4069080" y="2779776"/>
+            <a:off x="4069080" y="3287776"/>
             <a:ext cx="4343400" cy="109728"/>
           </a:xfrm>
           <a:prstGeom prst="roundRect">
@@ -14274,7 +14749,7 @@
         </p:nvSpPr>
         <p:spPr>
           <a:xfrm>
-            <a:off x="8823960" y="2743200"/>
+            <a:off x="8823960" y="3251200"/>
             <a:ext cx="640080" cy="182880"/>
           </a:xfrm>
           <a:prstGeom prst="rect">
@@ -14287,7 +14762,7 @@
           <a:bodyPr wrap="square" lIns="0" tIns="0" rIns="0" bIns="0" rtlCol="0" anchor="ctr"/>
           <a:lstStyle/>
           <a:p>
-            <a:pPr indent="0" marL="0">
+            <a:pPr marL="0" indent="0">
               <a:buNone/>
             </a:pPr>
             <a:r>
@@ -14295,10 +14770,13 @@
                 <a:solidFill>
                   <a:srgbClr val="123B2B"/>
                 </a:solidFill>
+                <a:latin typeface="Garamond"/>
               </a:rPr>
               <a:t>95%</a:t>
             </a:r>
-            <a:endParaRPr lang="en-US" sz="1000" dirty="0"/>
+            <a:endParaRPr lang="en-US" sz="1000" dirty="0">
+              <a:latin typeface="Garamond"/>
+            </a:endParaRPr>
           </a:p>
         </p:txBody>
       </p:sp>
@@ -14310,7 +14788,7 @@
         </p:nvSpPr>
         <p:spPr>
           <a:xfrm>
-            <a:off x="822960" y="3218688"/>
+            <a:off x="822960" y="3726688"/>
             <a:ext cx="3017520" cy="182880"/>
           </a:xfrm>
           <a:prstGeom prst="rect">
@@ -14323,7 +14801,7 @@
           <a:bodyPr wrap="square" lIns="0" tIns="0" rIns="0" bIns="0" rtlCol="0" anchor="ctr"/>
           <a:lstStyle/>
           <a:p>
-            <a:pPr indent="0" marL="0">
+            <a:pPr marL="0" indent="0">
               <a:buNone/>
             </a:pPr>
             <a:r>
@@ -14331,10 +14809,13 @@
                 <a:solidFill>
                   <a:srgbClr val="0E1712"/>
                 </a:solidFill>
+                <a:latin typeface="Garamond"/>
               </a:rPr>
               <a:t>Infrastructure cloud</a:t>
             </a:r>
-            <a:endParaRPr lang="en-US" sz="1100" dirty="0"/>
+            <a:endParaRPr lang="en-US" sz="1100" dirty="0">
+              <a:latin typeface="Garamond"/>
+            </a:endParaRPr>
           </a:p>
         </p:txBody>
       </p:sp>
@@ -14346,7 +14827,7 @@
         </p:nvSpPr>
         <p:spPr>
           <a:xfrm>
-            <a:off x="4069080" y="3255264"/>
+            <a:off x="4069080" y="3763264"/>
             <a:ext cx="4572000" cy="109728"/>
           </a:xfrm>
           <a:prstGeom prst="roundRect">
@@ -14373,7 +14854,7 @@
         </p:nvSpPr>
         <p:spPr>
           <a:xfrm>
-            <a:off x="4069080" y="3255264"/>
+            <a:off x="4069080" y="3763264"/>
             <a:ext cx="4114800" cy="109728"/>
           </a:xfrm>
           <a:prstGeom prst="roundRect">
@@ -14400,7 +14881,7 @@
         </p:nvSpPr>
         <p:spPr>
           <a:xfrm>
-            <a:off x="8823960" y="3218688"/>
+            <a:off x="8823960" y="3726688"/>
             <a:ext cx="640080" cy="182880"/>
           </a:xfrm>
           <a:prstGeom prst="rect">
@@ -14413,7 +14894,7 @@
           <a:bodyPr wrap="square" lIns="0" tIns="0" rIns="0" bIns="0" rtlCol="0" anchor="ctr"/>
           <a:lstStyle/>
           <a:p>
-            <a:pPr indent="0" marL="0">
+            <a:pPr marL="0" indent="0">
               <a:buNone/>
             </a:pPr>
             <a:r>
@@ -14421,10 +14902,13 @@
                 <a:solidFill>
                   <a:srgbClr val="123B2B"/>
                 </a:solidFill>
+                <a:latin typeface="Garamond"/>
               </a:rPr>
               <a:t>90%</a:t>
             </a:r>
-            <a:endParaRPr lang="en-US" sz="1000" dirty="0"/>
+            <a:endParaRPr lang="en-US" sz="1000" dirty="0">
+              <a:latin typeface="Garamond"/>
+            </a:endParaRPr>
           </a:p>
         </p:txBody>
       </p:sp>
@@ -14436,7 +14920,7 @@
         </p:nvSpPr>
         <p:spPr>
           <a:xfrm>
-            <a:off x="822960" y="3694176"/>
+            <a:off x="822960" y="4202176"/>
             <a:ext cx="3017520" cy="182880"/>
           </a:xfrm>
           <a:prstGeom prst="rect">
@@ -14449,7 +14933,7 @@
           <a:bodyPr wrap="square" lIns="0" tIns="0" rIns="0" bIns="0" rtlCol="0" anchor="ctr"/>
           <a:lstStyle/>
           <a:p>
-            <a:pPr indent="0" marL="0">
+            <a:pPr marL="0" indent="0">
               <a:buNone/>
             </a:pPr>
             <a:r>
@@ -14457,10 +14941,13 @@
                 <a:solidFill>
                   <a:srgbClr val="0E1712"/>
                 </a:solidFill>
+                <a:latin typeface="Garamond"/>
               </a:rPr>
               <a:t>Documentation conformité</a:t>
             </a:r>
-            <a:endParaRPr lang="en-US" sz="1100" dirty="0"/>
+            <a:endParaRPr lang="en-US" sz="1100" dirty="0">
+              <a:latin typeface="Garamond"/>
+            </a:endParaRPr>
           </a:p>
         </p:txBody>
       </p:sp>
@@ -14472,7 +14959,7 @@
         </p:nvSpPr>
         <p:spPr>
           <a:xfrm>
-            <a:off x="4069080" y="3730752"/>
+            <a:off x="4069080" y="4238752"/>
             <a:ext cx="4572000" cy="109728"/>
           </a:xfrm>
           <a:prstGeom prst="roundRect">
@@ -14499,7 +14986,7 @@
         </p:nvSpPr>
         <p:spPr>
           <a:xfrm>
-            <a:off x="4069080" y="3730752"/>
+            <a:off x="4069080" y="4238752"/>
             <a:ext cx="4572000" cy="109728"/>
           </a:xfrm>
           <a:prstGeom prst="roundRect">
@@ -14526,7 +15013,7 @@
         </p:nvSpPr>
         <p:spPr>
           <a:xfrm>
-            <a:off x="8823960" y="3694176"/>
+            <a:off x="8823960" y="4202176"/>
             <a:ext cx="640080" cy="182880"/>
           </a:xfrm>
           <a:prstGeom prst="rect">
@@ -14539,7 +15026,7 @@
           <a:bodyPr wrap="square" lIns="0" tIns="0" rIns="0" bIns="0" rtlCol="0" anchor="ctr"/>
           <a:lstStyle/>
           <a:p>
-            <a:pPr indent="0" marL="0">
+            <a:pPr marL="0" indent="0">
               <a:buNone/>
             </a:pPr>
             <a:r>
@@ -14547,10 +15034,13 @@
                 <a:solidFill>
                   <a:srgbClr val="123B2B"/>
                 </a:solidFill>
+                <a:latin typeface="Garamond"/>
               </a:rPr>
               <a:t>100%</a:t>
             </a:r>
-            <a:endParaRPr lang="en-US" sz="1000" dirty="0"/>
+            <a:endParaRPr lang="en-US" sz="1000" dirty="0">
+              <a:latin typeface="Garamond"/>
+            </a:endParaRPr>
           </a:p>
         </p:txBody>
       </p:sp>
@@ -14562,7 +15052,7 @@
         </p:nvSpPr>
         <p:spPr>
           <a:xfrm>
-            <a:off x="822960" y="4169664"/>
+            <a:off x="822960" y="4677664"/>
             <a:ext cx="3017520" cy="182880"/>
           </a:xfrm>
           <a:prstGeom prst="rect">
@@ -14575,7 +15065,7 @@
           <a:bodyPr wrap="square" lIns="0" tIns="0" rIns="0" bIns="0" rtlCol="0" anchor="ctr"/>
           <a:lstStyle/>
           <a:p>
-            <a:pPr indent="0" marL="0">
+            <a:pPr marL="0" indent="0">
               <a:buNone/>
             </a:pPr>
             <a:r>
@@ -14583,10 +15073,13 @@
                 <a:solidFill>
                   <a:srgbClr val="0E1712"/>
                 </a:solidFill>
+                <a:latin typeface="Garamond"/>
               </a:rPr>
               <a:t>Partner Portal</a:t>
             </a:r>
-            <a:endParaRPr lang="en-US" sz="1100" dirty="0"/>
+            <a:endParaRPr lang="en-US" sz="1100" dirty="0">
+              <a:latin typeface="Garamond"/>
+            </a:endParaRPr>
           </a:p>
         </p:txBody>
       </p:sp>
@@ -14598,7 +15091,7 @@
         </p:nvSpPr>
         <p:spPr>
           <a:xfrm>
-            <a:off x="4069080" y="4206240"/>
+            <a:off x="4069080" y="4714240"/>
             <a:ext cx="4572000" cy="109728"/>
           </a:xfrm>
           <a:prstGeom prst="roundRect">
@@ -14625,7 +15118,7 @@
         </p:nvSpPr>
         <p:spPr>
           <a:xfrm>
-            <a:off x="4069080" y="4206240"/>
+            <a:off x="4069080" y="4714240"/>
             <a:ext cx="4572000" cy="109728"/>
           </a:xfrm>
           <a:prstGeom prst="roundRect">
@@ -14652,7 +15145,7 @@
         </p:nvSpPr>
         <p:spPr>
           <a:xfrm>
-            <a:off x="8823960" y="4169664"/>
+            <a:off x="8823960" y="4677664"/>
             <a:ext cx="640080" cy="182880"/>
           </a:xfrm>
           <a:prstGeom prst="rect">
@@ -14665,7 +15158,7 @@
           <a:bodyPr wrap="square" lIns="0" tIns="0" rIns="0" bIns="0" rtlCol="0" anchor="ctr"/>
           <a:lstStyle/>
           <a:p>
-            <a:pPr indent="0" marL="0">
+            <a:pPr marL="0" indent="0">
               <a:buNone/>
             </a:pPr>
             <a:r>
@@ -14673,10 +15166,13 @@
                 <a:solidFill>
                   <a:srgbClr val="123B2B"/>
                 </a:solidFill>
+                <a:latin typeface="Garamond"/>
               </a:rPr>
               <a:t>100%</a:t>
             </a:r>
-            <a:endParaRPr lang="en-US" sz="1000" dirty="0"/>
+            <a:endParaRPr lang="en-US" sz="1000" dirty="0">
+              <a:latin typeface="Garamond"/>
+            </a:endParaRPr>
           </a:p>
         </p:txBody>
       </p:sp>
@@ -14688,7 +15184,7 @@
         </p:nvSpPr>
         <p:spPr>
           <a:xfrm>
-            <a:off x="822960" y="4645152"/>
+            <a:off x="822960" y="5153152"/>
             <a:ext cx="3017520" cy="182880"/>
           </a:xfrm>
           <a:prstGeom prst="rect">
@@ -14701,7 +15197,7 @@
           <a:bodyPr wrap="square" lIns="0" tIns="0" rIns="0" bIns="0" rtlCol="0" anchor="ctr"/>
           <a:lstStyle/>
           <a:p>
-            <a:pPr indent="0" marL="0">
+            <a:pPr marL="0" indent="0">
               <a:buNone/>
             </a:pPr>
             <a:r>
@@ -14709,10 +15205,13 @@
                 <a:solidFill>
                   <a:srgbClr val="0E1712"/>
                 </a:solidFill>
+                <a:latin typeface="Garamond"/>
               </a:rPr>
               <a:t>KYC / OTP</a:t>
             </a:r>
-            <a:endParaRPr lang="en-US" sz="1100" dirty="0"/>
+            <a:endParaRPr lang="en-US" sz="1100" dirty="0">
+              <a:latin typeface="Garamond"/>
+            </a:endParaRPr>
           </a:p>
         </p:txBody>
       </p:sp>
@@ -14724,7 +15223,7 @@
         </p:nvSpPr>
         <p:spPr>
           <a:xfrm>
-            <a:off x="4069080" y="4681728"/>
+            <a:off x="4069080" y="5189728"/>
             <a:ext cx="4572000" cy="109728"/>
           </a:xfrm>
           <a:prstGeom prst="roundRect">
@@ -14751,7 +15250,7 @@
         </p:nvSpPr>
         <p:spPr>
           <a:xfrm>
-            <a:off x="4069080" y="4681728"/>
+            <a:off x="4069080" y="5189728"/>
             <a:ext cx="3657600" cy="109728"/>
           </a:xfrm>
           <a:prstGeom prst="roundRect">
@@ -14778,7 +15277,7 @@
         </p:nvSpPr>
         <p:spPr>
           <a:xfrm>
-            <a:off x="8823960" y="4645152"/>
+            <a:off x="8823960" y="5153152"/>
             <a:ext cx="640080" cy="182880"/>
           </a:xfrm>
           <a:prstGeom prst="rect">
@@ -14791,7 +15290,7 @@
           <a:bodyPr wrap="square" lIns="0" tIns="0" rIns="0" bIns="0" rtlCol="0" anchor="ctr"/>
           <a:lstStyle/>
           <a:p>
-            <a:pPr indent="0" marL="0">
+            <a:pPr marL="0" indent="0">
               <a:buNone/>
             </a:pPr>
             <a:r>
@@ -14799,10 +15298,13 @@
                 <a:solidFill>
                   <a:srgbClr val="123B2B"/>
                 </a:solidFill>
+                <a:latin typeface="Garamond"/>
               </a:rPr>
               <a:t>80%</a:t>
             </a:r>
-            <a:endParaRPr lang="en-US" sz="1000" dirty="0"/>
+            <a:endParaRPr lang="en-US" sz="1000" dirty="0">
+              <a:latin typeface="Garamond"/>
+            </a:endParaRPr>
           </a:p>
         </p:txBody>
       </p:sp>
@@ -14814,7 +15316,7 @@
         </p:nvSpPr>
         <p:spPr>
           <a:xfrm>
-            <a:off x="9646920" y="2743200"/>
+            <a:off x="9646920" y="3251200"/>
             <a:ext cx="1737360" cy="2194560"/>
           </a:xfrm>
           <a:prstGeom prst="roundRect">
@@ -14843,7 +15345,7 @@
         </p:nvSpPr>
         <p:spPr>
           <a:xfrm>
-            <a:off x="9857232" y="2944368"/>
+            <a:off x="9857232" y="3452368"/>
             <a:ext cx="320040" cy="320040"/>
           </a:xfrm>
           <a:prstGeom prst="rect">
@@ -14856,7 +15358,7 @@
           <a:bodyPr wrap="square" lIns="0" tIns="0" rIns="0" bIns="0" rtlCol="0" anchor="ctr"/>
           <a:lstStyle/>
           <a:p>
-            <a:pPr indent="0" marL="0">
+            <a:pPr marL="0" indent="0">
               <a:buNone/>
             </a:pPr>
             <a:r>
@@ -14864,10 +15366,13 @@
                 <a:solidFill>
                   <a:srgbClr val="000000"/>
                 </a:solidFill>
+                <a:latin typeface="Garamond"/>
               </a:rPr>
               <a:t>⚙️</a:t>
             </a:r>
-            <a:endParaRPr lang="en-US" sz="1700" dirty="0"/>
+            <a:endParaRPr lang="en-US" sz="1700" dirty="0">
+              <a:latin typeface="Garamond"/>
+            </a:endParaRPr>
           </a:p>
         </p:txBody>
       </p:sp>
@@ -14879,7 +15384,7 @@
         </p:nvSpPr>
         <p:spPr>
           <a:xfrm>
-            <a:off x="10241280" y="2944368"/>
+            <a:off x="10241280" y="3452368"/>
             <a:ext cx="941832" cy="256032"/>
           </a:xfrm>
           <a:prstGeom prst="rect">
@@ -14892,7 +15397,7 @@
           <a:bodyPr wrap="square" lIns="0" tIns="0" rIns="0" bIns="0" rtlCol="0" anchor="ctr"/>
           <a:lstStyle/>
           <a:p>
-            <a:pPr indent="0" marL="0">
+            <a:pPr marL="0" indent="0">
               <a:buNone/>
             </a:pPr>
             <a:r>
@@ -14900,10 +15405,13 @@
                 <a:solidFill>
                   <a:srgbClr val="0E1712"/>
                 </a:solidFill>
+                <a:latin typeface="Garamond"/>
               </a:rPr>
               <a:t>Stack</a:t>
             </a:r>
-            <a:endParaRPr lang="en-US" sz="1500" dirty="0"/>
+            <a:endParaRPr lang="en-US" sz="1500" dirty="0">
+              <a:latin typeface="Garamond"/>
+            </a:endParaRPr>
           </a:p>
         </p:txBody>
       </p:sp>
@@ -14915,7 +15423,7 @@
         </p:nvSpPr>
         <p:spPr>
           <a:xfrm>
-            <a:off x="9857232" y="3383280"/>
+            <a:off x="9857232" y="3891280"/>
             <a:ext cx="384048" cy="32004"/>
           </a:xfrm>
           <a:prstGeom prst="rect">
@@ -14942,7 +15450,7 @@
         </p:nvSpPr>
         <p:spPr>
           <a:xfrm>
-            <a:off x="9857232" y="3520440"/>
+            <a:off x="9857232" y="4028440"/>
             <a:ext cx="1316736" cy="1234440"/>
           </a:xfrm>
           <a:prstGeom prst="rect">
@@ -14957,7 +15465,7 @@
           </a:bodyPr>
           <a:lstStyle/>
           <a:p>
-            <a:pPr indent="0" marL="0">
+            <a:pPr marL="0" indent="0">
               <a:buNone/>
             </a:pPr>
             <a:r>
@@ -14965,13 +15473,16 @@
                 <a:solidFill>
                   <a:srgbClr val="6B786E"/>
                 </a:solidFill>
+                <a:latin typeface="Garamond"/>
               </a:rPr>
               <a:t>Render</a:t>
             </a:r>
-            <a:endParaRPr lang="en-US" sz="1050" dirty="0"/>
-          </a:p>
-          <a:p>
-            <a:pPr indent="0" marL="0">
+            <a:endParaRPr lang="en-US" sz="1050" dirty="0">
+              <a:latin typeface="Garamond"/>
+            </a:endParaRPr>
+          </a:p>
+          <a:p>
+            <a:pPr marL="0" indent="0">
               <a:buNone/>
             </a:pPr>
             <a:r>
@@ -14979,13 +15490,16 @@
                 <a:solidFill>
                   <a:srgbClr val="6B786E"/>
                 </a:solidFill>
+                <a:latin typeface="Garamond"/>
               </a:rPr>
               <a:t>Supabase</a:t>
             </a:r>
-            <a:endParaRPr lang="en-US" sz="1050" dirty="0"/>
-          </a:p>
-          <a:p>
-            <a:pPr indent="0" marL="0">
+            <a:endParaRPr lang="en-US" sz="1050" dirty="0">
+              <a:latin typeface="Garamond"/>
+            </a:endParaRPr>
+          </a:p>
+          <a:p>
+            <a:pPr marL="0" indent="0">
               <a:buNone/>
             </a:pPr>
             <a:r>
@@ -14993,13 +15507,16 @@
                 <a:solidFill>
                   <a:srgbClr val="6B786E"/>
                 </a:solidFill>
+                <a:latin typeface="Garamond"/>
               </a:rPr>
               <a:t>Sumsub</a:t>
             </a:r>
-            <a:endParaRPr lang="en-US" sz="1050" dirty="0"/>
-          </a:p>
-          <a:p>
-            <a:pPr indent="0" marL="0">
+            <a:endParaRPr lang="en-US" sz="1050" dirty="0">
+              <a:latin typeface="Garamond"/>
+            </a:endParaRPr>
+          </a:p>
+          <a:p>
+            <a:pPr marL="0" indent="0">
               <a:buNone/>
             </a:pPr>
             <a:r>
@@ -15007,13 +15524,16 @@
                 <a:solidFill>
                   <a:srgbClr val="6B786E"/>
                 </a:solidFill>
+                <a:latin typeface="Garamond"/>
               </a:rPr>
               <a:t>Twilio</a:t>
             </a:r>
-            <a:endParaRPr lang="en-US" sz="1050" dirty="0"/>
-          </a:p>
-          <a:p>
-            <a:pPr indent="0" marL="0">
+            <a:endParaRPr lang="en-US" sz="1050" dirty="0">
+              <a:latin typeface="Garamond"/>
+            </a:endParaRPr>
+          </a:p>
+          <a:p>
+            <a:pPr marL="0" indent="0">
               <a:buNone/>
             </a:pPr>
             <a:r>
@@ -15021,13 +15541,16 @@
                 <a:solidFill>
                   <a:srgbClr val="6B786E"/>
                 </a:solidFill>
+                <a:latin typeface="Garamond"/>
               </a:rPr>
               <a:t>GitHub</a:t>
             </a:r>
-            <a:endParaRPr lang="en-US" sz="1050" dirty="0"/>
-          </a:p>
-          <a:p>
-            <a:pPr indent="0" marL="0">
+            <a:endParaRPr lang="en-US" sz="1050" dirty="0">
+              <a:latin typeface="Garamond"/>
+            </a:endParaRPr>
+          </a:p>
+          <a:p>
+            <a:pPr marL="0" indent="0">
               <a:buNone/>
             </a:pPr>
             <a:r>
@@ -15035,10 +15558,13 @@
                 <a:solidFill>
                   <a:srgbClr val="6B786E"/>
                 </a:solidFill>
+                <a:latin typeface="Garamond"/>
               </a:rPr>
               <a:t>IONOS</a:t>
             </a:r>
-            <a:endParaRPr lang="en-US" sz="1050" dirty="0"/>
+            <a:endParaRPr lang="en-US" sz="1050" dirty="0">
+              <a:latin typeface="Garamond"/>
+            </a:endParaRPr>
           </a:p>
         </p:txBody>
       </p:sp>
@@ -15063,7 +15589,7 @@
           <a:bodyPr wrap="square" lIns="0" tIns="0" rIns="0" bIns="0" rtlCol="0" anchor="ctr"/>
           <a:lstStyle/>
           <a:p>
-            <a:pPr indent="0" marL="0">
+            <a:pPr marL="0" indent="0">
               <a:buNone/>
             </a:pPr>
             <a:r>
@@ -15071,10 +15597,13 @@
                 <a:solidFill>
                   <a:srgbClr val="6B786E"/>
                 </a:solidFill>
+                <a:latin typeface="Garamond"/>
               </a:rPr>
               <a:t>© 2026 KOWO · contact@getkowo.com · getkowo.com</a:t>
             </a:r>
-            <a:endParaRPr lang="en-US" sz="750" dirty="0"/>
+            <a:endParaRPr lang="en-US" sz="750" dirty="0">
+              <a:latin typeface="Garamond"/>
+            </a:endParaRPr>
           </a:p>
         </p:txBody>
       </p:sp>
@@ -15094,6 +15623,7 @@
         <a:solidFill>
           <a:srgbClr val="F6F1E7"/>
         </a:solidFill>
+        <a:effectLst/>
       </p:bgPr>
     </p:bg>
     <p:spTree>
@@ -15143,14 +15673,14 @@
       </p:sp>
       <p:pic>
         <p:nvPicPr>
-          <p:cNvPr id="3" name="Image 0" descr="/mnt/data/kowo-institutional-partnership-v2/assets/kowo-logo.jpg">    </p:cNvPr>
+          <p:cNvPr id="3" name="Image 0" descr="/mnt/data/kowo-institutional-partnership-v2/assets/kowo-logo.jpg"/>
           <p:cNvPicPr>
             <a:picLocks noChangeAspect="1"/>
           </p:cNvPicPr>
           <p:nvPr/>
         </p:nvPicPr>
         <p:blipFill>
-          <a:blip r:embed="rId1"/>
+          <a:blip r:embed="rId3"/>
           <a:stretch>
             <a:fillRect/>
           </a:stretch>
@@ -15173,7 +15703,7 @@
         </p:nvSpPr>
         <p:spPr>
           <a:xfrm>
-            <a:off x="960120" y="356616"/>
+            <a:off x="960120" y="414673"/>
             <a:ext cx="1097280" cy="256032"/>
           </a:xfrm>
           <a:prstGeom prst="rect">
@@ -15186,7 +15716,7 @@
           <a:bodyPr wrap="square" lIns="0" tIns="0" rIns="0" bIns="0" rtlCol="0" anchor="ctr"/>
           <a:lstStyle/>
           <a:p>
-            <a:pPr indent="0" marL="0">
+            <a:pPr marL="0" indent="0">
               <a:buNone/>
             </a:pPr>
             <a:r>
@@ -15194,13 +15724,15 @@
                 <a:solidFill>
                   <a:srgbClr val="123B2B"/>
                 </a:solidFill>
-                <a:latin typeface="Aptos Display" pitchFamily="34" charset="0"/>
+                <a:latin typeface="Garamond"/>
                 <a:ea typeface="Aptos Display" pitchFamily="34" charset="-122"/>
                 <a:cs typeface="Aptos Display" pitchFamily="34" charset="-120"/>
               </a:rPr>
               <a:t>KOWO</a:t>
             </a:r>
-            <a:endParaRPr lang="en-US" sz="1000" dirty="0"/>
+            <a:endParaRPr lang="en-US" sz="1000" dirty="0">
+              <a:latin typeface="Garamond"/>
+            </a:endParaRPr>
           </a:p>
         </p:txBody>
       </p:sp>
@@ -15225,7 +15757,7 @@
           <a:bodyPr wrap="square" lIns="0" tIns="0" rIns="0" bIns="0" rtlCol="0" anchor="ctr"/>
           <a:lstStyle/>
           <a:p>
-            <a:pPr algn="r" indent="0" marL="0">
+            <a:pPr marL="0" indent="0" algn="r">
               <a:buNone/>
             </a:pPr>
             <a:r>
@@ -15233,10 +15765,13 @@
                 <a:solidFill>
                   <a:srgbClr val="6B786E"/>
                 </a:solidFill>
+                <a:latin typeface="Garamond"/>
               </a:rPr>
               <a:t>Institutional Partnership Brief</a:t>
             </a:r>
-            <a:endParaRPr lang="en-US" sz="800" dirty="0"/>
+            <a:endParaRPr lang="en-US" sz="800" dirty="0">
+              <a:latin typeface="Garamond"/>
+            </a:endParaRPr>
           </a:p>
         </p:txBody>
       </p:sp>
@@ -15290,7 +15825,7 @@
           <a:bodyPr wrap="square" lIns="0" tIns="0" rIns="0" bIns="0" rtlCol="0" anchor="ctr"/>
           <a:lstStyle/>
           <a:p>
-            <a:pPr algn="ctr" indent="0" marL="0">
+            <a:pPr marL="0" indent="0" algn="ctr">
               <a:buNone/>
             </a:pPr>
             <a:r>
@@ -15298,10 +15833,13 @@
                 <a:solidFill>
                   <a:srgbClr val="123B2B"/>
                 </a:solidFill>
+                <a:latin typeface="Garamond"/>
               </a:rPr>
               <a:t>08 · ARCHITECTURE TECHNIQUE</a:t>
             </a:r>
-            <a:endParaRPr lang="en-US" sz="850" dirty="0"/>
+            <a:endParaRPr lang="en-US" sz="850" dirty="0">
+              <a:latin typeface="Garamond"/>
+            </a:endParaRPr>
           </a:p>
         </p:txBody>
       </p:sp>
@@ -15313,8 +15851,51 @@
         </p:nvSpPr>
         <p:spPr>
           <a:xfrm>
-            <a:off x="658368" y="1335024"/>
-            <a:ext cx="5669280" cy="960120"/>
+            <a:off x="680139" y="1335024"/>
+            <a:ext cx="6474823" cy="960120"/>
+          </a:xfrm>
+          <a:prstGeom prst="rect">
+            <a:avLst/>
+          </a:prstGeom>
+          <a:noFill/>
+          <a:ln/>
+        </p:spPr>
+        <p:txBody>
+          <a:bodyPr wrap="square" lIns="0" tIns="0" rIns="0" bIns="0" rtlCol="0" anchor="ctr">
+            <a:normAutofit fontScale="77500" lnSpcReduction="20000"/>
+          </a:bodyPr>
+          <a:lstStyle/>
+          <a:p>
+            <a:pPr marL="0" indent="0">
+              <a:buNone/>
+            </a:pPr>
+            <a:r>
+              <a:rPr lang="en-US" sz="3600" b="1" dirty="0">
+                <a:solidFill>
+                  <a:srgbClr val="0E1712"/>
+                </a:solidFill>
+                <a:latin typeface="Garamond"/>
+                <a:ea typeface="Aptos Display" pitchFamily="34" charset="-122"/>
+                <a:cs typeface="Aptos Display" pitchFamily="34" charset="-120"/>
+              </a:rPr>
+              <a:t>Une architecture prête pour l’intégration avec un partenaire réglementé.</a:t>
+            </a:r>
+            <a:endParaRPr lang="en-US" sz="3600" dirty="0">
+              <a:latin typeface="Garamond"/>
+            </a:endParaRPr>
+          </a:p>
+        </p:txBody>
+      </p:sp>
+      <p:sp>
+        <p:nvSpPr>
+          <p:cNvPr id="9" name="Text 6"/>
+          <p:cNvSpPr/>
+          <p:nvPr/>
+        </p:nvSpPr>
+        <p:spPr>
+          <a:xfrm>
+            <a:off x="685800" y="2450592"/>
+            <a:ext cx="5303520" cy="621792"/>
           </a:xfrm>
           <a:prstGeom prst="rect">
             <a:avLst/>
@@ -15328,48 +15909,7 @@
           </a:bodyPr>
           <a:lstStyle/>
           <a:p>
-            <a:pPr indent="0" marL="0">
-              <a:buNone/>
-            </a:pPr>
-            <a:r>
-              <a:rPr lang="en-US" sz="3600" b="1" dirty="0">
-                <a:solidFill>
-                  <a:srgbClr val="0E1712"/>
-                </a:solidFill>
-                <a:latin typeface="Aptos Display" pitchFamily="34" charset="0"/>
-                <a:ea typeface="Aptos Display" pitchFamily="34" charset="-122"/>
-                <a:cs typeface="Aptos Display" pitchFamily="34" charset="-120"/>
-              </a:rPr>
-              <a:t>Une architecture prête pour l’intégration avec un partenaire réglementé.</a:t>
-            </a:r>
-            <a:endParaRPr lang="en-US" sz="3600" dirty="0"/>
-          </a:p>
-        </p:txBody>
-      </p:sp>
-      <p:sp>
-        <p:nvSpPr>
-          <p:cNvPr id="9" name="Text 6"/>
-          <p:cNvSpPr/>
-          <p:nvPr/>
-        </p:nvSpPr>
-        <p:spPr>
-          <a:xfrm>
-            <a:off x="685800" y="2450592"/>
-            <a:ext cx="5303520" cy="621792"/>
-          </a:xfrm>
-          <a:prstGeom prst="rect">
-            <a:avLst/>
-          </a:prstGeom>
-          <a:noFill/>
-          <a:ln/>
-        </p:spPr>
-        <p:txBody>
-          <a:bodyPr wrap="square" lIns="0" tIns="0" rIns="0" bIns="0" rtlCol="0" anchor="ctr">
-            <a:normAutofit/>
-          </a:bodyPr>
-          <a:lstStyle/>
-          <a:p>
-            <a:pPr indent="0" marL="0">
+            <a:pPr marL="0" indent="0">
               <a:buNone/>
             </a:pPr>
             <a:r>
@@ -15377,10 +15917,13 @@
                 <a:solidFill>
                   <a:srgbClr val="6B786E"/>
                 </a:solidFill>
+                <a:latin typeface="Garamond"/>
               </a:rPr>
               <a:t>Les composants sont pensés pour s’interfacer avec une institution financière et un PSP.</a:t>
             </a:r>
-            <a:endParaRPr lang="en-US" sz="1500" dirty="0"/>
+            <a:endParaRPr lang="en-US" sz="1500" dirty="0">
+              <a:latin typeface="Garamond"/>
+            </a:endParaRPr>
           </a:p>
         </p:txBody>
       </p:sp>
@@ -15392,7 +15935,7 @@
         </p:nvSpPr>
         <p:spPr>
           <a:xfrm>
-            <a:off x="822960" y="2743200"/>
+            <a:off x="822960" y="3098800"/>
             <a:ext cx="1600200" cy="1143000"/>
           </a:xfrm>
           <a:prstGeom prst="roundRect">
@@ -15419,7 +15962,7 @@
         </p:nvSpPr>
         <p:spPr>
           <a:xfrm>
-            <a:off x="960120" y="2926080"/>
+            <a:off x="960120" y="3281680"/>
             <a:ext cx="1325880" cy="219456"/>
           </a:xfrm>
           <a:prstGeom prst="rect">
@@ -15432,7 +15975,7 @@
           <a:bodyPr wrap="square" lIns="0" tIns="0" rIns="0" bIns="0" rtlCol="0" anchor="ctr"/>
           <a:lstStyle/>
           <a:p>
-            <a:pPr indent="0" marL="0">
+            <a:pPr marL="0" indent="0">
               <a:buNone/>
             </a:pPr>
             <a:r>
@@ -15440,10 +15983,13 @@
                 <a:solidFill>
                   <a:srgbClr val="0E1712"/>
                 </a:solidFill>
+                <a:latin typeface="Garamond"/>
               </a:rPr>
               <a:t>Mobile App</a:t>
             </a:r>
-            <a:endParaRPr lang="en-US" sz="1250" dirty="0"/>
+            <a:endParaRPr lang="en-US" sz="1250" dirty="0">
+              <a:latin typeface="Garamond"/>
+            </a:endParaRPr>
           </a:p>
         </p:txBody>
       </p:sp>
@@ -15455,7 +16001,7 @@
         </p:nvSpPr>
         <p:spPr>
           <a:xfrm>
-            <a:off x="960120" y="3246120"/>
+            <a:off x="960120" y="3601720"/>
             <a:ext cx="1325880" cy="347472"/>
           </a:xfrm>
           <a:prstGeom prst="rect">
@@ -15470,7 +16016,7 @@
           </a:bodyPr>
           <a:lstStyle/>
           <a:p>
-            <a:pPr indent="0" marL="0">
+            <a:pPr marL="0" indent="0">
               <a:buNone/>
             </a:pPr>
             <a:r>
@@ -15478,13 +16024,16 @@
                 <a:solidFill>
                   <a:srgbClr val="6B786E"/>
                 </a:solidFill>
+                <a:latin typeface="Garamond"/>
               </a:rPr>
               <a:t>KOWO Android</a:t>
             </a:r>
-            <a:endParaRPr lang="en-US" sz="870" dirty="0"/>
-          </a:p>
-          <a:p>
-            <a:pPr indent="0" marL="0">
+            <a:endParaRPr lang="en-US" sz="870" dirty="0">
+              <a:latin typeface="Garamond"/>
+            </a:endParaRPr>
+          </a:p>
+          <a:p>
+            <a:pPr marL="0" indent="0">
               <a:buNone/>
             </a:pPr>
             <a:r>
@@ -15492,10 +16041,13 @@
                 <a:solidFill>
                   <a:srgbClr val="6B786E"/>
                 </a:solidFill>
+                <a:latin typeface="Garamond"/>
               </a:rPr>
               <a:t>UX, groupes, notifications</a:t>
             </a:r>
-            <a:endParaRPr lang="en-US" sz="870" dirty="0"/>
+            <a:endParaRPr lang="en-US" sz="870" dirty="0">
+              <a:latin typeface="Garamond"/>
+            </a:endParaRPr>
           </a:p>
         </p:txBody>
       </p:sp>
@@ -15507,7 +16059,7 @@
         </p:nvSpPr>
         <p:spPr>
           <a:xfrm>
-            <a:off x="2487168" y="3310128"/>
+            <a:off x="2487168" y="3665728"/>
             <a:ext cx="347472" cy="0"/>
           </a:xfrm>
           <a:prstGeom prst="line">
@@ -15532,7 +16084,7 @@
         </p:nvSpPr>
         <p:spPr>
           <a:xfrm>
-            <a:off x="2926080" y="2743200"/>
+            <a:off x="2926080" y="3098800"/>
             <a:ext cx="1600200" cy="1143000"/>
           </a:xfrm>
           <a:prstGeom prst="roundRect">
@@ -15559,7 +16111,7 @@
         </p:nvSpPr>
         <p:spPr>
           <a:xfrm>
-            <a:off x="3063240" y="2926080"/>
+            <a:off x="3063240" y="3281680"/>
             <a:ext cx="1325880" cy="219456"/>
           </a:xfrm>
           <a:prstGeom prst="rect">
@@ -15572,7 +16124,7 @@
           <a:bodyPr wrap="square" lIns="0" tIns="0" rIns="0" bIns="0" rtlCol="0" anchor="ctr"/>
           <a:lstStyle/>
           <a:p>
-            <a:pPr indent="0" marL="0">
+            <a:pPr marL="0" indent="0">
               <a:buNone/>
             </a:pPr>
             <a:r>
@@ -15580,10 +16132,13 @@
                 <a:solidFill>
                   <a:srgbClr val="0E1712"/>
                 </a:solidFill>
+                <a:latin typeface="Garamond"/>
               </a:rPr>
               <a:t>Backend</a:t>
             </a:r>
-            <a:endParaRPr lang="en-US" sz="1250" dirty="0"/>
+            <a:endParaRPr lang="en-US" sz="1250" dirty="0">
+              <a:latin typeface="Garamond"/>
+            </a:endParaRPr>
           </a:p>
         </p:txBody>
       </p:sp>
@@ -15595,7 +16150,7 @@
         </p:nvSpPr>
         <p:spPr>
           <a:xfrm>
-            <a:off x="3063240" y="3246120"/>
+            <a:off x="3063240" y="3601720"/>
             <a:ext cx="1325880" cy="347472"/>
           </a:xfrm>
           <a:prstGeom prst="rect">
@@ -15610,7 +16165,7 @@
           </a:bodyPr>
           <a:lstStyle/>
           <a:p>
-            <a:pPr indent="0" marL="0">
+            <a:pPr marL="0" indent="0">
               <a:buNone/>
             </a:pPr>
             <a:r>
@@ -15618,13 +16173,16 @@
                 <a:solidFill>
                   <a:srgbClr val="6B786E"/>
                 </a:solidFill>
+                <a:latin typeface="Garamond"/>
               </a:rPr>
               <a:t>Render API</a:t>
             </a:r>
-            <a:endParaRPr lang="en-US" sz="870" dirty="0"/>
-          </a:p>
-          <a:p>
-            <a:pPr indent="0" marL="0">
+            <a:endParaRPr lang="en-US" sz="870" dirty="0">
+              <a:latin typeface="Garamond"/>
+            </a:endParaRPr>
+          </a:p>
+          <a:p>
+            <a:pPr marL="0" indent="0">
               <a:buNone/>
             </a:pPr>
             <a:r>
@@ -15632,10 +16190,13 @@
                 <a:solidFill>
                   <a:srgbClr val="6B786E"/>
                 </a:solidFill>
+                <a:latin typeface="Garamond"/>
               </a:rPr>
               <a:t>Business rules &amp; orchestration</a:t>
             </a:r>
-            <a:endParaRPr lang="en-US" sz="870" dirty="0"/>
+            <a:endParaRPr lang="en-US" sz="870" dirty="0">
+              <a:latin typeface="Garamond"/>
+            </a:endParaRPr>
           </a:p>
         </p:txBody>
       </p:sp>
@@ -15647,7 +16208,7 @@
         </p:nvSpPr>
         <p:spPr>
           <a:xfrm>
-            <a:off x="4590288" y="3310128"/>
+            <a:off x="4590288" y="3665728"/>
             <a:ext cx="347472" cy="0"/>
           </a:xfrm>
           <a:prstGeom prst="line">
@@ -15672,7 +16233,7 @@
         </p:nvSpPr>
         <p:spPr>
           <a:xfrm>
-            <a:off x="5029200" y="2743200"/>
+            <a:off x="5029200" y="3098800"/>
             <a:ext cx="1600200" cy="1143000"/>
           </a:xfrm>
           <a:prstGeom prst="roundRect">
@@ -15699,7 +16260,7 @@
         </p:nvSpPr>
         <p:spPr>
           <a:xfrm>
-            <a:off x="5166360" y="2926080"/>
+            <a:off x="5166360" y="3281680"/>
             <a:ext cx="1325880" cy="219456"/>
           </a:xfrm>
           <a:prstGeom prst="rect">
@@ -15712,7 +16273,7 @@
           <a:bodyPr wrap="square" lIns="0" tIns="0" rIns="0" bIns="0" rtlCol="0" anchor="ctr"/>
           <a:lstStyle/>
           <a:p>
-            <a:pPr indent="0" marL="0">
+            <a:pPr marL="0" indent="0">
               <a:buNone/>
             </a:pPr>
             <a:r>
@@ -15720,10 +16281,13 @@
                 <a:solidFill>
                   <a:srgbClr val="0E1712"/>
                 </a:solidFill>
+                <a:latin typeface="Garamond"/>
               </a:rPr>
               <a:t>Data</a:t>
             </a:r>
-            <a:endParaRPr lang="en-US" sz="1250" dirty="0"/>
+            <a:endParaRPr lang="en-US" sz="1250" dirty="0">
+              <a:latin typeface="Garamond"/>
+            </a:endParaRPr>
           </a:p>
         </p:txBody>
       </p:sp>
@@ -15735,7 +16299,7 @@
         </p:nvSpPr>
         <p:spPr>
           <a:xfrm>
-            <a:off x="5166360" y="3246120"/>
+            <a:off x="5166360" y="3601720"/>
             <a:ext cx="1325880" cy="347472"/>
           </a:xfrm>
           <a:prstGeom prst="rect">
@@ -15750,7 +16314,7 @@
           </a:bodyPr>
           <a:lstStyle/>
           <a:p>
-            <a:pPr indent="0" marL="0">
+            <a:pPr marL="0" indent="0">
               <a:buNone/>
             </a:pPr>
             <a:r>
@@ -15758,13 +16322,16 @@
                 <a:solidFill>
                   <a:srgbClr val="6B786E"/>
                 </a:solidFill>
+                <a:latin typeface="Garamond"/>
               </a:rPr>
               <a:t>Supabase</a:t>
             </a:r>
-            <a:endParaRPr lang="en-US" sz="870" dirty="0"/>
-          </a:p>
-          <a:p>
-            <a:pPr indent="0" marL="0">
+            <a:endParaRPr lang="en-US" sz="870" dirty="0">
+              <a:latin typeface="Garamond"/>
+            </a:endParaRPr>
+          </a:p>
+          <a:p>
+            <a:pPr marL="0" indent="0">
               <a:buNone/>
             </a:pPr>
             <a:r>
@@ -15772,10 +16339,13 @@
                 <a:solidFill>
                   <a:srgbClr val="6B786E"/>
                 </a:solidFill>
+                <a:latin typeface="Garamond"/>
               </a:rPr>
               <a:t>Users, groups, histories</a:t>
             </a:r>
-            <a:endParaRPr lang="en-US" sz="870" dirty="0"/>
+            <a:endParaRPr lang="en-US" sz="870" dirty="0">
+              <a:latin typeface="Garamond"/>
+            </a:endParaRPr>
           </a:p>
         </p:txBody>
       </p:sp>
@@ -15787,7 +16357,7 @@
         </p:nvSpPr>
         <p:spPr>
           <a:xfrm>
-            <a:off x="6693408" y="3310128"/>
+            <a:off x="6693408" y="3665728"/>
             <a:ext cx="347472" cy="0"/>
           </a:xfrm>
           <a:prstGeom prst="line">
@@ -15812,7 +16382,7 @@
         </p:nvSpPr>
         <p:spPr>
           <a:xfrm>
-            <a:off x="7132320" y="2743200"/>
+            <a:off x="7132320" y="3098800"/>
             <a:ext cx="1600200" cy="1143000"/>
           </a:xfrm>
           <a:prstGeom prst="roundRect">
@@ -15839,7 +16409,7 @@
         </p:nvSpPr>
         <p:spPr>
           <a:xfrm>
-            <a:off x="7269480" y="2926080"/>
+            <a:off x="7269480" y="3281680"/>
             <a:ext cx="1325880" cy="219456"/>
           </a:xfrm>
           <a:prstGeom prst="rect">
@@ -15852,7 +16422,7 @@
           <a:bodyPr wrap="square" lIns="0" tIns="0" rIns="0" bIns="0" rtlCol="0" anchor="ctr"/>
           <a:lstStyle/>
           <a:p>
-            <a:pPr indent="0" marL="0">
+            <a:pPr marL="0" indent="0">
               <a:buNone/>
             </a:pPr>
             <a:r>
@@ -15860,10 +16430,13 @@
                 <a:solidFill>
                   <a:srgbClr val="0E1712"/>
                 </a:solidFill>
+                <a:latin typeface="Garamond"/>
               </a:rPr>
               <a:t>Security</a:t>
             </a:r>
-            <a:endParaRPr lang="en-US" sz="1250" dirty="0"/>
+            <a:endParaRPr lang="en-US" sz="1250" dirty="0">
+              <a:latin typeface="Garamond"/>
+            </a:endParaRPr>
           </a:p>
         </p:txBody>
       </p:sp>
@@ -15875,7 +16448,7 @@
         </p:nvSpPr>
         <p:spPr>
           <a:xfrm>
-            <a:off x="7269480" y="3246120"/>
+            <a:off x="7269480" y="3601720"/>
             <a:ext cx="1325880" cy="347472"/>
           </a:xfrm>
           <a:prstGeom prst="rect">
@@ -15890,7 +16463,7 @@
           </a:bodyPr>
           <a:lstStyle/>
           <a:p>
-            <a:pPr indent="0" marL="0">
+            <a:pPr marL="0" indent="0">
               <a:buNone/>
             </a:pPr>
             <a:r>
@@ -15898,13 +16471,16 @@
                 <a:solidFill>
                   <a:srgbClr val="6B786E"/>
                 </a:solidFill>
+                <a:latin typeface="Garamond"/>
               </a:rPr>
               <a:t>Sumsub + Twilio</a:t>
             </a:r>
-            <a:endParaRPr lang="en-US" sz="870" dirty="0"/>
-          </a:p>
-          <a:p>
-            <a:pPr indent="0" marL="0">
+            <a:endParaRPr lang="en-US" sz="870" dirty="0">
+              <a:latin typeface="Garamond"/>
+            </a:endParaRPr>
+          </a:p>
+          <a:p>
+            <a:pPr marL="0" indent="0">
               <a:buNone/>
             </a:pPr>
             <a:r>
@@ -15912,10 +16488,13 @@
                 <a:solidFill>
                   <a:srgbClr val="6B786E"/>
                 </a:solidFill>
+                <a:latin typeface="Garamond"/>
               </a:rPr>
               <a:t>KYC &amp; OTP</a:t>
             </a:r>
-            <a:endParaRPr lang="en-US" sz="870" dirty="0"/>
+            <a:endParaRPr lang="en-US" sz="870" dirty="0">
+              <a:latin typeface="Garamond"/>
+            </a:endParaRPr>
           </a:p>
         </p:txBody>
       </p:sp>
@@ -15927,7 +16506,7 @@
         </p:nvSpPr>
         <p:spPr>
           <a:xfrm>
-            <a:off x="8796528" y="3310128"/>
+            <a:off x="8796528" y="3665728"/>
             <a:ext cx="347472" cy="0"/>
           </a:xfrm>
           <a:prstGeom prst="line">
@@ -15952,7 +16531,7 @@
         </p:nvSpPr>
         <p:spPr>
           <a:xfrm>
-            <a:off x="9235440" y="2743200"/>
+            <a:off x="9235440" y="3098800"/>
             <a:ext cx="1600200" cy="1143000"/>
           </a:xfrm>
           <a:prstGeom prst="roundRect">
@@ -15979,7 +16558,7 @@
         </p:nvSpPr>
         <p:spPr>
           <a:xfrm>
-            <a:off x="9372600" y="2926080"/>
+            <a:off x="9372600" y="3281680"/>
             <a:ext cx="1325880" cy="219456"/>
           </a:xfrm>
           <a:prstGeom prst="rect">
@@ -15992,7 +16571,7 @@
           <a:bodyPr wrap="square" lIns="0" tIns="0" rIns="0" bIns="0" rtlCol="0" anchor="ctr"/>
           <a:lstStyle/>
           <a:p>
-            <a:pPr indent="0" marL="0">
+            <a:pPr marL="0" indent="0">
               <a:buNone/>
             </a:pPr>
             <a:r>
@@ -16000,10 +16579,13 @@
                 <a:solidFill>
                   <a:srgbClr val="FFFFFF"/>
                 </a:solidFill>
+                <a:latin typeface="Garamond"/>
               </a:rPr>
               <a:t>Partner</a:t>
             </a:r>
-            <a:endParaRPr lang="en-US" sz="1250" dirty="0"/>
+            <a:endParaRPr lang="en-US" sz="1250" dirty="0">
+              <a:latin typeface="Garamond"/>
+            </a:endParaRPr>
           </a:p>
         </p:txBody>
       </p:sp>
@@ -16015,7 +16597,7 @@
         </p:nvSpPr>
         <p:spPr>
           <a:xfrm>
-            <a:off x="9372600" y="3246120"/>
+            <a:off x="9372600" y="3601720"/>
             <a:ext cx="1325880" cy="347472"/>
           </a:xfrm>
           <a:prstGeom prst="rect">
@@ -16030,7 +16612,7 @@
           </a:bodyPr>
           <a:lstStyle/>
           <a:p>
-            <a:pPr indent="0" marL="0">
+            <a:pPr marL="0" indent="0">
               <a:buNone/>
             </a:pPr>
             <a:r>
@@ -16038,13 +16620,16 @@
                 <a:solidFill>
                   <a:srgbClr val="C7D8CF"/>
                 </a:solidFill>
+                <a:latin typeface="Garamond"/>
               </a:rPr>
               <a:t>Institution + PSP</a:t>
             </a:r>
-            <a:endParaRPr lang="en-US" sz="870" dirty="0"/>
-          </a:p>
-          <a:p>
-            <a:pPr indent="0" marL="0">
+            <a:endParaRPr lang="en-US" sz="870" dirty="0">
+              <a:latin typeface="Garamond"/>
+            </a:endParaRPr>
+          </a:p>
+          <a:p>
+            <a:pPr marL="0" indent="0">
               <a:buNone/>
             </a:pPr>
             <a:r>
@@ -16052,10 +16637,13 @@
                 <a:solidFill>
                   <a:srgbClr val="C7D8CF"/>
                 </a:solidFill>
+                <a:latin typeface="Garamond"/>
               </a:rPr>
               <a:t>Wallets &amp; payouts</a:t>
             </a:r>
-            <a:endParaRPr lang="en-US" sz="870" dirty="0"/>
+            <a:endParaRPr lang="en-US" sz="870" dirty="0">
+              <a:latin typeface="Garamond"/>
+            </a:endParaRPr>
           </a:p>
         </p:txBody>
       </p:sp>
@@ -16080,7 +16668,7 @@
           <a:bodyPr wrap="square" lIns="0" tIns="0" rIns="0" bIns="0" rtlCol="0" anchor="ctr"/>
           <a:lstStyle/>
           <a:p>
-            <a:pPr algn="ctr" indent="0" marL="0">
+            <a:pPr marL="0" indent="0" algn="ctr">
               <a:buNone/>
             </a:pPr>
             <a:r>
@@ -16088,10 +16676,13 @@
                 <a:solidFill>
                   <a:srgbClr val="123B2B"/>
                 </a:solidFill>
+                <a:latin typeface="Garamond"/>
               </a:rPr>
               <a:t>Objectif : éviter que KOWO ne devienne détenteur des fonds. La technologie orchestre, le partenaire réglementé détient et exécute.</a:t>
             </a:r>
-            <a:endParaRPr lang="en-US" sz="1400" dirty="0"/>
+            <a:endParaRPr lang="en-US" sz="1400" dirty="0">
+              <a:latin typeface="Garamond"/>
+            </a:endParaRPr>
           </a:p>
         </p:txBody>
       </p:sp>
@@ -16116,7 +16707,7 @@
           <a:bodyPr wrap="square" lIns="0" tIns="0" rIns="0" bIns="0" rtlCol="0" anchor="ctr"/>
           <a:lstStyle/>
           <a:p>
-            <a:pPr indent="0" marL="0">
+            <a:pPr marL="0" indent="0">
               <a:buNone/>
             </a:pPr>
             <a:r>
@@ -16124,10 +16715,13 @@
                 <a:solidFill>
                   <a:srgbClr val="6B786E"/>
                 </a:solidFill>
+                <a:latin typeface="Garamond"/>
               </a:rPr>
               <a:t>© 2026 KOWO · contact@getkowo.com · getkowo.com</a:t>
             </a:r>
-            <a:endParaRPr lang="en-US" sz="750" dirty="0"/>
+            <a:endParaRPr lang="en-US" sz="750" dirty="0">
+              <a:latin typeface="Garamond"/>
+            </a:endParaRPr>
           </a:p>
         </p:txBody>
       </p:sp>
@@ -16147,6 +16741,7 @@
         <a:solidFill>
           <a:srgbClr val="F6F1E7"/>
         </a:solidFill>
+        <a:effectLst/>
       </p:bgPr>
     </p:bg>
     <p:spTree>
@@ -16196,14 +16791,14 @@
       </p:sp>
       <p:pic>
         <p:nvPicPr>
-          <p:cNvPr id="3" name="Image 0" descr="/mnt/data/kowo-institutional-partnership-v2/assets/kowo-logo.jpg">    </p:cNvPr>
+          <p:cNvPr id="3" name="Image 0" descr="/mnt/data/kowo-institutional-partnership-v2/assets/kowo-logo.jpg"/>
           <p:cNvPicPr>
             <a:picLocks noChangeAspect="1"/>
           </p:cNvPicPr>
           <p:nvPr/>
         </p:nvPicPr>
         <p:blipFill>
-          <a:blip r:embed="rId1"/>
+          <a:blip r:embed="rId3"/>
           <a:stretch>
             <a:fillRect/>
           </a:stretch>
@@ -16226,7 +16821,7 @@
         </p:nvSpPr>
         <p:spPr>
           <a:xfrm>
-            <a:off x="960120" y="356616"/>
+            <a:off x="960120" y="400159"/>
             <a:ext cx="1097280" cy="256032"/>
           </a:xfrm>
           <a:prstGeom prst="rect">
@@ -16239,7 +16834,7 @@
           <a:bodyPr wrap="square" lIns="0" tIns="0" rIns="0" bIns="0" rtlCol="0" anchor="ctr"/>
           <a:lstStyle/>
           <a:p>
-            <a:pPr indent="0" marL="0">
+            <a:pPr marL="0" indent="0">
               <a:buNone/>
             </a:pPr>
             <a:r>
@@ -16247,13 +16842,15 @@
                 <a:solidFill>
                   <a:srgbClr val="123B2B"/>
                 </a:solidFill>
-                <a:latin typeface="Aptos Display" pitchFamily="34" charset="0"/>
+                <a:latin typeface="Garamond"/>
                 <a:ea typeface="Aptos Display" pitchFamily="34" charset="-122"/>
                 <a:cs typeface="Aptos Display" pitchFamily="34" charset="-120"/>
               </a:rPr>
               <a:t>KOWO</a:t>
             </a:r>
-            <a:endParaRPr lang="en-US" sz="1000" dirty="0"/>
+            <a:endParaRPr lang="en-US" sz="1000" dirty="0">
+              <a:latin typeface="Garamond"/>
+            </a:endParaRPr>
           </a:p>
         </p:txBody>
       </p:sp>
@@ -16278,7 +16875,7 @@
           <a:bodyPr wrap="square" lIns="0" tIns="0" rIns="0" bIns="0" rtlCol="0" anchor="ctr"/>
           <a:lstStyle/>
           <a:p>
-            <a:pPr algn="r" indent="0" marL="0">
+            <a:pPr marL="0" indent="0" algn="r">
               <a:buNone/>
             </a:pPr>
             <a:r>
@@ -16286,10 +16883,13 @@
                 <a:solidFill>
                   <a:srgbClr val="6B786E"/>
                 </a:solidFill>
+                <a:latin typeface="Garamond"/>
               </a:rPr>
               <a:t>Institutional Partnership Brief</a:t>
             </a:r>
-            <a:endParaRPr lang="en-US" sz="800" dirty="0"/>
+            <a:endParaRPr lang="en-US" sz="800" dirty="0">
+              <a:latin typeface="Garamond"/>
+            </a:endParaRPr>
           </a:p>
         </p:txBody>
       </p:sp>
@@ -16343,7 +16943,7 @@
           <a:bodyPr wrap="square" lIns="0" tIns="0" rIns="0" bIns="0" rtlCol="0" anchor="ctr"/>
           <a:lstStyle/>
           <a:p>
-            <a:pPr algn="ctr" indent="0" marL="0">
+            <a:pPr marL="0" indent="0" algn="ctr">
               <a:buNone/>
             </a:pPr>
             <a:r>
@@ -16351,10 +16951,13 @@
                 <a:solidFill>
                   <a:srgbClr val="123B2B"/>
                 </a:solidFill>
+                <a:latin typeface="Garamond"/>
               </a:rPr>
               <a:t>09 · SIGNAL MARCHÉ</a:t>
             </a:r>
-            <a:endParaRPr lang="en-US" sz="850" dirty="0"/>
+            <a:endParaRPr lang="en-US" sz="850" dirty="0">
+              <a:latin typeface="Garamond"/>
+            </a:endParaRPr>
           </a:p>
         </p:txBody>
       </p:sp>
@@ -16381,7 +16984,7 @@
           </a:bodyPr>
           <a:lstStyle/>
           <a:p>
-            <a:pPr indent="0" marL="0">
+            <a:pPr marL="0" indent="0">
               <a:buNone/>
             </a:pPr>
             <a:r>
@@ -16389,13 +16992,15 @@
                 <a:solidFill>
                   <a:srgbClr val="0E1712"/>
                 </a:solidFill>
-                <a:latin typeface="Aptos Display" pitchFamily="34" charset="0"/>
+                <a:latin typeface="Garamond"/>
                 <a:ea typeface="Aptos Display" pitchFamily="34" charset="-122"/>
                 <a:cs typeface="Aptos Display" pitchFamily="34" charset="-120"/>
               </a:rPr>
               <a:t>Des acteurs comparables confirment la demande.</a:t>
             </a:r>
-            <a:endParaRPr lang="en-US" sz="3600" dirty="0"/>
+            <a:endParaRPr lang="en-US" sz="3600" dirty="0">
+              <a:latin typeface="Garamond"/>
+            </a:endParaRPr>
           </a:p>
         </p:txBody>
       </p:sp>
@@ -16422,7 +17027,7 @@
           </a:bodyPr>
           <a:lstStyle/>
           <a:p>
-            <a:pPr indent="0" marL="0">
+            <a:pPr marL="0" indent="0">
               <a:buNone/>
             </a:pPr>
             <a:r>
@@ -16430,10 +17035,13 @@
                 <a:solidFill>
                   <a:srgbClr val="6B786E"/>
                 </a:solidFill>
+                <a:latin typeface="Garamond"/>
               </a:rPr>
               <a:t>Les premières solutions d’épargne numérique en Afrique de l’Ouest valident l’existence d’un besoin utilisateur fort.</a:t>
             </a:r>
-            <a:endParaRPr lang="en-US" sz="1500" dirty="0"/>
+            <a:endParaRPr lang="en-US" sz="1500" dirty="0">
+              <a:latin typeface="Garamond"/>
+            </a:endParaRPr>
           </a:p>
         </p:txBody>
       </p:sp>
@@ -16445,7 +17053,7 @@
         </p:nvSpPr>
         <p:spPr>
           <a:xfrm>
-            <a:off x="914400" y="2788920"/>
+            <a:off x="914400" y="3384006"/>
             <a:ext cx="2926080" cy="1417320"/>
           </a:xfrm>
           <a:prstGeom prst="roundRect">
@@ -16474,7 +17082,7 @@
         </p:nvSpPr>
         <p:spPr>
           <a:xfrm>
-            <a:off x="1124712" y="2990088"/>
+            <a:off x="1124712" y="3585174"/>
             <a:ext cx="320040" cy="320040"/>
           </a:xfrm>
           <a:prstGeom prst="rect">
@@ -16487,7 +17095,7 @@
           <a:bodyPr wrap="square" lIns="0" tIns="0" rIns="0" bIns="0" rtlCol="0" anchor="ctr"/>
           <a:lstStyle/>
           <a:p>
-            <a:pPr indent="0" marL="0">
+            <a:pPr marL="0" indent="0">
               <a:buNone/>
             </a:pPr>
             <a:r>
@@ -16495,10 +17103,13 @@
                 <a:solidFill>
                   <a:srgbClr val="000000"/>
                 </a:solidFill>
+                <a:latin typeface="Garamond"/>
               </a:rPr>
               <a:t>📊</a:t>
             </a:r>
-            <a:endParaRPr lang="en-US" sz="1700" dirty="0"/>
+            <a:endParaRPr lang="en-US" sz="1700" dirty="0">
+              <a:latin typeface="Garamond"/>
+            </a:endParaRPr>
           </a:p>
         </p:txBody>
       </p:sp>
@@ -16510,7 +17121,7 @@
         </p:nvSpPr>
         <p:spPr>
           <a:xfrm>
-            <a:off x="1508760" y="2990088"/>
+            <a:off x="1508760" y="3585174"/>
             <a:ext cx="2130552" cy="256032"/>
           </a:xfrm>
           <a:prstGeom prst="rect">
@@ -16523,7 +17134,7 @@
           <a:bodyPr wrap="square" lIns="0" tIns="0" rIns="0" bIns="0" rtlCol="0" anchor="ctr"/>
           <a:lstStyle/>
           <a:p>
-            <a:pPr indent="0" marL="0">
+            <a:pPr marL="0" indent="0">
               <a:buNone/>
             </a:pPr>
             <a:r>
@@ -16531,10 +17142,13 @@
                 <a:solidFill>
                   <a:srgbClr val="0E1712"/>
                 </a:solidFill>
+                <a:latin typeface="Garamond"/>
               </a:rPr>
               <a:t>Ce que le marché montre</a:t>
             </a:r>
-            <a:endParaRPr lang="en-US" sz="1500" dirty="0"/>
+            <a:endParaRPr lang="en-US" sz="1500" dirty="0">
+              <a:latin typeface="Garamond"/>
+            </a:endParaRPr>
           </a:p>
         </p:txBody>
       </p:sp>
@@ -16546,7 +17160,7 @@
         </p:nvSpPr>
         <p:spPr>
           <a:xfrm>
-            <a:off x="1124712" y="3429000"/>
+            <a:off x="1124712" y="4024086"/>
             <a:ext cx="384048" cy="32004"/>
           </a:xfrm>
           <a:prstGeom prst="rect">
@@ -16573,7 +17187,7 @@
         </p:nvSpPr>
         <p:spPr>
           <a:xfrm>
-            <a:off x="1124712" y="3566160"/>
+            <a:off x="1124712" y="4161246"/>
             <a:ext cx="2505456" cy="457200"/>
           </a:xfrm>
           <a:prstGeom prst="rect">
@@ -16588,7 +17202,7 @@
           </a:bodyPr>
           <a:lstStyle/>
           <a:p>
-            <a:pPr indent="0" marL="0">
+            <a:pPr marL="0" indent="0">
               <a:buNone/>
             </a:pPr>
             <a:r>
@@ -16596,10 +17210,13 @@
                 <a:solidFill>
                   <a:srgbClr val="6B786E"/>
                 </a:solidFill>
+                <a:latin typeface="Garamond"/>
               </a:rPr>
               <a:t>Les utilisateurs adoptent déjà des solutions digitales autour de l’épargne, des objectifs financiers et des communautés.</a:t>
             </a:r>
-            <a:endParaRPr lang="en-US" sz="1050" dirty="0"/>
+            <a:endParaRPr lang="en-US" sz="1050" dirty="0">
+              <a:latin typeface="Garamond"/>
+            </a:endParaRPr>
           </a:p>
         </p:txBody>
       </p:sp>
@@ -16611,7 +17228,7 @@
         </p:nvSpPr>
         <p:spPr>
           <a:xfrm>
-            <a:off x="4617720" y="2788920"/>
+            <a:off x="4617720" y="3384006"/>
             <a:ext cx="2926080" cy="1417320"/>
           </a:xfrm>
           <a:prstGeom prst="roundRect">
@@ -16640,7 +17257,7 @@
         </p:nvSpPr>
         <p:spPr>
           <a:xfrm>
-            <a:off x="4828032" y="2990088"/>
+            <a:off x="4828032" y="3585174"/>
             <a:ext cx="320040" cy="320040"/>
           </a:xfrm>
           <a:prstGeom prst="rect">
@@ -16653,7 +17270,7 @@
           <a:bodyPr wrap="square" lIns="0" tIns="0" rIns="0" bIns="0" rtlCol="0" anchor="ctr"/>
           <a:lstStyle/>
           <a:p>
-            <a:pPr indent="0" marL="0">
+            <a:pPr marL="0" indent="0">
               <a:buNone/>
             </a:pPr>
             <a:r>
@@ -16661,10 +17278,13 @@
                 <a:solidFill>
                   <a:srgbClr val="000000"/>
                 </a:solidFill>
+                <a:latin typeface="Garamond"/>
               </a:rPr>
               <a:t>🌍</a:t>
             </a:r>
-            <a:endParaRPr lang="en-US" sz="1700" dirty="0"/>
+            <a:endParaRPr lang="en-US" sz="1700" dirty="0">
+              <a:latin typeface="Garamond"/>
+            </a:endParaRPr>
           </a:p>
         </p:txBody>
       </p:sp>
@@ -16676,7 +17296,7 @@
         </p:nvSpPr>
         <p:spPr>
           <a:xfrm>
-            <a:off x="5212080" y="2990088"/>
+            <a:off x="5212080" y="3585174"/>
             <a:ext cx="2130552" cy="256032"/>
           </a:xfrm>
           <a:prstGeom prst="rect">
@@ -16689,7 +17309,7 @@
           <a:bodyPr wrap="square" lIns="0" tIns="0" rIns="0" bIns="0" rtlCol="0" anchor="ctr"/>
           <a:lstStyle/>
           <a:p>
-            <a:pPr indent="0" marL="0">
+            <a:pPr marL="0" indent="0">
               <a:buNone/>
             </a:pPr>
             <a:r>
@@ -16697,10 +17317,13 @@
                 <a:solidFill>
                   <a:srgbClr val="0E1712"/>
                 </a:solidFill>
+                <a:latin typeface="Garamond"/>
               </a:rPr>
               <a:t>Ce que KOWO ajoute</a:t>
             </a:r>
-            <a:endParaRPr lang="en-US" sz="1500" dirty="0"/>
+            <a:endParaRPr lang="en-US" sz="1500" dirty="0">
+              <a:latin typeface="Garamond"/>
+            </a:endParaRPr>
           </a:p>
         </p:txBody>
       </p:sp>
@@ -16712,7 +17335,7 @@
         </p:nvSpPr>
         <p:spPr>
           <a:xfrm>
-            <a:off x="4828032" y="3429000"/>
+            <a:off x="4828032" y="4024086"/>
             <a:ext cx="384048" cy="32004"/>
           </a:xfrm>
           <a:prstGeom prst="rect">
@@ -16739,7 +17362,7 @@
         </p:nvSpPr>
         <p:spPr>
           <a:xfrm>
-            <a:off x="4828032" y="3566160"/>
+            <a:off x="4828032" y="4161246"/>
             <a:ext cx="2505456" cy="457200"/>
           </a:xfrm>
           <a:prstGeom prst="rect">
@@ -16754,7 +17377,7 @@
           </a:bodyPr>
           <a:lstStyle/>
           <a:p>
-            <a:pPr indent="0" marL="0">
+            <a:pPr marL="0" indent="0">
               <a:buNone/>
             </a:pPr>
             <a:r>
@@ -16762,10 +17385,13 @@
                 <a:solidFill>
                   <a:srgbClr val="6B786E"/>
                 </a:solidFill>
+                <a:latin typeface="Garamond"/>
               </a:rPr>
               <a:t>Une approche centrée sur les communautés, la diaspora, la documentation partenaire et l’architecture réglementaire.</a:t>
             </a:r>
-            <a:endParaRPr lang="en-US" sz="1050" dirty="0"/>
+            <a:endParaRPr lang="en-US" sz="1050" dirty="0">
+              <a:latin typeface="Garamond"/>
+            </a:endParaRPr>
           </a:p>
         </p:txBody>
       </p:sp>
@@ -16777,7 +17403,7 @@
         </p:nvSpPr>
         <p:spPr>
           <a:xfrm>
-            <a:off x="8321040" y="2788920"/>
+            <a:off x="8321040" y="3384006"/>
             <a:ext cx="2926080" cy="1417320"/>
           </a:xfrm>
           <a:prstGeom prst="roundRect">
@@ -16806,7 +17432,7 @@
         </p:nvSpPr>
         <p:spPr>
           <a:xfrm>
-            <a:off x="8531352" y="2990088"/>
+            <a:off x="8531352" y="3585174"/>
             <a:ext cx="320040" cy="320040"/>
           </a:xfrm>
           <a:prstGeom prst="rect">
@@ -16819,7 +17445,7 @@
           <a:bodyPr wrap="square" lIns="0" tIns="0" rIns="0" bIns="0" rtlCol="0" anchor="ctr"/>
           <a:lstStyle/>
           <a:p>
-            <a:pPr indent="0" marL="0">
+            <a:pPr marL="0" indent="0">
               <a:buNone/>
             </a:pPr>
             <a:r>
@@ -16827,10 +17453,13 @@
                 <a:solidFill>
                   <a:srgbClr val="000000"/>
                 </a:solidFill>
+                <a:latin typeface="Garamond"/>
               </a:rPr>
               <a:t>🤝</a:t>
             </a:r>
-            <a:endParaRPr lang="en-US" sz="1700" dirty="0"/>
+            <a:endParaRPr lang="en-US" sz="1700" dirty="0">
+              <a:latin typeface="Garamond"/>
+            </a:endParaRPr>
           </a:p>
         </p:txBody>
       </p:sp>
@@ -16842,7 +17471,7 @@
         </p:nvSpPr>
         <p:spPr>
           <a:xfrm>
-            <a:off x="8915400" y="2990088"/>
+            <a:off x="8915400" y="3585174"/>
             <a:ext cx="2130552" cy="256032"/>
           </a:xfrm>
           <a:prstGeom prst="rect">
@@ -16855,7 +17484,7 @@
           <a:bodyPr wrap="square" lIns="0" tIns="0" rIns="0" bIns="0" rtlCol="0" anchor="ctr"/>
           <a:lstStyle/>
           <a:p>
-            <a:pPr indent="0" marL="0">
+            <a:pPr marL="0" indent="0">
               <a:buNone/>
             </a:pPr>
             <a:r>
@@ -16863,10 +17492,13 @@
                 <a:solidFill>
                   <a:srgbClr val="0E1712"/>
                 </a:solidFill>
+                <a:latin typeface="Garamond"/>
               </a:rPr>
               <a:t>Ce que le partenaire gagne</a:t>
             </a:r>
-            <a:endParaRPr lang="en-US" sz="1500" dirty="0"/>
+            <a:endParaRPr lang="en-US" sz="1500" dirty="0">
+              <a:latin typeface="Garamond"/>
+            </a:endParaRPr>
           </a:p>
         </p:txBody>
       </p:sp>
@@ -16878,7 +17510,7 @@
         </p:nvSpPr>
         <p:spPr>
           <a:xfrm>
-            <a:off x="8531352" y="3429000"/>
+            <a:off x="8531352" y="4024086"/>
             <a:ext cx="384048" cy="32004"/>
           </a:xfrm>
           <a:prstGeom prst="rect">
@@ -16905,7 +17537,7 @@
         </p:nvSpPr>
         <p:spPr>
           <a:xfrm>
-            <a:off x="8531352" y="3566160"/>
+            <a:off x="8531352" y="4161246"/>
             <a:ext cx="2505456" cy="457200"/>
           </a:xfrm>
           <a:prstGeom prst="rect">
@@ -16920,7 +17552,7 @@
           </a:bodyPr>
           <a:lstStyle/>
           <a:p>
-            <a:pPr indent="0" marL="0">
+            <a:pPr marL="0" indent="0">
               <a:buNone/>
             </a:pPr>
             <a:r>
@@ -16928,10 +17560,13 @@
                 <a:solidFill>
                   <a:srgbClr val="6B786E"/>
                 </a:solidFill>
+                <a:latin typeface="Garamond"/>
               </a:rPr>
               <a:t>Une interface de croissance, de collecte digitale et de distribution de services financiers sous cadre réglementé.</a:t>
             </a:r>
-            <a:endParaRPr lang="en-US" sz="1050" dirty="0"/>
+            <a:endParaRPr lang="en-US" sz="1050" dirty="0">
+              <a:latin typeface="Garamond"/>
+            </a:endParaRPr>
           </a:p>
         </p:txBody>
       </p:sp>
@@ -16956,7 +17591,7 @@
           <a:bodyPr wrap="square" lIns="0" tIns="0" rIns="0" bIns="0" rtlCol="0" anchor="ctr"/>
           <a:lstStyle/>
           <a:p>
-            <a:pPr indent="0" marL="0">
+            <a:pPr marL="0" indent="0">
               <a:buNone/>
             </a:pPr>
             <a:r>
@@ -16964,10 +17599,13 @@
                 <a:solidFill>
                   <a:srgbClr val="6B786E"/>
                 </a:solidFill>
+                <a:latin typeface="Garamond"/>
               </a:rPr>
               <a:t>© 2026 KOWO · contact@getkowo.com · getkowo.com</a:t>
             </a:r>
-            <a:endParaRPr lang="en-US" sz="750" dirty="0"/>
+            <a:endParaRPr lang="en-US" sz="750" dirty="0">
+              <a:latin typeface="Garamond"/>
+            </a:endParaRPr>
           </a:p>
         </p:txBody>
       </p:sp>
@@ -17272,4 +17910,299 @@
     </a:ext>
   </a:extLst>
 </a:theme>
+</file>
+
+<file path=ppt/theme/theme2.xml><?xml version="1.0" encoding="utf-8"?>
+<a:theme xmlns:a="http://schemas.openxmlformats.org/drawingml/2006/main" name="Thème Office">
+  <a:themeElements>
+    <a:clrScheme name="Office">
+      <a:dk1>
+        <a:sysClr val="windowText" lastClr="000000"/>
+      </a:dk1>
+      <a:lt1>
+        <a:sysClr val="window" lastClr="FFFFFF"/>
+      </a:lt1>
+      <a:dk2>
+        <a:srgbClr val="44546A"/>
+      </a:dk2>
+      <a:lt2>
+        <a:srgbClr val="E7E6E6"/>
+      </a:lt2>
+      <a:accent1>
+        <a:srgbClr val="4472C4"/>
+      </a:accent1>
+      <a:accent2>
+        <a:srgbClr val="ED7D31"/>
+      </a:accent2>
+      <a:accent3>
+        <a:srgbClr val="A5A5A5"/>
+      </a:accent3>
+      <a:accent4>
+        <a:srgbClr val="FFC000"/>
+      </a:accent4>
+      <a:accent5>
+        <a:srgbClr val="5B9BD5"/>
+      </a:accent5>
+      <a:accent6>
+        <a:srgbClr val="70AD47"/>
+      </a:accent6>
+      <a:hlink>
+        <a:srgbClr val="0563C1"/>
+      </a:hlink>
+      <a:folHlink>
+        <a:srgbClr val="954F72"/>
+      </a:folHlink>
+    </a:clrScheme>
+    <a:fontScheme name="Office">
+      <a:majorFont>
+        <a:latin typeface="Calibri Light" panose="020F0302020204030204"/>
+        <a:ea typeface=""/>
+        <a:cs typeface=""/>
+        <a:font script="Jpan" typeface="游ゴシック Light"/>
+        <a:font script="Hang" typeface="맑은 고딕"/>
+        <a:font script="Hans" typeface="等线 Light"/>
+        <a:font script="Hant" typeface="新細明體"/>
+        <a:font script="Arab" typeface="Times New Roman"/>
+        <a:font script="Hebr" typeface="Times New Roman"/>
+        <a:font script="Thai" typeface="Angsana New"/>
+        <a:font script="Ethi" typeface="Nyala"/>
+        <a:font script="Beng" typeface="Vrinda"/>
+        <a:font script="Gujr" typeface="Shruti"/>
+        <a:font script="Khmr" typeface="MoolBoran"/>
+        <a:font script="Knda" typeface="Tunga"/>
+        <a:font script="Guru" typeface="Raavi"/>
+        <a:font script="Cans" typeface="Euphemia"/>
+        <a:font script="Cher" typeface="Plantagenet Cherokee"/>
+        <a:font script="Yiii" typeface="Microsoft Yi Baiti"/>
+        <a:font script="Tibt" typeface="Microsoft Himalaya"/>
+        <a:font script="Thaa" typeface="MV Boli"/>
+        <a:font script="Deva" typeface="Mangal"/>
+        <a:font script="Telu" typeface="Gautami"/>
+        <a:font script="Taml" typeface="Latha"/>
+        <a:font script="Syrc" typeface="Estrangelo Edessa"/>
+        <a:font script="Orya" typeface="Kalinga"/>
+        <a:font script="Mlym" typeface="Kartika"/>
+        <a:font script="Laoo" typeface="DokChampa"/>
+        <a:font script="Sinh" typeface="Iskoola Pota"/>
+        <a:font script="Mong" typeface="Mongolian Baiti"/>
+        <a:font script="Viet" typeface="Times New Roman"/>
+        <a:font script="Uigh" typeface="Microsoft Uighur"/>
+        <a:font script="Geor" typeface="Sylfaen"/>
+        <a:font script="Armn" typeface="Arial"/>
+        <a:font script="Bugi" typeface="Leelawadee UI"/>
+        <a:font script="Bopo" typeface="Microsoft JhengHei"/>
+        <a:font script="Java" typeface="Javanese Text"/>
+        <a:font script="Lisu" typeface="Segoe UI"/>
+        <a:font script="Mymr" typeface="Myanmar Text"/>
+        <a:font script="Nkoo" typeface="Ebrima"/>
+        <a:font script="Olck" typeface="Nirmala UI"/>
+        <a:font script="Osma" typeface="Ebrima"/>
+        <a:font script="Phag" typeface="Phagspa"/>
+        <a:font script="Syrn" typeface="Estrangelo Edessa"/>
+        <a:font script="Syrj" typeface="Estrangelo Edessa"/>
+        <a:font script="Syre" typeface="Estrangelo Edessa"/>
+        <a:font script="Sora" typeface="Nirmala UI"/>
+        <a:font script="Tale" typeface="Microsoft Tai Le"/>
+        <a:font script="Talu" typeface="Microsoft New Tai Lue"/>
+        <a:font script="Tfng" typeface="Ebrima"/>
+      </a:majorFont>
+      <a:minorFont>
+        <a:latin typeface="Calibri" panose="020F0502020204030204"/>
+        <a:ea typeface=""/>
+        <a:cs typeface=""/>
+        <a:font script="Jpan" typeface="游ゴシック"/>
+        <a:font script="Hang" typeface="맑은 고딕"/>
+        <a:font script="Hans" typeface="等线"/>
+        <a:font script="Hant" typeface="新細明體"/>
+        <a:font script="Arab" typeface="Arial"/>
+        <a:font script="Hebr" typeface="Arial"/>
+        <a:font script="Thai" typeface="Cordia New"/>
+        <a:font script="Ethi" typeface="Nyala"/>
+        <a:font script="Beng" typeface="Vrinda"/>
+        <a:font script="Gujr" typeface="Shruti"/>
+        <a:font script="Khmr" typeface="DaunPenh"/>
+        <a:font script="Knda" typeface="Tunga"/>
+        <a:font script="Guru" typeface="Raavi"/>
+        <a:font script="Cans" typeface="Euphemia"/>
+        <a:font script="Cher" typeface="Plantagenet Cherokee"/>
+        <a:font script="Yiii" typeface="Microsoft Yi Baiti"/>
+        <a:font script="Tibt" typeface="Microsoft Himalaya"/>
+        <a:font script="Thaa" typeface="MV Boli"/>
+        <a:font script="Deva" typeface="Mangal"/>
+        <a:font script="Telu" typeface="Gautami"/>
+        <a:font script="Taml" typeface="Latha"/>
+        <a:font script="Syrc" typeface="Estrangelo Edessa"/>
+        <a:font script="Orya" typeface="Kalinga"/>
+        <a:font script="Mlym" typeface="Kartika"/>
+        <a:font script="Laoo" typeface="DokChampa"/>
+        <a:font script="Sinh" typeface="Iskoola Pota"/>
+        <a:font script="Mong" typeface="Mongolian Baiti"/>
+        <a:font script="Viet" typeface="Arial"/>
+        <a:font script="Uigh" typeface="Microsoft Uighur"/>
+        <a:font script="Geor" typeface="Sylfaen"/>
+        <a:font script="Armn" typeface="Arial"/>
+        <a:font script="Bugi" typeface="Leelawadee UI"/>
+        <a:font script="Bopo" typeface="Microsoft JhengHei"/>
+        <a:font script="Java" typeface="Javanese Text"/>
+        <a:font script="Lisu" typeface="Segoe UI"/>
+        <a:font script="Mymr" typeface="Myanmar Text"/>
+        <a:font script="Nkoo" typeface="Ebrima"/>
+        <a:font script="Olck" typeface="Nirmala UI"/>
+        <a:font script="Osma" typeface="Ebrima"/>
+        <a:font script="Phag" typeface="Phagspa"/>
+        <a:font script="Syrn" typeface="Estrangelo Edessa"/>
+        <a:font script="Syrj" typeface="Estrangelo Edessa"/>
+        <a:font script="Syre" typeface="Estrangelo Edessa"/>
+        <a:font script="Sora" typeface="Nirmala UI"/>
+        <a:font script="Tale" typeface="Microsoft Tai Le"/>
+        <a:font script="Talu" typeface="Microsoft New Tai Lue"/>
+        <a:font script="Tfng" typeface="Ebrima"/>
+      </a:minorFont>
+    </a:fontScheme>
+    <a:fmtScheme name="Office">
+      <a:fillStyleLst>
+        <a:solidFill>
+          <a:schemeClr val="phClr"/>
+        </a:solidFill>
+        <a:gradFill rotWithShape="1">
+          <a:gsLst>
+            <a:gs pos="0">
+              <a:schemeClr val="phClr">
+                <a:lumMod val="110000"/>
+                <a:satMod val="105000"/>
+                <a:tint val="67000"/>
+              </a:schemeClr>
+            </a:gs>
+            <a:gs pos="50000">
+              <a:schemeClr val="phClr">
+                <a:lumMod val="105000"/>
+                <a:satMod val="103000"/>
+                <a:tint val="73000"/>
+              </a:schemeClr>
+            </a:gs>
+            <a:gs pos="100000">
+              <a:schemeClr val="phClr">
+                <a:lumMod val="105000"/>
+                <a:satMod val="109000"/>
+                <a:tint val="81000"/>
+              </a:schemeClr>
+            </a:gs>
+          </a:gsLst>
+          <a:lin ang="5400000" scaled="0"/>
+        </a:gradFill>
+        <a:gradFill rotWithShape="1">
+          <a:gsLst>
+            <a:gs pos="0">
+              <a:schemeClr val="phClr">
+                <a:satMod val="103000"/>
+                <a:lumMod val="102000"/>
+                <a:tint val="94000"/>
+              </a:schemeClr>
+            </a:gs>
+            <a:gs pos="50000">
+              <a:schemeClr val="phClr">
+                <a:satMod val="110000"/>
+                <a:lumMod val="100000"/>
+                <a:shade val="100000"/>
+              </a:schemeClr>
+            </a:gs>
+            <a:gs pos="100000">
+              <a:schemeClr val="phClr">
+                <a:lumMod val="99000"/>
+                <a:satMod val="120000"/>
+                <a:shade val="78000"/>
+              </a:schemeClr>
+            </a:gs>
+          </a:gsLst>
+          <a:lin ang="5400000" scaled="0"/>
+        </a:gradFill>
+      </a:fillStyleLst>
+      <a:lnStyleLst>
+        <a:ln w="6350" cap="flat" cmpd="sng" algn="ctr">
+          <a:solidFill>
+            <a:schemeClr val="phClr"/>
+          </a:solidFill>
+          <a:prstDash val="solid"/>
+          <a:miter lim="800000"/>
+        </a:ln>
+        <a:ln w="12700" cap="flat" cmpd="sng" algn="ctr">
+          <a:solidFill>
+            <a:schemeClr val="phClr"/>
+          </a:solidFill>
+          <a:prstDash val="solid"/>
+          <a:miter lim="800000"/>
+        </a:ln>
+        <a:ln w="19050" cap="flat" cmpd="sng" algn="ctr">
+          <a:solidFill>
+            <a:schemeClr val="phClr"/>
+          </a:solidFill>
+          <a:prstDash val="solid"/>
+          <a:miter lim="800000"/>
+        </a:ln>
+      </a:lnStyleLst>
+      <a:effectStyleLst>
+        <a:effectStyle>
+          <a:effectLst/>
+        </a:effectStyle>
+        <a:effectStyle>
+          <a:effectLst/>
+        </a:effectStyle>
+        <a:effectStyle>
+          <a:effectLst>
+            <a:outerShdw blurRad="57150" dist="19050" dir="5400000" algn="ctr" rotWithShape="0">
+              <a:srgbClr val="000000">
+                <a:alpha val="63000"/>
+              </a:srgbClr>
+            </a:outerShdw>
+          </a:effectLst>
+        </a:effectStyle>
+      </a:effectStyleLst>
+      <a:bgFillStyleLst>
+        <a:solidFill>
+          <a:schemeClr val="phClr"/>
+        </a:solidFill>
+        <a:solidFill>
+          <a:schemeClr val="phClr">
+            <a:tint val="95000"/>
+            <a:satMod val="170000"/>
+          </a:schemeClr>
+        </a:solidFill>
+        <a:gradFill rotWithShape="1">
+          <a:gsLst>
+            <a:gs pos="0">
+              <a:schemeClr val="phClr">
+                <a:tint val="93000"/>
+                <a:satMod val="150000"/>
+                <a:shade val="98000"/>
+                <a:lumMod val="102000"/>
+              </a:schemeClr>
+            </a:gs>
+            <a:gs pos="50000">
+              <a:schemeClr val="phClr">
+                <a:tint val="98000"/>
+                <a:satMod val="130000"/>
+                <a:shade val="90000"/>
+                <a:lumMod val="103000"/>
+              </a:schemeClr>
+            </a:gs>
+            <a:gs pos="100000">
+              <a:schemeClr val="phClr">
+                <a:shade val="63000"/>
+                <a:satMod val="120000"/>
+              </a:schemeClr>
+            </a:gs>
+          </a:gsLst>
+          <a:lin ang="5400000" scaled="0"/>
+        </a:gradFill>
+      </a:bgFillStyleLst>
+    </a:fmtScheme>
+  </a:themeElements>
+  <a:objectDefaults/>
+  <a:extraClrSchemeLst/>
+  <a:extLst>
+    <a:ext uri="{05A4C25C-085E-4340-85A3-A5531E510DB2}">
+      <thm15:themeFamily xmlns:thm15="http://schemas.microsoft.com/office/thememl/2012/main" name="Office Theme" id="{62F939B6-93AF-4DB8-9C6B-D6C7DFDC589F}" vid="{4A3C46E8-61CC-4603-A589-7422A47A8E4A}"/>
+    </a:ext>
+  </a:extLst>
+</a:theme>
 </file>
--- a/partners/institutional-partnership/KOWO_Institutional_Partnership_Brief_v2_Premium.pptx
+++ b/partners/institutional-partnership/KOWO_Institutional_Partnership_Brief_v2_Premium.pptx
@@ -4,9 +4,6 @@
   <p:sldMasterIdLst>
     <p:sldMasterId id="2147483648" r:id="rId1"/>
   </p:sldMasterIdLst>
-  <p:notesMasterIdLst>
-    <p:notesMasterId r:id="rId15"/>
-  </p:notesMasterIdLst>
   <p:sldIdLst>
     <p:sldId id="256" r:id="rId2"/>
     <p:sldId id="257" r:id="rId3"/>
@@ -22,8 +19,11 @@
     <p:sldId id="267" r:id="rId13"/>
     <p:sldId id="268" r:id="rId14"/>
   </p:sldIdLst>
-  <p:sldSz cx="12192000" cy="6858000"/>
-  <p:notesSz cx="6858000" cy="12192000"/>
+  <p:notesMasterIdLst>
+    <p:notesMasterId r:id="rId15"/>
+  </p:notesMasterIdLst>
+  <p:sldSz cx="12191695" cy="6858000"/>
+  <p:notesSz cx="6858000" cy="12191695"/>
   <p:defaultTextStyle>
     <a:lvl1pPr marL="0" algn="l" defTabSz="914400" rtl="0" eaLnBrk="1" latinLnBrk="0" hangingPunct="1">
       <a:defRPr sz="1800" kern="1200">
@@ -116,20 +116,7 @@
       </a:defRPr>
     </a:lvl9pPr>
   </p:defaultTextStyle>
-  <p:extLst>
-    <p:ext uri="{EFAFB233-063F-42B5-8137-9DF3F51BA10A}">
-      <p15:sldGuideLst xmlns:p15="http://schemas.microsoft.com/office/powerpoint/2012/main"/>
-    </p:ext>
-  </p:extLst>
 </p:presentation>
-</file>
-
-<file path=ppt/revisionInfo.xml><?xml version="1.0" encoding="utf-8"?>
-<p1510:revInfo xmlns:a="http://schemas.openxmlformats.org/drawingml/2006/main" xmlns:r="http://schemas.openxmlformats.org/officeDocument/2006/relationships" xmlns:p1510="http://schemas.microsoft.com/office/powerpoint/2015/10/main">
-  <p1510:revLst>
-    <p1510:client id="{6090890E-0E50-4350-9AC2-D6921418EA18}" v="549" dt="2026-06-28T19:36:04.305"/>
-  </p1510:revLst>
-</p1510:revInfo>
 </file>
 
 <file path=ppt/notesMasters/notesMaster1.xml><?xml version="1.0" encoding="utf-8"?>
@@ -156,7 +143,7 @@
       </p:grpSpPr>
       <p:sp>
         <p:nvSpPr>
-          <p:cNvPr id="2" name="Espace réservé de l'en-tête 1"/>
+          <p:cNvPr id="2" name="Header Placeholder 1"/>
           <p:cNvSpPr>
             <a:spLocks noGrp="1"/>
           </p:cNvSpPr>
@@ -167,7 +154,7 @@
         <p:spPr>
           <a:xfrm>
             <a:off x="0" y="0"/>
-            <a:ext cx="2971800" cy="611188"/>
+            <a:ext cx="2971800" cy="458788"/>
           </a:xfrm>
           <a:prstGeom prst="rect">
             <a:avLst/>
@@ -181,13 +168,13 @@
             </a:lvl1pPr>
           </a:lstStyle>
           <a:p>
-            <a:endParaRPr lang="fr-FR"/>
-          </a:p>
-        </p:txBody>
-      </p:sp>
-      <p:sp>
-        <p:nvSpPr>
-          <p:cNvPr id="3" name="Espace réservé de la date 2"/>
+            <a:endParaRPr lang="en-US"/>
+          </a:p>
+        </p:txBody>
+      </p:sp>
+      <p:sp>
+        <p:nvSpPr>
+          <p:cNvPr id="3" name="Date Placeholder 2"/>
           <p:cNvSpPr>
             <a:spLocks noGrp="1"/>
           </p:cNvSpPr>
@@ -198,7 +185,7 @@
         <p:spPr>
           <a:xfrm>
             <a:off x="3884613" y="0"/>
-            <a:ext cx="2971800" cy="611188"/>
+            <a:ext cx="2971800" cy="458788"/>
           </a:xfrm>
           <a:prstGeom prst="rect">
             <a:avLst/>
@@ -212,16 +199,17 @@
             </a:lvl1pPr>
           </a:lstStyle>
           <a:p>
-            <a:fld id="{09CCB1A4-7164-4FB7-9602-28F96A9B7EEE}" type="datetimeFigureOut">
-              <a:t>28/06/2026</a:t>
+            <a:fld id="{5282F153-3F37-0F45-9E97-73ACFA13230C}" type="datetimeFigureOut">
+              <a:rPr lang="en-US"/>
+              <a:t>7/23/19</a:t>
             </a:fld>
-            <a:endParaRPr lang="fr-FR"/>
-          </a:p>
-        </p:txBody>
-      </p:sp>
-      <p:sp>
-        <p:nvSpPr>
-          <p:cNvPr id="4" name="Espace réservé de l'image des diapositives 3"/>
+            <a:endParaRPr lang="en-US"/>
+          </a:p>
+        </p:txBody>
+      </p:sp>
+      <p:sp>
+        <p:nvSpPr>
+          <p:cNvPr id="4" name="Slide Image Placeholder 3"/>
           <p:cNvSpPr>
             <a:spLocks noGrp="1" noRot="1" noChangeAspect="1"/>
           </p:cNvSpPr>
@@ -231,8 +219,8 @@
         </p:nvSpPr>
         <p:spPr>
           <a:xfrm>
-            <a:off x="-228600" y="1524000"/>
-            <a:ext cx="7315200" cy="4114800"/>
+            <a:off x="685800" y="1143000"/>
+            <a:ext cx="5486400" cy="3086100"/>
           </a:xfrm>
           <a:prstGeom prst="rect">
             <a:avLst/>
@@ -248,13 +236,13 @@
           <a:bodyPr vert="horz" lIns="91440" tIns="45720" rIns="91440" bIns="45720" rtlCol="0" anchor="ctr"/>
           <a:lstStyle/>
           <a:p>
-            <a:endParaRPr lang="fr-FR"/>
-          </a:p>
-        </p:txBody>
-      </p:sp>
-      <p:sp>
-        <p:nvSpPr>
-          <p:cNvPr id="5" name="Espace réservé des notes 4"/>
+            <a:endParaRPr lang="en-US"/>
+          </a:p>
+        </p:txBody>
+      </p:sp>
+      <p:sp>
+        <p:nvSpPr>
+          <p:cNvPr id="5" name="Notes Placeholder 4"/>
           <p:cNvSpPr>
             <a:spLocks noGrp="1"/>
           </p:cNvSpPr>
@@ -264,8 +252,8 @@
         </p:nvSpPr>
         <p:spPr>
           <a:xfrm>
-            <a:off x="685800" y="5867400"/>
-            <a:ext cx="5486400" cy="4800600"/>
+            <a:off x="685800" y="4400550"/>
+            <a:ext cx="5486400" cy="3600450"/>
           </a:xfrm>
           <a:prstGeom prst="rect">
             <a:avLst/>
@@ -277,43 +265,43 @@
           <a:p>
             <a:pPr lvl="0"/>
             <a:r>
-              <a:rPr lang="fr-FR"/>
-              <a:t>Cliquez pour modifier les styles du texte du masque</a:t>
+              <a:rPr lang="en-US"/>
+              <a:t>Click to edit Master text styles</a:t>
             </a:r>
           </a:p>
           <a:p>
             <a:pPr lvl="1"/>
             <a:r>
-              <a:rPr lang="fr-FR"/>
-              <a:t>Deuxième niveau</a:t>
+              <a:rPr lang="en-US"/>
+              <a:t>Second level</a:t>
             </a:r>
           </a:p>
           <a:p>
             <a:pPr lvl="2"/>
             <a:r>
-              <a:rPr lang="fr-FR"/>
-              <a:t>Troisième niveau</a:t>
+              <a:rPr lang="en-US"/>
+              <a:t>Third level</a:t>
             </a:r>
           </a:p>
           <a:p>
             <a:pPr lvl="3"/>
             <a:r>
-              <a:rPr lang="fr-FR"/>
-              <a:t>Quatrième niveau</a:t>
+              <a:rPr lang="en-US"/>
+              <a:t>Fourth level</a:t>
             </a:r>
           </a:p>
           <a:p>
             <a:pPr lvl="4"/>
             <a:r>
-              <a:rPr lang="fr-FR"/>
-              <a:t>Cinquième niveau</a:t>
-            </a:r>
-          </a:p>
-        </p:txBody>
-      </p:sp>
-      <p:sp>
-        <p:nvSpPr>
-          <p:cNvPr id="6" name="Espace réservé du pied de page 5"/>
+              <a:rPr lang="en-US"/>
+              <a:t>Fifth level</a:t>
+            </a:r>
+          </a:p>
+        </p:txBody>
+      </p:sp>
+      <p:sp>
+        <p:nvSpPr>
+          <p:cNvPr id="6" name="Footer Placeholder 5"/>
           <p:cNvSpPr>
             <a:spLocks noGrp="1"/>
           </p:cNvSpPr>
@@ -323,8 +311,8 @@
         </p:nvSpPr>
         <p:spPr>
           <a:xfrm>
-            <a:off x="0" y="11580813"/>
-            <a:ext cx="2971800" cy="611187"/>
+            <a:off x="0" y="8685213"/>
+            <a:ext cx="2971800" cy="458787"/>
           </a:xfrm>
           <a:prstGeom prst="rect">
             <a:avLst/>
@@ -338,13 +326,13 @@
             </a:lvl1pPr>
           </a:lstStyle>
           <a:p>
-            <a:endParaRPr lang="fr-FR"/>
-          </a:p>
-        </p:txBody>
-      </p:sp>
-      <p:sp>
-        <p:nvSpPr>
-          <p:cNvPr id="7" name="Espace réservé du numéro de diapositive 6"/>
+            <a:endParaRPr lang="en-US"/>
+          </a:p>
+        </p:txBody>
+      </p:sp>
+      <p:sp>
+        <p:nvSpPr>
+          <p:cNvPr id="7" name="Slide Number Placeholder 6"/>
           <p:cNvSpPr>
             <a:spLocks noGrp="1"/>
           </p:cNvSpPr>
@@ -354,8 +342,8 @@
         </p:nvSpPr>
         <p:spPr>
           <a:xfrm>
-            <a:off x="3884613" y="11580813"/>
-            <a:ext cx="2971800" cy="611187"/>
+            <a:off x="3884613" y="8685213"/>
+            <a:ext cx="2971800" cy="458787"/>
           </a:xfrm>
           <a:prstGeom prst="rect">
             <a:avLst/>
@@ -369,17 +357,18 @@
             </a:lvl1pPr>
           </a:lstStyle>
           <a:p>
-            <a:fld id="{09E6D25F-46ED-4C0D-BDB4-DE6BF78EA6E2}" type="slidenum">
-              <a:t>‹N°›</a:t>
+            <a:fld id="{CE5E9CC1-C706-0F49-92D6-E571CC5EEA8F}" type="slidenum">
+              <a:rPr lang="en-US"/>
+              <a:t>‹#›</a:t>
             </a:fld>
-            <a:endParaRPr lang="fr-FR"/>
+            <a:endParaRPr lang="en-US"/>
           </a:p>
         </p:txBody>
       </p:sp>
     </p:spTree>
     <p:extLst>
       <p:ext uri="{BB962C8B-B14F-4D97-AF65-F5344CB8AC3E}">
-        <p14:creationId xmlns:p14="http://schemas.microsoft.com/office/powerpoint/2010/main" val="4138912729"/>
+        <p14:creationId xmlns:p14="http://schemas.microsoft.com/office/powerpoint/2010/main" val="1024086991"/>
       </p:ext>
     </p:extLst>
   </p:cSld>
@@ -523,6 +512,10 @@
           <a:bodyPr/>
           <a:lstStyle/>
           <a:p>
+            <a:r>
+              <a:rPr lang="en-US" dirty="0"/>
+              <a:t/>
+            </a:r>
             <a:endParaRPr lang="en-US" dirty="0"/>
           </a:p>
         </p:txBody>
@@ -607,6 +600,10 @@
           <a:bodyPr/>
           <a:lstStyle/>
           <a:p>
+            <a:r>
+              <a:rPr lang="en-US" dirty="0"/>
+              <a:t/>
+            </a:r>
             <a:endParaRPr lang="en-US" dirty="0"/>
           </a:p>
         </p:txBody>
@@ -691,6 +688,10 @@
           <a:bodyPr/>
           <a:lstStyle/>
           <a:p>
+            <a:r>
+              <a:rPr lang="en-US" dirty="0"/>
+              <a:t/>
+            </a:r>
             <a:endParaRPr lang="en-US" dirty="0"/>
           </a:p>
         </p:txBody>
@@ -775,6 +776,10 @@
           <a:bodyPr/>
           <a:lstStyle/>
           <a:p>
+            <a:r>
+              <a:rPr lang="en-US" dirty="0"/>
+              <a:t/>
+            </a:r>
             <a:endParaRPr lang="en-US" dirty="0"/>
           </a:p>
         </p:txBody>
@@ -859,6 +864,10 @@
           <a:bodyPr/>
           <a:lstStyle/>
           <a:p>
+            <a:r>
+              <a:rPr lang="en-US" dirty="0"/>
+              <a:t/>
+            </a:r>
             <a:endParaRPr lang="en-US" dirty="0"/>
           </a:p>
         </p:txBody>
@@ -943,6 +952,10 @@
           <a:bodyPr/>
           <a:lstStyle/>
           <a:p>
+            <a:r>
+              <a:rPr lang="en-US" dirty="0"/>
+              <a:t/>
+            </a:r>
             <a:endParaRPr lang="en-US" dirty="0"/>
           </a:p>
         </p:txBody>
@@ -1027,6 +1040,10 @@
           <a:bodyPr/>
           <a:lstStyle/>
           <a:p>
+            <a:r>
+              <a:rPr lang="en-US" dirty="0"/>
+              <a:t/>
+            </a:r>
             <a:endParaRPr lang="en-US" dirty="0"/>
           </a:p>
         </p:txBody>
@@ -1111,6 +1128,10 @@
           <a:bodyPr/>
           <a:lstStyle/>
           <a:p>
+            <a:r>
+              <a:rPr lang="en-US" dirty="0"/>
+              <a:t/>
+            </a:r>
             <a:endParaRPr lang="en-US" dirty="0"/>
           </a:p>
         </p:txBody>
@@ -1195,6 +1216,10 @@
           <a:bodyPr/>
           <a:lstStyle/>
           <a:p>
+            <a:r>
+              <a:rPr lang="en-US" dirty="0"/>
+              <a:t/>
+            </a:r>
             <a:endParaRPr lang="en-US" dirty="0"/>
           </a:p>
         </p:txBody>
@@ -1279,6 +1304,10 @@
           <a:bodyPr/>
           <a:lstStyle/>
           <a:p>
+            <a:r>
+              <a:rPr lang="en-US" dirty="0"/>
+              <a:t/>
+            </a:r>
             <a:endParaRPr lang="en-US" dirty="0"/>
           </a:p>
         </p:txBody>
@@ -1363,6 +1392,10 @@
           <a:bodyPr/>
           <a:lstStyle/>
           <a:p>
+            <a:r>
+              <a:rPr lang="en-US" dirty="0"/>
+              <a:t/>
+            </a:r>
             <a:endParaRPr lang="en-US" dirty="0"/>
           </a:p>
         </p:txBody>
@@ -1447,6 +1480,10 @@
           <a:bodyPr/>
           <a:lstStyle/>
           <a:p>
+            <a:r>
+              <a:rPr lang="en-US" dirty="0"/>
+              <a:t/>
+            </a:r>
             <a:endParaRPr lang="en-US" dirty="0"/>
           </a:p>
         </p:txBody>
@@ -1531,6 +1568,10 @@
           <a:bodyPr/>
           <a:lstStyle/>
           <a:p>
+            <a:r>
+              <a:rPr lang="en-US" dirty="0"/>
+              <a:t/>
+            </a:r>
             <a:endParaRPr lang="en-US" dirty="0"/>
           </a:p>
         </p:txBody>
@@ -1604,11 +1645,6 @@
 <file path=ppt/slideMasters/slideMaster1.xml><?xml version="1.0" encoding="utf-8"?>
 <p:sldMaster xmlns:a="http://schemas.openxmlformats.org/drawingml/2006/main" xmlns:r="http://schemas.openxmlformats.org/officeDocument/2006/relationships" xmlns:p="http://schemas.openxmlformats.org/presentationml/2006/main">
   <p:cSld>
-    <p:bg>
-      <p:bgRef idx="1001">
-        <a:schemeClr val="bg1"/>
-      </p:bgRef>
-    </p:bg>
     <p:spTree>
       <p:nvGrpSpPr>
         <p:cNvPr id="1" name=""/>
@@ -1891,7 +1927,6 @@
         <a:solidFill>
           <a:srgbClr val="07150F"/>
         </a:solidFill>
-        <a:effectLst/>
       </p:bgPr>
     </p:bg>
     <p:spTree>
@@ -2666,14 +2701,14 @@
       </p:sp>
       <p:pic>
         <p:nvPicPr>
-          <p:cNvPr id="32" name="Image 0" descr="/mnt/data/kowo-institutional-partnership-v2/assets/kowo-logo.jpg"/>
+          <p:cNvPr id="32" name="Image 0" descr="/mnt/data/kowo-institutional-partnership-v2/assets/kowo-logo.jpg">    </p:cNvPr>
           <p:cNvPicPr>
             <a:picLocks noChangeAspect="1"/>
           </p:cNvPicPr>
           <p:nvPr/>
         </p:nvPicPr>
         <p:blipFill>
-          <a:blip r:embed="rId3"/>
+          <a:blip r:embed="rId1"/>
           <a:stretch>
             <a:fillRect/>
           </a:stretch>
@@ -2709,7 +2744,7 @@
           <a:bodyPr wrap="square" lIns="0" tIns="0" rIns="0" bIns="0" rtlCol="0" anchor="ctr"/>
           <a:lstStyle/>
           <a:p>
-            <a:pPr marL="0" indent="0">
+            <a:pPr indent="0" marL="0">
               <a:buNone/>
             </a:pPr>
             <a:r>
@@ -2717,15 +2752,13 @@
                 <a:solidFill>
                   <a:srgbClr val="123B2B"/>
                 </a:solidFill>
-                <a:latin typeface="Garamond"/>
+                <a:latin typeface="Aptos Display" pitchFamily="34" charset="0"/>
                 <a:ea typeface="Aptos Display" pitchFamily="34" charset="-122"/>
                 <a:cs typeface="Aptos Display" pitchFamily="34" charset="-120"/>
               </a:rPr>
               <a:t>KOWO</a:t>
             </a:r>
-            <a:endParaRPr lang="en-US" sz="1000" dirty="0">
-              <a:latin typeface="Garamond"/>
-            </a:endParaRPr>
+            <a:endParaRPr lang="en-US" sz="1000" dirty="0"/>
           </a:p>
         </p:txBody>
       </p:sp>
@@ -2750,7 +2783,7 @@
           <a:bodyPr wrap="square" lIns="0" tIns="0" rIns="0" bIns="0" rtlCol="0" anchor="ctr"/>
           <a:lstStyle/>
           <a:p>
-            <a:pPr marL="0" indent="0" algn="r">
+            <a:pPr algn="r" indent="0" marL="0">
               <a:buNone/>
             </a:pPr>
             <a:r>
@@ -2758,26 +2791,23 @@
                 <a:solidFill>
                   <a:srgbClr val="123B2B"/>
                 </a:solidFill>
-                <a:latin typeface="Garamond"/>
               </a:rPr>
               <a:t>Institutional Partnership Brief</a:t>
             </a:r>
-            <a:endParaRPr lang="en-US" sz="800" dirty="0">
-              <a:latin typeface="Garamond"/>
-            </a:endParaRPr>
+            <a:endParaRPr lang="en-US" sz="800" dirty="0"/>
           </a:p>
         </p:txBody>
       </p:sp>
       <p:pic>
         <p:nvPicPr>
-          <p:cNvPr id="35" name="Image 1" descr="/mnt/data/kowo-institutional-partnership-v2/assets/kowo-logo.jpg"/>
+          <p:cNvPr id="35" name="Image 1" descr="/mnt/data/kowo-institutional-partnership-v2/assets/kowo-logo.jpg">    </p:cNvPr>
           <p:cNvPicPr>
             <a:picLocks noChangeAspect="1"/>
           </p:cNvPicPr>
           <p:nvPr/>
         </p:nvPicPr>
         <p:blipFill>
-          <a:blip r:embed="rId3"/>
+          <a:blip r:embed="rId2"/>
           <a:stretch>
             <a:fillRect/>
           </a:stretch>
@@ -2813,7 +2843,7 @@
           <a:bodyPr wrap="square" lIns="0" tIns="0" rIns="0" bIns="0" rtlCol="0" anchor="ctr"/>
           <a:lstStyle/>
           <a:p>
-            <a:pPr marL="0" indent="0">
+            <a:pPr indent="0" marL="0">
               <a:buNone/>
             </a:pPr>
             <a:r>
@@ -2821,15 +2851,13 @@
                 <a:solidFill>
                   <a:srgbClr val="FFFFFF"/>
                 </a:solidFill>
-                <a:latin typeface="Garamond"/>
+                <a:latin typeface="Aptos Display" pitchFamily="34" charset="0"/>
                 <a:ea typeface="Aptos Display" pitchFamily="34" charset="-122"/>
                 <a:cs typeface="Aptos Display" pitchFamily="34" charset="-120"/>
               </a:rPr>
               <a:t>KOWO</a:t>
             </a:r>
-            <a:endParaRPr lang="en-US" sz="2200" dirty="0">
-              <a:latin typeface="Garamond"/>
-            </a:endParaRPr>
+            <a:endParaRPr lang="en-US" sz="2200" dirty="0"/>
           </a:p>
         </p:txBody>
       </p:sp>
@@ -2856,7 +2884,7 @@
           </a:bodyPr>
           <a:lstStyle/>
           <a:p>
-            <a:pPr marL="0" indent="0">
+            <a:pPr indent="0" marL="0">
               <a:buNone/>
             </a:pPr>
             <a:r>
@@ -2864,18 +2892,16 @@
                 <a:solidFill>
                   <a:srgbClr val="FFFFFF"/>
                 </a:solidFill>
-                <a:latin typeface="Garamond"/>
+                <a:latin typeface="Aptos Display" pitchFamily="34" charset="0"/>
                 <a:ea typeface="Aptos Display" pitchFamily="34" charset="-122"/>
                 <a:cs typeface="Aptos Display" pitchFamily="34" charset="-120"/>
               </a:rPr>
               <a:t>Institutional</a:t>
             </a:r>
-            <a:endParaRPr lang="en-US" sz="5000" dirty="0">
-              <a:latin typeface="Garamond"/>
-            </a:endParaRPr>
-          </a:p>
-          <a:p>
-            <a:pPr marL="0" indent="0">
+            <a:endParaRPr lang="en-US" sz="5000" dirty="0"/>
+          </a:p>
+          <a:p>
+            <a:pPr indent="0" marL="0">
               <a:buNone/>
             </a:pPr>
             <a:r>
@@ -2883,18 +2909,16 @@
                 <a:solidFill>
                   <a:srgbClr val="FFFFFF"/>
                 </a:solidFill>
-                <a:latin typeface="Garamond"/>
+                <a:latin typeface="Aptos Display" pitchFamily="34" charset="0"/>
                 <a:ea typeface="Aptos Display" pitchFamily="34" charset="-122"/>
                 <a:cs typeface="Aptos Display" pitchFamily="34" charset="-120"/>
               </a:rPr>
               <a:t>Partnership</a:t>
             </a:r>
-            <a:endParaRPr lang="en-US" sz="5000" dirty="0">
-              <a:latin typeface="Garamond"/>
-            </a:endParaRPr>
-          </a:p>
-          <a:p>
-            <a:pPr marL="0" indent="0">
+            <a:endParaRPr lang="en-US" sz="5000" dirty="0"/>
+          </a:p>
+          <a:p>
+            <a:pPr indent="0" marL="0">
               <a:buNone/>
             </a:pPr>
             <a:r>
@@ -2902,15 +2926,13 @@
                 <a:solidFill>
                   <a:srgbClr val="FFFFFF"/>
                 </a:solidFill>
-                <a:latin typeface="Garamond"/>
+                <a:latin typeface="Aptos Display" pitchFamily="34" charset="0"/>
                 <a:ea typeface="Aptos Display" pitchFamily="34" charset="-122"/>
                 <a:cs typeface="Aptos Display" pitchFamily="34" charset="-120"/>
               </a:rPr>
               <a:t>Brief</a:t>
             </a:r>
-            <a:endParaRPr lang="en-US" sz="5000" dirty="0">
-              <a:latin typeface="Garamond"/>
-            </a:endParaRPr>
+            <a:endParaRPr lang="en-US" sz="5000" dirty="0"/>
           </a:p>
         </p:txBody>
       </p:sp>
@@ -2937,7 +2959,7 @@
           </a:bodyPr>
           <a:lstStyle/>
           <a:p>
-            <a:pPr marL="0" indent="0">
+            <a:pPr indent="0" marL="0">
               <a:buNone/>
             </a:pPr>
             <a:r>
@@ -2945,13 +2967,10 @@
                 <a:solidFill>
                   <a:srgbClr val="C7D8CF"/>
                 </a:solidFill>
-                <a:latin typeface="Garamond"/>
               </a:rPr>
               <a:t>Une note de présentation premium destinée aux institutions financières, microfinances, banques et partenaires réglementés.</a:t>
             </a:r>
-            <a:endParaRPr lang="en-US" sz="1600" dirty="0">
-              <a:latin typeface="Garamond"/>
-            </a:endParaRPr>
+            <a:endParaRPr lang="en-US" sz="1600" dirty="0"/>
           </a:p>
         </p:txBody>
       </p:sp>
@@ -3005,7 +3024,7 @@
           <a:bodyPr wrap="square" lIns="0" tIns="0" rIns="0" bIns="0" rtlCol="0" anchor="ctr"/>
           <a:lstStyle/>
           <a:p>
-            <a:pPr marL="0" indent="0" algn="ctr">
+            <a:pPr algn="ctr" indent="0" marL="0">
               <a:buNone/>
             </a:pPr>
             <a:r>
@@ -3013,13 +3032,10 @@
                 <a:solidFill>
                   <a:srgbClr val="8DFFD3"/>
                 </a:solidFill>
-                <a:latin typeface="Garamond"/>
               </a:rPr>
               <a:t>BUILDING COMMUNITY FINANCE · AFRICA &amp; DIASPORA</a:t>
             </a:r>
-            <a:endParaRPr lang="en-US" sz="850" dirty="0">
-              <a:latin typeface="Garamond"/>
-            </a:endParaRPr>
+            <a:endParaRPr lang="en-US" sz="850" dirty="0"/>
           </a:p>
         </p:txBody>
       </p:sp>
@@ -3077,7 +3093,7 @@
           </a:bodyPr>
           <a:lstStyle/>
           <a:p>
-            <a:pPr marL="0" indent="0">
+            <a:pPr indent="0" marL="0">
               <a:buNone/>
             </a:pPr>
             <a:r>
@@ -3085,13 +3101,10 @@
                 <a:solidFill>
                   <a:srgbClr val="FFFFFF"/>
                 </a:solidFill>
-                <a:latin typeface="Garamond"/>
               </a:rPr>
               <a:t>Le bon partenaire financier permet à KOWO de rester une plateforme technologique pendant que les fonds restent portés par un acteur réglementé.</a:t>
             </a:r>
-            <a:endParaRPr lang="en-US" sz="1700" dirty="0">
-              <a:latin typeface="Garamond"/>
-            </a:endParaRPr>
+            <a:endParaRPr lang="en-US" sz="1700" dirty="0"/>
           </a:p>
         </p:txBody>
       </p:sp>
@@ -3116,7 +3129,7 @@
           <a:bodyPr wrap="square" lIns="0" tIns="0" rIns="0" bIns="0" rtlCol="0" anchor="ctr"/>
           <a:lstStyle/>
           <a:p>
-            <a:pPr marL="0" indent="0">
+            <a:pPr indent="0" marL="0">
               <a:buNone/>
             </a:pPr>
             <a:r>
@@ -3124,13 +3137,10 @@
                 <a:solidFill>
                   <a:srgbClr val="8DFFD3"/>
                 </a:solidFill>
-                <a:latin typeface="Garamond"/>
               </a:rPr>
               <a:t>Version 2.0 · 2026</a:t>
             </a:r>
-            <a:endParaRPr lang="en-US" sz="900" dirty="0">
-              <a:latin typeface="Garamond"/>
-            </a:endParaRPr>
+            <a:endParaRPr lang="en-US" sz="900" dirty="0"/>
           </a:p>
         </p:txBody>
       </p:sp>
@@ -3155,7 +3165,7 @@
           <a:bodyPr wrap="square" lIns="0" tIns="0" rIns="0" bIns="0" rtlCol="0" anchor="ctr"/>
           <a:lstStyle/>
           <a:p>
-            <a:pPr marL="0" indent="0">
+            <a:pPr indent="0" marL="0">
               <a:buNone/>
             </a:pPr>
             <a:r>
@@ -3163,13 +3173,10 @@
                 <a:solidFill>
                   <a:srgbClr val="9DB7AA"/>
                 </a:solidFill>
-                <a:latin typeface="Garamond"/>
               </a:rPr>
               <a:t>© 2026 KOWO · contact@getkowo.com · getkowo.com</a:t>
             </a:r>
-            <a:endParaRPr lang="en-US" sz="750" dirty="0">
-              <a:latin typeface="Garamond"/>
-            </a:endParaRPr>
+            <a:endParaRPr lang="en-US" sz="750" dirty="0"/>
           </a:p>
         </p:txBody>
       </p:sp>
@@ -3189,7 +3196,6 @@
         <a:solidFill>
           <a:srgbClr val="07150F"/>
         </a:solidFill>
-        <a:effectLst/>
       </p:bgPr>
     </p:bg>
     <p:spTree>
@@ -3964,14 +3970,14 @@
       </p:sp>
       <p:pic>
         <p:nvPicPr>
-          <p:cNvPr id="32" name="Image 0" descr="/mnt/data/kowo-institutional-partnership-v2/assets/kowo-logo.jpg"/>
+          <p:cNvPr id="32" name="Image 0" descr="/mnt/data/kowo-institutional-partnership-v2/assets/kowo-logo.jpg">    </p:cNvPr>
           <p:cNvPicPr>
             <a:picLocks noChangeAspect="1"/>
           </p:cNvPicPr>
           <p:nvPr/>
         </p:nvPicPr>
         <p:blipFill>
-          <a:blip r:embed="rId3"/>
+          <a:blip r:embed="rId1"/>
           <a:stretch>
             <a:fillRect/>
           </a:stretch>
@@ -3994,7 +4000,7 @@
         </p:nvSpPr>
         <p:spPr>
           <a:xfrm>
-            <a:off x="960120" y="400159"/>
+            <a:off x="960120" y="356616"/>
             <a:ext cx="1097280" cy="256032"/>
           </a:xfrm>
           <a:prstGeom prst="rect">
@@ -4007,7 +4013,7 @@
           <a:bodyPr wrap="square" lIns="0" tIns="0" rIns="0" bIns="0" rtlCol="0" anchor="ctr"/>
           <a:lstStyle/>
           <a:p>
-            <a:pPr marL="0" indent="0">
+            <a:pPr indent="0" marL="0">
               <a:buNone/>
             </a:pPr>
             <a:r>
@@ -4015,15 +4021,13 @@
                 <a:solidFill>
                   <a:srgbClr val="123B2B"/>
                 </a:solidFill>
-                <a:latin typeface="Garamond"/>
+                <a:latin typeface="Aptos Display" pitchFamily="34" charset="0"/>
                 <a:ea typeface="Aptos Display" pitchFamily="34" charset="-122"/>
                 <a:cs typeface="Aptos Display" pitchFamily="34" charset="-120"/>
               </a:rPr>
               <a:t>KOWO</a:t>
             </a:r>
-            <a:endParaRPr lang="en-US" sz="1000" dirty="0">
-              <a:latin typeface="Garamond"/>
-            </a:endParaRPr>
+            <a:endParaRPr lang="en-US" sz="1000" dirty="0"/>
           </a:p>
         </p:txBody>
       </p:sp>
@@ -4048,7 +4052,7 @@
           <a:bodyPr wrap="square" lIns="0" tIns="0" rIns="0" bIns="0" rtlCol="0" anchor="ctr"/>
           <a:lstStyle/>
           <a:p>
-            <a:pPr marL="0" indent="0" algn="r">
+            <a:pPr algn="r" indent="0" marL="0">
               <a:buNone/>
             </a:pPr>
             <a:r>
@@ -4056,13 +4060,10 @@
                 <a:solidFill>
                   <a:srgbClr val="123B2B"/>
                 </a:solidFill>
-                <a:latin typeface="Garamond"/>
               </a:rPr>
               <a:t>Institutional Partnership Brief</a:t>
             </a:r>
-            <a:endParaRPr lang="en-US" sz="800" dirty="0">
-              <a:latin typeface="Garamond"/>
-            </a:endParaRPr>
+            <a:endParaRPr lang="en-US" sz="800" dirty="0"/>
           </a:p>
         </p:txBody>
       </p:sp>
@@ -4116,7 +4117,7 @@
           <a:bodyPr wrap="square" lIns="0" tIns="0" rIns="0" bIns="0" rtlCol="0" anchor="ctr"/>
           <a:lstStyle/>
           <a:p>
-            <a:pPr marL="0" indent="0" algn="ctr">
+            <a:pPr algn="ctr" indent="0" marL="0">
               <a:buNone/>
             </a:pPr>
             <a:r>
@@ -4124,13 +4125,10 @@
                 <a:solidFill>
                   <a:srgbClr val="8DFFD3"/>
                 </a:solidFill>
-                <a:latin typeface="Garamond"/>
               </a:rPr>
               <a:t>10 · PILOTE PROPOSÉ</a:t>
             </a:r>
-            <a:endParaRPr lang="en-US" sz="850" dirty="0">
-              <a:latin typeface="Garamond"/>
-            </a:endParaRPr>
+            <a:endParaRPr lang="en-US" sz="850" dirty="0"/>
           </a:p>
         </p:txBody>
       </p:sp>
@@ -4157,7 +4155,7 @@
           </a:bodyPr>
           <a:lstStyle/>
           <a:p>
-            <a:pPr marL="0" indent="0">
+            <a:pPr indent="0" marL="0">
               <a:buNone/>
             </a:pPr>
             <a:r>
@@ -4165,15 +4163,13 @@
                 <a:solidFill>
                   <a:srgbClr val="FFFFFF"/>
                 </a:solidFill>
-                <a:latin typeface="Garamond"/>
+                <a:latin typeface="Aptos Display" pitchFamily="34" charset="0"/>
                 <a:ea typeface="Aptos Display" pitchFamily="34" charset="-122"/>
                 <a:cs typeface="Aptos Display" pitchFamily="34" charset="-120"/>
               </a:rPr>
               <a:t>Commencer petit, contrôler les risques, prouver la valeur.</a:t>
             </a:r>
-            <a:endParaRPr lang="en-US" sz="3600" dirty="0">
-              <a:latin typeface="Garamond"/>
-            </a:endParaRPr>
+            <a:endParaRPr lang="en-US" sz="3600" dirty="0"/>
           </a:p>
         </p:txBody>
       </p:sp>
@@ -4200,7 +4196,7 @@
           </a:bodyPr>
           <a:lstStyle/>
           <a:p>
-            <a:pPr marL="0" indent="0">
+            <a:pPr indent="0" marL="0">
               <a:buNone/>
             </a:pPr>
             <a:r>
@@ -4208,13 +4204,10 @@
                 <a:solidFill>
                   <a:srgbClr val="C7D8CF"/>
                 </a:solidFill>
-                <a:latin typeface="Garamond"/>
               </a:rPr>
               <a:t>Un pilote encadré permet de tester les flux, la conformité et l’adoption avant extension.</a:t>
             </a:r>
-            <a:endParaRPr lang="en-US" sz="1500" dirty="0">
-              <a:latin typeface="Garamond"/>
-            </a:endParaRPr>
+            <a:endParaRPr lang="en-US" sz="1500" dirty="0"/>
           </a:p>
         </p:txBody>
       </p:sp>
@@ -4266,7 +4259,7 @@
           <a:bodyPr wrap="square" lIns="0" tIns="0" rIns="0" bIns="0" rtlCol="0" anchor="ctr"/>
           <a:lstStyle/>
           <a:p>
-            <a:pPr marL="0" indent="0">
+            <a:pPr indent="0" marL="0">
               <a:buNone/>
             </a:pPr>
             <a:r>
@@ -4274,13 +4267,10 @@
                 <a:solidFill>
                   <a:srgbClr val="07150F"/>
                 </a:solidFill>
-                <a:latin typeface="Garamond"/>
               </a:rPr>
               <a:t>1</a:t>
             </a:r>
-            <a:endParaRPr lang="en-US" sz="1800" dirty="0">
-              <a:latin typeface="Garamond"/>
-            </a:endParaRPr>
+            <a:endParaRPr lang="en-US" sz="1800" dirty="0"/>
           </a:p>
         </p:txBody>
       </p:sp>
@@ -4305,7 +4295,7 @@
           <a:bodyPr wrap="square" lIns="0" tIns="0" rIns="0" bIns="0" rtlCol="0" anchor="ctr"/>
           <a:lstStyle/>
           <a:p>
-            <a:pPr marL="0" indent="0">
+            <a:pPr indent="0" marL="0">
               <a:buNone/>
             </a:pPr>
             <a:r>
@@ -4313,13 +4303,10 @@
                 <a:solidFill>
                   <a:srgbClr val="07150F"/>
                 </a:solidFill>
-                <a:latin typeface="Garamond"/>
               </a:rPr>
               <a:t>Cadrage</a:t>
             </a:r>
-            <a:endParaRPr lang="en-US" sz="1400" dirty="0">
-              <a:latin typeface="Garamond"/>
-            </a:endParaRPr>
+            <a:endParaRPr lang="en-US" sz="1400" dirty="0"/>
           </a:p>
         </p:txBody>
       </p:sp>
@@ -4346,7 +4333,7 @@
           </a:bodyPr>
           <a:lstStyle/>
           <a:p>
-            <a:pPr marL="0" indent="0">
+            <a:pPr indent="0" marL="0">
               <a:buNone/>
             </a:pPr>
             <a:r>
@@ -4354,13 +4341,10 @@
                 <a:solidFill>
                   <a:srgbClr val="07150F"/>
                 </a:solidFill>
-                <a:latin typeface="Garamond"/>
               </a:rPr>
               <a:t>Validation modèle, responsabilités, documents et objectifs.</a:t>
             </a:r>
-            <a:endParaRPr lang="en-US" sz="880" dirty="0">
-              <a:latin typeface="Garamond"/>
-            </a:endParaRPr>
+            <a:endParaRPr lang="en-US" sz="880" dirty="0"/>
           </a:p>
         </p:txBody>
       </p:sp>
@@ -4412,7 +4396,7 @@
           <a:bodyPr wrap="square" lIns="0" tIns="0" rIns="0" bIns="0" rtlCol="0" anchor="ctr"/>
           <a:lstStyle/>
           <a:p>
-            <a:pPr marL="0" indent="0">
+            <a:pPr indent="0" marL="0">
               <a:buNone/>
             </a:pPr>
             <a:r>
@@ -4420,13 +4404,10 @@
                 <a:solidFill>
                   <a:srgbClr val="8DFFD3"/>
                 </a:solidFill>
-                <a:latin typeface="Garamond"/>
               </a:rPr>
               <a:t>2</a:t>
             </a:r>
-            <a:endParaRPr lang="en-US" sz="1800" dirty="0">
-              <a:latin typeface="Garamond"/>
-            </a:endParaRPr>
+            <a:endParaRPr lang="en-US" sz="1800" dirty="0"/>
           </a:p>
         </p:txBody>
       </p:sp>
@@ -4451,7 +4432,7 @@
           <a:bodyPr wrap="square" lIns="0" tIns="0" rIns="0" bIns="0" rtlCol="0" anchor="ctr"/>
           <a:lstStyle/>
           <a:p>
-            <a:pPr marL="0" indent="0">
+            <a:pPr indent="0" marL="0">
               <a:buNone/>
             </a:pPr>
             <a:r>
@@ -4459,13 +4440,10 @@
                 <a:solidFill>
                   <a:srgbClr val="FFFFFF"/>
                 </a:solidFill>
-                <a:latin typeface="Garamond"/>
               </a:rPr>
               <a:t>Intégration</a:t>
             </a:r>
-            <a:endParaRPr lang="en-US" sz="1400" dirty="0">
-              <a:latin typeface="Garamond"/>
-            </a:endParaRPr>
+            <a:endParaRPr lang="en-US" sz="1400" dirty="0"/>
           </a:p>
         </p:txBody>
       </p:sp>
@@ -4492,7 +4470,7 @@
           </a:bodyPr>
           <a:lstStyle/>
           <a:p>
-            <a:pPr marL="0" indent="0">
+            <a:pPr indent="0" marL="0">
               <a:buNone/>
             </a:pPr>
             <a:r>
@@ -4500,13 +4478,10 @@
                 <a:solidFill>
                   <a:srgbClr val="C7D8CF"/>
                 </a:solidFill>
-                <a:latin typeface="Garamond"/>
               </a:rPr>
               <a:t>API, wallets, KYC, tests de paiement et réconciliation.</a:t>
             </a:r>
-            <a:endParaRPr lang="en-US" sz="880" dirty="0">
-              <a:latin typeface="Garamond"/>
-            </a:endParaRPr>
+            <a:endParaRPr lang="en-US" sz="880" dirty="0"/>
           </a:p>
         </p:txBody>
       </p:sp>
@@ -4558,7 +4533,7 @@
           <a:bodyPr wrap="square" lIns="0" tIns="0" rIns="0" bIns="0" rtlCol="0" anchor="ctr"/>
           <a:lstStyle/>
           <a:p>
-            <a:pPr marL="0" indent="0">
+            <a:pPr indent="0" marL="0">
               <a:buNone/>
             </a:pPr>
             <a:r>
@@ -4566,13 +4541,10 @@
                 <a:solidFill>
                   <a:srgbClr val="8DFFD3"/>
                 </a:solidFill>
-                <a:latin typeface="Garamond"/>
               </a:rPr>
               <a:t>3</a:t>
             </a:r>
-            <a:endParaRPr lang="en-US" sz="1800" dirty="0">
-              <a:latin typeface="Garamond"/>
-            </a:endParaRPr>
+            <a:endParaRPr lang="en-US" sz="1800" dirty="0"/>
           </a:p>
         </p:txBody>
       </p:sp>
@@ -4597,7 +4569,7 @@
           <a:bodyPr wrap="square" lIns="0" tIns="0" rIns="0" bIns="0" rtlCol="0" anchor="ctr"/>
           <a:lstStyle/>
           <a:p>
-            <a:pPr marL="0" indent="0">
+            <a:pPr indent="0" marL="0">
               <a:buNone/>
             </a:pPr>
             <a:r>
@@ -4605,13 +4577,10 @@
                 <a:solidFill>
                   <a:srgbClr val="FFFFFF"/>
                 </a:solidFill>
-                <a:latin typeface="Garamond"/>
               </a:rPr>
               <a:t>Pilote</a:t>
             </a:r>
-            <a:endParaRPr lang="en-US" sz="1400" dirty="0">
-              <a:latin typeface="Garamond"/>
-            </a:endParaRPr>
+            <a:endParaRPr lang="en-US" sz="1400" dirty="0"/>
           </a:p>
         </p:txBody>
       </p:sp>
@@ -4638,7 +4607,7 @@
           </a:bodyPr>
           <a:lstStyle/>
           <a:p>
-            <a:pPr marL="0" indent="0">
+            <a:pPr indent="0" marL="0">
               <a:buNone/>
             </a:pPr>
             <a:r>
@@ -4646,13 +4615,10 @@
                 <a:solidFill>
                   <a:srgbClr val="C7D8CF"/>
                 </a:solidFill>
-                <a:latin typeface="Garamond"/>
               </a:rPr>
               <a:t>Groupes limités, plafonds de volume, suivi opérationnel.</a:t>
             </a:r>
-            <a:endParaRPr lang="en-US" sz="880" dirty="0">
-              <a:latin typeface="Garamond"/>
-            </a:endParaRPr>
+            <a:endParaRPr lang="en-US" sz="880" dirty="0"/>
           </a:p>
         </p:txBody>
       </p:sp>
@@ -4704,7 +4670,7 @@
           <a:bodyPr wrap="square" lIns="0" tIns="0" rIns="0" bIns="0" rtlCol="0" anchor="ctr"/>
           <a:lstStyle/>
           <a:p>
-            <a:pPr marL="0" indent="0">
+            <a:pPr indent="0" marL="0">
               <a:buNone/>
             </a:pPr>
             <a:r>
@@ -4712,13 +4678,10 @@
                 <a:solidFill>
                   <a:srgbClr val="8DFFD3"/>
                 </a:solidFill>
-                <a:latin typeface="Garamond"/>
               </a:rPr>
               <a:t>4</a:t>
             </a:r>
-            <a:endParaRPr lang="en-US" sz="1800" dirty="0">
-              <a:latin typeface="Garamond"/>
-            </a:endParaRPr>
+            <a:endParaRPr lang="en-US" sz="1800" dirty="0"/>
           </a:p>
         </p:txBody>
       </p:sp>
@@ -4743,7 +4706,7 @@
           <a:bodyPr wrap="square" lIns="0" tIns="0" rIns="0" bIns="0" rtlCol="0" anchor="ctr"/>
           <a:lstStyle/>
           <a:p>
-            <a:pPr marL="0" indent="0">
+            <a:pPr indent="0" marL="0">
               <a:buNone/>
             </a:pPr>
             <a:r>
@@ -4751,13 +4714,10 @@
                 <a:solidFill>
                   <a:srgbClr val="FFFFFF"/>
                 </a:solidFill>
-                <a:latin typeface="Garamond"/>
               </a:rPr>
               <a:t>Scale</a:t>
             </a:r>
-            <a:endParaRPr lang="en-US" sz="1400" dirty="0">
-              <a:latin typeface="Garamond"/>
-            </a:endParaRPr>
+            <a:endParaRPr lang="en-US" sz="1400" dirty="0"/>
           </a:p>
         </p:txBody>
       </p:sp>
@@ -4784,7 +4744,7 @@
           </a:bodyPr>
           <a:lstStyle/>
           <a:p>
-            <a:pPr marL="0" indent="0">
+            <a:pPr indent="0" marL="0">
               <a:buNone/>
             </a:pPr>
             <a:r>
@@ -4792,13 +4752,10 @@
                 <a:solidFill>
                   <a:srgbClr val="C7D8CF"/>
                 </a:solidFill>
-                <a:latin typeface="Garamond"/>
               </a:rPr>
               <a:t>Extension progressive selon résultats et validation conformité.</a:t>
             </a:r>
-            <a:endParaRPr lang="en-US" sz="880" dirty="0">
-              <a:latin typeface="Garamond"/>
-            </a:endParaRPr>
+            <a:endParaRPr lang="en-US" sz="880" dirty="0"/>
           </a:p>
         </p:txBody>
       </p:sp>
@@ -4823,7 +4780,7 @@
           <a:bodyPr wrap="square" lIns="0" tIns="0" rIns="0" bIns="0" rtlCol="0" anchor="ctr"/>
           <a:lstStyle/>
           <a:p>
-            <a:pPr marL="0" indent="0">
+            <a:pPr indent="0" marL="0">
               <a:buNone/>
             </a:pPr>
             <a:r>
@@ -4831,13 +4788,10 @@
                 <a:solidFill>
                   <a:srgbClr val="9DB7AA"/>
                 </a:solidFill>
-                <a:latin typeface="Garamond"/>
               </a:rPr>
               <a:t>© 2026 KOWO · contact@getkowo.com · getkowo.com</a:t>
             </a:r>
-            <a:endParaRPr lang="en-US" sz="750" dirty="0">
-              <a:latin typeface="Garamond"/>
-            </a:endParaRPr>
+            <a:endParaRPr lang="en-US" sz="750" dirty="0"/>
           </a:p>
         </p:txBody>
       </p:sp>
@@ -4857,7 +4811,6 @@
         <a:solidFill>
           <a:srgbClr val="F6F1E7"/>
         </a:solidFill>
-        <a:effectLst/>
       </p:bgPr>
     </p:bg>
     <p:spTree>
@@ -4907,14 +4860,14 @@
       </p:sp>
       <p:pic>
         <p:nvPicPr>
-          <p:cNvPr id="3" name="Image 0" descr="/mnt/data/kowo-institutional-partnership-v2/assets/kowo-logo.jpg"/>
+          <p:cNvPr id="3" name="Image 0" descr="/mnt/data/kowo-institutional-partnership-v2/assets/kowo-logo.jpg">    </p:cNvPr>
           <p:cNvPicPr>
             <a:picLocks noChangeAspect="1"/>
           </p:cNvPicPr>
           <p:nvPr/>
         </p:nvPicPr>
         <p:blipFill>
-          <a:blip r:embed="rId3"/>
+          <a:blip r:embed="rId1"/>
           <a:stretch>
             <a:fillRect/>
           </a:stretch>
@@ -4937,7 +4890,7 @@
         </p:nvSpPr>
         <p:spPr>
           <a:xfrm>
-            <a:off x="960120" y="400159"/>
+            <a:off x="960120" y="356616"/>
             <a:ext cx="1097280" cy="256032"/>
           </a:xfrm>
           <a:prstGeom prst="rect">
@@ -4950,7 +4903,7 @@
           <a:bodyPr wrap="square" lIns="0" tIns="0" rIns="0" bIns="0" rtlCol="0" anchor="ctr"/>
           <a:lstStyle/>
           <a:p>
-            <a:pPr marL="0" indent="0">
+            <a:pPr indent="0" marL="0">
               <a:buNone/>
             </a:pPr>
             <a:r>
@@ -4958,15 +4911,13 @@
                 <a:solidFill>
                   <a:srgbClr val="123B2B"/>
                 </a:solidFill>
-                <a:latin typeface="Garamond"/>
+                <a:latin typeface="Aptos Display" pitchFamily="34" charset="0"/>
                 <a:ea typeface="Aptos Display" pitchFamily="34" charset="-122"/>
                 <a:cs typeface="Aptos Display" pitchFamily="34" charset="-120"/>
               </a:rPr>
               <a:t>KOWO</a:t>
             </a:r>
-            <a:endParaRPr lang="en-US" sz="1000" dirty="0">
-              <a:latin typeface="Garamond"/>
-            </a:endParaRPr>
+            <a:endParaRPr lang="en-US" sz="1000" dirty="0"/>
           </a:p>
         </p:txBody>
       </p:sp>
@@ -4991,7 +4942,7 @@
           <a:bodyPr wrap="square" lIns="0" tIns="0" rIns="0" bIns="0" rtlCol="0" anchor="ctr"/>
           <a:lstStyle/>
           <a:p>
-            <a:pPr marL="0" indent="0" algn="r">
+            <a:pPr algn="r" indent="0" marL="0">
               <a:buNone/>
             </a:pPr>
             <a:r>
@@ -4999,13 +4950,10 @@
                 <a:solidFill>
                   <a:srgbClr val="6B786E"/>
                 </a:solidFill>
-                <a:latin typeface="Garamond"/>
               </a:rPr>
               <a:t>Institutional Partnership Brief</a:t>
             </a:r>
-            <a:endParaRPr lang="en-US" sz="800" dirty="0">
-              <a:latin typeface="Garamond"/>
-            </a:endParaRPr>
+            <a:endParaRPr lang="en-US" sz="800" dirty="0"/>
           </a:p>
         </p:txBody>
       </p:sp>
@@ -5059,7 +5007,7 @@
           <a:bodyPr wrap="square" lIns="0" tIns="0" rIns="0" bIns="0" rtlCol="0" anchor="ctr"/>
           <a:lstStyle/>
           <a:p>
-            <a:pPr marL="0" indent="0" algn="ctr">
+            <a:pPr algn="ctr" indent="0" marL="0">
               <a:buNone/>
             </a:pPr>
             <a:r>
@@ -5067,13 +5015,10 @@
                 <a:solidFill>
                   <a:srgbClr val="123B2B"/>
                 </a:solidFill>
-                <a:latin typeface="Garamond"/>
               </a:rPr>
               <a:t>11 · ROADMAP</a:t>
             </a:r>
-            <a:endParaRPr lang="en-US" sz="850" dirty="0">
-              <a:latin typeface="Garamond"/>
-            </a:endParaRPr>
+            <a:endParaRPr lang="en-US" sz="850" dirty="0"/>
           </a:p>
         </p:txBody>
       </p:sp>
@@ -5100,7 +5045,7 @@
           </a:bodyPr>
           <a:lstStyle/>
           <a:p>
-            <a:pPr marL="0" indent="0">
+            <a:pPr indent="0" marL="0">
               <a:buNone/>
             </a:pPr>
             <a:r>
@@ -5108,15 +5053,13 @@
                 <a:solidFill>
                   <a:srgbClr val="0E1712"/>
                 </a:solidFill>
-                <a:latin typeface="Garamond"/>
+                <a:latin typeface="Aptos Display" pitchFamily="34" charset="0"/>
                 <a:ea typeface="Aptos Display" pitchFamily="34" charset="-122"/>
                 <a:cs typeface="Aptos Display" pitchFamily="34" charset="-120"/>
               </a:rPr>
               <a:t>Une trajectoire progressive : Bénin, UEMOA, diaspora.</a:t>
             </a:r>
-            <a:endParaRPr lang="en-US" sz="3600" dirty="0">
-              <a:latin typeface="Garamond"/>
-            </a:endParaRPr>
+            <a:endParaRPr lang="en-US" sz="3600" dirty="0"/>
           </a:p>
         </p:txBody>
       </p:sp>
@@ -5143,7 +5086,7 @@
           </a:bodyPr>
           <a:lstStyle/>
           <a:p>
-            <a:pPr marL="0" indent="0">
+            <a:pPr indent="0" marL="0">
               <a:buNone/>
             </a:pPr>
             <a:r>
@@ -5151,13 +5094,10 @@
                 <a:solidFill>
                   <a:srgbClr val="6B786E"/>
                 </a:solidFill>
-                <a:latin typeface="Garamond"/>
               </a:rPr>
               <a:t>La priorité est de bâtir un modèle conforme et reproductible avant l’expansion.</a:t>
             </a:r>
-            <a:endParaRPr lang="en-US" sz="1500" dirty="0">
-              <a:latin typeface="Garamond"/>
-            </a:endParaRPr>
+            <a:endParaRPr lang="en-US" sz="1500" dirty="0"/>
           </a:p>
         </p:txBody>
       </p:sp>
@@ -5169,7 +5109,7 @@
         </p:nvSpPr>
         <p:spPr>
           <a:xfrm>
-            <a:off x="960120" y="3323771"/>
+            <a:off x="960120" y="2743200"/>
             <a:ext cx="2834640" cy="1828800"/>
           </a:xfrm>
           <a:prstGeom prst="roundRect">
@@ -5196,7 +5136,7 @@
         </p:nvSpPr>
         <p:spPr>
           <a:xfrm>
-            <a:off x="1188720" y="3643811"/>
+            <a:off x="1188720" y="3063240"/>
             <a:ext cx="1005840" cy="292608"/>
           </a:xfrm>
           <a:prstGeom prst="rect">
@@ -5209,7 +5149,7 @@
           <a:bodyPr wrap="square" lIns="0" tIns="0" rIns="0" bIns="0" rtlCol="0" anchor="ctr"/>
           <a:lstStyle/>
           <a:p>
-            <a:pPr marL="0" indent="0">
+            <a:pPr indent="0" marL="0">
               <a:buNone/>
             </a:pPr>
             <a:r>
@@ -5217,13 +5157,10 @@
                 <a:solidFill>
                   <a:srgbClr val="8DFFD3"/>
                 </a:solidFill>
-                <a:latin typeface="Garamond"/>
               </a:rPr>
               <a:t>2026</a:t>
             </a:r>
-            <a:endParaRPr lang="en-US" sz="2200" dirty="0">
-              <a:latin typeface="Garamond"/>
-            </a:endParaRPr>
+            <a:endParaRPr lang="en-US" sz="2200" dirty="0"/>
           </a:p>
         </p:txBody>
       </p:sp>
@@ -5235,7 +5172,7 @@
         </p:nvSpPr>
         <p:spPr>
           <a:xfrm>
-            <a:off x="1188720" y="4192451"/>
+            <a:off x="1188720" y="3611880"/>
             <a:ext cx="2286000" cy="594360"/>
           </a:xfrm>
           <a:prstGeom prst="rect">
@@ -5250,7 +5187,7 @@
           </a:bodyPr>
           <a:lstStyle/>
           <a:p>
-            <a:pPr marL="0" indent="0">
+            <a:pPr indent="0" marL="0">
               <a:buNone/>
             </a:pPr>
             <a:r>
@@ -5258,16 +5195,13 @@
                 <a:solidFill>
                   <a:srgbClr val="FFFFFF"/>
                 </a:solidFill>
-                <a:latin typeface="Garamond"/>
               </a:rPr>
               <a:t>Partenaire institutionnel</a:t>
             </a:r>
-            <a:endParaRPr lang="en-US" sz="1250" dirty="0">
-              <a:latin typeface="Garamond"/>
-            </a:endParaRPr>
-          </a:p>
-          <a:p>
-            <a:pPr marL="0" indent="0">
+            <a:endParaRPr lang="en-US" sz="1250" dirty="0"/>
+          </a:p>
+          <a:p>
+            <a:pPr indent="0" marL="0">
               <a:buNone/>
             </a:pPr>
             <a:r>
@@ -5275,16 +5209,13 @@
                 <a:solidFill>
                   <a:srgbClr val="FFFFFF"/>
                 </a:solidFill>
-                <a:latin typeface="Garamond"/>
               </a:rPr>
               <a:t>Pilote contrôlé</a:t>
             </a:r>
-            <a:endParaRPr lang="en-US" sz="1250" dirty="0">
-              <a:latin typeface="Garamond"/>
-            </a:endParaRPr>
-          </a:p>
-          <a:p>
-            <a:pPr marL="0" indent="0">
+            <a:endParaRPr lang="en-US" sz="1250" dirty="0"/>
+          </a:p>
+          <a:p>
+            <a:pPr indent="0" marL="0">
               <a:buNone/>
             </a:pPr>
             <a:r>
@@ -5292,13 +5223,10 @@
                 <a:solidFill>
                   <a:srgbClr val="FFFFFF"/>
                 </a:solidFill>
-                <a:latin typeface="Garamond"/>
               </a:rPr>
               <a:t>Premiers groupes</a:t>
             </a:r>
-            <a:endParaRPr lang="en-US" sz="1250" dirty="0">
-              <a:latin typeface="Garamond"/>
-            </a:endParaRPr>
+            <a:endParaRPr lang="en-US" sz="1250" dirty="0"/>
           </a:p>
         </p:txBody>
       </p:sp>
@@ -5310,7 +5238,7 @@
         </p:nvSpPr>
         <p:spPr>
           <a:xfrm>
-            <a:off x="3867912" y="4238171"/>
+            <a:off x="3867912" y="3657600"/>
             <a:ext cx="658368" cy="0"/>
           </a:xfrm>
           <a:prstGeom prst="line">
@@ -5335,7 +5263,7 @@
         </p:nvSpPr>
         <p:spPr>
           <a:xfrm>
-            <a:off x="4663440" y="3323771"/>
+            <a:off x="4663440" y="2743200"/>
             <a:ext cx="2834640" cy="1828800"/>
           </a:xfrm>
           <a:prstGeom prst="roundRect">
@@ -5362,7 +5290,7 @@
         </p:nvSpPr>
         <p:spPr>
           <a:xfrm>
-            <a:off x="4892040" y="3643811"/>
+            <a:off x="4892040" y="3063240"/>
             <a:ext cx="1005840" cy="292608"/>
           </a:xfrm>
           <a:prstGeom prst="rect">
@@ -5375,7 +5303,7 @@
           <a:bodyPr wrap="square" lIns="0" tIns="0" rIns="0" bIns="0" rtlCol="0" anchor="ctr"/>
           <a:lstStyle/>
           <a:p>
-            <a:pPr marL="0" indent="0">
+            <a:pPr indent="0" marL="0">
               <a:buNone/>
             </a:pPr>
             <a:r>
@@ -5383,13 +5311,10 @@
                 <a:solidFill>
                   <a:srgbClr val="123B2B"/>
                 </a:solidFill>
-                <a:latin typeface="Garamond"/>
               </a:rPr>
               <a:t>2027</a:t>
             </a:r>
-            <a:endParaRPr lang="en-US" sz="2200" dirty="0">
-              <a:latin typeface="Garamond"/>
-            </a:endParaRPr>
+            <a:endParaRPr lang="en-US" sz="2200" dirty="0"/>
           </a:p>
         </p:txBody>
       </p:sp>
@@ -5401,7 +5326,7 @@
         </p:nvSpPr>
         <p:spPr>
           <a:xfrm>
-            <a:off x="4892040" y="4192451"/>
+            <a:off x="4892040" y="3611880"/>
             <a:ext cx="2286000" cy="594360"/>
           </a:xfrm>
           <a:prstGeom prst="rect">
@@ -5416,7 +5341,7 @@
           </a:bodyPr>
           <a:lstStyle/>
           <a:p>
-            <a:pPr marL="0" indent="0">
+            <a:pPr indent="0" marL="0">
               <a:buNone/>
             </a:pPr>
             <a:r>
@@ -5424,16 +5349,13 @@
                 <a:solidFill>
                   <a:srgbClr val="0E1712"/>
                 </a:solidFill>
-                <a:latin typeface="Garamond"/>
               </a:rPr>
               <a:t>Extension Bénin</a:t>
             </a:r>
-            <a:endParaRPr lang="en-US" sz="1250" dirty="0">
-              <a:latin typeface="Garamond"/>
-            </a:endParaRPr>
-          </a:p>
-          <a:p>
-            <a:pPr marL="0" indent="0">
+            <a:endParaRPr lang="en-US" sz="1250" dirty="0"/>
+          </a:p>
+          <a:p>
+            <a:pPr indent="0" marL="0">
               <a:buNone/>
             </a:pPr>
             <a:r>
@@ -5441,16 +5363,13 @@
                 <a:solidFill>
                   <a:srgbClr val="0E1712"/>
                 </a:solidFill>
-                <a:latin typeface="Garamond"/>
               </a:rPr>
               <a:t>Partenariats microfinance</a:t>
             </a:r>
-            <a:endParaRPr lang="en-US" sz="1250" dirty="0">
-              <a:latin typeface="Garamond"/>
-            </a:endParaRPr>
-          </a:p>
-          <a:p>
-            <a:pPr marL="0" indent="0">
+            <a:endParaRPr lang="en-US" sz="1250" dirty="0"/>
+          </a:p>
+          <a:p>
+            <a:pPr indent="0" marL="0">
               <a:buNone/>
             </a:pPr>
             <a:r>
@@ -5458,13 +5377,10 @@
                 <a:solidFill>
                   <a:srgbClr val="0E1712"/>
                 </a:solidFill>
-                <a:latin typeface="Garamond"/>
               </a:rPr>
               <a:t>Version iOS</a:t>
             </a:r>
-            <a:endParaRPr lang="en-US" sz="1250" dirty="0">
-              <a:latin typeface="Garamond"/>
-            </a:endParaRPr>
+            <a:endParaRPr lang="en-US" sz="1250" dirty="0"/>
           </a:p>
         </p:txBody>
       </p:sp>
@@ -5476,7 +5392,7 @@
         </p:nvSpPr>
         <p:spPr>
           <a:xfrm>
-            <a:off x="7571232" y="4238171"/>
+            <a:off x="7571232" y="3657600"/>
             <a:ext cx="658368" cy="0"/>
           </a:xfrm>
           <a:prstGeom prst="line">
@@ -5501,7 +5417,7 @@
         </p:nvSpPr>
         <p:spPr>
           <a:xfrm>
-            <a:off x="8366760" y="3323771"/>
+            <a:off x="8366760" y="2743200"/>
             <a:ext cx="2834640" cy="1828800"/>
           </a:xfrm>
           <a:prstGeom prst="roundRect">
@@ -5528,7 +5444,7 @@
         </p:nvSpPr>
         <p:spPr>
           <a:xfrm>
-            <a:off x="8595360" y="3643811"/>
+            <a:off x="8595360" y="3063240"/>
             <a:ext cx="1005840" cy="292608"/>
           </a:xfrm>
           <a:prstGeom prst="rect">
@@ -5541,7 +5457,7 @@
           <a:bodyPr wrap="square" lIns="0" tIns="0" rIns="0" bIns="0" rtlCol="0" anchor="ctr"/>
           <a:lstStyle/>
           <a:p>
-            <a:pPr marL="0" indent="0">
+            <a:pPr indent="0" marL="0">
               <a:buNone/>
             </a:pPr>
             <a:r>
@@ -5549,13 +5465,10 @@
                 <a:solidFill>
                   <a:srgbClr val="123B2B"/>
                 </a:solidFill>
-                <a:latin typeface="Garamond"/>
               </a:rPr>
               <a:t>2028</a:t>
             </a:r>
-            <a:endParaRPr lang="en-US" sz="2200" dirty="0">
-              <a:latin typeface="Garamond"/>
-            </a:endParaRPr>
+            <a:endParaRPr lang="en-US" sz="2200" dirty="0"/>
           </a:p>
         </p:txBody>
       </p:sp>
@@ -5567,7 +5480,7 @@
         </p:nvSpPr>
         <p:spPr>
           <a:xfrm>
-            <a:off x="8595360" y="4192451"/>
+            <a:off x="8595360" y="3611880"/>
             <a:ext cx="2286000" cy="594360"/>
           </a:xfrm>
           <a:prstGeom prst="rect">
@@ -5582,7 +5495,7 @@
           </a:bodyPr>
           <a:lstStyle/>
           <a:p>
-            <a:pPr marL="0" indent="0">
+            <a:pPr indent="0" marL="0">
               <a:buNone/>
             </a:pPr>
             <a:r>
@@ -5590,16 +5503,13 @@
                 <a:solidFill>
                   <a:srgbClr val="0E1712"/>
                 </a:solidFill>
-                <a:latin typeface="Garamond"/>
               </a:rPr>
               <a:t>UEMOA</a:t>
             </a:r>
-            <a:endParaRPr lang="en-US" sz="1250" dirty="0">
-              <a:latin typeface="Garamond"/>
-            </a:endParaRPr>
-          </a:p>
-          <a:p>
-            <a:pPr marL="0" indent="0">
+            <a:endParaRPr lang="en-US" sz="1250" dirty="0"/>
+          </a:p>
+          <a:p>
+            <a:pPr indent="0" marL="0">
               <a:buNone/>
             </a:pPr>
             <a:r>
@@ -5607,16 +5517,13 @@
                 <a:solidFill>
                   <a:srgbClr val="0E1712"/>
                 </a:solidFill>
-                <a:latin typeface="Garamond"/>
               </a:rPr>
               <a:t>Diaspora</a:t>
             </a:r>
-            <a:endParaRPr lang="en-US" sz="1250" dirty="0">
-              <a:latin typeface="Garamond"/>
-            </a:endParaRPr>
-          </a:p>
-          <a:p>
-            <a:pPr marL="0" indent="0">
+            <a:endParaRPr lang="en-US" sz="1250" dirty="0"/>
+          </a:p>
+          <a:p>
+            <a:pPr indent="0" marL="0">
               <a:buNone/>
             </a:pPr>
             <a:r>
@@ -5624,13 +5531,10 @@
                 <a:solidFill>
                   <a:srgbClr val="0E1712"/>
                 </a:solidFill>
-                <a:latin typeface="Garamond"/>
               </a:rPr>
               <a:t>Services financiers via partenaires agréés</a:t>
             </a:r>
-            <a:endParaRPr lang="en-US" sz="1250" dirty="0">
-              <a:latin typeface="Garamond"/>
-            </a:endParaRPr>
+            <a:endParaRPr lang="en-US" sz="1250" dirty="0"/>
           </a:p>
         </p:txBody>
       </p:sp>
@@ -5655,7 +5559,7 @@
           <a:bodyPr wrap="square" lIns="0" tIns="0" rIns="0" bIns="0" rtlCol="0" anchor="ctr"/>
           <a:lstStyle/>
           <a:p>
-            <a:pPr marL="0" indent="0">
+            <a:pPr indent="0" marL="0">
               <a:buNone/>
             </a:pPr>
             <a:r>
@@ -5663,13 +5567,10 @@
                 <a:solidFill>
                   <a:srgbClr val="6B786E"/>
                 </a:solidFill>
-                <a:latin typeface="Garamond"/>
               </a:rPr>
               <a:t>© 2026 KOWO · contact@getkowo.com · getkowo.com</a:t>
             </a:r>
-            <a:endParaRPr lang="en-US" sz="750" dirty="0">
-              <a:latin typeface="Garamond"/>
-            </a:endParaRPr>
+            <a:endParaRPr lang="en-US" sz="750" dirty="0"/>
           </a:p>
         </p:txBody>
       </p:sp>
@@ -5689,7 +5590,6 @@
         <a:solidFill>
           <a:srgbClr val="F6F1E7"/>
         </a:solidFill>
-        <a:effectLst/>
       </p:bgPr>
     </p:bg>
     <p:spTree>
@@ -5739,14 +5639,14 @@
       </p:sp>
       <p:pic>
         <p:nvPicPr>
-          <p:cNvPr id="3" name="Image 0" descr="/mnt/data/kowo-institutional-partnership-v2/assets/kowo-logo.jpg"/>
+          <p:cNvPr id="3" name="Image 0" descr="/mnt/data/kowo-institutional-partnership-v2/assets/kowo-logo.jpg">    </p:cNvPr>
           <p:cNvPicPr>
             <a:picLocks noChangeAspect="1"/>
           </p:cNvPicPr>
           <p:nvPr/>
         </p:nvPicPr>
         <p:blipFill>
-          <a:blip r:embed="rId3"/>
+          <a:blip r:embed="rId1"/>
           <a:stretch>
             <a:fillRect/>
           </a:stretch>
@@ -5769,7 +5669,7 @@
         </p:nvSpPr>
         <p:spPr>
           <a:xfrm>
-            <a:off x="960120" y="392902"/>
+            <a:off x="960120" y="356616"/>
             <a:ext cx="1097280" cy="256032"/>
           </a:xfrm>
           <a:prstGeom prst="rect">
@@ -5782,7 +5682,7 @@
           <a:bodyPr wrap="square" lIns="0" tIns="0" rIns="0" bIns="0" rtlCol="0" anchor="ctr"/>
           <a:lstStyle/>
           <a:p>
-            <a:pPr marL="0" indent="0">
+            <a:pPr indent="0" marL="0">
               <a:buNone/>
             </a:pPr>
             <a:r>
@@ -5790,15 +5690,13 @@
                 <a:solidFill>
                   <a:srgbClr val="123B2B"/>
                 </a:solidFill>
-                <a:latin typeface="Garamond"/>
+                <a:latin typeface="Aptos Display" pitchFamily="34" charset="0"/>
                 <a:ea typeface="Aptos Display" pitchFamily="34" charset="-122"/>
                 <a:cs typeface="Aptos Display" pitchFamily="34" charset="-120"/>
               </a:rPr>
               <a:t>KOWO</a:t>
             </a:r>
-            <a:endParaRPr lang="en-US" sz="1000" dirty="0">
-              <a:latin typeface="Garamond"/>
-            </a:endParaRPr>
+            <a:endParaRPr lang="en-US" sz="1000" dirty="0"/>
           </a:p>
         </p:txBody>
       </p:sp>
@@ -5823,7 +5721,7 @@
           <a:bodyPr wrap="square" lIns="0" tIns="0" rIns="0" bIns="0" rtlCol="0" anchor="ctr"/>
           <a:lstStyle/>
           <a:p>
-            <a:pPr marL="0" indent="0" algn="r">
+            <a:pPr algn="r" indent="0" marL="0">
               <a:buNone/>
             </a:pPr>
             <a:r>
@@ -5831,13 +5729,10 @@
                 <a:solidFill>
                   <a:srgbClr val="6B786E"/>
                 </a:solidFill>
-                <a:latin typeface="Garamond"/>
               </a:rPr>
               <a:t>Institutional Partnership Brief</a:t>
             </a:r>
-            <a:endParaRPr lang="en-US" sz="800" dirty="0">
-              <a:latin typeface="Garamond"/>
-            </a:endParaRPr>
+            <a:endParaRPr lang="en-US" sz="800" dirty="0"/>
           </a:p>
         </p:txBody>
       </p:sp>
@@ -5891,7 +5786,7 @@
           <a:bodyPr wrap="square" lIns="0" tIns="0" rIns="0" bIns="0" rtlCol="0" anchor="ctr"/>
           <a:lstStyle/>
           <a:p>
-            <a:pPr marL="0" indent="0" algn="ctr">
+            <a:pPr algn="ctr" indent="0" marL="0">
               <a:buNone/>
             </a:pPr>
             <a:r>
@@ -5899,13 +5794,10 @@
                 <a:solidFill>
                   <a:srgbClr val="123B2B"/>
                 </a:solidFill>
-                <a:latin typeface="Garamond"/>
               </a:rPr>
               <a:t>12 · DISCUSSION SOUHAITÉE</a:t>
             </a:r>
-            <a:endParaRPr lang="en-US" sz="850" dirty="0">
-              <a:latin typeface="Garamond"/>
-            </a:endParaRPr>
+            <a:endParaRPr lang="en-US" sz="850" dirty="0"/>
           </a:p>
         </p:txBody>
       </p:sp>
@@ -5932,7 +5824,7 @@
           </a:bodyPr>
           <a:lstStyle/>
           <a:p>
-            <a:pPr marL="0" indent="0">
+            <a:pPr indent="0" marL="0">
               <a:buNone/>
             </a:pPr>
             <a:r>
@@ -5940,15 +5832,13 @@
                 <a:solidFill>
                   <a:srgbClr val="0E1712"/>
                 </a:solidFill>
-                <a:latin typeface="Garamond"/>
+                <a:latin typeface="Aptos Display" pitchFamily="34" charset="0"/>
                 <a:ea typeface="Aptos Display" pitchFamily="34" charset="-122"/>
                 <a:cs typeface="Aptos Display" pitchFamily="34" charset="-120"/>
               </a:rPr>
               <a:t>Ce que nous aimerions explorer avec vous.</a:t>
             </a:r>
-            <a:endParaRPr lang="en-US" sz="3600" dirty="0">
-              <a:latin typeface="Garamond"/>
-            </a:endParaRPr>
+            <a:endParaRPr lang="en-US" sz="3600" dirty="0"/>
           </a:p>
         </p:txBody>
       </p:sp>
@@ -5975,7 +5865,7 @@
           </a:bodyPr>
           <a:lstStyle/>
           <a:p>
-            <a:pPr marL="0" indent="0">
+            <a:pPr indent="0" marL="0">
               <a:buNone/>
             </a:pPr>
             <a:r>
@@ -5983,13 +5873,10 @@
                 <a:solidFill>
                   <a:srgbClr val="6B786E"/>
                 </a:solidFill>
-                <a:latin typeface="Garamond"/>
               </a:rPr>
               <a:t>L’objectif est d’identifier ensemble le meilleur cadre de partenariat, sans transférer le risque réglementaire vers KOWO.</a:t>
             </a:r>
-            <a:endParaRPr lang="en-US" sz="1500" dirty="0">
-              <a:latin typeface="Garamond"/>
-            </a:endParaRPr>
+            <a:endParaRPr lang="en-US" sz="1500" dirty="0"/>
           </a:p>
         </p:txBody>
       </p:sp>
@@ -6001,7 +5888,7 @@
         </p:nvSpPr>
         <p:spPr>
           <a:xfrm>
-            <a:off x="822960" y="3381829"/>
+            <a:off x="822960" y="2743200"/>
             <a:ext cx="2606040" cy="1417320"/>
           </a:xfrm>
           <a:prstGeom prst="roundRect">
@@ -6030,7 +5917,7 @@
         </p:nvSpPr>
         <p:spPr>
           <a:xfrm>
-            <a:off x="1033272" y="3582997"/>
+            <a:off x="1033272" y="2944368"/>
             <a:ext cx="320040" cy="320040"/>
           </a:xfrm>
           <a:prstGeom prst="rect">
@@ -6043,7 +5930,7 @@
           <a:bodyPr wrap="square" lIns="0" tIns="0" rIns="0" bIns="0" rtlCol="0" anchor="ctr"/>
           <a:lstStyle/>
           <a:p>
-            <a:pPr marL="0" indent="0">
+            <a:pPr indent="0" marL="0">
               <a:buNone/>
             </a:pPr>
             <a:r>
@@ -6051,13 +5938,10 @@
                 <a:solidFill>
                   <a:srgbClr val="000000"/>
                 </a:solidFill>
-                <a:latin typeface="Garamond"/>
               </a:rPr>
               <a:t>⚖️</a:t>
             </a:r>
-            <a:endParaRPr lang="en-US" sz="1700" dirty="0">
-              <a:latin typeface="Garamond"/>
-            </a:endParaRPr>
+            <a:endParaRPr lang="en-US" sz="1700" dirty="0"/>
           </a:p>
         </p:txBody>
       </p:sp>
@@ -6069,7 +5953,7 @@
         </p:nvSpPr>
         <p:spPr>
           <a:xfrm>
-            <a:off x="1417320" y="3582997"/>
+            <a:off x="1417320" y="2944368"/>
             <a:ext cx="1810512" cy="256032"/>
           </a:xfrm>
           <a:prstGeom prst="rect">
@@ -6082,7 +5966,7 @@
           <a:bodyPr wrap="square" lIns="0" tIns="0" rIns="0" bIns="0" rtlCol="0" anchor="ctr"/>
           <a:lstStyle/>
           <a:p>
-            <a:pPr marL="0" indent="0">
+            <a:pPr indent="0" marL="0">
               <a:buNone/>
             </a:pPr>
             <a:r>
@@ -6090,13 +5974,10 @@
                 <a:solidFill>
                   <a:srgbClr val="0E1712"/>
                 </a:solidFill>
-                <a:latin typeface="Garamond"/>
               </a:rPr>
               <a:t>Cadre juridique</a:t>
             </a:r>
-            <a:endParaRPr lang="en-US" sz="1500" dirty="0">
-              <a:latin typeface="Garamond"/>
-            </a:endParaRPr>
+            <a:endParaRPr lang="en-US" sz="1500" dirty="0"/>
           </a:p>
         </p:txBody>
       </p:sp>
@@ -6108,7 +5989,7 @@
         </p:nvSpPr>
         <p:spPr>
           <a:xfrm>
-            <a:off x="1033272" y="4021909"/>
+            <a:off x="1033272" y="3383280"/>
             <a:ext cx="384048" cy="32004"/>
           </a:xfrm>
           <a:prstGeom prst="rect">
@@ -6135,7 +6016,7 @@
         </p:nvSpPr>
         <p:spPr>
           <a:xfrm>
-            <a:off x="1033272" y="4159069"/>
+            <a:off x="1033272" y="3520440"/>
             <a:ext cx="2185416" cy="457200"/>
           </a:xfrm>
           <a:prstGeom prst="rect">
@@ -6150,7 +6031,7 @@
           </a:bodyPr>
           <a:lstStyle/>
           <a:p>
-            <a:pPr marL="0" indent="0">
+            <a:pPr indent="0" marL="0">
               <a:buNone/>
             </a:pPr>
             <a:r>
@@ -6158,13 +6039,10 @@
                 <a:solidFill>
                   <a:srgbClr val="6B786E"/>
                 </a:solidFill>
-                <a:latin typeface="Garamond"/>
               </a:rPr>
               <a:t>Modèle contractuel, responsabilités et limites de rôle.</a:t>
             </a:r>
-            <a:endParaRPr lang="en-US" sz="1050" dirty="0">
-              <a:latin typeface="Garamond"/>
-            </a:endParaRPr>
+            <a:endParaRPr lang="en-US" sz="1050" dirty="0"/>
           </a:p>
         </p:txBody>
       </p:sp>
@@ -6176,7 +6054,7 @@
         </p:nvSpPr>
         <p:spPr>
           <a:xfrm>
-            <a:off x="3749040" y="3381829"/>
+            <a:off x="3749040" y="2743200"/>
             <a:ext cx="2606040" cy="1417320"/>
           </a:xfrm>
           <a:prstGeom prst="roundRect">
@@ -6205,7 +6083,7 @@
         </p:nvSpPr>
         <p:spPr>
           <a:xfrm>
-            <a:off x="3959352" y="3582997"/>
+            <a:off x="3959352" y="2944368"/>
             <a:ext cx="320040" cy="320040"/>
           </a:xfrm>
           <a:prstGeom prst="rect">
@@ -6218,7 +6096,7 @@
           <a:bodyPr wrap="square" lIns="0" tIns="0" rIns="0" bIns="0" rtlCol="0" anchor="ctr"/>
           <a:lstStyle/>
           <a:p>
-            <a:pPr marL="0" indent="0">
+            <a:pPr indent="0" marL="0">
               <a:buNone/>
             </a:pPr>
             <a:r>
@@ -6226,13 +6104,10 @@
                 <a:solidFill>
                   <a:srgbClr val="000000"/>
                 </a:solidFill>
-                <a:latin typeface="Garamond"/>
               </a:rPr>
               <a:t>💼</a:t>
             </a:r>
-            <a:endParaRPr lang="en-US" sz="1700" dirty="0">
-              <a:latin typeface="Garamond"/>
-            </a:endParaRPr>
+            <a:endParaRPr lang="en-US" sz="1700" dirty="0"/>
           </a:p>
         </p:txBody>
       </p:sp>
@@ -6244,7 +6119,7 @@
         </p:nvSpPr>
         <p:spPr>
           <a:xfrm>
-            <a:off x="4343400" y="3582997"/>
+            <a:off x="4343400" y="2944368"/>
             <a:ext cx="1810512" cy="256032"/>
           </a:xfrm>
           <a:prstGeom prst="rect">
@@ -6257,7 +6132,7 @@
           <a:bodyPr wrap="square" lIns="0" tIns="0" rIns="0" bIns="0" rtlCol="0" anchor="ctr"/>
           <a:lstStyle/>
           <a:p>
-            <a:pPr marL="0" indent="0">
+            <a:pPr indent="0" marL="0">
               <a:buNone/>
             </a:pPr>
             <a:r>
@@ -6265,13 +6140,10 @@
                 <a:solidFill>
                   <a:srgbClr val="0E1712"/>
                 </a:solidFill>
-                <a:latin typeface="Garamond"/>
               </a:rPr>
               <a:t>Wallets / comptes</a:t>
             </a:r>
-            <a:endParaRPr lang="en-US" sz="1500" dirty="0">
-              <a:latin typeface="Garamond"/>
-            </a:endParaRPr>
+            <a:endParaRPr lang="en-US" sz="1500" dirty="0"/>
           </a:p>
         </p:txBody>
       </p:sp>
@@ -6283,7 +6155,7 @@
         </p:nvSpPr>
         <p:spPr>
           <a:xfrm>
-            <a:off x="3959352" y="4021909"/>
+            <a:off x="3959352" y="3383280"/>
             <a:ext cx="384048" cy="32004"/>
           </a:xfrm>
           <a:prstGeom prst="rect">
@@ -6310,7 +6182,7 @@
         </p:nvSpPr>
         <p:spPr>
           <a:xfrm>
-            <a:off x="3959352" y="4159069"/>
+            <a:off x="3959352" y="3520440"/>
             <a:ext cx="2185416" cy="457200"/>
           </a:xfrm>
           <a:prstGeom prst="rect">
@@ -6325,7 +6197,7 @@
           </a:bodyPr>
           <a:lstStyle/>
           <a:p>
-            <a:pPr marL="0" indent="0">
+            <a:pPr indent="0" marL="0">
               <a:buNone/>
             </a:pPr>
             <a:r>
@@ -6333,13 +6205,10 @@
                 <a:solidFill>
                   <a:srgbClr val="6B786E"/>
                 </a:solidFill>
-                <a:latin typeface="Garamond"/>
               </a:rPr>
               <a:t>Ouverture, tenue, plafonds et règles de fonctionnement.</a:t>
             </a:r>
-            <a:endParaRPr lang="en-US" sz="1050" dirty="0">
-              <a:latin typeface="Garamond"/>
-            </a:endParaRPr>
+            <a:endParaRPr lang="en-US" sz="1050" dirty="0"/>
           </a:p>
         </p:txBody>
       </p:sp>
@@ -6351,7 +6220,7 @@
         </p:nvSpPr>
         <p:spPr>
           <a:xfrm>
-            <a:off x="6675120" y="3381829"/>
+            <a:off x="6675120" y="2743200"/>
             <a:ext cx="2606040" cy="1417320"/>
           </a:xfrm>
           <a:prstGeom prst="roundRect">
@@ -6380,7 +6249,7 @@
         </p:nvSpPr>
         <p:spPr>
           <a:xfrm>
-            <a:off x="6885432" y="3582997"/>
+            <a:off x="6885432" y="2944368"/>
             <a:ext cx="320040" cy="320040"/>
           </a:xfrm>
           <a:prstGeom prst="rect">
@@ -6393,7 +6262,7 @@
           <a:bodyPr wrap="square" lIns="0" tIns="0" rIns="0" bIns="0" rtlCol="0" anchor="ctr"/>
           <a:lstStyle/>
           <a:p>
-            <a:pPr marL="0" indent="0">
+            <a:pPr indent="0" marL="0">
               <a:buNone/>
             </a:pPr>
             <a:r>
@@ -6401,13 +6270,10 @@
                 <a:solidFill>
                   <a:srgbClr val="000000"/>
                 </a:solidFill>
-                <a:latin typeface="Garamond"/>
               </a:rPr>
               <a:t>🔁</a:t>
             </a:r>
-            <a:endParaRPr lang="en-US" sz="1700" dirty="0">
-              <a:latin typeface="Garamond"/>
-            </a:endParaRPr>
+            <a:endParaRPr lang="en-US" sz="1700" dirty="0"/>
           </a:p>
         </p:txBody>
       </p:sp>
@@ -6419,7 +6285,7 @@
         </p:nvSpPr>
         <p:spPr>
           <a:xfrm>
-            <a:off x="7269480" y="3582997"/>
+            <a:off x="7269480" y="2944368"/>
             <a:ext cx="1810512" cy="256032"/>
           </a:xfrm>
           <a:prstGeom prst="rect">
@@ -6432,7 +6298,7 @@
           <a:bodyPr wrap="square" lIns="0" tIns="0" rIns="0" bIns="0" rtlCol="0" anchor="ctr"/>
           <a:lstStyle/>
           <a:p>
-            <a:pPr marL="0" indent="0">
+            <a:pPr indent="0" marL="0">
               <a:buNone/>
             </a:pPr>
             <a:r>
@@ -6440,13 +6306,10 @@
                 <a:solidFill>
                   <a:srgbClr val="0E1712"/>
                 </a:solidFill>
-                <a:latin typeface="Garamond"/>
               </a:rPr>
               <a:t>API &amp; flux</a:t>
             </a:r>
-            <a:endParaRPr lang="en-US" sz="1500" dirty="0">
-              <a:latin typeface="Garamond"/>
-            </a:endParaRPr>
+            <a:endParaRPr lang="en-US" sz="1500" dirty="0"/>
           </a:p>
         </p:txBody>
       </p:sp>
@@ -6458,7 +6321,7 @@
         </p:nvSpPr>
         <p:spPr>
           <a:xfrm>
-            <a:off x="6885432" y="4021909"/>
+            <a:off x="6885432" y="3383280"/>
             <a:ext cx="384048" cy="32004"/>
           </a:xfrm>
           <a:prstGeom prst="rect">
@@ -6485,7 +6348,7 @@
         </p:nvSpPr>
         <p:spPr>
           <a:xfrm>
-            <a:off x="6885432" y="4159069"/>
+            <a:off x="6885432" y="3520440"/>
             <a:ext cx="2185416" cy="457200"/>
           </a:xfrm>
           <a:prstGeom prst="rect">
@@ -6500,7 +6363,7 @@
           </a:bodyPr>
           <a:lstStyle/>
           <a:p>
-            <a:pPr marL="0" indent="0">
+            <a:pPr indent="0" marL="0">
               <a:buNone/>
             </a:pPr>
             <a:r>
@@ -6508,13 +6371,10 @@
                 <a:solidFill>
                   <a:srgbClr val="6B786E"/>
                 </a:solidFill>
-                <a:latin typeface="Garamond"/>
               </a:rPr>
               <a:t>Paiements, webhooks, commissions et réconciliation.</a:t>
             </a:r>
-            <a:endParaRPr lang="en-US" sz="1050" dirty="0">
-              <a:latin typeface="Garamond"/>
-            </a:endParaRPr>
+            <a:endParaRPr lang="en-US" sz="1050" dirty="0"/>
           </a:p>
         </p:txBody>
       </p:sp>
@@ -6526,7 +6386,7 @@
         </p:nvSpPr>
         <p:spPr>
           <a:xfrm>
-            <a:off x="9601200" y="3381829"/>
+            <a:off x="9601200" y="2743200"/>
             <a:ext cx="1783080" cy="1417320"/>
           </a:xfrm>
           <a:prstGeom prst="roundRect">
@@ -6555,7 +6415,7 @@
         </p:nvSpPr>
         <p:spPr>
           <a:xfrm>
-            <a:off x="9811512" y="3582997"/>
+            <a:off x="9811512" y="2944368"/>
             <a:ext cx="320040" cy="320040"/>
           </a:xfrm>
           <a:prstGeom prst="rect">
@@ -6568,7 +6428,7 @@
           <a:bodyPr wrap="square" lIns="0" tIns="0" rIns="0" bIns="0" rtlCol="0" anchor="ctr"/>
           <a:lstStyle/>
           <a:p>
-            <a:pPr marL="0" indent="0">
+            <a:pPr indent="0" marL="0">
               <a:buNone/>
             </a:pPr>
             <a:r>
@@ -6576,13 +6436,10 @@
                 <a:solidFill>
                   <a:srgbClr val="000000"/>
                 </a:solidFill>
-                <a:latin typeface="Garamond"/>
               </a:rPr>
               <a:t>🚀</a:t>
             </a:r>
-            <a:endParaRPr lang="en-US" sz="1700" dirty="0">
-              <a:latin typeface="Garamond"/>
-            </a:endParaRPr>
+            <a:endParaRPr lang="en-US" sz="1700" dirty="0"/>
           </a:p>
         </p:txBody>
       </p:sp>
@@ -6594,7 +6451,7 @@
         </p:nvSpPr>
         <p:spPr>
           <a:xfrm>
-            <a:off x="10195560" y="3582997"/>
+            <a:off x="10195560" y="2944368"/>
             <a:ext cx="987552" cy="256032"/>
           </a:xfrm>
           <a:prstGeom prst="rect">
@@ -6607,7 +6464,7 @@
           <a:bodyPr wrap="square" lIns="0" tIns="0" rIns="0" bIns="0" rtlCol="0" anchor="ctr"/>
           <a:lstStyle/>
           <a:p>
-            <a:pPr marL="0" indent="0">
+            <a:pPr indent="0" marL="0">
               <a:buNone/>
             </a:pPr>
             <a:r>
@@ -6615,13 +6472,10 @@
                 <a:solidFill>
                   <a:srgbClr val="0E1712"/>
                 </a:solidFill>
-                <a:latin typeface="Garamond"/>
               </a:rPr>
               <a:t>Pilote</a:t>
             </a:r>
-            <a:endParaRPr lang="en-US" sz="1500" dirty="0">
-              <a:latin typeface="Garamond"/>
-            </a:endParaRPr>
+            <a:endParaRPr lang="en-US" sz="1500" dirty="0"/>
           </a:p>
         </p:txBody>
       </p:sp>
@@ -6633,7 +6487,7 @@
         </p:nvSpPr>
         <p:spPr>
           <a:xfrm>
-            <a:off x="9811512" y="4021909"/>
+            <a:off x="9811512" y="3383280"/>
             <a:ext cx="384048" cy="32004"/>
           </a:xfrm>
           <a:prstGeom prst="rect">
@@ -6660,7 +6514,7 @@
         </p:nvSpPr>
         <p:spPr>
           <a:xfrm>
-            <a:off x="9811512" y="4159069"/>
+            <a:off x="9811512" y="3520440"/>
             <a:ext cx="1362456" cy="457200"/>
           </a:xfrm>
           <a:prstGeom prst="rect">
@@ -6675,7 +6529,7 @@
           </a:bodyPr>
           <a:lstStyle/>
           <a:p>
-            <a:pPr marL="0" indent="0">
+            <a:pPr indent="0" marL="0">
               <a:buNone/>
             </a:pPr>
             <a:r>
@@ -6683,13 +6537,10 @@
                 <a:solidFill>
                   <a:srgbClr val="6B786E"/>
                 </a:solidFill>
-                <a:latin typeface="Garamond"/>
               </a:rPr>
               <a:t>Périmètre, calendrier et critères de succès.</a:t>
             </a:r>
-            <a:endParaRPr lang="en-US" sz="1050" dirty="0">
-              <a:latin typeface="Garamond"/>
-            </a:endParaRPr>
+            <a:endParaRPr lang="en-US" sz="1050" dirty="0"/>
           </a:p>
         </p:txBody>
       </p:sp>
@@ -6714,7 +6565,7 @@
           <a:bodyPr wrap="square" lIns="0" tIns="0" rIns="0" bIns="0" rtlCol="0" anchor="ctr"/>
           <a:lstStyle/>
           <a:p>
-            <a:pPr marL="0" indent="0">
+            <a:pPr indent="0" marL="0">
               <a:buNone/>
             </a:pPr>
             <a:r>
@@ -6722,13 +6573,10 @@
                 <a:solidFill>
                   <a:srgbClr val="6B786E"/>
                 </a:solidFill>
-                <a:latin typeface="Garamond"/>
               </a:rPr>
               <a:t>© 2026 KOWO · contact@getkowo.com · getkowo.com</a:t>
             </a:r>
-            <a:endParaRPr lang="en-US" sz="750" dirty="0">
-              <a:latin typeface="Garamond"/>
-            </a:endParaRPr>
+            <a:endParaRPr lang="en-US" sz="750" dirty="0"/>
           </a:p>
         </p:txBody>
       </p:sp>
@@ -6748,7 +6596,6 @@
         <a:solidFill>
           <a:srgbClr val="07150F"/>
         </a:solidFill>
-        <a:effectLst/>
       </p:bgPr>
     </p:bg>
     <p:spTree>
@@ -7523,14 +7370,14 @@
       </p:sp>
       <p:pic>
         <p:nvPicPr>
-          <p:cNvPr id="32" name="Image 0" descr="/mnt/data/kowo-institutional-partnership-v2/assets/kowo-logo.jpg"/>
+          <p:cNvPr id="32" name="Image 0" descr="/mnt/data/kowo-institutional-partnership-v2/assets/kowo-logo.jpg">    </p:cNvPr>
           <p:cNvPicPr>
             <a:picLocks noChangeAspect="1"/>
           </p:cNvPicPr>
           <p:nvPr/>
         </p:nvPicPr>
         <p:blipFill>
-          <a:blip r:embed="rId3"/>
+          <a:blip r:embed="rId1"/>
           <a:stretch>
             <a:fillRect/>
           </a:stretch>
@@ -7553,7 +7400,7 @@
         </p:nvSpPr>
         <p:spPr>
           <a:xfrm>
-            <a:off x="960120" y="392902"/>
+            <a:off x="960120" y="356616"/>
             <a:ext cx="1097280" cy="256032"/>
           </a:xfrm>
           <a:prstGeom prst="rect">
@@ -7566,7 +7413,7 @@
           <a:bodyPr wrap="square" lIns="0" tIns="0" rIns="0" bIns="0" rtlCol="0" anchor="ctr"/>
           <a:lstStyle/>
           <a:p>
-            <a:pPr marL="0" indent="0">
+            <a:pPr indent="0" marL="0">
               <a:buNone/>
             </a:pPr>
             <a:r>
@@ -7574,15 +7421,13 @@
                 <a:solidFill>
                   <a:srgbClr val="123B2B"/>
                 </a:solidFill>
-                <a:latin typeface="Garamond"/>
+                <a:latin typeface="Aptos Display" pitchFamily="34" charset="0"/>
                 <a:ea typeface="Aptos Display" pitchFamily="34" charset="-122"/>
                 <a:cs typeface="Aptos Display" pitchFamily="34" charset="-120"/>
               </a:rPr>
               <a:t>KOWO</a:t>
             </a:r>
-            <a:endParaRPr lang="en-US" sz="1000" dirty="0">
-              <a:latin typeface="Garamond"/>
-            </a:endParaRPr>
+            <a:endParaRPr lang="en-US" sz="1000" dirty="0"/>
           </a:p>
         </p:txBody>
       </p:sp>
@@ -7607,7 +7452,7 @@
           <a:bodyPr wrap="square" lIns="0" tIns="0" rIns="0" bIns="0" rtlCol="0" anchor="ctr"/>
           <a:lstStyle/>
           <a:p>
-            <a:pPr marL="0" indent="0" algn="r">
+            <a:pPr algn="r" indent="0" marL="0">
               <a:buNone/>
             </a:pPr>
             <a:r>
@@ -7615,26 +7460,23 @@
                 <a:solidFill>
                   <a:srgbClr val="123B2B"/>
                 </a:solidFill>
-                <a:latin typeface="Garamond"/>
               </a:rPr>
               <a:t>Institutional Partnership Brief</a:t>
             </a:r>
-            <a:endParaRPr lang="en-US" sz="800" dirty="0">
-              <a:latin typeface="Garamond"/>
-            </a:endParaRPr>
+            <a:endParaRPr lang="en-US" sz="800" dirty="0"/>
           </a:p>
         </p:txBody>
       </p:sp>
       <p:pic>
         <p:nvPicPr>
-          <p:cNvPr id="35" name="Image 1" descr="/mnt/data/kowo-institutional-partnership-v2/assets/kowo-logo.jpg"/>
+          <p:cNvPr id="35" name="Image 1" descr="/mnt/data/kowo-institutional-partnership-v2/assets/kowo-logo.jpg">    </p:cNvPr>
           <p:cNvPicPr>
             <a:picLocks noChangeAspect="1"/>
           </p:cNvPicPr>
           <p:nvPr/>
         </p:nvPicPr>
         <p:blipFill>
-          <a:blip r:embed="rId3"/>
+          <a:blip r:embed="rId2"/>
           <a:stretch>
             <a:fillRect/>
           </a:stretch>
@@ -7657,7 +7499,7 @@
         </p:nvSpPr>
         <p:spPr>
           <a:xfrm>
-            <a:off x="1848394" y="1721975"/>
+            <a:off x="1783080" y="1627632"/>
             <a:ext cx="1554480" cy="292608"/>
           </a:xfrm>
           <a:prstGeom prst="rect">
@@ -7670,7 +7512,7 @@
           <a:bodyPr wrap="square" lIns="0" tIns="0" rIns="0" bIns="0" rtlCol="0" anchor="ctr"/>
           <a:lstStyle/>
           <a:p>
-            <a:pPr marL="0" indent="0">
+            <a:pPr indent="0" marL="0">
               <a:buNone/>
             </a:pPr>
             <a:r>
@@ -7678,13 +7520,10 @@
                 <a:solidFill>
                   <a:srgbClr val="FFFFFF"/>
                 </a:solidFill>
-                <a:latin typeface="Garamond"/>
               </a:rPr>
               <a:t>KOWO</a:t>
             </a:r>
-            <a:endParaRPr lang="en-US" sz="2400" dirty="0">
-              <a:latin typeface="Garamond"/>
-            </a:endParaRPr>
+            <a:endParaRPr lang="en-US" sz="2400" dirty="0"/>
           </a:p>
         </p:txBody>
       </p:sp>
@@ -7711,7 +7550,7 @@
           </a:bodyPr>
           <a:lstStyle/>
           <a:p>
-            <a:pPr marL="0" indent="0">
+            <a:pPr indent="0" marL="0">
               <a:buNone/>
             </a:pPr>
             <a:r>
@@ -7719,13 +7558,10 @@
                 <a:solidFill>
                   <a:srgbClr val="FFFFFF"/>
                 </a:solidFill>
-                <a:latin typeface="Garamond"/>
               </a:rPr>
               <a:t>Construisons l’épargne communautaire numérique avec un partenaire réglementé de confiance.</a:t>
             </a:r>
-            <a:endParaRPr lang="en-US" sz="3100" dirty="0">
-              <a:latin typeface="Garamond"/>
-            </a:endParaRPr>
+            <a:endParaRPr lang="en-US" sz="3100" dirty="0"/>
           </a:p>
         </p:txBody>
       </p:sp>
@@ -7779,7 +7615,7 @@
           <a:bodyPr wrap="square" lIns="0" tIns="0" rIns="0" bIns="0" rtlCol="0" anchor="ctr"/>
           <a:lstStyle/>
           <a:p>
-            <a:pPr marL="0" indent="0">
+            <a:pPr indent="0" marL="0">
               <a:buNone/>
             </a:pPr>
             <a:r>
@@ -7787,13 +7623,10 @@
                 <a:solidFill>
                   <a:srgbClr val="FFFFFF"/>
                 </a:solidFill>
-                <a:latin typeface="Garamond"/>
               </a:rPr>
               <a:t>Fayçol SALAMI</a:t>
             </a:r>
-            <a:endParaRPr lang="en-US" sz="1800" dirty="0">
-              <a:latin typeface="Garamond"/>
-            </a:endParaRPr>
+            <a:endParaRPr lang="en-US" sz="1800" dirty="0"/>
           </a:p>
         </p:txBody>
       </p:sp>
@@ -7820,7 +7653,7 @@
           </a:bodyPr>
           <a:lstStyle/>
           <a:p>
-            <a:pPr marL="0" indent="0">
+            <a:pPr indent="0" marL="0">
               <a:buNone/>
             </a:pPr>
             <a:r>
@@ -7828,16 +7661,13 @@
                 <a:solidFill>
                   <a:srgbClr val="C7D8CF"/>
                 </a:solidFill>
-                <a:latin typeface="Garamond"/>
               </a:rPr>
               <a:t>Fondateur — KOWO SARL</a:t>
             </a:r>
-            <a:endParaRPr lang="en-US" sz="1230" dirty="0">
-              <a:latin typeface="Garamond"/>
-            </a:endParaRPr>
-          </a:p>
-          <a:p>
-            <a:pPr marL="0" indent="0">
+            <a:endParaRPr lang="en-US" sz="1230" dirty="0"/>
+          </a:p>
+          <a:p>
+            <a:pPr indent="0" marL="0">
               <a:buNone/>
             </a:pPr>
             <a:r>
@@ -7845,24 +7675,19 @@
                 <a:solidFill>
                   <a:srgbClr val="C7D8CF"/>
                 </a:solidFill>
-                <a:latin typeface="Garamond"/>
               </a:rPr>
               <a:t>Fondateur — YandaTech EI (France)</a:t>
             </a:r>
-            <a:endParaRPr lang="en-US" sz="1230" dirty="0">
-              <a:latin typeface="Garamond"/>
-            </a:endParaRPr>
-          </a:p>
-          <a:p>
-            <a:pPr marL="0" indent="0">
-              <a:buNone/>
-            </a:pPr>
-            <a:endParaRPr lang="en-US" sz="1230" dirty="0">
-              <a:latin typeface="Garamond"/>
-            </a:endParaRPr>
-          </a:p>
-          <a:p>
-            <a:pPr marL="0" indent="0">
+            <a:endParaRPr lang="en-US" sz="1230" dirty="0"/>
+          </a:p>
+          <a:p>
+            <a:pPr indent="0" marL="0">
+              <a:buNone/>
+            </a:pPr>
+            <a:endParaRPr lang="en-US" sz="1230" dirty="0"/>
+          </a:p>
+          <a:p>
+            <a:pPr indent="0" marL="0">
               <a:buNone/>
             </a:pPr>
             <a:r>
@@ -7870,16 +7695,13 @@
                 <a:solidFill>
                   <a:srgbClr val="C7D8CF"/>
                 </a:solidFill>
-                <a:latin typeface="Garamond"/>
               </a:rPr>
               <a:t>contact@getkowo.com</a:t>
             </a:r>
-            <a:endParaRPr lang="en-US" sz="1230" dirty="0">
-              <a:latin typeface="Garamond"/>
-            </a:endParaRPr>
-          </a:p>
-          <a:p>
-            <a:pPr marL="0" indent="0">
+            <a:endParaRPr lang="en-US" sz="1230" dirty="0"/>
+          </a:p>
+          <a:p>
+            <a:pPr indent="0" marL="0">
               <a:buNone/>
             </a:pPr>
             <a:r>
@@ -7887,16 +7709,13 @@
                 <a:solidFill>
                   <a:srgbClr val="C7D8CF"/>
                 </a:solidFill>
-                <a:latin typeface="Garamond"/>
               </a:rPr>
               <a:t>faycol.salami@getkowo.com</a:t>
             </a:r>
-            <a:endParaRPr lang="en-US" sz="1230" dirty="0">
-              <a:latin typeface="Garamond"/>
-            </a:endParaRPr>
-          </a:p>
-          <a:p>
-            <a:pPr marL="0" indent="0">
+            <a:endParaRPr lang="en-US" sz="1230" dirty="0"/>
+          </a:p>
+          <a:p>
+            <a:pPr indent="0" marL="0">
               <a:buNone/>
             </a:pPr>
             <a:r>
@@ -7904,13 +7723,10 @@
                 <a:solidFill>
                   <a:srgbClr val="C7D8CF"/>
                 </a:solidFill>
-                <a:latin typeface="Garamond"/>
               </a:rPr>
               <a:t>www.getkowo.com</a:t>
             </a:r>
-            <a:endParaRPr lang="en-US" sz="1230" dirty="0">
-              <a:latin typeface="Garamond"/>
-            </a:endParaRPr>
+            <a:endParaRPr lang="en-US" sz="1230" dirty="0"/>
           </a:p>
         </p:txBody>
       </p:sp>
@@ -7964,7 +7780,7 @@
           <a:bodyPr wrap="square" lIns="0" tIns="0" rIns="0" bIns="0" rtlCol="0" anchor="ctr"/>
           <a:lstStyle/>
           <a:p>
-            <a:pPr marL="0" indent="0" algn="ctr">
+            <a:pPr algn="ctr" indent="0" marL="0">
               <a:buNone/>
             </a:pPr>
             <a:r>
@@ -7972,13 +7788,10 @@
                 <a:solidFill>
                   <a:srgbClr val="8DFFD3"/>
                 </a:solidFill>
-                <a:latin typeface="Garamond"/>
               </a:rPr>
               <a:t>PARTNER PORTAL · GETKOWO.COM/PARTNERS</a:t>
             </a:r>
-            <a:endParaRPr lang="en-US" sz="850" dirty="0">
-              <a:latin typeface="Garamond"/>
-            </a:endParaRPr>
+            <a:endParaRPr lang="en-US" sz="850" dirty="0"/>
           </a:p>
         </p:txBody>
       </p:sp>
@@ -8003,7 +7816,7 @@
           <a:bodyPr wrap="square" lIns="0" tIns="0" rIns="0" bIns="0" rtlCol="0" anchor="ctr"/>
           <a:lstStyle/>
           <a:p>
-            <a:pPr marL="0" indent="0">
+            <a:pPr indent="0" marL="0">
               <a:buNone/>
             </a:pPr>
             <a:r>
@@ -8011,13 +7824,10 @@
                 <a:solidFill>
                   <a:srgbClr val="9DB7AA"/>
                 </a:solidFill>
-                <a:latin typeface="Garamond"/>
               </a:rPr>
               <a:t>© 2026 KOWO · contact@getkowo.com · getkowo.com</a:t>
             </a:r>
-            <a:endParaRPr lang="en-US" sz="750" dirty="0">
-              <a:latin typeface="Garamond"/>
-            </a:endParaRPr>
+            <a:endParaRPr lang="en-US" sz="750" dirty="0"/>
           </a:p>
         </p:txBody>
       </p:sp>
@@ -8037,7 +7847,6 @@
         <a:solidFill>
           <a:srgbClr val="F6F1E7"/>
         </a:solidFill>
-        <a:effectLst/>
       </p:bgPr>
     </p:bg>
     <p:spTree>
@@ -8087,14 +7896,14 @@
       </p:sp>
       <p:pic>
         <p:nvPicPr>
-          <p:cNvPr id="3" name="Image 0" descr="/mnt/data/kowo-institutional-partnership-v2/assets/kowo-logo.jpg"/>
+          <p:cNvPr id="3" name="Image 0" descr="/mnt/data/kowo-institutional-partnership-v2/assets/kowo-logo.jpg">    </p:cNvPr>
           <p:cNvPicPr>
             <a:picLocks noChangeAspect="1"/>
           </p:cNvPicPr>
           <p:nvPr/>
         </p:nvPicPr>
         <p:blipFill>
-          <a:blip r:embed="rId3"/>
+          <a:blip r:embed="rId1"/>
           <a:stretch>
             <a:fillRect/>
           </a:stretch>
@@ -8117,7 +7926,7 @@
         </p:nvSpPr>
         <p:spPr>
           <a:xfrm>
-            <a:off x="996406" y="421930"/>
+            <a:off x="960120" y="356616"/>
             <a:ext cx="1097280" cy="256032"/>
           </a:xfrm>
           <a:prstGeom prst="rect">
@@ -8130,7 +7939,7 @@
           <a:bodyPr wrap="square" lIns="0" tIns="0" rIns="0" bIns="0" rtlCol="0" anchor="ctr"/>
           <a:lstStyle/>
           <a:p>
-            <a:pPr marL="0" indent="0">
+            <a:pPr indent="0" marL="0">
               <a:buNone/>
             </a:pPr>
             <a:r>
@@ -8138,15 +7947,13 @@
                 <a:solidFill>
                   <a:srgbClr val="123B2B"/>
                 </a:solidFill>
-                <a:latin typeface="Garamond"/>
+                <a:latin typeface="Aptos Display" pitchFamily="34" charset="0"/>
                 <a:ea typeface="Aptos Display" pitchFamily="34" charset="-122"/>
                 <a:cs typeface="Aptos Display" pitchFamily="34" charset="-120"/>
               </a:rPr>
               <a:t>KOWO</a:t>
             </a:r>
-            <a:endParaRPr lang="en-US" sz="1000" dirty="0">
-              <a:latin typeface="Garamond"/>
-            </a:endParaRPr>
+            <a:endParaRPr lang="en-US" sz="1000" dirty="0"/>
           </a:p>
         </p:txBody>
       </p:sp>
@@ -8171,7 +7978,7 @@
           <a:bodyPr wrap="square" lIns="0" tIns="0" rIns="0" bIns="0" rtlCol="0" anchor="ctr"/>
           <a:lstStyle/>
           <a:p>
-            <a:pPr marL="0" indent="0" algn="r">
+            <a:pPr algn="r" indent="0" marL="0">
               <a:buNone/>
             </a:pPr>
             <a:r>
@@ -8179,13 +7986,10 @@
                 <a:solidFill>
                   <a:srgbClr val="6B786E"/>
                 </a:solidFill>
-                <a:latin typeface="Garamond"/>
               </a:rPr>
               <a:t>Institutional Partnership Brief</a:t>
             </a:r>
-            <a:endParaRPr lang="en-US" sz="800" dirty="0">
-              <a:latin typeface="Garamond"/>
-            </a:endParaRPr>
+            <a:endParaRPr lang="en-US" sz="800" dirty="0"/>
           </a:p>
         </p:txBody>
       </p:sp>
@@ -8239,7 +8043,7 @@
           <a:bodyPr wrap="square" lIns="0" tIns="0" rIns="0" bIns="0" rtlCol="0" anchor="ctr"/>
           <a:lstStyle/>
           <a:p>
-            <a:pPr marL="0" indent="0" algn="ctr">
+            <a:pPr algn="ctr" indent="0" marL="0">
               <a:buNone/>
             </a:pPr>
             <a:r>
@@ -8247,13 +8051,10 @@
                 <a:solidFill>
                   <a:srgbClr val="123B2B"/>
                 </a:solidFill>
-                <a:latin typeface="Garamond"/>
               </a:rPr>
               <a:t>02 · OPPORTUNITÉ</a:t>
             </a:r>
-            <a:endParaRPr lang="en-US" sz="850" dirty="0">
-              <a:latin typeface="Garamond"/>
-            </a:endParaRPr>
+            <a:endParaRPr lang="en-US" sz="850" dirty="0"/>
           </a:p>
         </p:txBody>
       </p:sp>
@@ -8265,70 +8066,8 @@
         </p:nvSpPr>
         <p:spPr>
           <a:xfrm>
-            <a:off x="658368" y="1327767"/>
-            <a:ext cx="5669280" cy="1402805"/>
-          </a:xfrm>
-          <a:prstGeom prst="rect">
-            <a:avLst/>
-          </a:prstGeom>
-          <a:noFill/>
-          <a:ln/>
-        </p:spPr>
-        <p:txBody>
-          <a:bodyPr wrap="square" lIns="0" tIns="0" rIns="0" bIns="0" rtlCol="0" anchor="ctr">
-            <a:normAutofit fontScale="92500" lnSpcReduction="10000"/>
-          </a:bodyPr>
-          <a:lstStyle/>
-          <a:p>
-            <a:pPr marL="0" indent="0">
-              <a:buNone/>
-            </a:pPr>
-            <a:r>
-              <a:rPr lang="en-US" sz="3600" b="1" dirty="0">
-                <a:solidFill>
-                  <a:srgbClr val="0E1712"/>
-                </a:solidFill>
-                <a:latin typeface="Garamond"/>
-                <a:ea typeface="Aptos Display" pitchFamily="34" charset="-122"/>
-                <a:cs typeface="Aptos Display" pitchFamily="34" charset="-120"/>
-              </a:rPr>
-              <a:t>Le marché existe déjà.</a:t>
-            </a:r>
-            <a:endParaRPr lang="en-US" sz="3600" dirty="0">
-              <a:latin typeface="Garamond"/>
-            </a:endParaRPr>
-          </a:p>
-          <a:p>
-            <a:pPr marL="0" indent="0">
-              <a:buNone/>
-            </a:pPr>
-            <a:r>
-              <a:rPr lang="en-US" sz="3600" b="1" dirty="0">
-                <a:solidFill>
-                  <a:srgbClr val="0E1712"/>
-                </a:solidFill>
-                <a:latin typeface="Garamond"/>
-                <a:ea typeface="Aptos Display" pitchFamily="34" charset="-122"/>
-                <a:cs typeface="Aptos Display" pitchFamily="34" charset="-120"/>
-              </a:rPr>
-              <a:t>Il manque une couche technologique de confiance.</a:t>
-            </a:r>
-            <a:endParaRPr lang="en-US" sz="3600" dirty="0">
-              <a:latin typeface="Garamond"/>
-            </a:endParaRPr>
-          </a:p>
-        </p:txBody>
-      </p:sp>
-      <p:sp>
-        <p:nvSpPr>
-          <p:cNvPr id="9" name="Text 6"/>
-          <p:cNvSpPr/>
-          <p:nvPr/>
-        </p:nvSpPr>
-        <p:spPr>
-          <a:xfrm>
-            <a:off x="656772" y="3176306"/>
-            <a:ext cx="5303520" cy="621792"/>
+            <a:off x="658368" y="1335024"/>
+            <a:ext cx="5669280" cy="960120"/>
           </a:xfrm>
           <a:prstGeom prst="rect">
             <a:avLst/>
@@ -8342,7 +8081,65 @@
           </a:bodyPr>
           <a:lstStyle/>
           <a:p>
-            <a:pPr marL="0" indent="0">
+            <a:pPr indent="0" marL="0">
+              <a:buNone/>
+            </a:pPr>
+            <a:r>
+              <a:rPr lang="en-US" sz="3600" b="1" dirty="0">
+                <a:solidFill>
+                  <a:srgbClr val="0E1712"/>
+                </a:solidFill>
+                <a:latin typeface="Aptos Display" pitchFamily="34" charset="0"/>
+                <a:ea typeface="Aptos Display" pitchFamily="34" charset="-122"/>
+                <a:cs typeface="Aptos Display" pitchFamily="34" charset="-120"/>
+              </a:rPr>
+              <a:t>Le marché existe déjà.</a:t>
+            </a:r>
+            <a:endParaRPr lang="en-US" sz="3600" dirty="0"/>
+          </a:p>
+          <a:p>
+            <a:pPr indent="0" marL="0">
+              <a:buNone/>
+            </a:pPr>
+            <a:r>
+              <a:rPr lang="en-US" sz="3600" b="1" dirty="0">
+                <a:solidFill>
+                  <a:srgbClr val="0E1712"/>
+                </a:solidFill>
+                <a:latin typeface="Aptos Display" pitchFamily="34" charset="0"/>
+                <a:ea typeface="Aptos Display" pitchFamily="34" charset="-122"/>
+                <a:cs typeface="Aptos Display" pitchFamily="34" charset="-120"/>
+              </a:rPr>
+              <a:t>Il manque une couche technologique de confiance.</a:t>
+            </a:r>
+            <a:endParaRPr lang="en-US" sz="3600" dirty="0"/>
+          </a:p>
+        </p:txBody>
+      </p:sp>
+      <p:sp>
+        <p:nvSpPr>
+          <p:cNvPr id="9" name="Text 6"/>
+          <p:cNvSpPr/>
+          <p:nvPr/>
+        </p:nvSpPr>
+        <p:spPr>
+          <a:xfrm>
+            <a:off x="685800" y="2450592"/>
+            <a:ext cx="5303520" cy="621792"/>
+          </a:xfrm>
+          <a:prstGeom prst="rect">
+            <a:avLst/>
+          </a:prstGeom>
+          <a:noFill/>
+          <a:ln/>
+        </p:spPr>
+        <p:txBody>
+          <a:bodyPr wrap="square" lIns="0" tIns="0" rIns="0" bIns="0" rtlCol="0" anchor="ctr">
+            <a:normAutofit/>
+          </a:bodyPr>
+          <a:lstStyle/>
+          <a:p>
+            <a:pPr indent="0" marL="0">
               <a:buNone/>
             </a:pPr>
             <a:r>
@@ -8350,13 +8147,10 @@
                 <a:solidFill>
                   <a:srgbClr val="6B786E"/>
                 </a:solidFill>
-                <a:latin typeface="Garamond"/>
               </a:rPr>
               <a:t>Les communautés africaines cotisent, épargnent et financent déjà ensemble. KOWO digitalise ces usages sans se substituer aux institutions réglementées.</a:t>
             </a:r>
-            <a:endParaRPr lang="en-US" sz="1500" dirty="0">
-              <a:latin typeface="Garamond"/>
-            </a:endParaRPr>
+            <a:endParaRPr lang="en-US" sz="1500" dirty="0"/>
           </a:p>
         </p:txBody>
       </p:sp>
@@ -8410,7 +8204,7 @@
           <a:bodyPr wrap="square" lIns="0" tIns="0" rIns="0" bIns="0" rtlCol="0" anchor="ctr"/>
           <a:lstStyle/>
           <a:p>
-            <a:pPr marL="0" indent="0">
+            <a:pPr indent="0" marL="0">
               <a:buNone/>
             </a:pPr>
             <a:r>
@@ -8418,13 +8212,10 @@
                 <a:solidFill>
                   <a:srgbClr val="000000"/>
                 </a:solidFill>
-                <a:latin typeface="Garamond"/>
               </a:rPr>
               <a:t>🤝</a:t>
             </a:r>
-            <a:endParaRPr lang="en-US" sz="1700" dirty="0">
-              <a:latin typeface="Garamond"/>
-            </a:endParaRPr>
+            <a:endParaRPr lang="en-US" sz="1700" dirty="0"/>
           </a:p>
         </p:txBody>
       </p:sp>
@@ -8449,7 +8240,7 @@
           <a:bodyPr wrap="square" lIns="0" tIns="0" rIns="0" bIns="0" rtlCol="0" anchor="ctr"/>
           <a:lstStyle/>
           <a:p>
-            <a:pPr marL="0" indent="0">
+            <a:pPr indent="0" marL="0">
               <a:buNone/>
             </a:pPr>
             <a:r>
@@ -8457,13 +8248,10 @@
                 <a:solidFill>
                   <a:srgbClr val="0E1712"/>
                 </a:solidFill>
-                <a:latin typeface="Garamond"/>
               </a:rPr>
               <a:t>Usages existants</a:t>
             </a:r>
-            <a:endParaRPr lang="en-US" sz="1500" dirty="0">
-              <a:latin typeface="Garamond"/>
-            </a:endParaRPr>
+            <a:endParaRPr lang="en-US" sz="1500" dirty="0"/>
           </a:p>
         </p:txBody>
       </p:sp>
@@ -8517,7 +8305,7 @@
           </a:bodyPr>
           <a:lstStyle/>
           <a:p>
-            <a:pPr marL="0" indent="0">
+            <a:pPr indent="0" marL="0">
               <a:buNone/>
             </a:pPr>
             <a:r>
@@ -8525,13 +8313,10 @@
                 <a:solidFill>
                   <a:srgbClr val="6B786E"/>
                 </a:solidFill>
-                <a:latin typeface="Garamond"/>
               </a:rPr>
               <a:t>Tontines, associations, caisses communautaires, cotisations familiales et projets collaboratifs.</a:t>
             </a:r>
-            <a:endParaRPr lang="en-US" sz="1050" dirty="0">
-              <a:latin typeface="Garamond"/>
-            </a:endParaRPr>
+            <a:endParaRPr lang="en-US" sz="1050" dirty="0"/>
           </a:p>
         </p:txBody>
       </p:sp>
@@ -8585,7 +8370,7 @@
           <a:bodyPr wrap="square" lIns="0" tIns="0" rIns="0" bIns="0" rtlCol="0" anchor="ctr"/>
           <a:lstStyle/>
           <a:p>
-            <a:pPr marL="0" indent="0">
+            <a:pPr indent="0" marL="0">
               <a:buNone/>
             </a:pPr>
             <a:r>
@@ -8593,13 +8378,10 @@
                 <a:solidFill>
                   <a:srgbClr val="000000"/>
                 </a:solidFill>
-                <a:latin typeface="Garamond"/>
               </a:rPr>
               <a:t>⚠️</a:t>
             </a:r>
-            <a:endParaRPr lang="en-US" sz="1700" dirty="0">
-              <a:latin typeface="Garamond"/>
-            </a:endParaRPr>
+            <a:endParaRPr lang="en-US" sz="1700" dirty="0"/>
           </a:p>
         </p:txBody>
       </p:sp>
@@ -8624,7 +8406,7 @@
           <a:bodyPr wrap="square" lIns="0" tIns="0" rIns="0" bIns="0" rtlCol="0" anchor="ctr"/>
           <a:lstStyle/>
           <a:p>
-            <a:pPr marL="0" indent="0">
+            <a:pPr indent="0" marL="0">
               <a:buNone/>
             </a:pPr>
             <a:r>
@@ -8632,13 +8414,10 @@
                 <a:solidFill>
                   <a:srgbClr val="0E1712"/>
                 </a:solidFill>
-                <a:latin typeface="Garamond"/>
               </a:rPr>
               <a:t>Limites actuelles</a:t>
             </a:r>
-            <a:endParaRPr lang="en-US" sz="1500" dirty="0">
-              <a:latin typeface="Garamond"/>
-            </a:endParaRPr>
+            <a:endParaRPr lang="en-US" sz="1500" dirty="0"/>
           </a:p>
         </p:txBody>
       </p:sp>
@@ -8692,7 +8471,7 @@
           </a:bodyPr>
           <a:lstStyle/>
           <a:p>
-            <a:pPr marL="0" indent="0">
+            <a:pPr indent="0" marL="0">
               <a:buNone/>
             </a:pPr>
             <a:r>
@@ -8700,13 +8479,10 @@
                 <a:solidFill>
                   <a:srgbClr val="6B786E"/>
                 </a:solidFill>
-                <a:latin typeface="Garamond"/>
               </a:rPr>
               <a:t>WhatsApp, Excel, espèces, litiges, manque de traçabilité et faible visibilité des cycles.</a:t>
             </a:r>
-            <a:endParaRPr lang="en-US" sz="1050" dirty="0">
-              <a:latin typeface="Garamond"/>
-            </a:endParaRPr>
+            <a:endParaRPr lang="en-US" sz="1050" dirty="0"/>
           </a:p>
         </p:txBody>
       </p:sp>
@@ -8760,7 +8536,7 @@
           <a:bodyPr wrap="square" lIns="0" tIns="0" rIns="0" bIns="0" rtlCol="0" anchor="ctr"/>
           <a:lstStyle/>
           <a:p>
-            <a:pPr marL="0" indent="0">
+            <a:pPr indent="0" marL="0">
               <a:buNone/>
             </a:pPr>
             <a:r>
@@ -8768,13 +8544,10 @@
                 <a:solidFill>
                   <a:srgbClr val="000000"/>
                 </a:solidFill>
-                <a:latin typeface="Garamond"/>
               </a:rPr>
               <a:t>📱</a:t>
             </a:r>
-            <a:endParaRPr lang="en-US" sz="1700" dirty="0">
-              <a:latin typeface="Garamond"/>
-            </a:endParaRPr>
+            <a:endParaRPr lang="en-US" sz="1700" dirty="0"/>
           </a:p>
         </p:txBody>
       </p:sp>
@@ -8799,7 +8572,7 @@
           <a:bodyPr wrap="square" lIns="0" tIns="0" rIns="0" bIns="0" rtlCol="0" anchor="ctr"/>
           <a:lstStyle/>
           <a:p>
-            <a:pPr marL="0" indent="0">
+            <a:pPr indent="0" marL="0">
               <a:buNone/>
             </a:pPr>
             <a:r>
@@ -8807,13 +8580,10 @@
                 <a:solidFill>
                   <a:srgbClr val="0E1712"/>
                 </a:solidFill>
-                <a:latin typeface="Garamond"/>
               </a:rPr>
               <a:t>Solution KOWO</a:t>
             </a:r>
-            <a:endParaRPr lang="en-US" sz="1500" dirty="0">
-              <a:latin typeface="Garamond"/>
-            </a:endParaRPr>
+            <a:endParaRPr lang="en-US" sz="1500" dirty="0"/>
           </a:p>
         </p:txBody>
       </p:sp>
@@ -8867,7 +8637,7 @@
           </a:bodyPr>
           <a:lstStyle/>
           <a:p>
-            <a:pPr marL="0" indent="0">
+            <a:pPr indent="0" marL="0">
               <a:buNone/>
             </a:pPr>
             <a:r>
@@ -8875,13 +8645,10 @@
                 <a:solidFill>
                   <a:srgbClr val="6B786E"/>
                 </a:solidFill>
-                <a:latin typeface="Garamond"/>
               </a:rPr>
               <a:t>Application mobile, règles du groupe, historique, notifications, reporting et parcours utilisateurs.</a:t>
             </a:r>
-            <a:endParaRPr lang="en-US" sz="1050" dirty="0">
-              <a:latin typeface="Garamond"/>
-            </a:endParaRPr>
+            <a:endParaRPr lang="en-US" sz="1050" dirty="0"/>
           </a:p>
         </p:txBody>
       </p:sp>
@@ -8935,7 +8702,7 @@
           <a:bodyPr wrap="square" lIns="0" tIns="0" rIns="0" bIns="0" rtlCol="0" anchor="ctr"/>
           <a:lstStyle/>
           <a:p>
-            <a:pPr marL="0" indent="0">
+            <a:pPr indent="0" marL="0">
               <a:buNone/>
             </a:pPr>
             <a:r>
@@ -8943,13 +8710,10 @@
                 <a:solidFill>
                   <a:srgbClr val="000000"/>
                 </a:solidFill>
-                <a:latin typeface="Garamond"/>
               </a:rPr>
               <a:t>🏦</a:t>
             </a:r>
-            <a:endParaRPr lang="en-US" sz="1700" dirty="0">
-              <a:latin typeface="Garamond"/>
-            </a:endParaRPr>
+            <a:endParaRPr lang="en-US" sz="1700" dirty="0"/>
           </a:p>
         </p:txBody>
       </p:sp>
@@ -8974,7 +8738,7 @@
           <a:bodyPr wrap="square" lIns="0" tIns="0" rIns="0" bIns="0" rtlCol="0" anchor="ctr"/>
           <a:lstStyle/>
           <a:p>
-            <a:pPr marL="0" indent="0">
+            <a:pPr indent="0" marL="0">
               <a:buNone/>
             </a:pPr>
             <a:r>
@@ -8982,13 +8746,10 @@
                 <a:solidFill>
                   <a:srgbClr val="0E1712"/>
                 </a:solidFill>
-                <a:latin typeface="Garamond"/>
               </a:rPr>
               <a:t>Partenaire financier</a:t>
             </a:r>
-            <a:endParaRPr lang="en-US" sz="1500" dirty="0">
-              <a:latin typeface="Garamond"/>
-            </a:endParaRPr>
+            <a:endParaRPr lang="en-US" sz="1500" dirty="0"/>
           </a:p>
         </p:txBody>
       </p:sp>
@@ -9042,7 +8803,7 @@
           </a:bodyPr>
           <a:lstStyle/>
           <a:p>
-            <a:pPr marL="0" indent="0">
+            <a:pPr indent="0" marL="0">
               <a:buNone/>
             </a:pPr>
             <a:r>
@@ -9050,13 +8811,10 @@
                 <a:solidFill>
                   <a:srgbClr val="6B786E"/>
                 </a:solidFill>
-                <a:latin typeface="Garamond"/>
               </a:rPr>
               <a:t>Comptes, wallets, conservation des fonds, exigences réglementaires et confiance utilisateur.</a:t>
             </a:r>
-            <a:endParaRPr lang="en-US" sz="1050" dirty="0">
-              <a:latin typeface="Garamond"/>
-            </a:endParaRPr>
+            <a:endParaRPr lang="en-US" sz="1050" dirty="0"/>
           </a:p>
         </p:txBody>
       </p:sp>
@@ -9110,7 +8868,7 @@
           </a:bodyPr>
           <a:lstStyle/>
           <a:p>
-            <a:pPr marL="0" indent="0">
+            <a:pPr indent="0" marL="0">
               <a:buNone/>
             </a:pPr>
             <a:r>
@@ -9118,13 +8876,10 @@
                 <a:solidFill>
                   <a:srgbClr val="FFFFFF"/>
                 </a:solidFill>
-                <a:latin typeface="Garamond"/>
               </a:rPr>
               <a:t>Positionnement : KOWO ne cherche pas à devenir une microfinance, mais à devenir son interface digitale communautaire.</a:t>
             </a:r>
-            <a:endParaRPr lang="en-US" sz="1400" dirty="0">
-              <a:latin typeface="Garamond"/>
-            </a:endParaRPr>
+            <a:endParaRPr lang="en-US" sz="1400" dirty="0"/>
           </a:p>
         </p:txBody>
       </p:sp>
@@ -9149,7 +8904,7 @@
           <a:bodyPr wrap="square" lIns="0" tIns="0" rIns="0" bIns="0" rtlCol="0" anchor="ctr"/>
           <a:lstStyle/>
           <a:p>
-            <a:pPr marL="0" indent="0">
+            <a:pPr indent="0" marL="0">
               <a:buNone/>
             </a:pPr>
             <a:r>
@@ -9157,13 +8912,10 @@
                 <a:solidFill>
                   <a:srgbClr val="6B786E"/>
                 </a:solidFill>
-                <a:latin typeface="Garamond"/>
               </a:rPr>
               <a:t>© 2026 KOWO · contact@getkowo.com · getkowo.com</a:t>
             </a:r>
-            <a:endParaRPr lang="en-US" sz="750" dirty="0">
-              <a:latin typeface="Garamond"/>
-            </a:endParaRPr>
+            <a:endParaRPr lang="en-US" sz="750" dirty="0"/>
           </a:p>
         </p:txBody>
       </p:sp>
@@ -9183,7 +8935,6 @@
         <a:solidFill>
           <a:srgbClr val="07150F"/>
         </a:solidFill>
-        <a:effectLst/>
       </p:bgPr>
     </p:bg>
     <p:spTree>
@@ -9233,7 +8984,7 @@
         </p:nvSpPr>
         <p:spPr>
           <a:xfrm>
-            <a:off x="685800" y="123371"/>
+            <a:off x="685800" y="0"/>
             <a:ext cx="0" cy="6858000"/>
           </a:xfrm>
           <a:prstGeom prst="line">
@@ -9258,7 +9009,7 @@
         </p:nvSpPr>
         <p:spPr>
           <a:xfrm>
-            <a:off x="1371600" y="123371"/>
+            <a:off x="1371600" y="0"/>
             <a:ext cx="0" cy="6858000"/>
           </a:xfrm>
           <a:prstGeom prst="line">
@@ -9283,7 +9034,7 @@
         </p:nvSpPr>
         <p:spPr>
           <a:xfrm>
-            <a:off x="2057400" y="123371"/>
+            <a:off x="2057400" y="0"/>
             <a:ext cx="0" cy="6858000"/>
           </a:xfrm>
           <a:prstGeom prst="line">
@@ -9308,7 +9059,7 @@
         </p:nvSpPr>
         <p:spPr>
           <a:xfrm>
-            <a:off x="2743200" y="123371"/>
+            <a:off x="2743200" y="0"/>
             <a:ext cx="0" cy="6858000"/>
           </a:xfrm>
           <a:prstGeom prst="line">
@@ -9333,7 +9084,7 @@
         </p:nvSpPr>
         <p:spPr>
           <a:xfrm>
-            <a:off x="3429000" y="123371"/>
+            <a:off x="3429000" y="0"/>
             <a:ext cx="0" cy="6858000"/>
           </a:xfrm>
           <a:prstGeom prst="line">
@@ -9358,7 +9109,7 @@
         </p:nvSpPr>
         <p:spPr>
           <a:xfrm>
-            <a:off x="4114800" y="123371"/>
+            <a:off x="4114800" y="0"/>
             <a:ext cx="0" cy="6858000"/>
           </a:xfrm>
           <a:prstGeom prst="line">
@@ -9383,7 +9134,7 @@
         </p:nvSpPr>
         <p:spPr>
           <a:xfrm>
-            <a:off x="4800600" y="123371"/>
+            <a:off x="4800600" y="0"/>
             <a:ext cx="0" cy="6858000"/>
           </a:xfrm>
           <a:prstGeom prst="line">
@@ -9408,7 +9159,7 @@
         </p:nvSpPr>
         <p:spPr>
           <a:xfrm>
-            <a:off x="5486400" y="123371"/>
+            <a:off x="5486400" y="0"/>
             <a:ext cx="0" cy="6858000"/>
           </a:xfrm>
           <a:prstGeom prst="line">
@@ -9433,7 +9184,7 @@
         </p:nvSpPr>
         <p:spPr>
           <a:xfrm>
-            <a:off x="6172200" y="123371"/>
+            <a:off x="6172200" y="0"/>
             <a:ext cx="0" cy="6858000"/>
           </a:xfrm>
           <a:prstGeom prst="line">
@@ -9458,7 +9209,7 @@
         </p:nvSpPr>
         <p:spPr>
           <a:xfrm>
-            <a:off x="6858000" y="123371"/>
+            <a:off x="6858000" y="0"/>
             <a:ext cx="0" cy="6858000"/>
           </a:xfrm>
           <a:prstGeom prst="line">
@@ -9483,7 +9234,7 @@
         </p:nvSpPr>
         <p:spPr>
           <a:xfrm>
-            <a:off x="7543800" y="123371"/>
+            <a:off x="7543800" y="0"/>
             <a:ext cx="0" cy="6858000"/>
           </a:xfrm>
           <a:prstGeom prst="line">
@@ -9508,7 +9259,7 @@
         </p:nvSpPr>
         <p:spPr>
           <a:xfrm>
-            <a:off x="8229600" y="123371"/>
+            <a:off x="8229600" y="0"/>
             <a:ext cx="0" cy="6858000"/>
           </a:xfrm>
           <a:prstGeom prst="line">
@@ -9533,7 +9284,7 @@
         </p:nvSpPr>
         <p:spPr>
           <a:xfrm>
-            <a:off x="8915400" y="123371"/>
+            <a:off x="8915400" y="0"/>
             <a:ext cx="0" cy="6858000"/>
           </a:xfrm>
           <a:prstGeom prst="line">
@@ -9558,7 +9309,7 @@
         </p:nvSpPr>
         <p:spPr>
           <a:xfrm>
-            <a:off x="9601200" y="123371"/>
+            <a:off x="9601200" y="0"/>
             <a:ext cx="0" cy="6858000"/>
           </a:xfrm>
           <a:prstGeom prst="line">
@@ -9583,7 +9334,7 @@
         </p:nvSpPr>
         <p:spPr>
           <a:xfrm>
-            <a:off x="10287000" y="123371"/>
+            <a:off x="10287000" y="0"/>
             <a:ext cx="0" cy="6858000"/>
           </a:xfrm>
           <a:prstGeom prst="line">
@@ -9808,7 +9559,7 @@
         </p:nvSpPr>
         <p:spPr>
           <a:xfrm>
-            <a:off x="0" y="4238171"/>
+            <a:off x="0" y="4114800"/>
             <a:ext cx="12191695" cy="0"/>
           </a:xfrm>
           <a:prstGeom prst="line">
@@ -9833,7 +9584,7 @@
         </p:nvSpPr>
         <p:spPr>
           <a:xfrm>
-            <a:off x="0" y="4923971"/>
+            <a:off x="0" y="4800600"/>
             <a:ext cx="12191695" cy="0"/>
           </a:xfrm>
           <a:prstGeom prst="line">
@@ -9958,14 +9709,14 @@
       </p:sp>
       <p:pic>
         <p:nvPicPr>
-          <p:cNvPr id="32" name="Image 0" descr="/mnt/data/kowo-institutional-partnership-v2/assets/kowo-logo.jpg"/>
+          <p:cNvPr id="32" name="Image 0" descr="/mnt/data/kowo-institutional-partnership-v2/assets/kowo-logo.jpg">    </p:cNvPr>
           <p:cNvPicPr>
             <a:picLocks noChangeAspect="1"/>
           </p:cNvPicPr>
           <p:nvPr/>
         </p:nvPicPr>
         <p:blipFill>
-          <a:blip r:embed="rId3"/>
+          <a:blip r:embed="rId1"/>
           <a:stretch>
             <a:fillRect/>
           </a:stretch>
@@ -9988,7 +9739,7 @@
         </p:nvSpPr>
         <p:spPr>
           <a:xfrm>
-            <a:off x="960120" y="400159"/>
+            <a:off x="960120" y="356616"/>
             <a:ext cx="1097280" cy="256032"/>
           </a:xfrm>
           <a:prstGeom prst="rect">
@@ -10001,7 +9752,7 @@
           <a:bodyPr wrap="square" lIns="0" tIns="0" rIns="0" bIns="0" rtlCol="0" anchor="ctr"/>
           <a:lstStyle/>
           <a:p>
-            <a:pPr marL="0" indent="0">
+            <a:pPr indent="0" marL="0">
               <a:buNone/>
             </a:pPr>
             <a:r>
@@ -10009,15 +9760,13 @@
                 <a:solidFill>
                   <a:srgbClr val="123B2B"/>
                 </a:solidFill>
-                <a:latin typeface="Garamond"/>
+                <a:latin typeface="Aptos Display" pitchFamily="34" charset="0"/>
                 <a:ea typeface="Aptos Display" pitchFamily="34" charset="-122"/>
                 <a:cs typeface="Aptos Display" pitchFamily="34" charset="-120"/>
               </a:rPr>
               <a:t>KOWO</a:t>
             </a:r>
-            <a:endParaRPr lang="en-US" sz="1000" dirty="0">
-              <a:latin typeface="Garamond"/>
-            </a:endParaRPr>
+            <a:endParaRPr lang="en-US" sz="1000" dirty="0"/>
           </a:p>
         </p:txBody>
       </p:sp>
@@ -10042,7 +9791,7 @@
           <a:bodyPr wrap="square" lIns="0" tIns="0" rIns="0" bIns="0" rtlCol="0" anchor="ctr"/>
           <a:lstStyle/>
           <a:p>
-            <a:pPr marL="0" indent="0" algn="r">
+            <a:pPr algn="r" indent="0" marL="0">
               <a:buNone/>
             </a:pPr>
             <a:r>
@@ -10050,13 +9799,10 @@
                 <a:solidFill>
                   <a:srgbClr val="123B2B"/>
                 </a:solidFill>
-                <a:latin typeface="Garamond"/>
               </a:rPr>
               <a:t>Institutional Partnership Brief</a:t>
             </a:r>
-            <a:endParaRPr lang="en-US" sz="800" dirty="0">
-              <a:latin typeface="Garamond"/>
-            </a:endParaRPr>
+            <a:endParaRPr lang="en-US" sz="800" dirty="0"/>
           </a:p>
         </p:txBody>
       </p:sp>
@@ -10110,7 +9856,7 @@
           <a:bodyPr wrap="square" lIns="0" tIns="0" rIns="0" bIns="0" rtlCol="0" anchor="ctr"/>
           <a:lstStyle/>
           <a:p>
-            <a:pPr marL="0" indent="0" algn="ctr">
+            <a:pPr algn="ctr" indent="0" marL="0">
               <a:buNone/>
             </a:pPr>
             <a:r>
@@ -10118,13 +9864,10 @@
                 <a:solidFill>
                   <a:srgbClr val="8DFFD3"/>
                 </a:solidFill>
-                <a:latin typeface="Garamond"/>
               </a:rPr>
               <a:t>03 · VISION</a:t>
             </a:r>
-            <a:endParaRPr lang="en-US" sz="850" dirty="0">
-              <a:latin typeface="Garamond"/>
-            </a:endParaRPr>
+            <a:endParaRPr lang="en-US" sz="850" dirty="0"/>
           </a:p>
         </p:txBody>
       </p:sp>
@@ -10136,7 +9879,7 @@
         </p:nvSpPr>
         <p:spPr>
           <a:xfrm>
-            <a:off x="658368" y="1581767"/>
+            <a:off x="658368" y="1335024"/>
             <a:ext cx="5669280" cy="960120"/>
           </a:xfrm>
           <a:prstGeom prst="rect">
@@ -10151,7 +9894,7 @@
           </a:bodyPr>
           <a:lstStyle/>
           <a:p>
-            <a:pPr marL="0" indent="0">
+            <a:pPr indent="0" marL="0">
               <a:buNone/>
             </a:pPr>
             <a:r>
@@ -10159,15 +9902,13 @@
                 <a:solidFill>
                   <a:srgbClr val="FFFFFF"/>
                 </a:solidFill>
-                <a:latin typeface="Garamond"/>
+                <a:latin typeface="Aptos Display" pitchFamily="34" charset="0"/>
                 <a:ea typeface="Aptos Display" pitchFamily="34" charset="-122"/>
                 <a:cs typeface="Aptos Display" pitchFamily="34" charset="-120"/>
               </a:rPr>
               <a:t>Construire l’infrastructure panafricaine de l’épargne communautaire numérique.</a:t>
             </a:r>
-            <a:endParaRPr lang="en-US" sz="3600" dirty="0">
-              <a:latin typeface="Garamond"/>
-            </a:endParaRPr>
+            <a:endParaRPr lang="en-US" sz="3600" dirty="0"/>
           </a:p>
         </p:txBody>
       </p:sp>
@@ -10179,7 +9920,7 @@
         </p:nvSpPr>
         <p:spPr>
           <a:xfrm>
-            <a:off x="656772" y="2958592"/>
+            <a:off x="685800" y="2450592"/>
             <a:ext cx="5303520" cy="621792"/>
           </a:xfrm>
           <a:prstGeom prst="rect">
@@ -10194,7 +9935,7 @@
           </a:bodyPr>
           <a:lstStyle/>
           <a:p>
-            <a:pPr marL="0" indent="0">
+            <a:pPr indent="0" marL="0">
               <a:buNone/>
             </a:pPr>
             <a:r>
@@ -10202,13 +9943,10 @@
                 <a:solidFill>
                   <a:srgbClr val="C7D8CF"/>
                 </a:solidFill>
-                <a:latin typeface="Garamond"/>
               </a:rPr>
               <a:t>Une plateforme pensée pour l’Afrique d’abord, mais naturellement ouverte à la diaspora.</a:t>
             </a:r>
-            <a:endParaRPr lang="en-US" sz="1500" dirty="0">
-              <a:latin typeface="Garamond"/>
-            </a:endParaRPr>
+            <a:endParaRPr lang="en-US" sz="1500" dirty="0"/>
           </a:p>
         </p:txBody>
       </p:sp>
@@ -10220,7 +9958,7 @@
         </p:nvSpPr>
         <p:spPr>
           <a:xfrm>
-            <a:off x="914400" y="3780971"/>
+            <a:off x="914400" y="3657600"/>
             <a:ext cx="2834640" cy="1234440"/>
           </a:xfrm>
           <a:prstGeom prst="roundRect">
@@ -10247,7 +9985,7 @@
         </p:nvSpPr>
         <p:spPr>
           <a:xfrm>
-            <a:off x="1143000" y="4009571"/>
+            <a:off x="1143000" y="3886200"/>
             <a:ext cx="2286000" cy="274320"/>
           </a:xfrm>
           <a:prstGeom prst="rect">
@@ -10260,7 +9998,7 @@
           <a:bodyPr wrap="square" lIns="0" tIns="0" rIns="0" bIns="0" rtlCol="0" anchor="ctr"/>
           <a:lstStyle/>
           <a:p>
-            <a:pPr marL="0" indent="0">
+            <a:pPr indent="0" marL="0">
               <a:buNone/>
             </a:pPr>
             <a:r>
@@ -10268,13 +10006,10 @@
                 <a:solidFill>
                   <a:srgbClr val="FFFFFF"/>
                 </a:solidFill>
-                <a:latin typeface="Garamond"/>
               </a:rPr>
               <a:t>Afrique</a:t>
             </a:r>
-            <a:endParaRPr lang="en-US" sz="1900" dirty="0">
-              <a:latin typeface="Garamond"/>
-            </a:endParaRPr>
+            <a:endParaRPr lang="en-US" sz="1900" dirty="0"/>
           </a:p>
         </p:txBody>
       </p:sp>
@@ -10286,7 +10021,7 @@
         </p:nvSpPr>
         <p:spPr>
           <a:xfrm>
-            <a:off x="1143000" y="4347899"/>
+            <a:off x="1143000" y="4224528"/>
             <a:ext cx="2286000" cy="384048"/>
           </a:xfrm>
           <a:prstGeom prst="rect">
@@ -10301,7 +10036,7 @@
           </a:bodyPr>
           <a:lstStyle/>
           <a:p>
-            <a:pPr marL="0" indent="0">
+            <a:pPr indent="0" marL="0">
               <a:buNone/>
             </a:pPr>
             <a:r>
@@ -10309,13 +10044,10 @@
                 <a:solidFill>
                   <a:srgbClr val="C7D8CF"/>
                 </a:solidFill>
-                <a:latin typeface="Garamond"/>
               </a:rPr>
               <a:t>Marchés locaux, usages communautaires, mobile money</a:t>
             </a:r>
-            <a:endParaRPr lang="en-US" sz="1050" dirty="0">
-              <a:latin typeface="Garamond"/>
-            </a:endParaRPr>
+            <a:endParaRPr lang="en-US" sz="1050" dirty="0"/>
           </a:p>
         </p:txBody>
       </p:sp>
@@ -10327,7 +10059,7 @@
         </p:nvSpPr>
         <p:spPr>
           <a:xfrm>
-            <a:off x="3794760" y="4393619"/>
+            <a:off x="3794760" y="4270248"/>
             <a:ext cx="484632" cy="0"/>
           </a:xfrm>
           <a:prstGeom prst="line">
@@ -10352,7 +10084,7 @@
         </p:nvSpPr>
         <p:spPr>
           <a:xfrm>
-            <a:off x="4389120" y="3780971"/>
+            <a:off x="4389120" y="3657600"/>
             <a:ext cx="2834640" cy="1234440"/>
           </a:xfrm>
           <a:prstGeom prst="roundRect">
@@ -10379,7 +10111,7 @@
         </p:nvSpPr>
         <p:spPr>
           <a:xfrm>
-            <a:off x="4617720" y="4009571"/>
+            <a:off x="4617720" y="3886200"/>
             <a:ext cx="2286000" cy="274320"/>
           </a:xfrm>
           <a:prstGeom prst="rect">
@@ -10392,7 +10124,7 @@
           <a:bodyPr wrap="square" lIns="0" tIns="0" rIns="0" bIns="0" rtlCol="0" anchor="ctr"/>
           <a:lstStyle/>
           <a:p>
-            <a:pPr marL="0" indent="0">
+            <a:pPr indent="0" marL="0">
               <a:buNone/>
             </a:pPr>
             <a:r>
@@ -10400,13 +10132,10 @@
                 <a:solidFill>
                   <a:srgbClr val="07150F"/>
                 </a:solidFill>
-                <a:latin typeface="Garamond"/>
               </a:rPr>
               <a:t>Diaspora</a:t>
             </a:r>
-            <a:endParaRPr lang="en-US" sz="1900" dirty="0">
-              <a:latin typeface="Garamond"/>
-            </a:endParaRPr>
+            <a:endParaRPr lang="en-US" sz="1900" dirty="0"/>
           </a:p>
         </p:txBody>
       </p:sp>
@@ -10418,7 +10147,7 @@
         </p:nvSpPr>
         <p:spPr>
           <a:xfrm>
-            <a:off x="4617720" y="4347899"/>
+            <a:off x="4617720" y="4224528"/>
             <a:ext cx="2286000" cy="384048"/>
           </a:xfrm>
           <a:prstGeom prst="rect">
@@ -10433,7 +10162,7 @@
           </a:bodyPr>
           <a:lstStyle/>
           <a:p>
-            <a:pPr marL="0" indent="0">
+            <a:pPr indent="0" marL="0">
               <a:buNone/>
             </a:pPr>
             <a:r>
@@ -10441,13 +10170,10 @@
                 <a:solidFill>
                   <a:srgbClr val="07150F"/>
                 </a:solidFill>
-                <a:latin typeface="Garamond"/>
               </a:rPr>
               <a:t>Contribution à distance, projets familiaux, confiance</a:t>
             </a:r>
-            <a:endParaRPr lang="en-US" sz="1050" dirty="0">
-              <a:latin typeface="Garamond"/>
-            </a:endParaRPr>
+            <a:endParaRPr lang="en-US" sz="1050" dirty="0"/>
           </a:p>
         </p:txBody>
       </p:sp>
@@ -10459,7 +10185,7 @@
         </p:nvSpPr>
         <p:spPr>
           <a:xfrm>
-            <a:off x="7269480" y="4393619"/>
+            <a:off x="7269480" y="4270248"/>
             <a:ext cx="484632" cy="0"/>
           </a:xfrm>
           <a:prstGeom prst="line">
@@ -10484,7 +10210,7 @@
         </p:nvSpPr>
         <p:spPr>
           <a:xfrm>
-            <a:off x="7863840" y="3780971"/>
+            <a:off x="7863840" y="3657600"/>
             <a:ext cx="2834640" cy="1234440"/>
           </a:xfrm>
           <a:prstGeom prst="roundRect">
@@ -10511,7 +10237,7 @@
         </p:nvSpPr>
         <p:spPr>
           <a:xfrm>
-            <a:off x="8092440" y="4009571"/>
+            <a:off x="8092440" y="3886200"/>
             <a:ext cx="2286000" cy="274320"/>
           </a:xfrm>
           <a:prstGeom prst="rect">
@@ -10524,7 +10250,7 @@
           <a:bodyPr wrap="square" lIns="0" tIns="0" rIns="0" bIns="0" rtlCol="0" anchor="ctr"/>
           <a:lstStyle/>
           <a:p>
-            <a:pPr marL="0" indent="0">
+            <a:pPr indent="0" marL="0">
               <a:buNone/>
             </a:pPr>
             <a:r>
@@ -10532,13 +10258,10 @@
                 <a:solidFill>
                   <a:srgbClr val="FFFFFF"/>
                 </a:solidFill>
-                <a:latin typeface="Garamond"/>
               </a:rPr>
               <a:t>Institutions</a:t>
             </a:r>
-            <a:endParaRPr lang="en-US" sz="1900" dirty="0">
-              <a:latin typeface="Garamond"/>
-            </a:endParaRPr>
+            <a:endParaRPr lang="en-US" sz="1900" dirty="0"/>
           </a:p>
         </p:txBody>
       </p:sp>
@@ -10550,7 +10273,7 @@
         </p:nvSpPr>
         <p:spPr>
           <a:xfrm>
-            <a:off x="8092440" y="4347899"/>
+            <a:off x="8092440" y="4224528"/>
             <a:ext cx="2286000" cy="384048"/>
           </a:xfrm>
           <a:prstGeom prst="rect">
@@ -10565,7 +10288,7 @@
           </a:bodyPr>
           <a:lstStyle/>
           <a:p>
-            <a:pPr marL="0" indent="0">
+            <a:pPr indent="0" marL="0">
               <a:buNone/>
             </a:pPr>
             <a:r>
@@ -10573,13 +10296,10 @@
                 <a:solidFill>
                   <a:srgbClr val="C7D8CF"/>
                 </a:solidFill>
-                <a:latin typeface="Garamond"/>
               </a:rPr>
               <a:t>Microfinances, banques, EME, PSP et SGI agréés</a:t>
             </a:r>
-            <a:endParaRPr lang="en-US" sz="1050" dirty="0">
-              <a:latin typeface="Garamond"/>
-            </a:endParaRPr>
+            <a:endParaRPr lang="en-US" sz="1050" dirty="0"/>
           </a:p>
         </p:txBody>
       </p:sp>
@@ -10604,7 +10324,7 @@
           <a:bodyPr wrap="square" lIns="0" tIns="0" rIns="0" bIns="0" rtlCol="0" anchor="ctr"/>
           <a:lstStyle/>
           <a:p>
-            <a:pPr marL="0" indent="0">
+            <a:pPr indent="0" marL="0">
               <a:buNone/>
             </a:pPr>
             <a:r>
@@ -10612,13 +10332,10 @@
                 <a:solidFill>
                   <a:srgbClr val="9DB7AA"/>
                 </a:solidFill>
-                <a:latin typeface="Garamond"/>
               </a:rPr>
               <a:t>© 2026 KOWO · contact@getkowo.com · getkowo.com</a:t>
             </a:r>
-            <a:endParaRPr lang="en-US" sz="750" dirty="0">
-              <a:latin typeface="Garamond"/>
-            </a:endParaRPr>
+            <a:endParaRPr lang="en-US" sz="750" dirty="0"/>
           </a:p>
         </p:txBody>
       </p:sp>
@@ -10638,7 +10355,6 @@
         <a:solidFill>
           <a:srgbClr val="F6F1E7"/>
         </a:solidFill>
-        <a:effectLst/>
       </p:bgPr>
     </p:bg>
     <p:spTree>
@@ -10688,14 +10404,14 @@
       </p:sp>
       <p:pic>
         <p:nvPicPr>
-          <p:cNvPr id="3" name="Image 0" descr="/mnt/data/kowo-institutional-partnership-v2/assets/kowo-logo.jpg"/>
+          <p:cNvPr id="3" name="Image 0" descr="/mnt/data/kowo-institutional-partnership-v2/assets/kowo-logo.jpg">    </p:cNvPr>
           <p:cNvPicPr>
             <a:picLocks noChangeAspect="1"/>
           </p:cNvPicPr>
           <p:nvPr/>
         </p:nvPicPr>
         <p:blipFill>
-          <a:blip r:embed="rId3"/>
+          <a:blip r:embed="rId1"/>
           <a:stretch>
             <a:fillRect/>
           </a:stretch>
@@ -10718,7 +10434,7 @@
         </p:nvSpPr>
         <p:spPr>
           <a:xfrm>
-            <a:off x="960120" y="400159"/>
+            <a:off x="960120" y="356616"/>
             <a:ext cx="1097280" cy="256032"/>
           </a:xfrm>
           <a:prstGeom prst="rect">
@@ -10731,7 +10447,7 @@
           <a:bodyPr wrap="square" lIns="0" tIns="0" rIns="0" bIns="0" rtlCol="0" anchor="ctr"/>
           <a:lstStyle/>
           <a:p>
-            <a:pPr marL="0" indent="0">
+            <a:pPr indent="0" marL="0">
               <a:buNone/>
             </a:pPr>
             <a:r>
@@ -10739,15 +10455,13 @@
                 <a:solidFill>
                   <a:srgbClr val="123B2B"/>
                 </a:solidFill>
-                <a:latin typeface="Garamond"/>
+                <a:latin typeface="Aptos Display" pitchFamily="34" charset="0"/>
                 <a:ea typeface="Aptos Display" pitchFamily="34" charset="-122"/>
                 <a:cs typeface="Aptos Display" pitchFamily="34" charset="-120"/>
               </a:rPr>
               <a:t>KOWO</a:t>
             </a:r>
-            <a:endParaRPr lang="en-US" sz="1000" dirty="0">
-              <a:latin typeface="Garamond"/>
-            </a:endParaRPr>
+            <a:endParaRPr lang="en-US" sz="1000" dirty="0"/>
           </a:p>
         </p:txBody>
       </p:sp>
@@ -10772,7 +10486,7 @@
           <a:bodyPr wrap="square" lIns="0" tIns="0" rIns="0" bIns="0" rtlCol="0" anchor="ctr"/>
           <a:lstStyle/>
           <a:p>
-            <a:pPr marL="0" indent="0" algn="r">
+            <a:pPr algn="r" indent="0" marL="0">
               <a:buNone/>
             </a:pPr>
             <a:r>
@@ -10780,13 +10494,10 @@
                 <a:solidFill>
                   <a:srgbClr val="6B786E"/>
                 </a:solidFill>
-                <a:latin typeface="Garamond"/>
               </a:rPr>
               <a:t>Institutional Partnership Brief</a:t>
             </a:r>
-            <a:endParaRPr lang="en-US" sz="800" dirty="0">
-              <a:latin typeface="Garamond"/>
-            </a:endParaRPr>
+            <a:endParaRPr lang="en-US" sz="800" dirty="0"/>
           </a:p>
         </p:txBody>
       </p:sp>
@@ -10840,7 +10551,7 @@
           <a:bodyPr wrap="square" lIns="0" tIns="0" rIns="0" bIns="0" rtlCol="0" anchor="ctr"/>
           <a:lstStyle/>
           <a:p>
-            <a:pPr marL="0" indent="0" algn="ctr">
+            <a:pPr algn="ctr" indent="0" marL="0">
               <a:buNone/>
             </a:pPr>
             <a:r>
@@ -10848,13 +10559,10 @@
                 <a:solidFill>
                   <a:srgbClr val="123B2B"/>
                 </a:solidFill>
-                <a:latin typeface="Garamond"/>
               </a:rPr>
               <a:t>04 · MODÈLE CIBLE</a:t>
             </a:r>
-            <a:endParaRPr lang="en-US" sz="850" dirty="0">
-              <a:latin typeface="Garamond"/>
-            </a:endParaRPr>
+            <a:endParaRPr lang="en-US" sz="850" dirty="0"/>
           </a:p>
         </p:txBody>
       </p:sp>
@@ -10866,70 +10574,8 @@
         </p:nvSpPr>
         <p:spPr>
           <a:xfrm>
-            <a:off x="680139" y="1335024"/>
-            <a:ext cx="6605451" cy="960120"/>
-          </a:xfrm>
-          <a:prstGeom prst="rect">
-            <a:avLst/>
-          </a:prstGeom>
-          <a:noFill/>
-          <a:ln/>
-        </p:spPr>
-        <p:txBody>
-          <a:bodyPr wrap="square" lIns="0" tIns="0" rIns="0" bIns="0" rtlCol="0" anchor="ctr">
-            <a:normAutofit fontScale="92500" lnSpcReduction="10000"/>
-          </a:bodyPr>
-          <a:lstStyle/>
-          <a:p>
-            <a:pPr marL="0" indent="0">
-              <a:buNone/>
-            </a:pPr>
-            <a:r>
-              <a:rPr lang="en-US" sz="3600" b="1" dirty="0">
-                <a:solidFill>
-                  <a:srgbClr val="0E1712"/>
-                </a:solidFill>
-                <a:latin typeface="Garamond"/>
-                <a:ea typeface="Aptos Display" pitchFamily="34" charset="-122"/>
-                <a:cs typeface="Aptos Display" pitchFamily="34" charset="-120"/>
-              </a:rPr>
-              <a:t>Le partenaire porte les comptes.</a:t>
-            </a:r>
-            <a:endParaRPr lang="en-US" sz="3600" dirty="0">
-              <a:latin typeface="Garamond"/>
-            </a:endParaRPr>
-          </a:p>
-          <a:p>
-            <a:pPr marL="0" indent="0">
-              <a:buNone/>
-            </a:pPr>
-            <a:r>
-              <a:rPr lang="en-US" sz="3600" b="1" dirty="0">
-                <a:solidFill>
-                  <a:srgbClr val="0E1712"/>
-                </a:solidFill>
-                <a:latin typeface="Garamond"/>
-                <a:ea typeface="Aptos Display" pitchFamily="34" charset="-122"/>
-                <a:cs typeface="Aptos Display" pitchFamily="34" charset="-120"/>
-              </a:rPr>
-              <a:t>KOWO porte l’expérience.</a:t>
-            </a:r>
-            <a:endParaRPr lang="en-US" sz="3600" dirty="0">
-              <a:latin typeface="Garamond"/>
-            </a:endParaRPr>
-          </a:p>
-        </p:txBody>
-      </p:sp>
-      <p:sp>
-        <p:nvSpPr>
-          <p:cNvPr id="9" name="Text 6"/>
-          <p:cNvSpPr/>
-          <p:nvPr/>
-        </p:nvSpPr>
-        <p:spPr>
-          <a:xfrm>
-            <a:off x="685800" y="2450592"/>
-            <a:ext cx="5303520" cy="621792"/>
+            <a:off x="658368" y="1335024"/>
+            <a:ext cx="5669280" cy="960120"/>
           </a:xfrm>
           <a:prstGeom prst="rect">
             <a:avLst/>
@@ -10943,7 +10589,65 @@
           </a:bodyPr>
           <a:lstStyle/>
           <a:p>
-            <a:pPr marL="0" indent="0">
+            <a:pPr indent="0" marL="0">
+              <a:buNone/>
+            </a:pPr>
+            <a:r>
+              <a:rPr lang="en-US" sz="3600" b="1" dirty="0">
+                <a:solidFill>
+                  <a:srgbClr val="0E1712"/>
+                </a:solidFill>
+                <a:latin typeface="Aptos Display" pitchFamily="34" charset="0"/>
+                <a:ea typeface="Aptos Display" pitchFamily="34" charset="-122"/>
+                <a:cs typeface="Aptos Display" pitchFamily="34" charset="-120"/>
+              </a:rPr>
+              <a:t>Le partenaire porte les comptes.</a:t>
+            </a:r>
+            <a:endParaRPr lang="en-US" sz="3600" dirty="0"/>
+          </a:p>
+          <a:p>
+            <a:pPr indent="0" marL="0">
+              <a:buNone/>
+            </a:pPr>
+            <a:r>
+              <a:rPr lang="en-US" sz="3600" b="1" dirty="0">
+                <a:solidFill>
+                  <a:srgbClr val="0E1712"/>
+                </a:solidFill>
+                <a:latin typeface="Aptos Display" pitchFamily="34" charset="0"/>
+                <a:ea typeface="Aptos Display" pitchFamily="34" charset="-122"/>
+                <a:cs typeface="Aptos Display" pitchFamily="34" charset="-120"/>
+              </a:rPr>
+              <a:t>KOWO porte l’expérience.</a:t>
+            </a:r>
+            <a:endParaRPr lang="en-US" sz="3600" dirty="0"/>
+          </a:p>
+        </p:txBody>
+      </p:sp>
+      <p:sp>
+        <p:nvSpPr>
+          <p:cNvPr id="9" name="Text 6"/>
+          <p:cNvSpPr/>
+          <p:nvPr/>
+        </p:nvSpPr>
+        <p:spPr>
+          <a:xfrm>
+            <a:off x="685800" y="2450592"/>
+            <a:ext cx="5303520" cy="621792"/>
+          </a:xfrm>
+          <a:prstGeom prst="rect">
+            <a:avLst/>
+          </a:prstGeom>
+          <a:noFill/>
+          <a:ln/>
+        </p:spPr>
+        <p:txBody>
+          <a:bodyPr wrap="square" lIns="0" tIns="0" rIns="0" bIns="0" rtlCol="0" anchor="ctr">
+            <a:normAutofit/>
+          </a:bodyPr>
+          <a:lstStyle/>
+          <a:p>
+            <a:pPr indent="0" marL="0">
               <a:buNone/>
             </a:pPr>
             <a:r>
@@ -10951,13 +10655,10 @@
                 <a:solidFill>
                   <a:srgbClr val="6B786E"/>
                 </a:solidFill>
-                <a:latin typeface="Garamond"/>
               </a:rPr>
               <a:t>La séparation des rôles est au cœur du modèle recherché.</a:t>
             </a:r>
-            <a:endParaRPr lang="en-US" sz="1500" dirty="0">
-              <a:latin typeface="Garamond"/>
-            </a:endParaRPr>
+            <a:endParaRPr lang="en-US" sz="1500" dirty="0"/>
           </a:p>
         </p:txBody>
       </p:sp>
@@ -10969,7 +10670,7 @@
         </p:nvSpPr>
         <p:spPr>
           <a:xfrm>
-            <a:off x="822960" y="3197497"/>
+            <a:off x="822960" y="2834640"/>
             <a:ext cx="1828800" cy="1078992"/>
           </a:xfrm>
           <a:prstGeom prst="roundRect">
@@ -10996,7 +10697,7 @@
         </p:nvSpPr>
         <p:spPr>
           <a:xfrm>
-            <a:off x="960120" y="3398665"/>
+            <a:off x="960120" y="3035808"/>
             <a:ext cx="1554480" cy="201168"/>
           </a:xfrm>
           <a:prstGeom prst="rect">
@@ -11009,7 +10710,7 @@
           <a:bodyPr wrap="square" lIns="0" tIns="0" rIns="0" bIns="0" rtlCol="0" anchor="ctr"/>
           <a:lstStyle/>
           <a:p>
-            <a:pPr marL="0" indent="0">
+            <a:pPr indent="0" marL="0">
               <a:buNone/>
             </a:pPr>
             <a:r>
@@ -11017,13 +10718,10 @@
                 <a:solidFill>
                   <a:srgbClr val="0E1712"/>
                 </a:solidFill>
-                <a:latin typeface="Garamond"/>
               </a:rPr>
               <a:t>Utilisateurs</a:t>
             </a:r>
-            <a:endParaRPr lang="en-US" sz="1400" dirty="0">
-              <a:latin typeface="Garamond"/>
-            </a:endParaRPr>
+            <a:endParaRPr lang="en-US" sz="1400" dirty="0"/>
           </a:p>
         </p:txBody>
       </p:sp>
@@ -11035,7 +10733,7 @@
         </p:nvSpPr>
         <p:spPr>
           <a:xfrm>
-            <a:off x="960120" y="3700417"/>
+            <a:off x="960120" y="3337560"/>
             <a:ext cx="1554480" cy="320040"/>
           </a:xfrm>
           <a:prstGeom prst="rect">
@@ -11050,7 +10748,7 @@
           </a:bodyPr>
           <a:lstStyle/>
           <a:p>
-            <a:pPr marL="0" indent="0">
+            <a:pPr indent="0" marL="0">
               <a:buNone/>
             </a:pPr>
             <a:r>
@@ -11058,13 +10756,10 @@
                 <a:solidFill>
                   <a:srgbClr val="6B786E"/>
                 </a:solidFill>
-                <a:latin typeface="Garamond"/>
               </a:rPr>
               <a:t>Familles, associations, groupes, diaspora</a:t>
             </a:r>
-            <a:endParaRPr lang="en-US" sz="870" dirty="0">
-              <a:latin typeface="Garamond"/>
-            </a:endParaRPr>
+            <a:endParaRPr lang="en-US" sz="870" dirty="0"/>
           </a:p>
         </p:txBody>
       </p:sp>
@@ -11076,7 +10771,7 @@
         </p:nvSpPr>
         <p:spPr>
           <a:xfrm>
-            <a:off x="3200400" y="3197497"/>
+            <a:off x="3200400" y="2834640"/>
             <a:ext cx="1828800" cy="1078992"/>
           </a:xfrm>
           <a:prstGeom prst="roundRect">
@@ -11103,7 +10798,7 @@
         </p:nvSpPr>
         <p:spPr>
           <a:xfrm>
-            <a:off x="3337560" y="3398665"/>
+            <a:off x="3337560" y="3035808"/>
             <a:ext cx="1554480" cy="201168"/>
           </a:xfrm>
           <a:prstGeom prst="rect">
@@ -11116,7 +10811,7 @@
           <a:bodyPr wrap="square" lIns="0" tIns="0" rIns="0" bIns="0" rtlCol="0" anchor="ctr"/>
           <a:lstStyle/>
           <a:p>
-            <a:pPr marL="0" indent="0">
+            <a:pPr indent="0" marL="0">
               <a:buNone/>
             </a:pPr>
             <a:r>
@@ -11124,13 +10819,10 @@
                 <a:solidFill>
                   <a:srgbClr val="0E1712"/>
                 </a:solidFill>
-                <a:latin typeface="Garamond"/>
               </a:rPr>
               <a:t>Wallets / comptes</a:t>
             </a:r>
-            <a:endParaRPr lang="en-US" sz="1400" dirty="0">
-              <a:latin typeface="Garamond"/>
-            </a:endParaRPr>
+            <a:endParaRPr lang="en-US" sz="1400" dirty="0"/>
           </a:p>
         </p:txBody>
       </p:sp>
@@ -11142,7 +10834,7 @@
         </p:nvSpPr>
         <p:spPr>
           <a:xfrm>
-            <a:off x="3337560" y="3700417"/>
+            <a:off x="3337560" y="3337560"/>
             <a:ext cx="1554480" cy="320040"/>
           </a:xfrm>
           <a:prstGeom prst="rect">
@@ -11157,7 +10849,7 @@
           </a:bodyPr>
           <a:lstStyle/>
           <a:p>
-            <a:pPr marL="0" indent="0">
+            <a:pPr indent="0" marL="0">
               <a:buNone/>
             </a:pPr>
             <a:r>
@@ -11165,13 +10857,10 @@
                 <a:solidFill>
                   <a:srgbClr val="6B786E"/>
                 </a:solidFill>
-                <a:latin typeface="Garamond"/>
               </a:rPr>
               <a:t>Ouverts chez l’institution partenaire</a:t>
             </a:r>
-            <a:endParaRPr lang="en-US" sz="870" dirty="0">
-              <a:latin typeface="Garamond"/>
-            </a:endParaRPr>
+            <a:endParaRPr lang="en-US" sz="870" dirty="0"/>
           </a:p>
         </p:txBody>
       </p:sp>
@@ -11183,7 +10872,7 @@
         </p:nvSpPr>
         <p:spPr>
           <a:xfrm>
-            <a:off x="5577840" y="3197497"/>
+            <a:off x="5577840" y="2834640"/>
             <a:ext cx="1828800" cy="1078992"/>
           </a:xfrm>
           <a:prstGeom prst="roundRect">
@@ -11210,7 +10899,7 @@
         </p:nvSpPr>
         <p:spPr>
           <a:xfrm>
-            <a:off x="5715000" y="3398665"/>
+            <a:off x="5715000" y="3035808"/>
             <a:ext cx="1554480" cy="201168"/>
           </a:xfrm>
           <a:prstGeom prst="rect">
@@ -11223,7 +10912,7 @@
           <a:bodyPr wrap="square" lIns="0" tIns="0" rIns="0" bIns="0" rtlCol="0" anchor="ctr"/>
           <a:lstStyle/>
           <a:p>
-            <a:pPr marL="0" indent="0">
+            <a:pPr indent="0" marL="0">
               <a:buNone/>
             </a:pPr>
             <a:r>
@@ -11231,13 +10920,10 @@
                 <a:solidFill>
                   <a:srgbClr val="FFFFFF"/>
                 </a:solidFill>
-                <a:latin typeface="Garamond"/>
               </a:rPr>
               <a:t>Institution partenaire</a:t>
             </a:r>
-            <a:endParaRPr lang="en-US" sz="1400" dirty="0">
-              <a:latin typeface="Garamond"/>
-            </a:endParaRPr>
+            <a:endParaRPr lang="en-US" sz="1400" dirty="0"/>
           </a:p>
         </p:txBody>
       </p:sp>
@@ -11249,7 +10935,7 @@
         </p:nvSpPr>
         <p:spPr>
           <a:xfrm>
-            <a:off x="5715000" y="3700417"/>
+            <a:off x="5715000" y="3337560"/>
             <a:ext cx="1554480" cy="320040"/>
           </a:xfrm>
           <a:prstGeom prst="rect">
@@ -11264,7 +10950,7 @@
           </a:bodyPr>
           <a:lstStyle/>
           <a:p>
-            <a:pPr marL="0" indent="0">
+            <a:pPr indent="0" marL="0">
               <a:buNone/>
             </a:pPr>
             <a:r>
@@ -11272,13 +10958,10 @@
                 <a:solidFill>
                   <a:srgbClr val="C7D8CF"/>
                 </a:solidFill>
-                <a:latin typeface="Garamond"/>
               </a:rPr>
               <a:t>Conservation des fonds &amp; conformité</a:t>
             </a:r>
-            <a:endParaRPr lang="en-US" sz="870" dirty="0">
-              <a:latin typeface="Garamond"/>
-            </a:endParaRPr>
+            <a:endParaRPr lang="en-US" sz="870" dirty="0"/>
           </a:p>
         </p:txBody>
       </p:sp>
@@ -11290,7 +10973,7 @@
         </p:nvSpPr>
         <p:spPr>
           <a:xfrm>
-            <a:off x="7955280" y="3197497"/>
+            <a:off x="7955280" y="2834640"/>
             <a:ext cx="1828800" cy="1078992"/>
           </a:xfrm>
           <a:prstGeom prst="roundRect">
@@ -11317,7 +11000,7 @@
         </p:nvSpPr>
         <p:spPr>
           <a:xfrm>
-            <a:off x="8092440" y="3398665"/>
+            <a:off x="8092440" y="3035808"/>
             <a:ext cx="1554480" cy="201168"/>
           </a:xfrm>
           <a:prstGeom prst="rect">
@@ -11330,7 +11013,7 @@
           <a:bodyPr wrap="square" lIns="0" tIns="0" rIns="0" bIns="0" rtlCol="0" anchor="ctr"/>
           <a:lstStyle/>
           <a:p>
-            <a:pPr marL="0" indent="0">
+            <a:pPr indent="0" marL="0">
               <a:buNone/>
             </a:pPr>
             <a:r>
@@ -11338,13 +11021,10 @@
                 <a:solidFill>
                   <a:srgbClr val="0E1712"/>
                 </a:solidFill>
-                <a:latin typeface="Garamond"/>
               </a:rPr>
               <a:t>KOWO</a:t>
             </a:r>
-            <a:endParaRPr lang="en-US" sz="1400" dirty="0">
-              <a:latin typeface="Garamond"/>
-            </a:endParaRPr>
+            <a:endParaRPr lang="en-US" sz="1400" dirty="0"/>
           </a:p>
         </p:txBody>
       </p:sp>
@@ -11356,7 +11036,7 @@
         </p:nvSpPr>
         <p:spPr>
           <a:xfrm>
-            <a:off x="8092440" y="3700417"/>
+            <a:off x="8092440" y="3337560"/>
             <a:ext cx="1554480" cy="320040"/>
           </a:xfrm>
           <a:prstGeom prst="rect">
@@ -11371,7 +11051,7 @@
           </a:bodyPr>
           <a:lstStyle/>
           <a:p>
-            <a:pPr marL="0" indent="0">
+            <a:pPr indent="0" marL="0">
               <a:buNone/>
             </a:pPr>
             <a:r>
@@ -11379,13 +11059,10 @@
                 <a:solidFill>
                   <a:srgbClr val="6B786E"/>
                 </a:solidFill>
-                <a:latin typeface="Garamond"/>
               </a:rPr>
               <a:t>App, UX, règles, notifications, analytics</a:t>
             </a:r>
-            <a:endParaRPr lang="en-US" sz="870" dirty="0">
-              <a:latin typeface="Garamond"/>
-            </a:endParaRPr>
+            <a:endParaRPr lang="en-US" sz="870" dirty="0"/>
           </a:p>
         </p:txBody>
       </p:sp>
@@ -11397,7 +11074,7 @@
         </p:nvSpPr>
         <p:spPr>
           <a:xfrm>
-            <a:off x="10058400" y="3197497"/>
+            <a:off x="10058400" y="2834640"/>
             <a:ext cx="1828800" cy="1078992"/>
           </a:xfrm>
           <a:prstGeom prst="roundRect">
@@ -11424,7 +11101,7 @@
         </p:nvSpPr>
         <p:spPr>
           <a:xfrm>
-            <a:off x="10195560" y="3398665"/>
+            <a:off x="10195560" y="3035808"/>
             <a:ext cx="1554480" cy="201168"/>
           </a:xfrm>
           <a:prstGeom prst="rect">
@@ -11437,7 +11114,7 @@
           <a:bodyPr wrap="square" lIns="0" tIns="0" rIns="0" bIns="0" rtlCol="0" anchor="ctr"/>
           <a:lstStyle/>
           <a:p>
-            <a:pPr marL="0" indent="0">
+            <a:pPr indent="0" marL="0">
               <a:buNone/>
             </a:pPr>
             <a:r>
@@ -11445,13 +11122,10 @@
                 <a:solidFill>
                   <a:srgbClr val="0E1712"/>
                 </a:solidFill>
-                <a:latin typeface="Garamond"/>
               </a:rPr>
               <a:t>Commission</a:t>
             </a:r>
-            <a:endParaRPr lang="en-US" sz="1400" dirty="0">
-              <a:latin typeface="Garamond"/>
-            </a:endParaRPr>
+            <a:endParaRPr lang="en-US" sz="1400" dirty="0"/>
           </a:p>
         </p:txBody>
       </p:sp>
@@ -11463,7 +11137,7 @@
         </p:nvSpPr>
         <p:spPr>
           <a:xfrm>
-            <a:off x="10195560" y="3700417"/>
+            <a:off x="10195560" y="3337560"/>
             <a:ext cx="1554480" cy="320040"/>
           </a:xfrm>
           <a:prstGeom prst="rect">
@@ -11478,7 +11152,7 @@
           </a:bodyPr>
           <a:lstStyle/>
           <a:p>
-            <a:pPr marL="0" indent="0">
+            <a:pPr indent="0" marL="0">
               <a:buNone/>
             </a:pPr>
             <a:r>
@@ -11486,13 +11160,10 @@
                 <a:solidFill>
                   <a:srgbClr val="6B786E"/>
                 </a:solidFill>
-                <a:latin typeface="Garamond"/>
               </a:rPr>
               <a:t>Revenu de plateforme uniquement</a:t>
             </a:r>
-            <a:endParaRPr lang="en-US" sz="870" dirty="0">
-              <a:latin typeface="Garamond"/>
-            </a:endParaRPr>
+            <a:endParaRPr lang="en-US" sz="870" dirty="0"/>
           </a:p>
         </p:txBody>
       </p:sp>
@@ -11504,7 +11175,7 @@
         </p:nvSpPr>
         <p:spPr>
           <a:xfrm>
-            <a:off x="2688336" y="3736993"/>
+            <a:off x="2688336" y="3374136"/>
             <a:ext cx="402336" cy="0"/>
           </a:xfrm>
           <a:prstGeom prst="line">
@@ -11529,7 +11200,7 @@
         </p:nvSpPr>
         <p:spPr>
           <a:xfrm>
-            <a:off x="5065776" y="3736993"/>
+            <a:off x="5065776" y="3374136"/>
             <a:ext cx="402336" cy="0"/>
           </a:xfrm>
           <a:prstGeom prst="line">
@@ -11554,7 +11225,7 @@
         </p:nvSpPr>
         <p:spPr>
           <a:xfrm>
-            <a:off x="7443216" y="3736993"/>
+            <a:off x="7443216" y="3374136"/>
             <a:ext cx="402336" cy="0"/>
           </a:xfrm>
           <a:prstGeom prst="line">
@@ -11579,7 +11250,7 @@
         </p:nvSpPr>
         <p:spPr>
           <a:xfrm>
-            <a:off x="9820656" y="3736993"/>
+            <a:off x="9820656" y="3374136"/>
             <a:ext cx="128016" cy="0"/>
           </a:xfrm>
           <a:prstGeom prst="line">
@@ -11644,7 +11315,7 @@
           <a:bodyPr wrap="square" lIns="0" tIns="0" rIns="0" bIns="0" rtlCol="0" anchor="ctr"/>
           <a:lstStyle/>
           <a:p>
-            <a:pPr marL="0" indent="0" algn="ctr">
+            <a:pPr algn="ctr" indent="0" marL="0">
               <a:buNone/>
             </a:pPr>
             <a:r>
@@ -11652,13 +11323,10 @@
                 <a:solidFill>
                   <a:srgbClr val="07150F"/>
                 </a:solidFill>
-                <a:latin typeface="Garamond"/>
               </a:rPr>
               <a:t>Principe clé : les fonds des utilisateurs ne sont pas mélangés aux revenus de KOWO.</a:t>
             </a:r>
-            <a:endParaRPr lang="en-US" sz="1300" dirty="0">
-              <a:latin typeface="Garamond"/>
-            </a:endParaRPr>
+            <a:endParaRPr lang="en-US" sz="1300" dirty="0"/>
           </a:p>
         </p:txBody>
       </p:sp>
@@ -11683,7 +11351,7 @@
           <a:bodyPr wrap="square" lIns="0" tIns="0" rIns="0" bIns="0" rtlCol="0" anchor="ctr"/>
           <a:lstStyle/>
           <a:p>
-            <a:pPr marL="0" indent="0">
+            <a:pPr indent="0" marL="0">
               <a:buNone/>
             </a:pPr>
             <a:r>
@@ -11691,13 +11359,10 @@
                 <a:solidFill>
                   <a:srgbClr val="6B786E"/>
                 </a:solidFill>
-                <a:latin typeface="Garamond"/>
               </a:rPr>
               <a:t>© 2026 KOWO · contact@getkowo.com · getkowo.com</a:t>
             </a:r>
-            <a:endParaRPr lang="en-US" sz="750" dirty="0">
-              <a:latin typeface="Garamond"/>
-            </a:endParaRPr>
+            <a:endParaRPr lang="en-US" sz="750" dirty="0"/>
           </a:p>
         </p:txBody>
       </p:sp>
@@ -11717,7 +11382,6 @@
         <a:solidFill>
           <a:srgbClr val="F6F1E7"/>
         </a:solidFill>
-        <a:effectLst/>
       </p:bgPr>
     </p:bg>
     <p:spTree>
@@ -11767,14 +11431,14 @@
       </p:sp>
       <p:pic>
         <p:nvPicPr>
-          <p:cNvPr id="3" name="Image 0" descr="/mnt/data/kowo-institutional-partnership-v2/assets/kowo-logo.jpg"/>
+          <p:cNvPr id="3" name="Image 0" descr="/mnt/data/kowo-institutional-partnership-v2/assets/kowo-logo.jpg">    </p:cNvPr>
           <p:cNvPicPr>
             <a:picLocks noChangeAspect="1"/>
           </p:cNvPicPr>
           <p:nvPr/>
         </p:nvPicPr>
         <p:blipFill>
-          <a:blip r:embed="rId3"/>
+          <a:blip r:embed="rId1"/>
           <a:stretch>
             <a:fillRect/>
           </a:stretch>
@@ -11797,7 +11461,7 @@
         </p:nvSpPr>
         <p:spPr>
           <a:xfrm>
-            <a:off x="960120" y="414673"/>
+            <a:off x="960120" y="356616"/>
             <a:ext cx="1097280" cy="256032"/>
           </a:xfrm>
           <a:prstGeom prst="rect">
@@ -11810,7 +11474,7 @@
           <a:bodyPr wrap="square" lIns="0" tIns="0" rIns="0" bIns="0" rtlCol="0" anchor="ctr"/>
           <a:lstStyle/>
           <a:p>
-            <a:pPr marL="0" indent="0">
+            <a:pPr indent="0" marL="0">
               <a:buNone/>
             </a:pPr>
             <a:r>
@@ -11818,15 +11482,13 @@
                 <a:solidFill>
                   <a:srgbClr val="123B2B"/>
                 </a:solidFill>
-                <a:latin typeface="Garamond"/>
+                <a:latin typeface="Aptos Display" pitchFamily="34" charset="0"/>
                 <a:ea typeface="Aptos Display" pitchFamily="34" charset="-122"/>
                 <a:cs typeface="Aptos Display" pitchFamily="34" charset="-120"/>
               </a:rPr>
               <a:t>KOWO</a:t>
             </a:r>
-            <a:endParaRPr lang="en-US" sz="1000" dirty="0">
-              <a:latin typeface="Garamond"/>
-            </a:endParaRPr>
+            <a:endParaRPr lang="en-US" sz="1000" dirty="0"/>
           </a:p>
         </p:txBody>
       </p:sp>
@@ -11851,7 +11513,7 @@
           <a:bodyPr wrap="square" lIns="0" tIns="0" rIns="0" bIns="0" rtlCol="0" anchor="ctr"/>
           <a:lstStyle/>
           <a:p>
-            <a:pPr marL="0" indent="0" algn="r">
+            <a:pPr algn="r" indent="0" marL="0">
               <a:buNone/>
             </a:pPr>
             <a:r>
@@ -11859,13 +11521,10 @@
                 <a:solidFill>
                   <a:srgbClr val="6B786E"/>
                 </a:solidFill>
-                <a:latin typeface="Garamond"/>
               </a:rPr>
               <a:t>Institutional Partnership Brief</a:t>
             </a:r>
-            <a:endParaRPr lang="en-US" sz="800" dirty="0">
-              <a:latin typeface="Garamond"/>
-            </a:endParaRPr>
+            <a:endParaRPr lang="en-US" sz="800" dirty="0"/>
           </a:p>
         </p:txBody>
       </p:sp>
@@ -11919,7 +11578,7 @@
           <a:bodyPr wrap="square" lIns="0" tIns="0" rIns="0" bIns="0" rtlCol="0" anchor="ctr"/>
           <a:lstStyle/>
           <a:p>
-            <a:pPr marL="0" indent="0" algn="ctr">
+            <a:pPr algn="ctr" indent="0" marL="0">
               <a:buNone/>
             </a:pPr>
             <a:r>
@@ -11927,13 +11586,10 @@
                 <a:solidFill>
                   <a:srgbClr val="123B2B"/>
                 </a:solidFill>
-                <a:latin typeface="Garamond"/>
               </a:rPr>
               <a:t>05 · RÉPARTITION DES RÔLES</a:t>
             </a:r>
-            <a:endParaRPr lang="en-US" sz="850" dirty="0">
-              <a:latin typeface="Garamond"/>
-            </a:endParaRPr>
+            <a:endParaRPr lang="en-US" sz="850" dirty="0"/>
           </a:p>
         </p:txBody>
       </p:sp>
@@ -11945,51 +11601,8 @@
         </p:nvSpPr>
         <p:spPr>
           <a:xfrm>
-            <a:off x="680139" y="1335024"/>
-            <a:ext cx="6307909" cy="960120"/>
-          </a:xfrm>
-          <a:prstGeom prst="rect">
-            <a:avLst/>
-          </a:prstGeom>
-          <a:noFill/>
-          <a:ln/>
-        </p:spPr>
-        <p:txBody>
-          <a:bodyPr wrap="square" lIns="0" tIns="0" rIns="0" bIns="0" rtlCol="0" anchor="ctr">
-            <a:normAutofit fontScale="70000" lnSpcReduction="20000"/>
-          </a:bodyPr>
-          <a:lstStyle/>
-          <a:p>
-            <a:pPr marL="0" indent="0">
-              <a:buNone/>
-            </a:pPr>
-            <a:r>
-              <a:rPr lang="en-US" sz="3600" b="1" dirty="0">
-                <a:solidFill>
-                  <a:srgbClr val="0E1712"/>
-                </a:solidFill>
-                <a:latin typeface="Garamond"/>
-                <a:ea typeface="Aptos Display" pitchFamily="34" charset="-122"/>
-                <a:cs typeface="Aptos Display" pitchFamily="34" charset="-120"/>
-              </a:rPr>
-              <a:t>Une collaboration claire, lisible et compatible avec les attentes réglementaires.</a:t>
-            </a:r>
-            <a:endParaRPr lang="en-US" sz="3600" dirty="0">
-              <a:latin typeface="Garamond"/>
-            </a:endParaRPr>
-          </a:p>
-        </p:txBody>
-      </p:sp>
-      <p:sp>
-        <p:nvSpPr>
-          <p:cNvPr id="9" name="Text 6"/>
-          <p:cNvSpPr/>
-          <p:nvPr/>
-        </p:nvSpPr>
-        <p:spPr>
-          <a:xfrm>
-            <a:off x="685800" y="2624763"/>
-            <a:ext cx="5303520" cy="621792"/>
+            <a:off x="658368" y="1335024"/>
+            <a:ext cx="5669280" cy="960120"/>
           </a:xfrm>
           <a:prstGeom prst="rect">
             <a:avLst/>
@@ -12003,7 +11616,48 @@
           </a:bodyPr>
           <a:lstStyle/>
           <a:p>
-            <a:pPr marL="0" indent="0">
+            <a:pPr indent="0" marL="0">
+              <a:buNone/>
+            </a:pPr>
+            <a:r>
+              <a:rPr lang="en-US" sz="3600" b="1" dirty="0">
+                <a:solidFill>
+                  <a:srgbClr val="0E1712"/>
+                </a:solidFill>
+                <a:latin typeface="Aptos Display" pitchFamily="34" charset="0"/>
+                <a:ea typeface="Aptos Display" pitchFamily="34" charset="-122"/>
+                <a:cs typeface="Aptos Display" pitchFamily="34" charset="-120"/>
+              </a:rPr>
+              <a:t>Une collaboration claire, lisible et compatible avec les attentes réglementaires.</a:t>
+            </a:r>
+            <a:endParaRPr lang="en-US" sz="3600" dirty="0"/>
+          </a:p>
+        </p:txBody>
+      </p:sp>
+      <p:sp>
+        <p:nvSpPr>
+          <p:cNvPr id="9" name="Text 6"/>
+          <p:cNvSpPr/>
+          <p:nvPr/>
+        </p:nvSpPr>
+        <p:spPr>
+          <a:xfrm>
+            <a:off x="685800" y="2450592"/>
+            <a:ext cx="5303520" cy="621792"/>
+          </a:xfrm>
+          <a:prstGeom prst="rect">
+            <a:avLst/>
+          </a:prstGeom>
+          <a:noFill/>
+          <a:ln/>
+        </p:spPr>
+        <p:txBody>
+          <a:bodyPr wrap="square" lIns="0" tIns="0" rIns="0" bIns="0" rtlCol="0" anchor="ctr">
+            <a:normAutofit/>
+          </a:bodyPr>
+          <a:lstStyle/>
+          <a:p>
+            <a:pPr indent="0" marL="0">
               <a:buNone/>
             </a:pPr>
             <a:r>
@@ -12011,13 +11665,10 @@
                 <a:solidFill>
                   <a:srgbClr val="6B786E"/>
                 </a:solidFill>
-                <a:latin typeface="Garamond"/>
               </a:rPr>
               <a:t>Chaque partie reste dans son cœur de métier.</a:t>
             </a:r>
-            <a:endParaRPr lang="en-US" sz="1500" dirty="0">
-              <a:latin typeface="Garamond"/>
-            </a:endParaRPr>
+            <a:endParaRPr lang="en-US" sz="1500" dirty="0"/>
           </a:p>
         </p:txBody>
       </p:sp>
@@ -12029,7 +11680,7 @@
         </p:nvSpPr>
         <p:spPr>
           <a:xfrm>
-            <a:off x="731520" y="3548743"/>
+            <a:off x="731520" y="2743200"/>
             <a:ext cx="3200400" cy="2148840"/>
           </a:xfrm>
           <a:prstGeom prst="roundRect">
@@ -12058,7 +11709,7 @@
         </p:nvSpPr>
         <p:spPr>
           <a:xfrm>
-            <a:off x="941832" y="3749911"/>
+            <a:off x="941832" y="2944368"/>
             <a:ext cx="320040" cy="320040"/>
           </a:xfrm>
           <a:prstGeom prst="rect">
@@ -12071,7 +11722,7 @@
           <a:bodyPr wrap="square" lIns="0" tIns="0" rIns="0" bIns="0" rtlCol="0" anchor="ctr"/>
           <a:lstStyle/>
           <a:p>
-            <a:pPr marL="0" indent="0">
+            <a:pPr indent="0" marL="0">
               <a:buNone/>
             </a:pPr>
             <a:r>
@@ -12079,13 +11730,10 @@
                 <a:solidFill>
                   <a:srgbClr val="000000"/>
                 </a:solidFill>
-                <a:latin typeface="Garamond"/>
               </a:rPr>
               <a:t>🏦</a:t>
             </a:r>
-            <a:endParaRPr lang="en-US" sz="1700" dirty="0">
-              <a:latin typeface="Garamond"/>
-            </a:endParaRPr>
+            <a:endParaRPr lang="en-US" sz="1700" dirty="0"/>
           </a:p>
         </p:txBody>
       </p:sp>
@@ -12097,7 +11745,7 @@
         </p:nvSpPr>
         <p:spPr>
           <a:xfrm>
-            <a:off x="1325880" y="3749911"/>
+            <a:off x="1325880" y="2944368"/>
             <a:ext cx="2404872" cy="256032"/>
           </a:xfrm>
           <a:prstGeom prst="rect">
@@ -12110,7 +11758,7 @@
           <a:bodyPr wrap="square" lIns="0" tIns="0" rIns="0" bIns="0" rtlCol="0" anchor="ctr"/>
           <a:lstStyle/>
           <a:p>
-            <a:pPr marL="0" indent="0">
+            <a:pPr indent="0" marL="0">
               <a:buNone/>
             </a:pPr>
             <a:r>
@@ -12118,13 +11766,10 @@
                 <a:solidFill>
                   <a:srgbClr val="0E1712"/>
                 </a:solidFill>
-                <a:latin typeface="Garamond"/>
               </a:rPr>
               <a:t>Institution partenaire</a:t>
             </a:r>
-            <a:endParaRPr lang="en-US" sz="1500" dirty="0">
-              <a:latin typeface="Garamond"/>
-            </a:endParaRPr>
+            <a:endParaRPr lang="en-US" sz="1500" dirty="0"/>
           </a:p>
         </p:txBody>
       </p:sp>
@@ -12136,7 +11781,7 @@
         </p:nvSpPr>
         <p:spPr>
           <a:xfrm>
-            <a:off x="941832" y="4188823"/>
+            <a:off x="941832" y="3383280"/>
             <a:ext cx="384048" cy="32004"/>
           </a:xfrm>
           <a:prstGeom prst="rect">
@@ -12163,7 +11808,7 @@
         </p:nvSpPr>
         <p:spPr>
           <a:xfrm>
-            <a:off x="941832" y="4325983"/>
+            <a:off x="941832" y="3520440"/>
             <a:ext cx="2779776" cy="1188720"/>
           </a:xfrm>
           <a:prstGeom prst="rect">
@@ -12178,7 +11823,7 @@
           </a:bodyPr>
           <a:lstStyle/>
           <a:p>
-            <a:pPr marL="0" indent="0">
+            <a:pPr indent="0" marL="0">
               <a:buNone/>
             </a:pPr>
             <a:r>
@@ -12186,16 +11831,13 @@
                 <a:solidFill>
                   <a:srgbClr val="6B786E"/>
                 </a:solidFill>
-                <a:latin typeface="Garamond"/>
               </a:rPr>
               <a:t>• Ouverture des comptes / wallets</a:t>
             </a:r>
-            <a:endParaRPr lang="en-US" sz="1050" dirty="0">
-              <a:latin typeface="Garamond"/>
-            </a:endParaRPr>
-          </a:p>
-          <a:p>
-            <a:pPr marL="0" indent="0">
+            <a:endParaRPr lang="en-US" sz="1050" dirty="0"/>
+          </a:p>
+          <a:p>
+            <a:pPr indent="0" marL="0">
               <a:buNone/>
             </a:pPr>
             <a:r>
@@ -12203,16 +11845,13 @@
                 <a:solidFill>
                   <a:srgbClr val="6B786E"/>
                 </a:solidFill>
-                <a:latin typeface="Garamond"/>
               </a:rPr>
               <a:t>• Conservation des fonds</a:t>
             </a:r>
-            <a:endParaRPr lang="en-US" sz="1050" dirty="0">
-              <a:latin typeface="Garamond"/>
-            </a:endParaRPr>
-          </a:p>
-          <a:p>
-            <a:pPr marL="0" indent="0">
+            <a:endParaRPr lang="en-US" sz="1050" dirty="0"/>
+          </a:p>
+          <a:p>
+            <a:pPr indent="0" marL="0">
               <a:buNone/>
             </a:pPr>
             <a:r>
@@ -12220,16 +11859,13 @@
                 <a:solidFill>
                   <a:srgbClr val="6B786E"/>
                 </a:solidFill>
-                <a:latin typeface="Garamond"/>
               </a:rPr>
               <a:t>• Conformité financière</a:t>
             </a:r>
-            <a:endParaRPr lang="en-US" sz="1050" dirty="0">
-              <a:latin typeface="Garamond"/>
-            </a:endParaRPr>
-          </a:p>
-          <a:p>
-            <a:pPr marL="0" indent="0">
+            <a:endParaRPr lang="en-US" sz="1050" dirty="0"/>
+          </a:p>
+          <a:p>
+            <a:pPr indent="0" marL="0">
               <a:buNone/>
             </a:pPr>
             <a:r>
@@ -12237,16 +11873,13 @@
                 <a:solidFill>
                   <a:srgbClr val="6B786E"/>
                 </a:solidFill>
-                <a:latin typeface="Garamond"/>
               </a:rPr>
               <a:t>• Obligations réglementaires</a:t>
             </a:r>
-            <a:endParaRPr lang="en-US" sz="1050" dirty="0">
-              <a:latin typeface="Garamond"/>
-            </a:endParaRPr>
-          </a:p>
-          <a:p>
-            <a:pPr marL="0" indent="0">
+            <a:endParaRPr lang="en-US" sz="1050" dirty="0"/>
+          </a:p>
+          <a:p>
+            <a:pPr indent="0" marL="0">
               <a:buNone/>
             </a:pPr>
             <a:r>
@@ -12254,13 +11887,10 @@
                 <a:solidFill>
                   <a:srgbClr val="6B786E"/>
                 </a:solidFill>
-                <a:latin typeface="Garamond"/>
               </a:rPr>
               <a:t>• Supervision des opérations</a:t>
             </a:r>
-            <a:endParaRPr lang="en-US" sz="1050" dirty="0">
-              <a:latin typeface="Garamond"/>
-            </a:endParaRPr>
+            <a:endParaRPr lang="en-US" sz="1050" dirty="0"/>
           </a:p>
         </p:txBody>
       </p:sp>
@@ -12272,7 +11902,7 @@
         </p:nvSpPr>
         <p:spPr>
           <a:xfrm>
-            <a:off x="4480560" y="3548743"/>
+            <a:off x="4480560" y="2743200"/>
             <a:ext cx="3200400" cy="2148840"/>
           </a:xfrm>
           <a:prstGeom prst="roundRect">
@@ -12301,7 +11931,7 @@
         </p:nvSpPr>
         <p:spPr>
           <a:xfrm>
-            <a:off x="4690872" y="3749911"/>
+            <a:off x="4690872" y="2944368"/>
             <a:ext cx="320040" cy="320040"/>
           </a:xfrm>
           <a:prstGeom prst="rect">
@@ -12314,7 +11944,7 @@
           <a:bodyPr wrap="square" lIns="0" tIns="0" rIns="0" bIns="0" rtlCol="0" anchor="ctr"/>
           <a:lstStyle/>
           <a:p>
-            <a:pPr marL="0" indent="0">
+            <a:pPr indent="0" marL="0">
               <a:buNone/>
             </a:pPr>
             <a:r>
@@ -12322,13 +11952,10 @@
                 <a:solidFill>
                   <a:srgbClr val="000000"/>
                 </a:solidFill>
-                <a:latin typeface="Garamond"/>
               </a:rPr>
               <a:t>📱</a:t>
             </a:r>
-            <a:endParaRPr lang="en-US" sz="1700" dirty="0">
-              <a:latin typeface="Garamond"/>
-            </a:endParaRPr>
+            <a:endParaRPr lang="en-US" sz="1700" dirty="0"/>
           </a:p>
         </p:txBody>
       </p:sp>
@@ -12340,7 +11967,7 @@
         </p:nvSpPr>
         <p:spPr>
           <a:xfrm>
-            <a:off x="5074920" y="3749911"/>
+            <a:off x="5074920" y="2944368"/>
             <a:ext cx="2404872" cy="256032"/>
           </a:xfrm>
           <a:prstGeom prst="rect">
@@ -12353,7 +11980,7 @@
           <a:bodyPr wrap="square" lIns="0" tIns="0" rIns="0" bIns="0" rtlCol="0" anchor="ctr"/>
           <a:lstStyle/>
           <a:p>
-            <a:pPr marL="0" indent="0">
+            <a:pPr indent="0" marL="0">
               <a:buNone/>
             </a:pPr>
             <a:r>
@@ -12361,13 +11988,10 @@
                 <a:solidFill>
                   <a:srgbClr val="0E1712"/>
                 </a:solidFill>
-                <a:latin typeface="Garamond"/>
               </a:rPr>
               <a:t>KOWO</a:t>
             </a:r>
-            <a:endParaRPr lang="en-US" sz="1500" dirty="0">
-              <a:latin typeface="Garamond"/>
-            </a:endParaRPr>
+            <a:endParaRPr lang="en-US" sz="1500" dirty="0"/>
           </a:p>
         </p:txBody>
       </p:sp>
@@ -12379,7 +12003,7 @@
         </p:nvSpPr>
         <p:spPr>
           <a:xfrm>
-            <a:off x="4690872" y="4188823"/>
+            <a:off x="4690872" y="3383280"/>
             <a:ext cx="384048" cy="32004"/>
           </a:xfrm>
           <a:prstGeom prst="rect">
@@ -12406,7 +12030,7 @@
         </p:nvSpPr>
         <p:spPr>
           <a:xfrm>
-            <a:off x="4690872" y="4325983"/>
+            <a:off x="4690872" y="3520440"/>
             <a:ext cx="2779776" cy="1188720"/>
           </a:xfrm>
           <a:prstGeom prst="rect">
@@ -12421,7 +12045,7 @@
           </a:bodyPr>
           <a:lstStyle/>
           <a:p>
-            <a:pPr marL="0" indent="0">
+            <a:pPr indent="0" marL="0">
               <a:buNone/>
             </a:pPr>
             <a:r>
@@ -12429,16 +12053,13 @@
                 <a:solidFill>
                   <a:srgbClr val="6B786E"/>
                 </a:solidFill>
-                <a:latin typeface="Garamond"/>
               </a:rPr>
               <a:t>• Application mobile</a:t>
             </a:r>
-            <a:endParaRPr lang="en-US" sz="1050" dirty="0">
-              <a:latin typeface="Garamond"/>
-            </a:endParaRPr>
-          </a:p>
-          <a:p>
-            <a:pPr marL="0" indent="0">
+            <a:endParaRPr lang="en-US" sz="1050" dirty="0"/>
+          </a:p>
+          <a:p>
+            <a:pPr indent="0" marL="0">
               <a:buNone/>
             </a:pPr>
             <a:r>
@@ -12446,16 +12067,13 @@
                 <a:solidFill>
                   <a:srgbClr val="6B786E"/>
                 </a:solidFill>
-                <a:latin typeface="Garamond"/>
               </a:rPr>
               <a:t>• Gestion des communautés</a:t>
             </a:r>
-            <a:endParaRPr lang="en-US" sz="1050" dirty="0">
-              <a:latin typeface="Garamond"/>
-            </a:endParaRPr>
-          </a:p>
-          <a:p>
-            <a:pPr marL="0" indent="0">
+            <a:endParaRPr lang="en-US" sz="1050" dirty="0"/>
+          </a:p>
+          <a:p>
+            <a:pPr indent="0" marL="0">
               <a:buNone/>
             </a:pPr>
             <a:r>
@@ -12463,16 +12081,13 @@
                 <a:solidFill>
                   <a:srgbClr val="6B786E"/>
                 </a:solidFill>
-                <a:latin typeface="Garamond"/>
               </a:rPr>
               <a:t>• Interfaces API</a:t>
             </a:r>
-            <a:endParaRPr lang="en-US" sz="1050" dirty="0">
-              <a:latin typeface="Garamond"/>
-            </a:endParaRPr>
-          </a:p>
-          <a:p>
-            <a:pPr marL="0" indent="0">
+            <a:endParaRPr lang="en-US" sz="1050" dirty="0"/>
+          </a:p>
+          <a:p>
+            <a:pPr indent="0" marL="0">
               <a:buNone/>
             </a:pPr>
             <a:r>
@@ -12480,16 +12095,13 @@
                 <a:solidFill>
                   <a:srgbClr val="6B786E"/>
                 </a:solidFill>
-                <a:latin typeface="Garamond"/>
               </a:rPr>
               <a:t>• Notifications &amp; historiques</a:t>
             </a:r>
-            <a:endParaRPr lang="en-US" sz="1050" dirty="0">
-              <a:latin typeface="Garamond"/>
-            </a:endParaRPr>
-          </a:p>
-          <a:p>
-            <a:pPr marL="0" indent="0">
+            <a:endParaRPr lang="en-US" sz="1050" dirty="0"/>
+          </a:p>
+          <a:p>
+            <a:pPr indent="0" marL="0">
               <a:buNone/>
             </a:pPr>
             <a:r>
@@ -12497,13 +12109,10 @@
                 <a:solidFill>
                   <a:srgbClr val="6B786E"/>
                 </a:solidFill>
-                <a:latin typeface="Garamond"/>
               </a:rPr>
               <a:t>• Support et reporting</a:t>
             </a:r>
-            <a:endParaRPr lang="en-US" sz="1050" dirty="0">
-              <a:latin typeface="Garamond"/>
-            </a:endParaRPr>
+            <a:endParaRPr lang="en-US" sz="1050" dirty="0"/>
           </a:p>
         </p:txBody>
       </p:sp>
@@ -12515,7 +12124,7 @@
         </p:nvSpPr>
         <p:spPr>
           <a:xfrm>
-            <a:off x="8229600" y="3548743"/>
+            <a:off x="8229600" y="2743200"/>
             <a:ext cx="3200400" cy="2148840"/>
           </a:xfrm>
           <a:prstGeom prst="roundRect">
@@ -12544,7 +12153,7 @@
         </p:nvSpPr>
         <p:spPr>
           <a:xfrm>
-            <a:off x="8439912" y="3749911"/>
+            <a:off x="8439912" y="2944368"/>
             <a:ext cx="320040" cy="320040"/>
           </a:xfrm>
           <a:prstGeom prst="rect">
@@ -12557,7 +12166,7 @@
           <a:bodyPr wrap="square" lIns="0" tIns="0" rIns="0" bIns="0" rtlCol="0" anchor="ctr"/>
           <a:lstStyle/>
           <a:p>
-            <a:pPr marL="0" indent="0">
+            <a:pPr indent="0" marL="0">
               <a:buNone/>
             </a:pPr>
             <a:r>
@@ -12565,13 +12174,10 @@
                 <a:solidFill>
                   <a:srgbClr val="000000"/>
                 </a:solidFill>
-                <a:latin typeface="Garamond"/>
               </a:rPr>
               <a:t>🔌</a:t>
             </a:r>
-            <a:endParaRPr lang="en-US" sz="1700" dirty="0">
-              <a:latin typeface="Garamond"/>
-            </a:endParaRPr>
+            <a:endParaRPr lang="en-US" sz="1700" dirty="0"/>
           </a:p>
         </p:txBody>
       </p:sp>
@@ -12583,7 +12189,7 @@
         </p:nvSpPr>
         <p:spPr>
           <a:xfrm>
-            <a:off x="8823960" y="3749911"/>
+            <a:off x="8823960" y="2944368"/>
             <a:ext cx="2404872" cy="256032"/>
           </a:xfrm>
           <a:prstGeom prst="rect">
@@ -12596,7 +12202,7 @@
           <a:bodyPr wrap="square" lIns="0" tIns="0" rIns="0" bIns="0" rtlCol="0" anchor="ctr"/>
           <a:lstStyle/>
           <a:p>
-            <a:pPr marL="0" indent="0">
+            <a:pPr indent="0" marL="0">
               <a:buNone/>
             </a:pPr>
             <a:r>
@@ -12604,13 +12210,10 @@
                 <a:solidFill>
                   <a:srgbClr val="0E1712"/>
                 </a:solidFill>
-                <a:latin typeface="Garamond"/>
               </a:rPr>
               <a:t>PSP / rails</a:t>
             </a:r>
-            <a:endParaRPr lang="en-US" sz="1500" dirty="0">
-              <a:latin typeface="Garamond"/>
-            </a:endParaRPr>
+            <a:endParaRPr lang="en-US" sz="1500" dirty="0"/>
           </a:p>
         </p:txBody>
       </p:sp>
@@ -12622,7 +12225,7 @@
         </p:nvSpPr>
         <p:spPr>
           <a:xfrm>
-            <a:off x="8439912" y="4188823"/>
+            <a:off x="8439912" y="3383280"/>
             <a:ext cx="384048" cy="32004"/>
           </a:xfrm>
           <a:prstGeom prst="rect">
@@ -12649,7 +12252,7 @@
         </p:nvSpPr>
         <p:spPr>
           <a:xfrm>
-            <a:off x="8439912" y="4325983"/>
+            <a:off x="8439912" y="3520440"/>
             <a:ext cx="2779776" cy="1188720"/>
           </a:xfrm>
           <a:prstGeom prst="rect">
@@ -12664,7 +12267,7 @@
           </a:bodyPr>
           <a:lstStyle/>
           <a:p>
-            <a:pPr marL="0" indent="0">
+            <a:pPr indent="0" marL="0">
               <a:buNone/>
             </a:pPr>
             <a:r>
@@ -12672,16 +12275,13 @@
                 <a:solidFill>
                   <a:srgbClr val="6B786E"/>
                 </a:solidFill>
-                <a:latin typeface="Garamond"/>
               </a:rPr>
               <a:t>• Mobile Money</a:t>
             </a:r>
-            <a:endParaRPr lang="en-US" sz="1050" dirty="0">
-              <a:latin typeface="Garamond"/>
-            </a:endParaRPr>
-          </a:p>
-          <a:p>
-            <a:pPr marL="0" indent="0">
+            <a:endParaRPr lang="en-US" sz="1050" dirty="0"/>
+          </a:p>
+          <a:p>
+            <a:pPr indent="0" marL="0">
               <a:buNone/>
             </a:pPr>
             <a:r>
@@ -12689,16 +12289,13 @@
                 <a:solidFill>
                   <a:srgbClr val="6B786E"/>
                 </a:solidFill>
-                <a:latin typeface="Garamond"/>
               </a:rPr>
               <a:t>• Cartes / virements</a:t>
             </a:r>
-            <a:endParaRPr lang="en-US" sz="1050" dirty="0">
-              <a:latin typeface="Garamond"/>
-            </a:endParaRPr>
-          </a:p>
-          <a:p>
-            <a:pPr marL="0" indent="0">
+            <a:endParaRPr lang="en-US" sz="1050" dirty="0"/>
+          </a:p>
+          <a:p>
+            <a:pPr indent="0" marL="0">
               <a:buNone/>
             </a:pPr>
             <a:r>
@@ -12706,16 +12303,13 @@
                 <a:solidFill>
                   <a:srgbClr val="6B786E"/>
                 </a:solidFill>
-                <a:latin typeface="Garamond"/>
               </a:rPr>
               <a:t>• Webhooks</a:t>
             </a:r>
-            <a:endParaRPr lang="en-US" sz="1050" dirty="0">
-              <a:latin typeface="Garamond"/>
-            </a:endParaRPr>
-          </a:p>
-          <a:p>
-            <a:pPr marL="0" indent="0">
+            <a:endParaRPr lang="en-US" sz="1050" dirty="0"/>
+          </a:p>
+          <a:p>
+            <a:pPr indent="0" marL="0">
               <a:buNone/>
             </a:pPr>
             <a:r>
@@ -12723,16 +12317,13 @@
                 <a:solidFill>
                   <a:srgbClr val="6B786E"/>
                 </a:solidFill>
-                <a:latin typeface="Garamond"/>
               </a:rPr>
               <a:t>• Payouts</a:t>
             </a:r>
-            <a:endParaRPr lang="en-US" sz="1050" dirty="0">
-              <a:latin typeface="Garamond"/>
-            </a:endParaRPr>
-          </a:p>
-          <a:p>
-            <a:pPr marL="0" indent="0">
+            <a:endParaRPr lang="en-US" sz="1050" dirty="0"/>
+          </a:p>
+          <a:p>
+            <a:pPr indent="0" marL="0">
               <a:buNone/>
             </a:pPr>
             <a:r>
@@ -12740,13 +12331,10 @@
                 <a:solidFill>
                   <a:srgbClr val="6B786E"/>
                 </a:solidFill>
-                <a:latin typeface="Garamond"/>
               </a:rPr>
               <a:t>• Réconciliation technique</a:t>
             </a:r>
-            <a:endParaRPr lang="en-US" sz="1050" dirty="0">
-              <a:latin typeface="Garamond"/>
-            </a:endParaRPr>
+            <a:endParaRPr lang="en-US" sz="1050" dirty="0"/>
           </a:p>
         </p:txBody>
       </p:sp>
@@ -12771,7 +12359,7 @@
           <a:bodyPr wrap="square" lIns="0" tIns="0" rIns="0" bIns="0" rtlCol="0" anchor="ctr"/>
           <a:lstStyle/>
           <a:p>
-            <a:pPr marL="0" indent="0">
+            <a:pPr indent="0" marL="0">
               <a:buNone/>
             </a:pPr>
             <a:r>
@@ -12779,13 +12367,10 @@
                 <a:solidFill>
                   <a:srgbClr val="6B786E"/>
                 </a:solidFill>
-                <a:latin typeface="Garamond"/>
               </a:rPr>
               <a:t>© 2026 KOWO · contact@getkowo.com · getkowo.com</a:t>
             </a:r>
-            <a:endParaRPr lang="en-US" sz="750" dirty="0">
-              <a:latin typeface="Garamond"/>
-            </a:endParaRPr>
+            <a:endParaRPr lang="en-US" sz="750" dirty="0"/>
           </a:p>
         </p:txBody>
       </p:sp>
@@ -12805,7 +12390,6 @@
         <a:solidFill>
           <a:srgbClr val="07150F"/>
         </a:solidFill>
-        <a:effectLst/>
       </p:bgPr>
     </p:bg>
     <p:spTree>
@@ -12855,7 +12439,7 @@
         </p:nvSpPr>
         <p:spPr>
           <a:xfrm>
-            <a:off x="685800" y="370114"/>
+            <a:off x="685800" y="0"/>
             <a:ext cx="0" cy="6858000"/>
           </a:xfrm>
           <a:prstGeom prst="line">
@@ -12880,7 +12464,7 @@
         </p:nvSpPr>
         <p:spPr>
           <a:xfrm>
-            <a:off x="1371600" y="370114"/>
+            <a:off x="1371600" y="0"/>
             <a:ext cx="0" cy="6858000"/>
           </a:xfrm>
           <a:prstGeom prst="line">
@@ -12905,7 +12489,7 @@
         </p:nvSpPr>
         <p:spPr>
           <a:xfrm>
-            <a:off x="2057400" y="370114"/>
+            <a:off x="2057400" y="0"/>
             <a:ext cx="0" cy="6858000"/>
           </a:xfrm>
           <a:prstGeom prst="line">
@@ -12930,7 +12514,7 @@
         </p:nvSpPr>
         <p:spPr>
           <a:xfrm>
-            <a:off x="2743200" y="370114"/>
+            <a:off x="2743200" y="0"/>
             <a:ext cx="0" cy="6858000"/>
           </a:xfrm>
           <a:prstGeom prst="line">
@@ -12955,7 +12539,7 @@
         </p:nvSpPr>
         <p:spPr>
           <a:xfrm>
-            <a:off x="3429000" y="370114"/>
+            <a:off x="3429000" y="0"/>
             <a:ext cx="0" cy="6858000"/>
           </a:xfrm>
           <a:prstGeom prst="line">
@@ -12980,7 +12564,7 @@
         </p:nvSpPr>
         <p:spPr>
           <a:xfrm>
-            <a:off x="4114800" y="370114"/>
+            <a:off x="4114800" y="0"/>
             <a:ext cx="0" cy="6858000"/>
           </a:xfrm>
           <a:prstGeom prst="line">
@@ -13005,7 +12589,7 @@
         </p:nvSpPr>
         <p:spPr>
           <a:xfrm>
-            <a:off x="4800600" y="370114"/>
+            <a:off x="4800600" y="0"/>
             <a:ext cx="0" cy="6858000"/>
           </a:xfrm>
           <a:prstGeom prst="line">
@@ -13030,7 +12614,7 @@
         </p:nvSpPr>
         <p:spPr>
           <a:xfrm>
-            <a:off x="5486400" y="370114"/>
+            <a:off x="5486400" y="0"/>
             <a:ext cx="0" cy="6858000"/>
           </a:xfrm>
           <a:prstGeom prst="line">
@@ -13055,7 +12639,7 @@
         </p:nvSpPr>
         <p:spPr>
           <a:xfrm>
-            <a:off x="6172200" y="370114"/>
+            <a:off x="6172200" y="0"/>
             <a:ext cx="0" cy="6858000"/>
           </a:xfrm>
           <a:prstGeom prst="line">
@@ -13080,7 +12664,7 @@
         </p:nvSpPr>
         <p:spPr>
           <a:xfrm>
-            <a:off x="6858000" y="370114"/>
+            <a:off x="6858000" y="0"/>
             <a:ext cx="0" cy="6858000"/>
           </a:xfrm>
           <a:prstGeom prst="line">
@@ -13105,7 +12689,7 @@
         </p:nvSpPr>
         <p:spPr>
           <a:xfrm>
-            <a:off x="7543800" y="370114"/>
+            <a:off x="7543800" y="0"/>
             <a:ext cx="0" cy="6858000"/>
           </a:xfrm>
           <a:prstGeom prst="line">
@@ -13130,7 +12714,7 @@
         </p:nvSpPr>
         <p:spPr>
           <a:xfrm>
-            <a:off x="8229600" y="370114"/>
+            <a:off x="8229600" y="0"/>
             <a:ext cx="0" cy="6858000"/>
           </a:xfrm>
           <a:prstGeom prst="line">
@@ -13155,7 +12739,7 @@
         </p:nvSpPr>
         <p:spPr>
           <a:xfrm>
-            <a:off x="8915400" y="370114"/>
+            <a:off x="8915400" y="0"/>
             <a:ext cx="0" cy="6858000"/>
           </a:xfrm>
           <a:prstGeom prst="line">
@@ -13180,7 +12764,7 @@
         </p:nvSpPr>
         <p:spPr>
           <a:xfrm>
-            <a:off x="9601200" y="370114"/>
+            <a:off x="9601200" y="0"/>
             <a:ext cx="0" cy="6858000"/>
           </a:xfrm>
           <a:prstGeom prst="line">
@@ -13205,7 +12789,7 @@
         </p:nvSpPr>
         <p:spPr>
           <a:xfrm>
-            <a:off x="10287000" y="370114"/>
+            <a:off x="10287000" y="0"/>
             <a:ext cx="0" cy="6858000"/>
           </a:xfrm>
           <a:prstGeom prst="line">
@@ -13230,7 +12814,7 @@
         </p:nvSpPr>
         <p:spPr>
           <a:xfrm>
-            <a:off x="10972800" y="370114"/>
+            <a:off x="10972800" y="0"/>
             <a:ext cx="0" cy="6858000"/>
           </a:xfrm>
           <a:prstGeom prst="line">
@@ -13405,7 +12989,7 @@
         </p:nvSpPr>
         <p:spPr>
           <a:xfrm>
-            <a:off x="0" y="3799114"/>
+            <a:off x="0" y="3429000"/>
             <a:ext cx="12191695" cy="0"/>
           </a:xfrm>
           <a:prstGeom prst="line">
@@ -13430,7 +13014,7 @@
         </p:nvSpPr>
         <p:spPr>
           <a:xfrm>
-            <a:off x="0" y="4484914"/>
+            <a:off x="0" y="4114800"/>
             <a:ext cx="12191695" cy="0"/>
           </a:xfrm>
           <a:prstGeom prst="line">
@@ -13455,7 +13039,7 @@
         </p:nvSpPr>
         <p:spPr>
           <a:xfrm>
-            <a:off x="0" y="5170714"/>
+            <a:off x="0" y="4800600"/>
             <a:ext cx="12191695" cy="0"/>
           </a:xfrm>
           <a:prstGeom prst="line">
@@ -13480,7 +13064,7 @@
         </p:nvSpPr>
         <p:spPr>
           <a:xfrm>
-            <a:off x="0" y="5856514"/>
+            <a:off x="0" y="5486400"/>
             <a:ext cx="12191695" cy="0"/>
           </a:xfrm>
           <a:prstGeom prst="line">
@@ -13580,14 +13164,14 @@
       </p:sp>
       <p:pic>
         <p:nvPicPr>
-          <p:cNvPr id="32" name="Image 0" descr="/mnt/data/kowo-institutional-partnership-v2/assets/kowo-logo.jpg"/>
+          <p:cNvPr id="32" name="Image 0" descr="/mnt/data/kowo-institutional-partnership-v2/assets/kowo-logo.jpg">    </p:cNvPr>
           <p:cNvPicPr>
             <a:picLocks noChangeAspect="1"/>
           </p:cNvPicPr>
           <p:nvPr/>
         </p:nvPicPr>
         <p:blipFill>
-          <a:blip r:embed="rId3"/>
+          <a:blip r:embed="rId1"/>
           <a:stretch>
             <a:fillRect/>
           </a:stretch>
@@ -13610,7 +13194,7 @@
         </p:nvSpPr>
         <p:spPr>
           <a:xfrm>
-            <a:off x="960120" y="414673"/>
+            <a:off x="960120" y="356616"/>
             <a:ext cx="1097280" cy="256032"/>
           </a:xfrm>
           <a:prstGeom prst="rect">
@@ -13623,7 +13207,7 @@
           <a:bodyPr wrap="square" lIns="0" tIns="0" rIns="0" bIns="0" rtlCol="0" anchor="ctr"/>
           <a:lstStyle/>
           <a:p>
-            <a:pPr marL="0" indent="0">
+            <a:pPr indent="0" marL="0">
               <a:buNone/>
             </a:pPr>
             <a:r>
@@ -13631,15 +13215,13 @@
                 <a:solidFill>
                   <a:srgbClr val="123B2B"/>
                 </a:solidFill>
-                <a:latin typeface="Garamond"/>
+                <a:latin typeface="Aptos Display" pitchFamily="34" charset="0"/>
                 <a:ea typeface="Aptos Display" pitchFamily="34" charset="-122"/>
                 <a:cs typeface="Aptos Display" pitchFamily="34" charset="-120"/>
               </a:rPr>
               <a:t>KOWO</a:t>
             </a:r>
-            <a:endParaRPr lang="en-US" sz="1000" dirty="0">
-              <a:latin typeface="Garamond"/>
-            </a:endParaRPr>
+            <a:endParaRPr lang="en-US" sz="1000" dirty="0"/>
           </a:p>
         </p:txBody>
       </p:sp>
@@ -13664,7 +13246,7 @@
           <a:bodyPr wrap="square" lIns="0" tIns="0" rIns="0" bIns="0" rtlCol="0" anchor="ctr"/>
           <a:lstStyle/>
           <a:p>
-            <a:pPr marL="0" indent="0" algn="r">
+            <a:pPr algn="r" indent="0" marL="0">
               <a:buNone/>
             </a:pPr>
             <a:r>
@@ -13672,13 +13254,10 @@
                 <a:solidFill>
                   <a:srgbClr val="123B2B"/>
                 </a:solidFill>
-                <a:latin typeface="Garamond"/>
               </a:rPr>
               <a:t>Institutional Partnership Brief</a:t>
             </a:r>
-            <a:endParaRPr lang="en-US" sz="800" dirty="0">
-              <a:latin typeface="Garamond"/>
-            </a:endParaRPr>
+            <a:endParaRPr lang="en-US" sz="800" dirty="0"/>
           </a:p>
         </p:txBody>
       </p:sp>
@@ -13732,7 +13311,7 @@
           <a:bodyPr wrap="square" lIns="0" tIns="0" rIns="0" bIns="0" rtlCol="0" anchor="ctr"/>
           <a:lstStyle/>
           <a:p>
-            <a:pPr marL="0" indent="0" algn="ctr">
+            <a:pPr algn="ctr" indent="0" marL="0">
               <a:buNone/>
             </a:pPr>
             <a:r>
@@ -13740,13 +13319,10 @@
                 <a:solidFill>
                   <a:srgbClr val="8DFFD3"/>
                 </a:solidFill>
-                <a:latin typeface="Garamond"/>
               </a:rPr>
               <a:t>06 · VALEUR PARTENAIRE</a:t>
             </a:r>
-            <a:endParaRPr lang="en-US" sz="850" dirty="0">
-              <a:latin typeface="Garamond"/>
-            </a:endParaRPr>
+            <a:endParaRPr lang="en-US" sz="850" dirty="0"/>
           </a:p>
         </p:txBody>
       </p:sp>
@@ -13758,51 +13334,8 @@
         </p:nvSpPr>
         <p:spPr>
           <a:xfrm>
-            <a:off x="680139" y="1364052"/>
-            <a:ext cx="6126480" cy="931092"/>
-          </a:xfrm>
-          <a:prstGeom prst="rect">
-            <a:avLst/>
-          </a:prstGeom>
-          <a:noFill/>
-          <a:ln/>
-        </p:spPr>
-        <p:txBody>
-          <a:bodyPr wrap="square" lIns="0" tIns="0" rIns="0" bIns="0" rtlCol="0" anchor="ctr">
-            <a:normAutofit fontScale="92500" lnSpcReduction="10000"/>
-          </a:bodyPr>
-          <a:lstStyle/>
-          <a:p>
-            <a:pPr marL="0" indent="0">
-              <a:buNone/>
-            </a:pPr>
-            <a:r>
-              <a:rPr lang="en-US" sz="3600" b="1" dirty="0">
-                <a:solidFill>
-                  <a:srgbClr val="FFFFFF"/>
-                </a:solidFill>
-                <a:latin typeface="Garamond"/>
-                <a:ea typeface="Aptos Display" pitchFamily="34" charset="-122"/>
-                <a:cs typeface="Aptos Display" pitchFamily="34" charset="-120"/>
-              </a:rPr>
-              <a:t>Pourquoi devenir le partenaire financier historique de KOWO ?</a:t>
-            </a:r>
-            <a:endParaRPr lang="en-US" sz="3600" dirty="0">
-              <a:latin typeface="Garamond"/>
-            </a:endParaRPr>
-          </a:p>
-        </p:txBody>
-      </p:sp>
-      <p:sp>
-        <p:nvSpPr>
-          <p:cNvPr id="38" name="Text 35"/>
-          <p:cNvSpPr/>
-          <p:nvPr/>
-        </p:nvSpPr>
-        <p:spPr>
-          <a:xfrm>
-            <a:off x="685800" y="2450592"/>
-            <a:ext cx="5303520" cy="621792"/>
+            <a:off x="658368" y="1335024"/>
+            <a:ext cx="5669280" cy="960120"/>
           </a:xfrm>
           <a:prstGeom prst="rect">
             <a:avLst/>
@@ -13816,7 +13349,48 @@
           </a:bodyPr>
           <a:lstStyle/>
           <a:p>
-            <a:pPr marL="0" indent="0">
+            <a:pPr indent="0" marL="0">
+              <a:buNone/>
+            </a:pPr>
+            <a:r>
+              <a:rPr lang="en-US" sz="3600" b="1" dirty="0">
+                <a:solidFill>
+                  <a:srgbClr val="FFFFFF"/>
+                </a:solidFill>
+                <a:latin typeface="Aptos Display" pitchFamily="34" charset="0"/>
+                <a:ea typeface="Aptos Display" pitchFamily="34" charset="-122"/>
+                <a:cs typeface="Aptos Display" pitchFamily="34" charset="-120"/>
+              </a:rPr>
+              <a:t>Pourquoi devenir le partenaire financier historique de KOWO ?</a:t>
+            </a:r>
+            <a:endParaRPr lang="en-US" sz="3600" dirty="0"/>
+          </a:p>
+        </p:txBody>
+      </p:sp>
+      <p:sp>
+        <p:nvSpPr>
+          <p:cNvPr id="38" name="Text 35"/>
+          <p:cNvSpPr/>
+          <p:nvPr/>
+        </p:nvSpPr>
+        <p:spPr>
+          <a:xfrm>
+            <a:off x="685800" y="2450592"/>
+            <a:ext cx="5303520" cy="621792"/>
+          </a:xfrm>
+          <a:prstGeom prst="rect">
+            <a:avLst/>
+          </a:prstGeom>
+          <a:noFill/>
+          <a:ln/>
+        </p:spPr>
+        <p:txBody>
+          <a:bodyPr wrap="square" lIns="0" tIns="0" rIns="0" bIns="0" rtlCol="0" anchor="ctr">
+            <a:normAutofit/>
+          </a:bodyPr>
+          <a:lstStyle/>
+          <a:p>
+            <a:pPr indent="0" marL="0">
               <a:buNone/>
             </a:pPr>
             <a:r>
@@ -13824,13 +13398,10 @@
                 <a:solidFill>
                   <a:srgbClr val="C7D8CF"/>
                 </a:solidFill>
-                <a:latin typeface="Garamond"/>
               </a:rPr>
               <a:t>KOWO apporte une nouvelle interface d’acquisition, de fidélisation et de digitalisation pour une institution financière.</a:t>
             </a:r>
-            <a:endParaRPr lang="en-US" sz="1500" dirty="0">
-              <a:latin typeface="Garamond"/>
-            </a:endParaRPr>
+            <a:endParaRPr lang="en-US" sz="1500" dirty="0"/>
           </a:p>
         </p:txBody>
       </p:sp>
@@ -13842,7 +13413,7 @@
         </p:nvSpPr>
         <p:spPr>
           <a:xfrm>
-            <a:off x="777240" y="3433354"/>
+            <a:off x="777240" y="3063240"/>
             <a:ext cx="4572000" cy="804672"/>
           </a:xfrm>
           <a:prstGeom prst="roundRect">
@@ -13871,7 +13442,7 @@
         </p:nvSpPr>
         <p:spPr>
           <a:xfrm>
-            <a:off x="978408" y="3579658"/>
+            <a:off x="978408" y="3209544"/>
             <a:ext cx="1508760" cy="182880"/>
           </a:xfrm>
           <a:prstGeom prst="rect">
@@ -13884,7 +13455,7 @@
           <a:bodyPr wrap="square" lIns="0" tIns="0" rIns="0" bIns="0" rtlCol="0" anchor="ctr"/>
           <a:lstStyle/>
           <a:p>
-            <a:pPr marL="0" indent="0">
+            <a:pPr indent="0" marL="0">
               <a:buNone/>
             </a:pPr>
             <a:r>
@@ -13892,13 +13463,10 @@
                 <a:solidFill>
                   <a:srgbClr val="8DFFD3"/>
                 </a:solidFill>
-                <a:latin typeface="Garamond"/>
               </a:rPr>
               <a:t>Acquisition clients</a:t>
             </a:r>
-            <a:endParaRPr lang="en-US" sz="1400" dirty="0">
-              <a:latin typeface="Garamond"/>
-            </a:endParaRPr>
+            <a:endParaRPr lang="en-US" sz="1400" dirty="0"/>
           </a:p>
         </p:txBody>
       </p:sp>
@@ -13910,7 +13478,7 @@
         </p:nvSpPr>
         <p:spPr>
           <a:xfrm>
-            <a:off x="2560320" y="3597946"/>
+            <a:off x="2560320" y="3227832"/>
             <a:ext cx="2560320" cy="274320"/>
           </a:xfrm>
           <a:prstGeom prst="rect">
@@ -13925,7 +13493,7 @@
           </a:bodyPr>
           <a:lstStyle/>
           <a:p>
-            <a:pPr marL="0" indent="0">
+            <a:pPr indent="0" marL="0">
               <a:buNone/>
             </a:pPr>
             <a:r>
@@ -13933,13 +13501,10 @@
                 <a:solidFill>
                   <a:srgbClr val="C7D8CF"/>
                 </a:solidFill>
-                <a:latin typeface="Garamond"/>
               </a:rPr>
               <a:t>Accès à de nouveaux utilisateurs via les communautés et la diaspora.</a:t>
             </a:r>
-            <a:endParaRPr lang="en-US" sz="950" dirty="0">
-              <a:latin typeface="Garamond"/>
-            </a:endParaRPr>
+            <a:endParaRPr lang="en-US" sz="950" dirty="0"/>
           </a:p>
         </p:txBody>
       </p:sp>
@@ -13951,7 +13516,7 @@
         </p:nvSpPr>
         <p:spPr>
           <a:xfrm>
-            <a:off x="6080760" y="3433354"/>
+            <a:off x="6080760" y="3063240"/>
             <a:ext cx="4572000" cy="804672"/>
           </a:xfrm>
           <a:prstGeom prst="roundRect">
@@ -13980,7 +13545,7 @@
         </p:nvSpPr>
         <p:spPr>
           <a:xfrm>
-            <a:off x="6281928" y="3579658"/>
+            <a:off x="6281928" y="3209544"/>
             <a:ext cx="1508760" cy="182880"/>
           </a:xfrm>
           <a:prstGeom prst="rect">
@@ -13993,7 +13558,7 @@
           <a:bodyPr wrap="square" lIns="0" tIns="0" rIns="0" bIns="0" rtlCol="0" anchor="ctr"/>
           <a:lstStyle/>
           <a:p>
-            <a:pPr marL="0" indent="0">
+            <a:pPr indent="0" marL="0">
               <a:buNone/>
             </a:pPr>
             <a:r>
@@ -14001,13 +13566,10 @@
                 <a:solidFill>
                   <a:srgbClr val="8DFFD3"/>
                 </a:solidFill>
-                <a:latin typeface="Garamond"/>
               </a:rPr>
               <a:t>Digitalisation</a:t>
             </a:r>
-            <a:endParaRPr lang="en-US" sz="1400" dirty="0">
-              <a:latin typeface="Garamond"/>
-            </a:endParaRPr>
+            <a:endParaRPr lang="en-US" sz="1400" dirty="0"/>
           </a:p>
         </p:txBody>
       </p:sp>
@@ -14019,7 +13581,7 @@
         </p:nvSpPr>
         <p:spPr>
           <a:xfrm>
-            <a:off x="7863840" y="3597946"/>
+            <a:off x="7863840" y="3227832"/>
             <a:ext cx="2560320" cy="274320"/>
           </a:xfrm>
           <a:prstGeom prst="rect">
@@ -14034,7 +13596,7 @@
           </a:bodyPr>
           <a:lstStyle/>
           <a:p>
-            <a:pPr marL="0" indent="0">
+            <a:pPr indent="0" marL="0">
               <a:buNone/>
             </a:pPr>
             <a:r>
@@ -14042,13 +13604,10 @@
                 <a:solidFill>
                   <a:srgbClr val="C7D8CF"/>
                 </a:solidFill>
-                <a:latin typeface="Garamond"/>
               </a:rPr>
               <a:t>Modernisation de l’épargne communautaire sans développer toute l’UX en interne.</a:t>
             </a:r>
-            <a:endParaRPr lang="en-US" sz="950" dirty="0">
-              <a:latin typeface="Garamond"/>
-            </a:endParaRPr>
+            <a:endParaRPr lang="en-US" sz="950" dirty="0"/>
           </a:p>
         </p:txBody>
       </p:sp>
@@ -14060,7 +13619,7 @@
         </p:nvSpPr>
         <p:spPr>
           <a:xfrm>
-            <a:off x="777240" y="4530634"/>
+            <a:off x="777240" y="4160520"/>
             <a:ext cx="4572000" cy="804672"/>
           </a:xfrm>
           <a:prstGeom prst="roundRect">
@@ -14089,7 +13648,7 @@
         </p:nvSpPr>
         <p:spPr>
           <a:xfrm>
-            <a:off x="978408" y="4676938"/>
+            <a:off x="978408" y="4306824"/>
             <a:ext cx="1508760" cy="182880"/>
           </a:xfrm>
           <a:prstGeom prst="rect">
@@ -14102,7 +13661,7 @@
           <a:bodyPr wrap="square" lIns="0" tIns="0" rIns="0" bIns="0" rtlCol="0" anchor="ctr"/>
           <a:lstStyle/>
           <a:p>
-            <a:pPr marL="0" indent="0">
+            <a:pPr indent="0" marL="0">
               <a:buNone/>
             </a:pPr>
             <a:r>
@@ -14110,13 +13669,10 @@
                 <a:solidFill>
                   <a:srgbClr val="8DFFD3"/>
                 </a:solidFill>
-                <a:latin typeface="Garamond"/>
               </a:rPr>
               <a:t>Revenus partagés</a:t>
             </a:r>
-            <a:endParaRPr lang="en-US" sz="1400" dirty="0">
-              <a:latin typeface="Garamond"/>
-            </a:endParaRPr>
+            <a:endParaRPr lang="en-US" sz="1400" dirty="0"/>
           </a:p>
         </p:txBody>
       </p:sp>
@@ -14128,7 +13684,7 @@
         </p:nvSpPr>
         <p:spPr>
           <a:xfrm>
-            <a:off x="2560320" y="4695226"/>
+            <a:off x="2560320" y="4325112"/>
             <a:ext cx="2560320" cy="274320"/>
           </a:xfrm>
           <a:prstGeom prst="rect">
@@ -14143,7 +13699,7 @@
           </a:bodyPr>
           <a:lstStyle/>
           <a:p>
-            <a:pPr marL="0" indent="0">
+            <a:pPr indent="0" marL="0">
               <a:buNone/>
             </a:pPr>
             <a:r>
@@ -14151,13 +13707,10 @@
                 <a:solidFill>
                   <a:srgbClr val="C7D8CF"/>
                 </a:solidFill>
-                <a:latin typeface="Garamond"/>
               </a:rPr>
               <a:t>Commissions, frais d’usage et nouveaux produits financiers à terme.</a:t>
             </a:r>
-            <a:endParaRPr lang="en-US" sz="950" dirty="0">
-              <a:latin typeface="Garamond"/>
-            </a:endParaRPr>
+            <a:endParaRPr lang="en-US" sz="950" dirty="0"/>
           </a:p>
         </p:txBody>
       </p:sp>
@@ -14169,7 +13722,7 @@
         </p:nvSpPr>
         <p:spPr>
           <a:xfrm>
-            <a:off x="6080760" y="4530634"/>
+            <a:off x="6080760" y="4160520"/>
             <a:ext cx="4572000" cy="804672"/>
           </a:xfrm>
           <a:prstGeom prst="roundRect">
@@ -14198,7 +13751,7 @@
         </p:nvSpPr>
         <p:spPr>
           <a:xfrm>
-            <a:off x="6281928" y="4676938"/>
+            <a:off x="6281928" y="4306824"/>
             <a:ext cx="1508760" cy="182880"/>
           </a:xfrm>
           <a:prstGeom prst="rect">
@@ -14211,7 +13764,7 @@
           <a:bodyPr wrap="square" lIns="0" tIns="0" rIns="0" bIns="0" rtlCol="0" anchor="ctr"/>
           <a:lstStyle/>
           <a:p>
-            <a:pPr marL="0" indent="0">
+            <a:pPr indent="0" marL="0">
               <a:buNone/>
             </a:pPr>
             <a:r>
@@ -14219,13 +13772,10 @@
                 <a:solidFill>
                   <a:srgbClr val="8DFFD3"/>
                 </a:solidFill>
-                <a:latin typeface="Garamond"/>
               </a:rPr>
               <a:t>Confiance</a:t>
             </a:r>
-            <a:endParaRPr lang="en-US" sz="1400" dirty="0">
-              <a:latin typeface="Garamond"/>
-            </a:endParaRPr>
+            <a:endParaRPr lang="en-US" sz="1400" dirty="0"/>
           </a:p>
         </p:txBody>
       </p:sp>
@@ -14237,7 +13787,7 @@
         </p:nvSpPr>
         <p:spPr>
           <a:xfrm>
-            <a:off x="7863840" y="4695226"/>
+            <a:off x="7863840" y="4325112"/>
             <a:ext cx="2560320" cy="274320"/>
           </a:xfrm>
           <a:prstGeom prst="rect">
@@ -14252,7 +13802,7 @@
           </a:bodyPr>
           <a:lstStyle/>
           <a:p>
-            <a:pPr marL="0" indent="0">
+            <a:pPr indent="0" marL="0">
               <a:buNone/>
             </a:pPr>
             <a:r>
@@ -14260,13 +13810,10 @@
                 <a:solidFill>
                   <a:srgbClr val="C7D8CF"/>
                 </a:solidFill>
-                <a:latin typeface="Garamond"/>
               </a:rPr>
               <a:t>Une architecture où l’institution porte la partie réglementée.</a:t>
             </a:r>
-            <a:endParaRPr lang="en-US" sz="950" dirty="0">
-              <a:latin typeface="Garamond"/>
-            </a:endParaRPr>
+            <a:endParaRPr lang="en-US" sz="950" dirty="0"/>
           </a:p>
         </p:txBody>
       </p:sp>
@@ -14291,7 +13838,7 @@
           <a:bodyPr wrap="square" lIns="0" tIns="0" rIns="0" bIns="0" rtlCol="0" anchor="ctr"/>
           <a:lstStyle/>
           <a:p>
-            <a:pPr marL="0" indent="0">
+            <a:pPr indent="0" marL="0">
               <a:buNone/>
             </a:pPr>
             <a:r>
@@ -14299,13 +13846,10 @@
                 <a:solidFill>
                   <a:srgbClr val="9DB7AA"/>
                 </a:solidFill>
-                <a:latin typeface="Garamond"/>
               </a:rPr>
               <a:t>© 2026 KOWO · contact@getkowo.com · getkowo.com</a:t>
             </a:r>
-            <a:endParaRPr lang="en-US" sz="750" dirty="0">
-              <a:latin typeface="Garamond"/>
-            </a:endParaRPr>
+            <a:endParaRPr lang="en-US" sz="750" dirty="0"/>
           </a:p>
         </p:txBody>
       </p:sp>
@@ -14325,7 +13869,6 @@
         <a:solidFill>
           <a:srgbClr val="F6F1E7"/>
         </a:solidFill>
-        <a:effectLst/>
       </p:bgPr>
     </p:bg>
     <p:spTree>
@@ -14375,14 +13918,14 @@
       </p:sp>
       <p:pic>
         <p:nvPicPr>
-          <p:cNvPr id="3" name="Image 0" descr="/mnt/data/kowo-institutional-partnership-v2/assets/kowo-logo.jpg"/>
+          <p:cNvPr id="3" name="Image 0" descr="/mnt/data/kowo-institutional-partnership-v2/assets/kowo-logo.jpg">    </p:cNvPr>
           <p:cNvPicPr>
             <a:picLocks noChangeAspect="1"/>
           </p:cNvPicPr>
           <p:nvPr/>
         </p:nvPicPr>
         <p:blipFill>
-          <a:blip r:embed="rId3"/>
+          <a:blip r:embed="rId1"/>
           <a:stretch>
             <a:fillRect/>
           </a:stretch>
@@ -14405,7 +13948,7 @@
         </p:nvSpPr>
         <p:spPr>
           <a:xfrm>
-            <a:off x="960120" y="414673"/>
+            <a:off x="960120" y="356616"/>
             <a:ext cx="1097280" cy="256032"/>
           </a:xfrm>
           <a:prstGeom prst="rect">
@@ -14418,7 +13961,7 @@
           <a:bodyPr wrap="square" lIns="0" tIns="0" rIns="0" bIns="0" rtlCol="0" anchor="ctr"/>
           <a:lstStyle/>
           <a:p>
-            <a:pPr marL="0" indent="0">
+            <a:pPr indent="0" marL="0">
               <a:buNone/>
             </a:pPr>
             <a:r>
@@ -14426,15 +13969,13 @@
                 <a:solidFill>
                   <a:srgbClr val="123B2B"/>
                 </a:solidFill>
-                <a:latin typeface="Garamond"/>
+                <a:latin typeface="Aptos Display" pitchFamily="34" charset="0"/>
                 <a:ea typeface="Aptos Display" pitchFamily="34" charset="-122"/>
                 <a:cs typeface="Aptos Display" pitchFamily="34" charset="-120"/>
               </a:rPr>
               <a:t>KOWO</a:t>
             </a:r>
-            <a:endParaRPr lang="en-US" sz="1000" dirty="0">
-              <a:latin typeface="Garamond"/>
-            </a:endParaRPr>
+            <a:endParaRPr lang="en-US" sz="1000" dirty="0"/>
           </a:p>
         </p:txBody>
       </p:sp>
@@ -14459,7 +14000,7 @@
           <a:bodyPr wrap="square" lIns="0" tIns="0" rIns="0" bIns="0" rtlCol="0" anchor="ctr"/>
           <a:lstStyle/>
           <a:p>
-            <a:pPr marL="0" indent="0" algn="r">
+            <a:pPr algn="r" indent="0" marL="0">
               <a:buNone/>
             </a:pPr>
             <a:r>
@@ -14467,13 +14008,10 @@
                 <a:solidFill>
                   <a:srgbClr val="6B786E"/>
                 </a:solidFill>
-                <a:latin typeface="Garamond"/>
               </a:rPr>
               <a:t>Institutional Partnership Brief</a:t>
             </a:r>
-            <a:endParaRPr lang="en-US" sz="800" dirty="0">
-              <a:latin typeface="Garamond"/>
-            </a:endParaRPr>
+            <a:endParaRPr lang="en-US" sz="800" dirty="0"/>
           </a:p>
         </p:txBody>
       </p:sp>
@@ -14527,7 +14065,7 @@
           <a:bodyPr wrap="square" lIns="0" tIns="0" rIns="0" bIns="0" rtlCol="0" anchor="ctr"/>
           <a:lstStyle/>
           <a:p>
-            <a:pPr marL="0" indent="0" algn="ctr">
+            <a:pPr algn="ctr" indent="0" marL="0">
               <a:buNone/>
             </a:pPr>
             <a:r>
@@ -14535,13 +14073,10 @@
                 <a:solidFill>
                   <a:srgbClr val="123B2B"/>
                 </a:solidFill>
-                <a:latin typeface="Garamond"/>
               </a:rPr>
               <a:t>07 · ÉTAT D’AVANCEMENT</a:t>
             </a:r>
-            <a:endParaRPr lang="en-US" sz="850" dirty="0">
-              <a:latin typeface="Garamond"/>
-            </a:endParaRPr>
+            <a:endParaRPr lang="en-US" sz="850" dirty="0"/>
           </a:p>
         </p:txBody>
       </p:sp>
@@ -14553,70 +14088,8 @@
         </p:nvSpPr>
         <p:spPr>
           <a:xfrm>
-            <a:off x="680139" y="1335024"/>
-            <a:ext cx="6249851" cy="960120"/>
-          </a:xfrm>
-          <a:prstGeom prst="rect">
-            <a:avLst/>
-          </a:prstGeom>
-          <a:noFill/>
-          <a:ln/>
-        </p:spPr>
-        <p:txBody>
-          <a:bodyPr wrap="square" lIns="0" tIns="0" rIns="0" bIns="0" rtlCol="0" anchor="ctr">
-            <a:normAutofit fontScale="70000" lnSpcReduction="20000"/>
-          </a:bodyPr>
-          <a:lstStyle/>
-          <a:p>
-            <a:pPr marL="0" indent="0">
-              <a:buNone/>
-            </a:pPr>
-            <a:r>
-              <a:rPr lang="en-US" sz="3600" b="1" dirty="0">
-                <a:solidFill>
-                  <a:srgbClr val="0E1712"/>
-                </a:solidFill>
-                <a:latin typeface="Garamond"/>
-                <a:ea typeface="Aptos Display" pitchFamily="34" charset="-122"/>
-                <a:cs typeface="Aptos Display" pitchFamily="34" charset="-120"/>
-              </a:rPr>
-              <a:t>KOWO n’est plus une idée.</a:t>
-            </a:r>
-            <a:endParaRPr lang="en-US" sz="3600" dirty="0">
-              <a:latin typeface="Garamond"/>
-            </a:endParaRPr>
-          </a:p>
-          <a:p>
-            <a:pPr marL="0" indent="0">
-              <a:buNone/>
-            </a:pPr>
-            <a:r>
-              <a:rPr lang="en-US" sz="3600" b="1" dirty="0">
-                <a:solidFill>
-                  <a:srgbClr val="0E1712"/>
-                </a:solidFill>
-                <a:latin typeface="Garamond"/>
-                <a:ea typeface="Aptos Display" pitchFamily="34" charset="-122"/>
-                <a:cs typeface="Aptos Display" pitchFamily="34" charset="-120"/>
-              </a:rPr>
-              <a:t>Le socle produit et documentaire existe déjà.</a:t>
-            </a:r>
-            <a:endParaRPr lang="en-US" sz="3600" dirty="0">
-              <a:latin typeface="Garamond"/>
-            </a:endParaRPr>
-          </a:p>
-        </p:txBody>
-      </p:sp>
-      <p:sp>
-        <p:nvSpPr>
-          <p:cNvPr id="9" name="Text 6"/>
-          <p:cNvSpPr/>
-          <p:nvPr/>
-        </p:nvSpPr>
-        <p:spPr>
-          <a:xfrm>
-            <a:off x="664029" y="2450592"/>
-            <a:ext cx="6239690" cy="621792"/>
+            <a:off x="658368" y="1335024"/>
+            <a:ext cx="5669280" cy="960120"/>
           </a:xfrm>
           <a:prstGeom prst="rect">
             <a:avLst/>
@@ -14630,7 +14103,65 @@
           </a:bodyPr>
           <a:lstStyle/>
           <a:p>
-            <a:pPr marL="0" indent="0">
+            <a:pPr indent="0" marL="0">
+              <a:buNone/>
+            </a:pPr>
+            <a:r>
+              <a:rPr lang="en-US" sz="3600" b="1" dirty="0">
+                <a:solidFill>
+                  <a:srgbClr val="0E1712"/>
+                </a:solidFill>
+                <a:latin typeface="Aptos Display" pitchFamily="34" charset="0"/>
+                <a:ea typeface="Aptos Display" pitchFamily="34" charset="-122"/>
+                <a:cs typeface="Aptos Display" pitchFamily="34" charset="-120"/>
+              </a:rPr>
+              <a:t>KOWO n’est plus une idée.</a:t>
+            </a:r>
+            <a:endParaRPr lang="en-US" sz="3600" dirty="0"/>
+          </a:p>
+          <a:p>
+            <a:pPr indent="0" marL="0">
+              <a:buNone/>
+            </a:pPr>
+            <a:r>
+              <a:rPr lang="en-US" sz="3600" b="1" dirty="0">
+                <a:solidFill>
+                  <a:srgbClr val="0E1712"/>
+                </a:solidFill>
+                <a:latin typeface="Aptos Display" pitchFamily="34" charset="0"/>
+                <a:ea typeface="Aptos Display" pitchFamily="34" charset="-122"/>
+                <a:cs typeface="Aptos Display" pitchFamily="34" charset="-120"/>
+              </a:rPr>
+              <a:t>Le socle produit et documentaire existe déjà.</a:t>
+            </a:r>
+            <a:endParaRPr lang="en-US" sz="3600" dirty="0"/>
+          </a:p>
+        </p:txBody>
+      </p:sp>
+      <p:sp>
+        <p:nvSpPr>
+          <p:cNvPr id="9" name="Text 6"/>
+          <p:cNvSpPr/>
+          <p:nvPr/>
+        </p:nvSpPr>
+        <p:spPr>
+          <a:xfrm>
+            <a:off x="685800" y="2450592"/>
+            <a:ext cx="5303520" cy="621792"/>
+          </a:xfrm>
+          <a:prstGeom prst="rect">
+            <a:avLst/>
+          </a:prstGeom>
+          <a:noFill/>
+          <a:ln/>
+        </p:spPr>
+        <p:txBody>
+          <a:bodyPr wrap="square" lIns="0" tIns="0" rIns="0" bIns="0" rtlCol="0" anchor="ctr">
+            <a:normAutofit/>
+          </a:bodyPr>
+          <a:lstStyle/>
+          <a:p>
+            <a:pPr indent="0" marL="0">
               <a:buNone/>
             </a:pPr>
             <a:r>
@@ -14638,13 +14169,10 @@
                 <a:solidFill>
                   <a:srgbClr val="6B786E"/>
                 </a:solidFill>
-                <a:latin typeface="Garamond"/>
               </a:rPr>
               <a:t>Le partenariat recherché vise à sécuriser le déploiement financier et réglementaire.</a:t>
             </a:r>
-            <a:endParaRPr lang="en-US" sz="1500" dirty="0">
-              <a:latin typeface="Garamond"/>
-            </a:endParaRPr>
+            <a:endParaRPr lang="en-US" sz="1500" dirty="0"/>
           </a:p>
         </p:txBody>
       </p:sp>
@@ -14656,7 +14184,7 @@
         </p:nvSpPr>
         <p:spPr>
           <a:xfrm>
-            <a:off x="822960" y="3251200"/>
+            <a:off x="822960" y="2743200"/>
             <a:ext cx="3017520" cy="182880"/>
           </a:xfrm>
           <a:prstGeom prst="rect">
@@ -14669,7 +14197,7 @@
           <a:bodyPr wrap="square" lIns="0" tIns="0" rIns="0" bIns="0" rtlCol="0" anchor="ctr"/>
           <a:lstStyle/>
           <a:p>
-            <a:pPr marL="0" indent="0">
+            <a:pPr indent="0" marL="0">
               <a:buNone/>
             </a:pPr>
             <a:r>
@@ -14677,13 +14205,10 @@
                 <a:solidFill>
                   <a:srgbClr val="0E1712"/>
                 </a:solidFill>
-                <a:latin typeface="Garamond"/>
               </a:rPr>
               <a:t>Application mobile</a:t>
             </a:r>
-            <a:endParaRPr lang="en-US" sz="1100" dirty="0">
-              <a:latin typeface="Garamond"/>
-            </a:endParaRPr>
+            <a:endParaRPr lang="en-US" sz="1100" dirty="0"/>
           </a:p>
         </p:txBody>
       </p:sp>
@@ -14695,7 +14220,7 @@
         </p:nvSpPr>
         <p:spPr>
           <a:xfrm>
-            <a:off x="4069080" y="3287776"/>
+            <a:off x="4069080" y="2779776"/>
             <a:ext cx="4572000" cy="109728"/>
           </a:xfrm>
           <a:prstGeom prst="roundRect">
@@ -14722,7 +14247,7 @@
         </p:nvSpPr>
         <p:spPr>
           <a:xfrm>
-            <a:off x="4069080" y="3287776"/>
+            <a:off x="4069080" y="2779776"/>
             <a:ext cx="4343400" cy="109728"/>
           </a:xfrm>
           <a:prstGeom prst="roundRect">
@@ -14749,7 +14274,7 @@
         </p:nvSpPr>
         <p:spPr>
           <a:xfrm>
-            <a:off x="8823960" y="3251200"/>
+            <a:off x="8823960" y="2743200"/>
             <a:ext cx="640080" cy="182880"/>
           </a:xfrm>
           <a:prstGeom prst="rect">
@@ -14762,7 +14287,7 @@
           <a:bodyPr wrap="square" lIns="0" tIns="0" rIns="0" bIns="0" rtlCol="0" anchor="ctr"/>
           <a:lstStyle/>
           <a:p>
-            <a:pPr marL="0" indent="0">
+            <a:pPr indent="0" marL="0">
               <a:buNone/>
             </a:pPr>
             <a:r>
@@ -14770,13 +14295,10 @@
                 <a:solidFill>
                   <a:srgbClr val="123B2B"/>
                 </a:solidFill>
-                <a:latin typeface="Garamond"/>
               </a:rPr>
               <a:t>95%</a:t>
             </a:r>
-            <a:endParaRPr lang="en-US" sz="1000" dirty="0">
-              <a:latin typeface="Garamond"/>
-            </a:endParaRPr>
+            <a:endParaRPr lang="en-US" sz="1000" dirty="0"/>
           </a:p>
         </p:txBody>
       </p:sp>
@@ -14788,7 +14310,7 @@
         </p:nvSpPr>
         <p:spPr>
           <a:xfrm>
-            <a:off x="822960" y="3726688"/>
+            <a:off x="822960" y="3218688"/>
             <a:ext cx="3017520" cy="182880"/>
           </a:xfrm>
           <a:prstGeom prst="rect">
@@ -14801,7 +14323,7 @@
           <a:bodyPr wrap="square" lIns="0" tIns="0" rIns="0" bIns="0" rtlCol="0" anchor="ctr"/>
           <a:lstStyle/>
           <a:p>
-            <a:pPr marL="0" indent="0">
+            <a:pPr indent="0" marL="0">
               <a:buNone/>
             </a:pPr>
             <a:r>
@@ -14809,13 +14331,10 @@
                 <a:solidFill>
                   <a:srgbClr val="0E1712"/>
                 </a:solidFill>
-                <a:latin typeface="Garamond"/>
               </a:rPr>
               <a:t>Infrastructure cloud</a:t>
             </a:r>
-            <a:endParaRPr lang="en-US" sz="1100" dirty="0">
-              <a:latin typeface="Garamond"/>
-            </a:endParaRPr>
+            <a:endParaRPr lang="en-US" sz="1100" dirty="0"/>
           </a:p>
         </p:txBody>
       </p:sp>
@@ -14827,7 +14346,7 @@
         </p:nvSpPr>
         <p:spPr>
           <a:xfrm>
-            <a:off x="4069080" y="3763264"/>
+            <a:off x="4069080" y="3255264"/>
             <a:ext cx="4572000" cy="109728"/>
           </a:xfrm>
           <a:prstGeom prst="roundRect">
@@ -14854,7 +14373,7 @@
         </p:nvSpPr>
         <p:spPr>
           <a:xfrm>
-            <a:off x="4069080" y="3763264"/>
+            <a:off x="4069080" y="3255264"/>
             <a:ext cx="4114800" cy="109728"/>
           </a:xfrm>
           <a:prstGeom prst="roundRect">
@@ -14881,7 +14400,7 @@
         </p:nvSpPr>
         <p:spPr>
           <a:xfrm>
-            <a:off x="8823960" y="3726688"/>
+            <a:off x="8823960" y="3218688"/>
             <a:ext cx="640080" cy="182880"/>
           </a:xfrm>
           <a:prstGeom prst="rect">
@@ -14894,7 +14413,7 @@
           <a:bodyPr wrap="square" lIns="0" tIns="0" rIns="0" bIns="0" rtlCol="0" anchor="ctr"/>
           <a:lstStyle/>
           <a:p>
-            <a:pPr marL="0" indent="0">
+            <a:pPr indent="0" marL="0">
               <a:buNone/>
             </a:pPr>
             <a:r>
@@ -14902,13 +14421,10 @@
                 <a:solidFill>
                   <a:srgbClr val="123B2B"/>
                 </a:solidFill>
-                <a:latin typeface="Garamond"/>
               </a:rPr>
               <a:t>90%</a:t>
             </a:r>
-            <a:endParaRPr lang="en-US" sz="1000" dirty="0">
-              <a:latin typeface="Garamond"/>
-            </a:endParaRPr>
+            <a:endParaRPr lang="en-US" sz="1000" dirty="0"/>
           </a:p>
         </p:txBody>
       </p:sp>
@@ -14920,7 +14436,7 @@
         </p:nvSpPr>
         <p:spPr>
           <a:xfrm>
-            <a:off x="822960" y="4202176"/>
+            <a:off x="822960" y="3694176"/>
             <a:ext cx="3017520" cy="182880"/>
           </a:xfrm>
           <a:prstGeom prst="rect">
@@ -14933,7 +14449,7 @@
           <a:bodyPr wrap="square" lIns="0" tIns="0" rIns="0" bIns="0" rtlCol="0" anchor="ctr"/>
           <a:lstStyle/>
           <a:p>
-            <a:pPr marL="0" indent="0">
+            <a:pPr indent="0" marL="0">
               <a:buNone/>
             </a:pPr>
             <a:r>
@@ -14941,13 +14457,10 @@
                 <a:solidFill>
                   <a:srgbClr val="0E1712"/>
                 </a:solidFill>
-                <a:latin typeface="Garamond"/>
               </a:rPr>
               <a:t>Documentation conformité</a:t>
             </a:r>
-            <a:endParaRPr lang="en-US" sz="1100" dirty="0">
-              <a:latin typeface="Garamond"/>
-            </a:endParaRPr>
+            <a:endParaRPr lang="en-US" sz="1100" dirty="0"/>
           </a:p>
         </p:txBody>
       </p:sp>
@@ -14959,7 +14472,7 @@
         </p:nvSpPr>
         <p:spPr>
           <a:xfrm>
-            <a:off x="4069080" y="4238752"/>
+            <a:off x="4069080" y="3730752"/>
             <a:ext cx="4572000" cy="109728"/>
           </a:xfrm>
           <a:prstGeom prst="roundRect">
@@ -14986,7 +14499,7 @@
         </p:nvSpPr>
         <p:spPr>
           <a:xfrm>
-            <a:off x="4069080" y="4238752"/>
+            <a:off x="4069080" y="3730752"/>
             <a:ext cx="4572000" cy="109728"/>
           </a:xfrm>
           <a:prstGeom prst="roundRect">
@@ -15013,7 +14526,7 @@
         </p:nvSpPr>
         <p:spPr>
           <a:xfrm>
-            <a:off x="8823960" y="4202176"/>
+            <a:off x="8823960" y="3694176"/>
             <a:ext cx="640080" cy="182880"/>
           </a:xfrm>
           <a:prstGeom prst="rect">
@@ -15026,7 +14539,7 @@
           <a:bodyPr wrap="square" lIns="0" tIns="0" rIns="0" bIns="0" rtlCol="0" anchor="ctr"/>
           <a:lstStyle/>
           <a:p>
-            <a:pPr marL="0" indent="0">
+            <a:pPr indent="0" marL="0">
               <a:buNone/>
             </a:pPr>
             <a:r>
@@ -15034,13 +14547,10 @@
                 <a:solidFill>
                   <a:srgbClr val="123B2B"/>
                 </a:solidFill>
-                <a:latin typeface="Garamond"/>
               </a:rPr>
               <a:t>100%</a:t>
             </a:r>
-            <a:endParaRPr lang="en-US" sz="1000" dirty="0">
-              <a:latin typeface="Garamond"/>
-            </a:endParaRPr>
+            <a:endParaRPr lang="en-US" sz="1000" dirty="0"/>
           </a:p>
         </p:txBody>
       </p:sp>
@@ -15052,7 +14562,7 @@
         </p:nvSpPr>
         <p:spPr>
           <a:xfrm>
-            <a:off x="822960" y="4677664"/>
+            <a:off x="822960" y="4169664"/>
             <a:ext cx="3017520" cy="182880"/>
           </a:xfrm>
           <a:prstGeom prst="rect">
@@ -15065,7 +14575,7 @@
           <a:bodyPr wrap="square" lIns="0" tIns="0" rIns="0" bIns="0" rtlCol="0" anchor="ctr"/>
           <a:lstStyle/>
           <a:p>
-            <a:pPr marL="0" indent="0">
+            <a:pPr indent="0" marL="0">
               <a:buNone/>
             </a:pPr>
             <a:r>
@@ -15073,13 +14583,10 @@
                 <a:solidFill>
                   <a:srgbClr val="0E1712"/>
                 </a:solidFill>
-                <a:latin typeface="Garamond"/>
               </a:rPr>
               <a:t>Partner Portal</a:t>
             </a:r>
-            <a:endParaRPr lang="en-US" sz="1100" dirty="0">
-              <a:latin typeface="Garamond"/>
-            </a:endParaRPr>
+            <a:endParaRPr lang="en-US" sz="1100" dirty="0"/>
           </a:p>
         </p:txBody>
       </p:sp>
@@ -15091,7 +14598,7 @@
         </p:nvSpPr>
         <p:spPr>
           <a:xfrm>
-            <a:off x="4069080" y="4714240"/>
+            <a:off x="4069080" y="4206240"/>
             <a:ext cx="4572000" cy="109728"/>
           </a:xfrm>
           <a:prstGeom prst="roundRect">
@@ -15118,7 +14625,7 @@
         </p:nvSpPr>
         <p:spPr>
           <a:xfrm>
-            <a:off x="4069080" y="4714240"/>
+            <a:off x="4069080" y="4206240"/>
             <a:ext cx="4572000" cy="109728"/>
           </a:xfrm>
           <a:prstGeom prst="roundRect">
@@ -15145,7 +14652,7 @@
         </p:nvSpPr>
         <p:spPr>
           <a:xfrm>
-            <a:off x="8823960" y="4677664"/>
+            <a:off x="8823960" y="4169664"/>
             <a:ext cx="640080" cy="182880"/>
           </a:xfrm>
           <a:prstGeom prst="rect">
@@ -15158,7 +14665,7 @@
           <a:bodyPr wrap="square" lIns="0" tIns="0" rIns="0" bIns="0" rtlCol="0" anchor="ctr"/>
           <a:lstStyle/>
           <a:p>
-            <a:pPr marL="0" indent="0">
+            <a:pPr indent="0" marL="0">
               <a:buNone/>
             </a:pPr>
             <a:r>
@@ -15166,13 +14673,10 @@
                 <a:solidFill>
                   <a:srgbClr val="123B2B"/>
                 </a:solidFill>
-                <a:latin typeface="Garamond"/>
               </a:rPr>
               <a:t>100%</a:t>
             </a:r>
-            <a:endParaRPr lang="en-US" sz="1000" dirty="0">
-              <a:latin typeface="Garamond"/>
-            </a:endParaRPr>
+            <a:endParaRPr lang="en-US" sz="1000" dirty="0"/>
           </a:p>
         </p:txBody>
       </p:sp>
@@ -15184,7 +14688,7 @@
         </p:nvSpPr>
         <p:spPr>
           <a:xfrm>
-            <a:off x="822960" y="5153152"/>
+            <a:off x="822960" y="4645152"/>
             <a:ext cx="3017520" cy="182880"/>
           </a:xfrm>
           <a:prstGeom prst="rect">
@@ -15197,7 +14701,7 @@
           <a:bodyPr wrap="square" lIns="0" tIns="0" rIns="0" bIns="0" rtlCol="0" anchor="ctr"/>
           <a:lstStyle/>
           <a:p>
-            <a:pPr marL="0" indent="0">
+            <a:pPr indent="0" marL="0">
               <a:buNone/>
             </a:pPr>
             <a:r>
@@ -15205,13 +14709,10 @@
                 <a:solidFill>
                   <a:srgbClr val="0E1712"/>
                 </a:solidFill>
-                <a:latin typeface="Garamond"/>
               </a:rPr>
               <a:t>KYC / OTP</a:t>
             </a:r>
-            <a:endParaRPr lang="en-US" sz="1100" dirty="0">
-              <a:latin typeface="Garamond"/>
-            </a:endParaRPr>
+            <a:endParaRPr lang="en-US" sz="1100" dirty="0"/>
           </a:p>
         </p:txBody>
       </p:sp>
@@ -15223,7 +14724,7 @@
         </p:nvSpPr>
         <p:spPr>
           <a:xfrm>
-            <a:off x="4069080" y="5189728"/>
+            <a:off x="4069080" y="4681728"/>
             <a:ext cx="4572000" cy="109728"/>
           </a:xfrm>
           <a:prstGeom prst="roundRect">
@@ -15250,7 +14751,7 @@
         </p:nvSpPr>
         <p:spPr>
           <a:xfrm>
-            <a:off x="4069080" y="5189728"/>
+            <a:off x="4069080" y="4681728"/>
             <a:ext cx="3657600" cy="109728"/>
           </a:xfrm>
           <a:prstGeom prst="roundRect">
@@ -15277,7 +14778,7 @@
         </p:nvSpPr>
         <p:spPr>
           <a:xfrm>
-            <a:off x="8823960" y="5153152"/>
+            <a:off x="8823960" y="4645152"/>
             <a:ext cx="640080" cy="182880"/>
           </a:xfrm>
           <a:prstGeom prst="rect">
@@ -15290,7 +14791,7 @@
           <a:bodyPr wrap="square" lIns="0" tIns="0" rIns="0" bIns="0" rtlCol="0" anchor="ctr"/>
           <a:lstStyle/>
           <a:p>
-            <a:pPr marL="0" indent="0">
+            <a:pPr indent="0" marL="0">
               <a:buNone/>
             </a:pPr>
             <a:r>
@@ -15298,13 +14799,10 @@
                 <a:solidFill>
                   <a:srgbClr val="123B2B"/>
                 </a:solidFill>
-                <a:latin typeface="Garamond"/>
               </a:rPr>
               <a:t>80%</a:t>
             </a:r>
-            <a:endParaRPr lang="en-US" sz="1000" dirty="0">
-              <a:latin typeface="Garamond"/>
-            </a:endParaRPr>
+            <a:endParaRPr lang="en-US" sz="1000" dirty="0"/>
           </a:p>
         </p:txBody>
       </p:sp>
@@ -15316,7 +14814,7 @@
         </p:nvSpPr>
         <p:spPr>
           <a:xfrm>
-            <a:off x="9646920" y="3251200"/>
+            <a:off x="9646920" y="2743200"/>
             <a:ext cx="1737360" cy="2194560"/>
           </a:xfrm>
           <a:prstGeom prst="roundRect">
@@ -15345,7 +14843,7 @@
         </p:nvSpPr>
         <p:spPr>
           <a:xfrm>
-            <a:off x="9857232" y="3452368"/>
+            <a:off x="9857232" y="2944368"/>
             <a:ext cx="320040" cy="320040"/>
           </a:xfrm>
           <a:prstGeom prst="rect">
@@ -15358,7 +14856,7 @@
           <a:bodyPr wrap="square" lIns="0" tIns="0" rIns="0" bIns="0" rtlCol="0" anchor="ctr"/>
           <a:lstStyle/>
           <a:p>
-            <a:pPr marL="0" indent="0">
+            <a:pPr indent="0" marL="0">
               <a:buNone/>
             </a:pPr>
             <a:r>
@@ -15366,13 +14864,10 @@
                 <a:solidFill>
                   <a:srgbClr val="000000"/>
                 </a:solidFill>
-                <a:latin typeface="Garamond"/>
               </a:rPr>
               <a:t>⚙️</a:t>
             </a:r>
-            <a:endParaRPr lang="en-US" sz="1700" dirty="0">
-              <a:latin typeface="Garamond"/>
-            </a:endParaRPr>
+            <a:endParaRPr lang="en-US" sz="1700" dirty="0"/>
           </a:p>
         </p:txBody>
       </p:sp>
@@ -15384,7 +14879,7 @@
         </p:nvSpPr>
         <p:spPr>
           <a:xfrm>
-            <a:off x="10241280" y="3452368"/>
+            <a:off x="10241280" y="2944368"/>
             <a:ext cx="941832" cy="256032"/>
           </a:xfrm>
           <a:prstGeom prst="rect">
@@ -15397,7 +14892,7 @@
           <a:bodyPr wrap="square" lIns="0" tIns="0" rIns="0" bIns="0" rtlCol="0" anchor="ctr"/>
           <a:lstStyle/>
           <a:p>
-            <a:pPr marL="0" indent="0">
+            <a:pPr indent="0" marL="0">
               <a:buNone/>
             </a:pPr>
             <a:r>
@@ -15405,13 +14900,10 @@
                 <a:solidFill>
                   <a:srgbClr val="0E1712"/>
                 </a:solidFill>
-                <a:latin typeface="Garamond"/>
               </a:rPr>
               <a:t>Stack</a:t>
             </a:r>
-            <a:endParaRPr lang="en-US" sz="1500" dirty="0">
-              <a:latin typeface="Garamond"/>
-            </a:endParaRPr>
+            <a:endParaRPr lang="en-US" sz="1500" dirty="0"/>
           </a:p>
         </p:txBody>
       </p:sp>
@@ -15423,7 +14915,7 @@
         </p:nvSpPr>
         <p:spPr>
           <a:xfrm>
-            <a:off x="9857232" y="3891280"/>
+            <a:off x="9857232" y="3383280"/>
             <a:ext cx="384048" cy="32004"/>
           </a:xfrm>
           <a:prstGeom prst="rect">
@@ -15450,7 +14942,7 @@
         </p:nvSpPr>
         <p:spPr>
           <a:xfrm>
-            <a:off x="9857232" y="4028440"/>
+            <a:off x="9857232" y="3520440"/>
             <a:ext cx="1316736" cy="1234440"/>
           </a:xfrm>
           <a:prstGeom prst="rect">
@@ -15465,7 +14957,7 @@
           </a:bodyPr>
           <a:lstStyle/>
           <a:p>
-            <a:pPr marL="0" indent="0">
+            <a:pPr indent="0" marL="0">
               <a:buNone/>
             </a:pPr>
             <a:r>
@@ -15473,16 +14965,13 @@
                 <a:solidFill>
                   <a:srgbClr val="6B786E"/>
                 </a:solidFill>
-                <a:latin typeface="Garamond"/>
               </a:rPr>
               <a:t>Render</a:t>
             </a:r>
-            <a:endParaRPr lang="en-US" sz="1050" dirty="0">
-              <a:latin typeface="Garamond"/>
-            </a:endParaRPr>
-          </a:p>
-          <a:p>
-            <a:pPr marL="0" indent="0">
+            <a:endParaRPr lang="en-US" sz="1050" dirty="0"/>
+          </a:p>
+          <a:p>
+            <a:pPr indent="0" marL="0">
               <a:buNone/>
             </a:pPr>
             <a:r>
@@ -15490,16 +14979,13 @@
                 <a:solidFill>
                   <a:srgbClr val="6B786E"/>
                 </a:solidFill>
-                <a:latin typeface="Garamond"/>
               </a:rPr>
               <a:t>Supabase</a:t>
             </a:r>
-            <a:endParaRPr lang="en-US" sz="1050" dirty="0">
-              <a:latin typeface="Garamond"/>
-            </a:endParaRPr>
-          </a:p>
-          <a:p>
-            <a:pPr marL="0" indent="0">
+            <a:endParaRPr lang="en-US" sz="1050" dirty="0"/>
+          </a:p>
+          <a:p>
+            <a:pPr indent="0" marL="0">
               <a:buNone/>
             </a:pPr>
             <a:r>
@@ -15507,16 +14993,13 @@
                 <a:solidFill>
                   <a:srgbClr val="6B786E"/>
                 </a:solidFill>
-                <a:latin typeface="Garamond"/>
               </a:rPr>
               <a:t>Sumsub</a:t>
             </a:r>
-            <a:endParaRPr lang="en-US" sz="1050" dirty="0">
-              <a:latin typeface="Garamond"/>
-            </a:endParaRPr>
-          </a:p>
-          <a:p>
-            <a:pPr marL="0" indent="0">
+            <a:endParaRPr lang="en-US" sz="1050" dirty="0"/>
+          </a:p>
+          <a:p>
+            <a:pPr indent="0" marL="0">
               <a:buNone/>
             </a:pPr>
             <a:r>
@@ -15524,16 +15007,13 @@
                 <a:solidFill>
                   <a:srgbClr val="6B786E"/>
                 </a:solidFill>
-                <a:latin typeface="Garamond"/>
               </a:rPr>
               <a:t>Twilio</a:t>
             </a:r>
-            <a:endParaRPr lang="en-US" sz="1050" dirty="0">
-              <a:latin typeface="Garamond"/>
-            </a:endParaRPr>
-          </a:p>
-          <a:p>
-            <a:pPr marL="0" indent="0">
+            <a:endParaRPr lang="en-US" sz="1050" dirty="0"/>
+          </a:p>
+          <a:p>
+            <a:pPr indent="0" marL="0">
               <a:buNone/>
             </a:pPr>
             <a:r>
@@ -15541,16 +15021,13 @@
                 <a:solidFill>
                   <a:srgbClr val="6B786E"/>
                 </a:solidFill>
-                <a:latin typeface="Garamond"/>
               </a:rPr>
               <a:t>GitHub</a:t>
             </a:r>
-            <a:endParaRPr lang="en-US" sz="1050" dirty="0">
-              <a:latin typeface="Garamond"/>
-            </a:endParaRPr>
-          </a:p>
-          <a:p>
-            <a:pPr marL="0" indent="0">
+            <a:endParaRPr lang="en-US" sz="1050" dirty="0"/>
+          </a:p>
+          <a:p>
+            <a:pPr indent="0" marL="0">
               <a:buNone/>
             </a:pPr>
             <a:r>
@@ -15558,13 +15035,10 @@
                 <a:solidFill>
                   <a:srgbClr val="6B786E"/>
                 </a:solidFill>
-                <a:latin typeface="Garamond"/>
               </a:rPr>
               <a:t>IONOS</a:t>
             </a:r>
-            <a:endParaRPr lang="en-US" sz="1050" dirty="0">
-              <a:latin typeface="Garamond"/>
-            </a:endParaRPr>
+            <a:endParaRPr lang="en-US" sz="1050" dirty="0"/>
           </a:p>
         </p:txBody>
       </p:sp>
@@ -15589,7 +15063,7 @@
           <a:bodyPr wrap="square" lIns="0" tIns="0" rIns="0" bIns="0" rtlCol="0" anchor="ctr"/>
           <a:lstStyle/>
           <a:p>
-            <a:pPr marL="0" indent="0">
+            <a:pPr indent="0" marL="0">
               <a:buNone/>
             </a:pPr>
             <a:r>
@@ -15597,13 +15071,10 @@
                 <a:solidFill>
                   <a:srgbClr val="6B786E"/>
                 </a:solidFill>
-                <a:latin typeface="Garamond"/>
               </a:rPr>
               <a:t>© 2026 KOWO · contact@getkowo.com · getkowo.com</a:t>
             </a:r>
-            <a:endParaRPr lang="en-US" sz="750" dirty="0">
-              <a:latin typeface="Garamond"/>
-            </a:endParaRPr>
+            <a:endParaRPr lang="en-US" sz="750" dirty="0"/>
           </a:p>
         </p:txBody>
       </p:sp>
@@ -15623,7 +15094,6 @@
         <a:solidFill>
           <a:srgbClr val="F6F1E7"/>
         </a:solidFill>
-        <a:effectLst/>
       </p:bgPr>
     </p:bg>
     <p:spTree>
@@ -15673,14 +15143,14 @@
       </p:sp>
       <p:pic>
         <p:nvPicPr>
-          <p:cNvPr id="3" name="Image 0" descr="/mnt/data/kowo-institutional-partnership-v2/assets/kowo-logo.jpg"/>
+          <p:cNvPr id="3" name="Image 0" descr="/mnt/data/kowo-institutional-partnership-v2/assets/kowo-logo.jpg">    </p:cNvPr>
           <p:cNvPicPr>
             <a:picLocks noChangeAspect="1"/>
           </p:cNvPicPr>
           <p:nvPr/>
         </p:nvPicPr>
         <p:blipFill>
-          <a:blip r:embed="rId3"/>
+          <a:blip r:embed="rId1"/>
           <a:stretch>
             <a:fillRect/>
           </a:stretch>
@@ -15703,7 +15173,7 @@
         </p:nvSpPr>
         <p:spPr>
           <a:xfrm>
-            <a:off x="960120" y="414673"/>
+            <a:off x="960120" y="356616"/>
             <a:ext cx="1097280" cy="256032"/>
           </a:xfrm>
           <a:prstGeom prst="rect">
@@ -15716,7 +15186,7 @@
           <a:bodyPr wrap="square" lIns="0" tIns="0" rIns="0" bIns="0" rtlCol="0" anchor="ctr"/>
           <a:lstStyle/>
           <a:p>
-            <a:pPr marL="0" indent="0">
+            <a:pPr indent="0" marL="0">
               <a:buNone/>
             </a:pPr>
             <a:r>
@@ -15724,15 +15194,13 @@
                 <a:solidFill>
                   <a:srgbClr val="123B2B"/>
                 </a:solidFill>
-                <a:latin typeface="Garamond"/>
+                <a:latin typeface="Aptos Display" pitchFamily="34" charset="0"/>
                 <a:ea typeface="Aptos Display" pitchFamily="34" charset="-122"/>
                 <a:cs typeface="Aptos Display" pitchFamily="34" charset="-120"/>
               </a:rPr>
               <a:t>KOWO</a:t>
             </a:r>
-            <a:endParaRPr lang="en-US" sz="1000" dirty="0">
-              <a:latin typeface="Garamond"/>
-            </a:endParaRPr>
+            <a:endParaRPr lang="en-US" sz="1000" dirty="0"/>
           </a:p>
         </p:txBody>
       </p:sp>
@@ -15757,7 +15225,7 @@
           <a:bodyPr wrap="square" lIns="0" tIns="0" rIns="0" bIns="0" rtlCol="0" anchor="ctr"/>
           <a:lstStyle/>
           <a:p>
-            <a:pPr marL="0" indent="0" algn="r">
+            <a:pPr algn="r" indent="0" marL="0">
               <a:buNone/>
             </a:pPr>
             <a:r>
@@ -15765,13 +15233,10 @@
                 <a:solidFill>
                   <a:srgbClr val="6B786E"/>
                 </a:solidFill>
-                <a:latin typeface="Garamond"/>
               </a:rPr>
               <a:t>Institutional Partnership Brief</a:t>
             </a:r>
-            <a:endParaRPr lang="en-US" sz="800" dirty="0">
-              <a:latin typeface="Garamond"/>
-            </a:endParaRPr>
+            <a:endParaRPr lang="en-US" sz="800" dirty="0"/>
           </a:p>
         </p:txBody>
       </p:sp>
@@ -15825,7 +15290,7 @@
           <a:bodyPr wrap="square" lIns="0" tIns="0" rIns="0" bIns="0" rtlCol="0" anchor="ctr"/>
           <a:lstStyle/>
           <a:p>
-            <a:pPr marL="0" indent="0" algn="ctr">
+            <a:pPr algn="ctr" indent="0" marL="0">
               <a:buNone/>
             </a:pPr>
             <a:r>
@@ -15833,13 +15298,10 @@
                 <a:solidFill>
                   <a:srgbClr val="123B2B"/>
                 </a:solidFill>
-                <a:latin typeface="Garamond"/>
               </a:rPr>
               <a:t>08 · ARCHITECTURE TECHNIQUE</a:t>
             </a:r>
-            <a:endParaRPr lang="en-US" sz="850" dirty="0">
-              <a:latin typeface="Garamond"/>
-            </a:endParaRPr>
+            <a:endParaRPr lang="en-US" sz="850" dirty="0"/>
           </a:p>
         </p:txBody>
       </p:sp>
@@ -15851,51 +15313,8 @@
         </p:nvSpPr>
         <p:spPr>
           <a:xfrm>
-            <a:off x="680139" y="1335024"/>
-            <a:ext cx="6474823" cy="960120"/>
-          </a:xfrm>
-          <a:prstGeom prst="rect">
-            <a:avLst/>
-          </a:prstGeom>
-          <a:noFill/>
-          <a:ln/>
-        </p:spPr>
-        <p:txBody>
-          <a:bodyPr wrap="square" lIns="0" tIns="0" rIns="0" bIns="0" rtlCol="0" anchor="ctr">
-            <a:normAutofit fontScale="77500" lnSpcReduction="20000"/>
-          </a:bodyPr>
-          <a:lstStyle/>
-          <a:p>
-            <a:pPr marL="0" indent="0">
-              <a:buNone/>
-            </a:pPr>
-            <a:r>
-              <a:rPr lang="en-US" sz="3600" b="1" dirty="0">
-                <a:solidFill>
-                  <a:srgbClr val="0E1712"/>
-                </a:solidFill>
-                <a:latin typeface="Garamond"/>
-                <a:ea typeface="Aptos Display" pitchFamily="34" charset="-122"/>
-                <a:cs typeface="Aptos Display" pitchFamily="34" charset="-120"/>
-              </a:rPr>
-              <a:t>Une architecture prête pour l’intégration avec un partenaire réglementé.</a:t>
-            </a:r>
-            <a:endParaRPr lang="en-US" sz="3600" dirty="0">
-              <a:latin typeface="Garamond"/>
-            </a:endParaRPr>
-          </a:p>
-        </p:txBody>
-      </p:sp>
-      <p:sp>
-        <p:nvSpPr>
-          <p:cNvPr id="9" name="Text 6"/>
-          <p:cNvSpPr/>
-          <p:nvPr/>
-        </p:nvSpPr>
-        <p:spPr>
-          <a:xfrm>
-            <a:off x="685800" y="2450592"/>
-            <a:ext cx="5303520" cy="621792"/>
+            <a:off x="658368" y="1335024"/>
+            <a:ext cx="5669280" cy="960120"/>
           </a:xfrm>
           <a:prstGeom prst="rect">
             <a:avLst/>
@@ -15909,7 +15328,48 @@
           </a:bodyPr>
           <a:lstStyle/>
           <a:p>
-            <a:pPr marL="0" indent="0">
+            <a:pPr indent="0" marL="0">
+              <a:buNone/>
+            </a:pPr>
+            <a:r>
+              <a:rPr lang="en-US" sz="3600" b="1" dirty="0">
+                <a:solidFill>
+                  <a:srgbClr val="0E1712"/>
+                </a:solidFill>
+                <a:latin typeface="Aptos Display" pitchFamily="34" charset="0"/>
+                <a:ea typeface="Aptos Display" pitchFamily="34" charset="-122"/>
+                <a:cs typeface="Aptos Display" pitchFamily="34" charset="-120"/>
+              </a:rPr>
+              <a:t>Une architecture prête pour l’intégration avec un partenaire réglementé.</a:t>
+            </a:r>
+            <a:endParaRPr lang="en-US" sz="3600" dirty="0"/>
+          </a:p>
+        </p:txBody>
+      </p:sp>
+      <p:sp>
+        <p:nvSpPr>
+          <p:cNvPr id="9" name="Text 6"/>
+          <p:cNvSpPr/>
+          <p:nvPr/>
+        </p:nvSpPr>
+        <p:spPr>
+          <a:xfrm>
+            <a:off x="685800" y="2450592"/>
+            <a:ext cx="5303520" cy="621792"/>
+          </a:xfrm>
+          <a:prstGeom prst="rect">
+            <a:avLst/>
+          </a:prstGeom>
+          <a:noFill/>
+          <a:ln/>
+        </p:spPr>
+        <p:txBody>
+          <a:bodyPr wrap="square" lIns="0" tIns="0" rIns="0" bIns="0" rtlCol="0" anchor="ctr">
+            <a:normAutofit/>
+          </a:bodyPr>
+          <a:lstStyle/>
+          <a:p>
+            <a:pPr indent="0" marL="0">
               <a:buNone/>
             </a:pPr>
             <a:r>
@@ -15917,13 +15377,10 @@
                 <a:solidFill>
                   <a:srgbClr val="6B786E"/>
                 </a:solidFill>
-                <a:latin typeface="Garamond"/>
               </a:rPr>
               <a:t>Les composants sont pensés pour s’interfacer avec une institution financière et un PSP.</a:t>
             </a:r>
-            <a:endParaRPr lang="en-US" sz="1500" dirty="0">
-              <a:latin typeface="Garamond"/>
-            </a:endParaRPr>
+            <a:endParaRPr lang="en-US" sz="1500" dirty="0"/>
           </a:p>
         </p:txBody>
       </p:sp>
@@ -15935,7 +15392,7 @@
         </p:nvSpPr>
         <p:spPr>
           <a:xfrm>
-            <a:off x="822960" y="3098800"/>
+            <a:off x="822960" y="2743200"/>
             <a:ext cx="1600200" cy="1143000"/>
           </a:xfrm>
           <a:prstGeom prst="roundRect">
@@ -15962,7 +15419,7 @@
         </p:nvSpPr>
         <p:spPr>
           <a:xfrm>
-            <a:off x="960120" y="3281680"/>
+            <a:off x="960120" y="2926080"/>
             <a:ext cx="1325880" cy="219456"/>
           </a:xfrm>
           <a:prstGeom prst="rect">
@@ -15975,7 +15432,7 @@
           <a:bodyPr wrap="square" lIns="0" tIns="0" rIns="0" bIns="0" rtlCol="0" anchor="ctr"/>
           <a:lstStyle/>
           <a:p>
-            <a:pPr marL="0" indent="0">
+            <a:pPr indent="0" marL="0">
               <a:buNone/>
             </a:pPr>
             <a:r>
@@ -15983,13 +15440,10 @@
                 <a:solidFill>
                   <a:srgbClr val="0E1712"/>
                 </a:solidFill>
-                <a:latin typeface="Garamond"/>
               </a:rPr>
               <a:t>Mobile App</a:t>
             </a:r>
-            <a:endParaRPr lang="en-US" sz="1250" dirty="0">
-              <a:latin typeface="Garamond"/>
-            </a:endParaRPr>
+            <a:endParaRPr lang="en-US" sz="1250" dirty="0"/>
           </a:p>
         </p:txBody>
       </p:sp>
@@ -16001,7 +15455,7 @@
         </p:nvSpPr>
         <p:spPr>
           <a:xfrm>
-            <a:off x="960120" y="3601720"/>
+            <a:off x="960120" y="3246120"/>
             <a:ext cx="1325880" cy="347472"/>
           </a:xfrm>
           <a:prstGeom prst="rect">
@@ -16016,7 +15470,7 @@
           </a:bodyPr>
           <a:lstStyle/>
           <a:p>
-            <a:pPr marL="0" indent="0">
+            <a:pPr indent="0" marL="0">
               <a:buNone/>
             </a:pPr>
             <a:r>
@@ -16024,16 +15478,13 @@
                 <a:solidFill>
                   <a:srgbClr val="6B786E"/>
                 </a:solidFill>
-                <a:latin typeface="Garamond"/>
               </a:rPr>
               <a:t>KOWO Android</a:t>
             </a:r>
-            <a:endParaRPr lang="en-US" sz="870" dirty="0">
-              <a:latin typeface="Garamond"/>
-            </a:endParaRPr>
-          </a:p>
-          <a:p>
-            <a:pPr marL="0" indent="0">
+            <a:endParaRPr lang="en-US" sz="870" dirty="0"/>
+          </a:p>
+          <a:p>
+            <a:pPr indent="0" marL="0">
               <a:buNone/>
             </a:pPr>
             <a:r>
@@ -16041,13 +15492,10 @@
                 <a:solidFill>
                   <a:srgbClr val="6B786E"/>
                 </a:solidFill>
-                <a:latin typeface="Garamond"/>
               </a:rPr>
               <a:t>UX, groupes, notifications</a:t>
             </a:r>
-            <a:endParaRPr lang="en-US" sz="870" dirty="0">
-              <a:latin typeface="Garamond"/>
-            </a:endParaRPr>
+            <a:endParaRPr lang="en-US" sz="870" dirty="0"/>
           </a:p>
         </p:txBody>
       </p:sp>
@@ -16059,7 +15507,7 @@
         </p:nvSpPr>
         <p:spPr>
           <a:xfrm>
-            <a:off x="2487168" y="3665728"/>
+            <a:off x="2487168" y="3310128"/>
             <a:ext cx="347472" cy="0"/>
           </a:xfrm>
           <a:prstGeom prst="line">
@@ -16084,7 +15532,7 @@
         </p:nvSpPr>
         <p:spPr>
           <a:xfrm>
-            <a:off x="2926080" y="3098800"/>
+            <a:off x="2926080" y="2743200"/>
             <a:ext cx="1600200" cy="1143000"/>
           </a:xfrm>
           <a:prstGeom prst="roundRect">
@@ -16111,7 +15559,7 @@
         </p:nvSpPr>
         <p:spPr>
           <a:xfrm>
-            <a:off x="3063240" y="3281680"/>
+            <a:off x="3063240" y="2926080"/>
             <a:ext cx="1325880" cy="219456"/>
           </a:xfrm>
           <a:prstGeom prst="rect">
@@ -16124,7 +15572,7 @@
           <a:bodyPr wrap="square" lIns="0" tIns="0" rIns="0" bIns="0" rtlCol="0" anchor="ctr"/>
           <a:lstStyle/>
           <a:p>
-            <a:pPr marL="0" indent="0">
+            <a:pPr indent="0" marL="0">
               <a:buNone/>
             </a:pPr>
             <a:r>
@@ -16132,13 +15580,10 @@
                 <a:solidFill>
                   <a:srgbClr val="0E1712"/>
                 </a:solidFill>
-                <a:latin typeface="Garamond"/>
               </a:rPr>
               <a:t>Backend</a:t>
             </a:r>
-            <a:endParaRPr lang="en-US" sz="1250" dirty="0">
-              <a:latin typeface="Garamond"/>
-            </a:endParaRPr>
+            <a:endParaRPr lang="en-US" sz="1250" dirty="0"/>
           </a:p>
         </p:txBody>
       </p:sp>
@@ -16150,7 +15595,7 @@
         </p:nvSpPr>
         <p:spPr>
           <a:xfrm>
-            <a:off x="3063240" y="3601720"/>
+            <a:off x="3063240" y="3246120"/>
             <a:ext cx="1325880" cy="347472"/>
           </a:xfrm>
           <a:prstGeom prst="rect">
@@ -16165,7 +15610,7 @@
           </a:bodyPr>
           <a:lstStyle/>
           <a:p>
-            <a:pPr marL="0" indent="0">
+            <a:pPr indent="0" marL="0">
               <a:buNone/>
             </a:pPr>
             <a:r>
@@ -16173,16 +15618,13 @@
                 <a:solidFill>
                   <a:srgbClr val="6B786E"/>
                 </a:solidFill>
-                <a:latin typeface="Garamond"/>
               </a:rPr>
               <a:t>Render API</a:t>
             </a:r>
-            <a:endParaRPr lang="en-US" sz="870" dirty="0">
-              <a:latin typeface="Garamond"/>
-            </a:endParaRPr>
-          </a:p>
-          <a:p>
-            <a:pPr marL="0" indent="0">
+            <a:endParaRPr lang="en-US" sz="870" dirty="0"/>
+          </a:p>
+          <a:p>
+            <a:pPr indent="0" marL="0">
               <a:buNone/>
             </a:pPr>
             <a:r>
@@ -16190,13 +15632,10 @@
                 <a:solidFill>
                   <a:srgbClr val="6B786E"/>
                 </a:solidFill>
-                <a:latin typeface="Garamond"/>
               </a:rPr>
               <a:t>Business rules &amp; orchestration</a:t>
             </a:r>
-            <a:endParaRPr lang="en-US" sz="870" dirty="0">
-              <a:latin typeface="Garamond"/>
-            </a:endParaRPr>
+            <a:endParaRPr lang="en-US" sz="870" dirty="0"/>
           </a:p>
         </p:txBody>
       </p:sp>
@@ -16208,7 +15647,7 @@
         </p:nvSpPr>
         <p:spPr>
           <a:xfrm>
-            <a:off x="4590288" y="3665728"/>
+            <a:off x="4590288" y="3310128"/>
             <a:ext cx="347472" cy="0"/>
           </a:xfrm>
           <a:prstGeom prst="line">
@@ -16233,7 +15672,7 @@
         </p:nvSpPr>
         <p:spPr>
           <a:xfrm>
-            <a:off x="5029200" y="3098800"/>
+            <a:off x="5029200" y="2743200"/>
             <a:ext cx="1600200" cy="1143000"/>
           </a:xfrm>
           <a:prstGeom prst="roundRect">
@@ -16260,7 +15699,7 @@
         </p:nvSpPr>
         <p:spPr>
           <a:xfrm>
-            <a:off x="5166360" y="3281680"/>
+            <a:off x="5166360" y="2926080"/>
             <a:ext cx="1325880" cy="219456"/>
           </a:xfrm>
           <a:prstGeom prst="rect">
@@ -16273,7 +15712,7 @@
           <a:bodyPr wrap="square" lIns="0" tIns="0" rIns="0" bIns="0" rtlCol="0" anchor="ctr"/>
           <a:lstStyle/>
           <a:p>
-            <a:pPr marL="0" indent="0">
+            <a:pPr indent="0" marL="0">
               <a:buNone/>
             </a:pPr>
             <a:r>
@@ -16281,13 +15720,10 @@
                 <a:solidFill>
                   <a:srgbClr val="0E1712"/>
                 </a:solidFill>
-                <a:latin typeface="Garamond"/>
               </a:rPr>
               <a:t>Data</a:t>
             </a:r>
-            <a:endParaRPr lang="en-US" sz="1250" dirty="0">
-              <a:latin typeface="Garamond"/>
-            </a:endParaRPr>
+            <a:endParaRPr lang="en-US" sz="1250" dirty="0"/>
           </a:p>
         </p:txBody>
       </p:sp>
@@ -16299,7 +15735,7 @@
         </p:nvSpPr>
         <p:spPr>
           <a:xfrm>
-            <a:off x="5166360" y="3601720"/>
+            <a:off x="5166360" y="3246120"/>
             <a:ext cx="1325880" cy="347472"/>
           </a:xfrm>
           <a:prstGeom prst="rect">
@@ -16314,7 +15750,7 @@
           </a:bodyPr>
           <a:lstStyle/>
           <a:p>
-            <a:pPr marL="0" indent="0">
+            <a:pPr indent="0" marL="0">
               <a:buNone/>
             </a:pPr>
             <a:r>
@@ -16322,16 +15758,13 @@
                 <a:solidFill>
                   <a:srgbClr val="6B786E"/>
                 </a:solidFill>
-                <a:latin typeface="Garamond"/>
               </a:rPr>
               <a:t>Supabase</a:t>
             </a:r>
-            <a:endParaRPr lang="en-US" sz="870" dirty="0">
-              <a:latin typeface="Garamond"/>
-            </a:endParaRPr>
-          </a:p>
-          <a:p>
-            <a:pPr marL="0" indent="0">
+            <a:endParaRPr lang="en-US" sz="870" dirty="0"/>
+          </a:p>
+          <a:p>
+            <a:pPr indent="0" marL="0">
               <a:buNone/>
             </a:pPr>
             <a:r>
@@ -16339,13 +15772,10 @@
                 <a:solidFill>
                   <a:srgbClr val="6B786E"/>
                 </a:solidFill>
-                <a:latin typeface="Garamond"/>
               </a:rPr>
               <a:t>Users, groups, histories</a:t>
             </a:r>
-            <a:endParaRPr lang="en-US" sz="870" dirty="0">
-              <a:latin typeface="Garamond"/>
-            </a:endParaRPr>
+            <a:endParaRPr lang="en-US" sz="870" dirty="0"/>
           </a:p>
         </p:txBody>
       </p:sp>
@@ -16357,7 +15787,7 @@
         </p:nvSpPr>
         <p:spPr>
           <a:xfrm>
-            <a:off x="6693408" y="3665728"/>
+            <a:off x="6693408" y="3310128"/>
             <a:ext cx="347472" cy="0"/>
           </a:xfrm>
           <a:prstGeom prst="line">
@@ -16382,7 +15812,7 @@
         </p:nvSpPr>
         <p:spPr>
           <a:xfrm>
-            <a:off x="7132320" y="3098800"/>
+            <a:off x="7132320" y="2743200"/>
             <a:ext cx="1600200" cy="1143000"/>
           </a:xfrm>
           <a:prstGeom prst="roundRect">
@@ -16409,7 +15839,7 @@
         </p:nvSpPr>
         <p:spPr>
           <a:xfrm>
-            <a:off x="7269480" y="3281680"/>
+            <a:off x="7269480" y="2926080"/>
             <a:ext cx="1325880" cy="219456"/>
           </a:xfrm>
           <a:prstGeom prst="rect">
@@ -16422,7 +15852,7 @@
           <a:bodyPr wrap="square" lIns="0" tIns="0" rIns="0" bIns="0" rtlCol="0" anchor="ctr"/>
           <a:lstStyle/>
           <a:p>
-            <a:pPr marL="0" indent="0">
+            <a:pPr indent="0" marL="0">
               <a:buNone/>
             </a:pPr>
             <a:r>
@@ -16430,13 +15860,10 @@
                 <a:solidFill>
                   <a:srgbClr val="0E1712"/>
                 </a:solidFill>
-                <a:latin typeface="Garamond"/>
               </a:rPr>
               <a:t>Security</a:t>
             </a:r>
-            <a:endParaRPr lang="en-US" sz="1250" dirty="0">
-              <a:latin typeface="Garamond"/>
-            </a:endParaRPr>
+            <a:endParaRPr lang="en-US" sz="1250" dirty="0"/>
           </a:p>
         </p:txBody>
       </p:sp>
@@ -16448,7 +15875,7 @@
         </p:nvSpPr>
         <p:spPr>
           <a:xfrm>
-            <a:off x="7269480" y="3601720"/>
+            <a:off x="7269480" y="3246120"/>
             <a:ext cx="1325880" cy="347472"/>
           </a:xfrm>
           <a:prstGeom prst="rect">
@@ -16463,7 +15890,7 @@
           </a:bodyPr>
           <a:lstStyle/>
           <a:p>
-            <a:pPr marL="0" indent="0">
+            <a:pPr indent="0" marL="0">
               <a:buNone/>
             </a:pPr>
             <a:r>
@@ -16471,16 +15898,13 @@
                 <a:solidFill>
                   <a:srgbClr val="6B786E"/>
                 </a:solidFill>
-                <a:latin typeface="Garamond"/>
               </a:rPr>
               <a:t>Sumsub + Twilio</a:t>
             </a:r>
-            <a:endParaRPr lang="en-US" sz="870" dirty="0">
-              <a:latin typeface="Garamond"/>
-            </a:endParaRPr>
-          </a:p>
-          <a:p>
-            <a:pPr marL="0" indent="0">
+            <a:endParaRPr lang="en-US" sz="870" dirty="0"/>
+          </a:p>
+          <a:p>
+            <a:pPr indent="0" marL="0">
               <a:buNone/>
             </a:pPr>
             <a:r>
@@ -16488,13 +15912,10 @@
                 <a:solidFill>
                   <a:srgbClr val="6B786E"/>
                 </a:solidFill>
-                <a:latin typeface="Garamond"/>
               </a:rPr>
               <a:t>KYC &amp; OTP</a:t>
             </a:r>
-            <a:endParaRPr lang="en-US" sz="870" dirty="0">
-              <a:latin typeface="Garamond"/>
-            </a:endParaRPr>
+            <a:endParaRPr lang="en-US" sz="870" dirty="0"/>
           </a:p>
         </p:txBody>
       </p:sp>
@@ -16506,7 +15927,7 @@
         </p:nvSpPr>
         <p:spPr>
           <a:xfrm>
-            <a:off x="8796528" y="3665728"/>
+            <a:off x="8796528" y="3310128"/>
             <a:ext cx="347472" cy="0"/>
           </a:xfrm>
           <a:prstGeom prst="line">
@@ -16531,7 +15952,7 @@
         </p:nvSpPr>
         <p:spPr>
           <a:xfrm>
-            <a:off x="9235440" y="3098800"/>
+            <a:off x="9235440" y="2743200"/>
             <a:ext cx="1600200" cy="1143000"/>
           </a:xfrm>
           <a:prstGeom prst="roundRect">
@@ -16558,7 +15979,7 @@
         </p:nvSpPr>
         <p:spPr>
           <a:xfrm>
-            <a:off x="9372600" y="3281680"/>
+            <a:off x="9372600" y="2926080"/>
             <a:ext cx="1325880" cy="219456"/>
           </a:xfrm>
           <a:prstGeom prst="rect">
@@ -16571,7 +15992,7 @@
           <a:bodyPr wrap="square" lIns="0" tIns="0" rIns="0" bIns="0" rtlCol="0" anchor="ctr"/>
           <a:lstStyle/>
           <a:p>
-            <a:pPr marL="0" indent="0">
+            <a:pPr indent="0" marL="0">
               <a:buNone/>
             </a:pPr>
             <a:r>
@@ -16579,13 +16000,10 @@
                 <a:solidFill>
                   <a:srgbClr val="FFFFFF"/>
                 </a:solidFill>
-                <a:latin typeface="Garamond"/>
               </a:rPr>
               <a:t>Partner</a:t>
             </a:r>
-            <a:endParaRPr lang="en-US" sz="1250" dirty="0">
-              <a:latin typeface="Garamond"/>
-            </a:endParaRPr>
+            <a:endParaRPr lang="en-US" sz="1250" dirty="0"/>
           </a:p>
         </p:txBody>
       </p:sp>
@@ -16597,7 +16015,7 @@
         </p:nvSpPr>
         <p:spPr>
           <a:xfrm>
-            <a:off x="9372600" y="3601720"/>
+            <a:off x="9372600" y="3246120"/>
             <a:ext cx="1325880" cy="347472"/>
           </a:xfrm>
           <a:prstGeom prst="rect">
@@ -16612,7 +16030,7 @@
           </a:bodyPr>
           <a:lstStyle/>
           <a:p>
-            <a:pPr marL="0" indent="0">
+            <a:pPr indent="0" marL="0">
               <a:buNone/>
             </a:pPr>
             <a:r>
@@ -16620,16 +16038,13 @@
                 <a:solidFill>
                   <a:srgbClr val="C7D8CF"/>
                 </a:solidFill>
-                <a:latin typeface="Garamond"/>
               </a:rPr>
               <a:t>Institution + PSP</a:t>
             </a:r>
-            <a:endParaRPr lang="en-US" sz="870" dirty="0">
-              <a:latin typeface="Garamond"/>
-            </a:endParaRPr>
-          </a:p>
-          <a:p>
-            <a:pPr marL="0" indent="0">
+            <a:endParaRPr lang="en-US" sz="870" dirty="0"/>
+          </a:p>
+          <a:p>
+            <a:pPr indent="0" marL="0">
               <a:buNone/>
             </a:pPr>
             <a:r>
@@ -16637,13 +16052,10 @@
                 <a:solidFill>
                   <a:srgbClr val="C7D8CF"/>
                 </a:solidFill>
-                <a:latin typeface="Garamond"/>
               </a:rPr>
               <a:t>Wallets &amp; payouts</a:t>
             </a:r>
-            <a:endParaRPr lang="en-US" sz="870" dirty="0">
-              <a:latin typeface="Garamond"/>
-            </a:endParaRPr>
+            <a:endParaRPr lang="en-US" sz="870" dirty="0"/>
           </a:p>
         </p:txBody>
       </p:sp>
@@ -16668,7 +16080,7 @@
           <a:bodyPr wrap="square" lIns="0" tIns="0" rIns="0" bIns="0" rtlCol="0" anchor="ctr"/>
           <a:lstStyle/>
           <a:p>
-            <a:pPr marL="0" indent="0" algn="ctr">
+            <a:pPr algn="ctr" indent="0" marL="0">
               <a:buNone/>
             </a:pPr>
             <a:r>
@@ -16676,13 +16088,10 @@
                 <a:solidFill>
                   <a:srgbClr val="123B2B"/>
                 </a:solidFill>
-                <a:latin typeface="Garamond"/>
               </a:rPr>
               <a:t>Objectif : éviter que KOWO ne devienne détenteur des fonds. La technologie orchestre, le partenaire réglementé détient et exécute.</a:t>
             </a:r>
-            <a:endParaRPr lang="en-US" sz="1400" dirty="0">
-              <a:latin typeface="Garamond"/>
-            </a:endParaRPr>
+            <a:endParaRPr lang="en-US" sz="1400" dirty="0"/>
           </a:p>
         </p:txBody>
       </p:sp>
@@ -16707,7 +16116,7 @@
           <a:bodyPr wrap="square" lIns="0" tIns="0" rIns="0" bIns="0" rtlCol="0" anchor="ctr"/>
           <a:lstStyle/>
           <a:p>
-            <a:pPr marL="0" indent="0">
+            <a:pPr indent="0" marL="0">
               <a:buNone/>
             </a:pPr>
             <a:r>
@@ -16715,13 +16124,10 @@
                 <a:solidFill>
                   <a:srgbClr val="6B786E"/>
                 </a:solidFill>
-                <a:latin typeface="Garamond"/>
               </a:rPr>
               <a:t>© 2026 KOWO · contact@getkowo.com · getkowo.com</a:t>
             </a:r>
-            <a:endParaRPr lang="en-US" sz="750" dirty="0">
-              <a:latin typeface="Garamond"/>
-            </a:endParaRPr>
+            <a:endParaRPr lang="en-US" sz="750" dirty="0"/>
           </a:p>
         </p:txBody>
       </p:sp>
@@ -16741,7 +16147,6 @@
         <a:solidFill>
           <a:srgbClr val="F6F1E7"/>
         </a:solidFill>
-        <a:effectLst/>
       </p:bgPr>
     </p:bg>
     <p:spTree>
@@ -16791,14 +16196,14 @@
       </p:sp>
       <p:pic>
         <p:nvPicPr>
-          <p:cNvPr id="3" name="Image 0" descr="/mnt/data/kowo-institutional-partnership-v2/assets/kowo-logo.jpg"/>
+          <p:cNvPr id="3" name="Image 0" descr="/mnt/data/kowo-institutional-partnership-v2/assets/kowo-logo.jpg">    </p:cNvPr>
           <p:cNvPicPr>
             <a:picLocks noChangeAspect="1"/>
           </p:cNvPicPr>
           <p:nvPr/>
         </p:nvPicPr>
         <p:blipFill>
-          <a:blip r:embed="rId3"/>
+          <a:blip r:embed="rId1"/>
           <a:stretch>
             <a:fillRect/>
           </a:stretch>
@@ -16821,7 +16226,7 @@
         </p:nvSpPr>
         <p:spPr>
           <a:xfrm>
-            <a:off x="960120" y="400159"/>
+            <a:off x="960120" y="356616"/>
             <a:ext cx="1097280" cy="256032"/>
           </a:xfrm>
           <a:prstGeom prst="rect">
@@ -16834,7 +16239,7 @@
           <a:bodyPr wrap="square" lIns="0" tIns="0" rIns="0" bIns="0" rtlCol="0" anchor="ctr"/>
           <a:lstStyle/>
           <a:p>
-            <a:pPr marL="0" indent="0">
+            <a:pPr indent="0" marL="0">
               <a:buNone/>
             </a:pPr>
             <a:r>
@@ -16842,15 +16247,13 @@
                 <a:solidFill>
                   <a:srgbClr val="123B2B"/>
                 </a:solidFill>
-                <a:latin typeface="Garamond"/>
+                <a:latin typeface="Aptos Display" pitchFamily="34" charset="0"/>
                 <a:ea typeface="Aptos Display" pitchFamily="34" charset="-122"/>
                 <a:cs typeface="Aptos Display" pitchFamily="34" charset="-120"/>
               </a:rPr>
               <a:t>KOWO</a:t>
             </a:r>
-            <a:endParaRPr lang="en-US" sz="1000" dirty="0">
-              <a:latin typeface="Garamond"/>
-            </a:endParaRPr>
+            <a:endParaRPr lang="en-US" sz="1000" dirty="0"/>
           </a:p>
         </p:txBody>
       </p:sp>
@@ -16875,7 +16278,7 @@
           <a:bodyPr wrap="square" lIns="0" tIns="0" rIns="0" bIns="0" rtlCol="0" anchor="ctr"/>
           <a:lstStyle/>
           <a:p>
-            <a:pPr marL="0" indent="0" algn="r">
+            <a:pPr algn="r" indent="0" marL="0">
               <a:buNone/>
             </a:pPr>
             <a:r>
@@ -16883,13 +16286,10 @@
                 <a:solidFill>
                   <a:srgbClr val="6B786E"/>
                 </a:solidFill>
-                <a:latin typeface="Garamond"/>
               </a:rPr>
               <a:t>Institutional Partnership Brief</a:t>
             </a:r>
-            <a:endParaRPr lang="en-US" sz="800" dirty="0">
-              <a:latin typeface="Garamond"/>
-            </a:endParaRPr>
+            <a:endParaRPr lang="en-US" sz="800" dirty="0"/>
           </a:p>
         </p:txBody>
       </p:sp>
@@ -16943,7 +16343,7 @@
           <a:bodyPr wrap="square" lIns="0" tIns="0" rIns="0" bIns="0" rtlCol="0" anchor="ctr"/>
           <a:lstStyle/>
           <a:p>
-            <a:pPr marL="0" indent="0" algn="ctr">
+            <a:pPr algn="ctr" indent="0" marL="0">
               <a:buNone/>
             </a:pPr>
             <a:r>
@@ -16951,13 +16351,10 @@
                 <a:solidFill>
                   <a:srgbClr val="123B2B"/>
                 </a:solidFill>
-                <a:latin typeface="Garamond"/>
               </a:rPr>
               <a:t>09 · SIGNAL MARCHÉ</a:t>
             </a:r>
-            <a:endParaRPr lang="en-US" sz="850" dirty="0">
-              <a:latin typeface="Garamond"/>
-            </a:endParaRPr>
+            <a:endParaRPr lang="en-US" sz="850" dirty="0"/>
           </a:p>
         </p:txBody>
       </p:sp>
@@ -16984,7 +16381,7 @@
           </a:bodyPr>
           <a:lstStyle/>
           <a:p>
-            <a:pPr marL="0" indent="0">
+            <a:pPr indent="0" marL="0">
               <a:buNone/>
             </a:pPr>
             <a:r>
@@ -16992,15 +16389,13 @@
                 <a:solidFill>
                   <a:srgbClr val="0E1712"/>
                 </a:solidFill>
-                <a:latin typeface="Garamond"/>
+                <a:latin typeface="Aptos Display" pitchFamily="34" charset="0"/>
                 <a:ea typeface="Aptos Display" pitchFamily="34" charset="-122"/>
                 <a:cs typeface="Aptos Display" pitchFamily="34" charset="-120"/>
               </a:rPr>
               <a:t>Des acteurs comparables confirment la demande.</a:t>
             </a:r>
-            <a:endParaRPr lang="en-US" sz="3600" dirty="0">
-              <a:latin typeface="Garamond"/>
-            </a:endParaRPr>
+            <a:endParaRPr lang="en-US" sz="3600" dirty="0"/>
           </a:p>
         </p:txBody>
       </p:sp>
@@ -17027,7 +16422,7 @@
           </a:bodyPr>
           <a:lstStyle/>
           <a:p>
-            <a:pPr marL="0" indent="0">
+            <a:pPr indent="0" marL="0">
               <a:buNone/>
             </a:pPr>
             <a:r>
@@ -17035,13 +16430,10 @@
                 <a:solidFill>
                   <a:srgbClr val="6B786E"/>
                 </a:solidFill>
-                <a:latin typeface="Garamond"/>
               </a:rPr>
               <a:t>Les premières solutions d’épargne numérique en Afrique de l’Ouest valident l’existence d’un besoin utilisateur fort.</a:t>
             </a:r>
-            <a:endParaRPr lang="en-US" sz="1500" dirty="0">
-              <a:latin typeface="Garamond"/>
-            </a:endParaRPr>
+            <a:endParaRPr lang="en-US" sz="1500" dirty="0"/>
           </a:p>
         </p:txBody>
       </p:sp>
@@ -17053,7 +16445,7 @@
         </p:nvSpPr>
         <p:spPr>
           <a:xfrm>
-            <a:off x="914400" y="3384006"/>
+            <a:off x="914400" y="2788920"/>
             <a:ext cx="2926080" cy="1417320"/>
           </a:xfrm>
           <a:prstGeom prst="roundRect">
@@ -17082,7 +16474,7 @@
         </p:nvSpPr>
         <p:spPr>
           <a:xfrm>
-            <a:off x="1124712" y="3585174"/>
+            <a:off x="1124712" y="2990088"/>
             <a:ext cx="320040" cy="320040"/>
           </a:xfrm>
           <a:prstGeom prst="rect">
@@ -17095,7 +16487,7 @@
           <a:bodyPr wrap="square" lIns="0" tIns="0" rIns="0" bIns="0" rtlCol="0" anchor="ctr"/>
           <a:lstStyle/>
           <a:p>
-            <a:pPr marL="0" indent="0">
+            <a:pPr indent="0" marL="0">
               <a:buNone/>
             </a:pPr>
             <a:r>
@@ -17103,13 +16495,10 @@
                 <a:solidFill>
                   <a:srgbClr val="000000"/>
                 </a:solidFill>
-                <a:latin typeface="Garamond"/>
               </a:rPr>
               <a:t>📊</a:t>
             </a:r>
-            <a:endParaRPr lang="en-US" sz="1700" dirty="0">
-              <a:latin typeface="Garamond"/>
-            </a:endParaRPr>
+            <a:endParaRPr lang="en-US" sz="1700" dirty="0"/>
           </a:p>
         </p:txBody>
       </p:sp>
@@ -17121,7 +16510,7 @@
         </p:nvSpPr>
         <p:spPr>
           <a:xfrm>
-            <a:off x="1508760" y="3585174"/>
+            <a:off x="1508760" y="2990088"/>
             <a:ext cx="2130552" cy="256032"/>
           </a:xfrm>
           <a:prstGeom prst="rect">
@@ -17134,7 +16523,7 @@
           <a:bodyPr wrap="square" lIns="0" tIns="0" rIns="0" bIns="0" rtlCol="0" anchor="ctr"/>
           <a:lstStyle/>
           <a:p>
-            <a:pPr marL="0" indent="0">
+            <a:pPr indent="0" marL="0">
               <a:buNone/>
             </a:pPr>
             <a:r>
@@ -17142,13 +16531,10 @@
                 <a:solidFill>
                   <a:srgbClr val="0E1712"/>
                 </a:solidFill>
-                <a:latin typeface="Garamond"/>
               </a:rPr>
               <a:t>Ce que le marché montre</a:t>
             </a:r>
-            <a:endParaRPr lang="en-US" sz="1500" dirty="0">
-              <a:latin typeface="Garamond"/>
-            </a:endParaRPr>
+            <a:endParaRPr lang="en-US" sz="1500" dirty="0"/>
           </a:p>
         </p:txBody>
       </p:sp>
@@ -17160,7 +16546,7 @@
         </p:nvSpPr>
         <p:spPr>
           <a:xfrm>
-            <a:off x="1124712" y="4024086"/>
+            <a:off x="1124712" y="3429000"/>
             <a:ext cx="384048" cy="32004"/>
           </a:xfrm>
           <a:prstGeom prst="rect">
@@ -17187,7 +16573,7 @@
         </p:nvSpPr>
         <p:spPr>
           <a:xfrm>
-            <a:off x="1124712" y="4161246"/>
+            <a:off x="1124712" y="3566160"/>
             <a:ext cx="2505456" cy="457200"/>
           </a:xfrm>
           <a:prstGeom prst="rect">
@@ -17202,7 +16588,7 @@
           </a:bodyPr>
           <a:lstStyle/>
           <a:p>
-            <a:pPr marL="0" indent="0">
+            <a:pPr indent="0" marL="0">
               <a:buNone/>
             </a:pPr>
             <a:r>
@@ -17210,13 +16596,10 @@
                 <a:solidFill>
                   <a:srgbClr val="6B786E"/>
                 </a:solidFill>
-                <a:latin typeface="Garamond"/>
               </a:rPr>
               <a:t>Les utilisateurs adoptent déjà des solutions digitales autour de l’épargne, des objectifs financiers et des communautés.</a:t>
             </a:r>
-            <a:endParaRPr lang="en-US" sz="1050" dirty="0">
-              <a:latin typeface="Garamond"/>
-            </a:endParaRPr>
+            <a:endParaRPr lang="en-US" sz="1050" dirty="0"/>
           </a:p>
         </p:txBody>
       </p:sp>
@@ -17228,7 +16611,7 @@
         </p:nvSpPr>
         <p:spPr>
           <a:xfrm>
-            <a:off x="4617720" y="3384006"/>
+            <a:off x="4617720" y="2788920"/>
             <a:ext cx="2926080" cy="1417320"/>
           </a:xfrm>
           <a:prstGeom prst="roundRect">
@@ -17257,7 +16640,7 @@
         </p:nvSpPr>
         <p:spPr>
           <a:xfrm>
-            <a:off x="4828032" y="3585174"/>
+            <a:off x="4828032" y="2990088"/>
             <a:ext cx="320040" cy="320040"/>
           </a:xfrm>
           <a:prstGeom prst="rect">
@@ -17270,7 +16653,7 @@
           <a:bodyPr wrap="square" lIns="0" tIns="0" rIns="0" bIns="0" rtlCol="0" anchor="ctr"/>
           <a:lstStyle/>
           <a:p>
-            <a:pPr marL="0" indent="0">
+            <a:pPr indent="0" marL="0">
               <a:buNone/>
             </a:pPr>
             <a:r>
@@ -17278,13 +16661,10 @@
                 <a:solidFill>
                   <a:srgbClr val="000000"/>
                 </a:solidFill>
-                <a:latin typeface="Garamond"/>
               </a:rPr>
               <a:t>🌍</a:t>
             </a:r>
-            <a:endParaRPr lang="en-US" sz="1700" dirty="0">
-              <a:latin typeface="Garamond"/>
-            </a:endParaRPr>
+            <a:endParaRPr lang="en-US" sz="1700" dirty="0"/>
           </a:p>
         </p:txBody>
       </p:sp>
@@ -17296,7 +16676,7 @@
         </p:nvSpPr>
         <p:spPr>
           <a:xfrm>
-            <a:off x="5212080" y="3585174"/>
+            <a:off x="5212080" y="2990088"/>
             <a:ext cx="2130552" cy="256032"/>
           </a:xfrm>
           <a:prstGeom prst="rect">
@@ -17309,7 +16689,7 @@
           <a:bodyPr wrap="square" lIns="0" tIns="0" rIns="0" bIns="0" rtlCol="0" anchor="ctr"/>
           <a:lstStyle/>
           <a:p>
-            <a:pPr marL="0" indent="0">
+            <a:pPr indent="0" marL="0">
               <a:buNone/>
             </a:pPr>
             <a:r>
@@ -17317,13 +16697,10 @@
                 <a:solidFill>
                   <a:srgbClr val="0E1712"/>
                 </a:solidFill>
-                <a:latin typeface="Garamond"/>
               </a:rPr>
               <a:t>Ce que KOWO ajoute</a:t>
             </a:r>
-            <a:endParaRPr lang="en-US" sz="1500" dirty="0">
-              <a:latin typeface="Garamond"/>
-            </a:endParaRPr>
+            <a:endParaRPr lang="en-US" sz="1500" dirty="0"/>
           </a:p>
         </p:txBody>
       </p:sp>
@@ -17335,7 +16712,7 @@
         </p:nvSpPr>
         <p:spPr>
           <a:xfrm>
-            <a:off x="4828032" y="4024086"/>
+            <a:off x="4828032" y="3429000"/>
             <a:ext cx="384048" cy="32004"/>
           </a:xfrm>
           <a:prstGeom prst="rect">
@@ -17362,7 +16739,7 @@
         </p:nvSpPr>
         <p:spPr>
           <a:xfrm>
-            <a:off x="4828032" y="4161246"/>
+            <a:off x="4828032" y="3566160"/>
             <a:ext cx="2505456" cy="457200"/>
           </a:xfrm>
           <a:prstGeom prst="rect">
@@ -17377,7 +16754,7 @@
           </a:bodyPr>
           <a:lstStyle/>
           <a:p>
-            <a:pPr marL="0" indent="0">
+            <a:pPr indent="0" marL="0">
               <a:buNone/>
             </a:pPr>
             <a:r>
@@ -17385,13 +16762,10 @@
                 <a:solidFill>
                   <a:srgbClr val="6B786E"/>
                 </a:solidFill>
-                <a:latin typeface="Garamond"/>
               </a:rPr>
               <a:t>Une approche centrée sur les communautés, la diaspora, la documentation partenaire et l’architecture réglementaire.</a:t>
             </a:r>
-            <a:endParaRPr lang="en-US" sz="1050" dirty="0">
-              <a:latin typeface="Garamond"/>
-            </a:endParaRPr>
+            <a:endParaRPr lang="en-US" sz="1050" dirty="0"/>
           </a:p>
         </p:txBody>
       </p:sp>
@@ -17403,7 +16777,7 @@
         </p:nvSpPr>
         <p:spPr>
           <a:xfrm>
-            <a:off x="8321040" y="3384006"/>
+            <a:off x="8321040" y="2788920"/>
             <a:ext cx="2926080" cy="1417320"/>
           </a:xfrm>
           <a:prstGeom prst="roundRect">
@@ -17432,7 +16806,7 @@
         </p:nvSpPr>
         <p:spPr>
           <a:xfrm>
-            <a:off x="8531352" y="3585174"/>
+            <a:off x="8531352" y="2990088"/>
             <a:ext cx="320040" cy="320040"/>
           </a:xfrm>
           <a:prstGeom prst="rect">
@@ -17445,7 +16819,7 @@
           <a:bodyPr wrap="square" lIns="0" tIns="0" rIns="0" bIns="0" rtlCol="0" anchor="ctr"/>
           <a:lstStyle/>
           <a:p>
-            <a:pPr marL="0" indent="0">
+            <a:pPr indent="0" marL="0">
               <a:buNone/>
             </a:pPr>
             <a:r>
@@ -17453,13 +16827,10 @@
                 <a:solidFill>
                   <a:srgbClr val="000000"/>
                 </a:solidFill>
-                <a:latin typeface="Garamond"/>
               </a:rPr>
               <a:t>🤝</a:t>
             </a:r>
-            <a:endParaRPr lang="en-US" sz="1700" dirty="0">
-              <a:latin typeface="Garamond"/>
-            </a:endParaRPr>
+            <a:endParaRPr lang="en-US" sz="1700" dirty="0"/>
           </a:p>
         </p:txBody>
       </p:sp>
@@ -17471,7 +16842,7 @@
         </p:nvSpPr>
         <p:spPr>
           <a:xfrm>
-            <a:off x="8915400" y="3585174"/>
+            <a:off x="8915400" y="2990088"/>
             <a:ext cx="2130552" cy="256032"/>
           </a:xfrm>
           <a:prstGeom prst="rect">
@@ -17484,7 +16855,7 @@
           <a:bodyPr wrap="square" lIns="0" tIns="0" rIns="0" bIns="0" rtlCol="0" anchor="ctr"/>
           <a:lstStyle/>
           <a:p>
-            <a:pPr marL="0" indent="0">
+            <a:pPr indent="0" marL="0">
               <a:buNone/>
             </a:pPr>
             <a:r>
@@ -17492,13 +16863,10 @@
                 <a:solidFill>
                   <a:srgbClr val="0E1712"/>
                 </a:solidFill>
-                <a:latin typeface="Garamond"/>
               </a:rPr>
               <a:t>Ce que le partenaire gagne</a:t>
             </a:r>
-            <a:endParaRPr lang="en-US" sz="1500" dirty="0">
-              <a:latin typeface="Garamond"/>
-            </a:endParaRPr>
+            <a:endParaRPr lang="en-US" sz="1500" dirty="0"/>
           </a:p>
         </p:txBody>
       </p:sp>
@@ -17510,7 +16878,7 @@
         </p:nvSpPr>
         <p:spPr>
           <a:xfrm>
-            <a:off x="8531352" y="4024086"/>
+            <a:off x="8531352" y="3429000"/>
             <a:ext cx="384048" cy="32004"/>
           </a:xfrm>
           <a:prstGeom prst="rect">
@@ -17537,7 +16905,7 @@
         </p:nvSpPr>
         <p:spPr>
           <a:xfrm>
-            <a:off x="8531352" y="4161246"/>
+            <a:off x="8531352" y="3566160"/>
             <a:ext cx="2505456" cy="457200"/>
           </a:xfrm>
           <a:prstGeom prst="rect">
@@ -17552,7 +16920,7 @@
           </a:bodyPr>
           <a:lstStyle/>
           <a:p>
-            <a:pPr marL="0" indent="0">
+            <a:pPr indent="0" marL="0">
               <a:buNone/>
             </a:pPr>
             <a:r>
@@ -17560,13 +16928,10 @@
                 <a:solidFill>
                   <a:srgbClr val="6B786E"/>
                 </a:solidFill>
-                <a:latin typeface="Garamond"/>
               </a:rPr>
               <a:t>Une interface de croissance, de collecte digitale et de distribution de services financiers sous cadre réglementé.</a:t>
             </a:r>
-            <a:endParaRPr lang="en-US" sz="1050" dirty="0">
-              <a:latin typeface="Garamond"/>
-            </a:endParaRPr>
+            <a:endParaRPr lang="en-US" sz="1050" dirty="0"/>
           </a:p>
         </p:txBody>
       </p:sp>
@@ -17591,7 +16956,7 @@
           <a:bodyPr wrap="square" lIns="0" tIns="0" rIns="0" bIns="0" rtlCol="0" anchor="ctr"/>
           <a:lstStyle/>
           <a:p>
-            <a:pPr marL="0" indent="0">
+            <a:pPr indent="0" marL="0">
               <a:buNone/>
             </a:pPr>
             <a:r>
@@ -17599,13 +16964,10 @@
                 <a:solidFill>
                   <a:srgbClr val="6B786E"/>
                 </a:solidFill>
-                <a:latin typeface="Garamond"/>
               </a:rPr>
               <a:t>© 2026 KOWO · contact@getkowo.com · getkowo.com</a:t>
             </a:r>
-            <a:endParaRPr lang="en-US" sz="750" dirty="0">
-              <a:latin typeface="Garamond"/>
-            </a:endParaRPr>
+            <a:endParaRPr lang="en-US" sz="750" dirty="0"/>
           </a:p>
         </p:txBody>
       </p:sp>
@@ -17910,299 +17272,4 @@
     </a:ext>
   </a:extLst>
 </a:theme>
-</file>
-
-<file path=ppt/theme/theme2.xml><?xml version="1.0" encoding="utf-8"?>
-<a:theme xmlns:a="http://schemas.openxmlformats.org/drawingml/2006/main" name="Thème Office">
-  <a:themeElements>
-    <a:clrScheme name="Office">
-      <a:dk1>
-        <a:sysClr val="windowText" lastClr="000000"/>
-      </a:dk1>
-      <a:lt1>
-        <a:sysClr val="window" lastClr="FFFFFF"/>
-      </a:lt1>
-      <a:dk2>
-        <a:srgbClr val="44546A"/>
-      </a:dk2>
-      <a:lt2>
-        <a:srgbClr val="E7E6E6"/>
-      </a:lt2>
-      <a:accent1>
-        <a:srgbClr val="4472C4"/>
-      </a:accent1>
-      <a:accent2>
-        <a:srgbClr val="ED7D31"/>
-      </a:accent2>
-      <a:accent3>
-        <a:srgbClr val="A5A5A5"/>
-      </a:accent3>
-      <a:accent4>
-        <a:srgbClr val="FFC000"/>
-      </a:accent4>
-      <a:accent5>
-        <a:srgbClr val="5B9BD5"/>
-      </a:accent5>
-      <a:accent6>
-        <a:srgbClr val="70AD47"/>
-      </a:accent6>
-      <a:hlink>
-        <a:srgbClr val="0563C1"/>
-      </a:hlink>
-      <a:folHlink>
-        <a:srgbClr val="954F72"/>
-      </a:folHlink>
-    </a:clrScheme>
-    <a:fontScheme name="Office">
-      <a:majorFont>
-        <a:latin typeface="Calibri Light" panose="020F0302020204030204"/>
-        <a:ea typeface=""/>
-        <a:cs typeface=""/>
-        <a:font script="Jpan" typeface="游ゴシック Light"/>
-        <a:font script="Hang" typeface="맑은 고딕"/>
-        <a:font script="Hans" typeface="等线 Light"/>
-        <a:font script="Hant" typeface="新細明體"/>
-        <a:font script="Arab" typeface="Times New Roman"/>
-        <a:font script="Hebr" typeface="Times New Roman"/>
-        <a:font script="Thai" typeface="Angsana New"/>
-        <a:font script="Ethi" typeface="Nyala"/>
-        <a:font script="Beng" typeface="Vrinda"/>
-        <a:font script="Gujr" typeface="Shruti"/>
-        <a:font script="Khmr" typeface="MoolBoran"/>
-        <a:font script="Knda" typeface="Tunga"/>
-        <a:font script="Guru" typeface="Raavi"/>
-        <a:font script="Cans" typeface="Euphemia"/>
-        <a:font script="Cher" typeface="Plantagenet Cherokee"/>
-        <a:font script="Yiii" typeface="Microsoft Yi Baiti"/>
-        <a:font script="Tibt" typeface="Microsoft Himalaya"/>
-        <a:font script="Thaa" typeface="MV Boli"/>
-        <a:font script="Deva" typeface="Mangal"/>
-        <a:font script="Telu" typeface="Gautami"/>
-        <a:font script="Taml" typeface="Latha"/>
-        <a:font script="Syrc" typeface="Estrangelo Edessa"/>
-        <a:font script="Orya" typeface="Kalinga"/>
-        <a:font script="Mlym" typeface="Kartika"/>
-        <a:font script="Laoo" typeface="DokChampa"/>
-        <a:font script="Sinh" typeface="Iskoola Pota"/>
-        <a:font script="Mong" typeface="Mongolian Baiti"/>
-        <a:font script="Viet" typeface="Times New Roman"/>
-        <a:font script="Uigh" typeface="Microsoft Uighur"/>
-        <a:font script="Geor" typeface="Sylfaen"/>
-        <a:font script="Armn" typeface="Arial"/>
-        <a:font script="Bugi" typeface="Leelawadee UI"/>
-        <a:font script="Bopo" typeface="Microsoft JhengHei"/>
-        <a:font script="Java" typeface="Javanese Text"/>
-        <a:font script="Lisu" typeface="Segoe UI"/>
-        <a:font script="Mymr" typeface="Myanmar Text"/>
-        <a:font script="Nkoo" typeface="Ebrima"/>
-        <a:font script="Olck" typeface="Nirmala UI"/>
-        <a:font script="Osma" typeface="Ebrima"/>
-        <a:font script="Phag" typeface="Phagspa"/>
-        <a:font script="Syrn" typeface="Estrangelo Edessa"/>
-        <a:font script="Syrj" typeface="Estrangelo Edessa"/>
-        <a:font script="Syre" typeface="Estrangelo Edessa"/>
-        <a:font script="Sora" typeface="Nirmala UI"/>
-        <a:font script="Tale" typeface="Microsoft Tai Le"/>
-        <a:font script="Talu" typeface="Microsoft New Tai Lue"/>
-        <a:font script="Tfng" typeface="Ebrima"/>
-      </a:majorFont>
-      <a:minorFont>
-        <a:latin typeface="Calibri" panose="020F0502020204030204"/>
-        <a:ea typeface=""/>
-        <a:cs typeface=""/>
-        <a:font script="Jpan" typeface="游ゴシック"/>
-        <a:font script="Hang" typeface="맑은 고딕"/>
-        <a:font script="Hans" typeface="等线"/>
-        <a:font script="Hant" typeface="新細明體"/>
-        <a:font script="Arab" typeface="Arial"/>
-        <a:font script="Hebr" typeface="Arial"/>
-        <a:font script="Thai" typeface="Cordia New"/>
-        <a:font script="Ethi" typeface="Nyala"/>
-        <a:font script="Beng" typeface="Vrinda"/>
-        <a:font script="Gujr" typeface="Shruti"/>
-        <a:font script="Khmr" typeface="DaunPenh"/>
-        <a:font script="Knda" typeface="Tunga"/>
-        <a:font script="Guru" typeface="Raavi"/>
-        <a:font script="Cans" typeface="Euphemia"/>
-        <a:font script="Cher" typeface="Plantagenet Cherokee"/>
-        <a:font script="Yiii" typeface="Microsoft Yi Baiti"/>
-        <a:font script="Tibt" typeface="Microsoft Himalaya"/>
-        <a:font script="Thaa" typeface="MV Boli"/>
-        <a:font script="Deva" typeface="Mangal"/>
-        <a:font script="Telu" typeface="Gautami"/>
-        <a:font script="Taml" typeface="Latha"/>
-        <a:font script="Syrc" typeface="Estrangelo Edessa"/>
-        <a:font script="Orya" typeface="Kalinga"/>
-        <a:font script="Mlym" typeface="Kartika"/>
-        <a:font script="Laoo" typeface="DokChampa"/>
-        <a:font script="Sinh" typeface="Iskoola Pota"/>
-        <a:font script="Mong" typeface="Mongolian Baiti"/>
-        <a:font script="Viet" typeface="Arial"/>
-        <a:font script="Uigh" typeface="Microsoft Uighur"/>
-        <a:font script="Geor" typeface="Sylfaen"/>
-        <a:font script="Armn" typeface="Arial"/>
-        <a:font script="Bugi" typeface="Leelawadee UI"/>
-        <a:font script="Bopo" typeface="Microsoft JhengHei"/>
-        <a:font script="Java" typeface="Javanese Text"/>
-        <a:font script="Lisu" typeface="Segoe UI"/>
-        <a:font script="Mymr" typeface="Myanmar Text"/>
-        <a:font script="Nkoo" typeface="Ebrima"/>
-        <a:font script="Olck" typeface="Nirmala UI"/>
-        <a:font script="Osma" typeface="Ebrima"/>
-        <a:font script="Phag" typeface="Phagspa"/>
-        <a:font script="Syrn" typeface="Estrangelo Edessa"/>
-        <a:font script="Syrj" typeface="Estrangelo Edessa"/>
-        <a:font script="Syre" typeface="Estrangelo Edessa"/>
-        <a:font script="Sora" typeface="Nirmala UI"/>
-        <a:font script="Tale" typeface="Microsoft Tai Le"/>
-        <a:font script="Talu" typeface="Microsoft New Tai Lue"/>
-        <a:font script="Tfng" typeface="Ebrima"/>
-      </a:minorFont>
-    </a:fontScheme>
-    <a:fmtScheme name="Office">
-      <a:fillStyleLst>
-        <a:solidFill>
-          <a:schemeClr val="phClr"/>
-        </a:solidFill>
-        <a:gradFill rotWithShape="1">
-          <a:gsLst>
-            <a:gs pos="0">
-              <a:schemeClr val="phClr">
-                <a:lumMod val="110000"/>
-                <a:satMod val="105000"/>
-                <a:tint val="67000"/>
-              </a:schemeClr>
-            </a:gs>
-            <a:gs pos="50000">
-              <a:schemeClr val="phClr">
-                <a:lumMod val="105000"/>
-                <a:satMod val="103000"/>
-                <a:tint val="73000"/>
-              </a:schemeClr>
-            </a:gs>
-            <a:gs pos="100000">
-              <a:schemeClr val="phClr">
-                <a:lumMod val="105000"/>
-                <a:satMod val="109000"/>
-                <a:tint val="81000"/>
-              </a:schemeClr>
-            </a:gs>
-          </a:gsLst>
-          <a:lin ang="5400000" scaled="0"/>
-        </a:gradFill>
-        <a:gradFill rotWithShape="1">
-          <a:gsLst>
-            <a:gs pos="0">
-              <a:schemeClr val="phClr">
-                <a:satMod val="103000"/>
-                <a:lumMod val="102000"/>
-                <a:tint val="94000"/>
-              </a:schemeClr>
-            </a:gs>
-            <a:gs pos="50000">
-              <a:schemeClr val="phClr">
-                <a:satMod val="110000"/>
-                <a:lumMod val="100000"/>
-                <a:shade val="100000"/>
-              </a:schemeClr>
-            </a:gs>
-            <a:gs pos="100000">
-              <a:schemeClr val="phClr">
-                <a:lumMod val="99000"/>
-                <a:satMod val="120000"/>
-                <a:shade val="78000"/>
-              </a:schemeClr>
-            </a:gs>
-          </a:gsLst>
-          <a:lin ang="5400000" scaled="0"/>
-        </a:gradFill>
-      </a:fillStyleLst>
-      <a:lnStyleLst>
-        <a:ln w="6350" cap="flat" cmpd="sng" algn="ctr">
-          <a:solidFill>
-            <a:schemeClr val="phClr"/>
-          </a:solidFill>
-          <a:prstDash val="solid"/>
-          <a:miter lim="800000"/>
-        </a:ln>
-        <a:ln w="12700" cap="flat" cmpd="sng" algn="ctr">
-          <a:solidFill>
-            <a:schemeClr val="phClr"/>
-          </a:solidFill>
-          <a:prstDash val="solid"/>
-          <a:miter lim="800000"/>
-        </a:ln>
-        <a:ln w="19050" cap="flat" cmpd="sng" algn="ctr">
-          <a:solidFill>
-            <a:schemeClr val="phClr"/>
-          </a:solidFill>
-          <a:prstDash val="solid"/>
-          <a:miter lim="800000"/>
-        </a:ln>
-      </a:lnStyleLst>
-      <a:effectStyleLst>
-        <a:effectStyle>
-          <a:effectLst/>
-        </a:effectStyle>
-        <a:effectStyle>
-          <a:effectLst/>
-        </a:effectStyle>
-        <a:effectStyle>
-          <a:effectLst>
-            <a:outerShdw blurRad="57150" dist="19050" dir="5400000" algn="ctr" rotWithShape="0">
-              <a:srgbClr val="000000">
-                <a:alpha val="63000"/>
-              </a:srgbClr>
-            </a:outerShdw>
-          </a:effectLst>
-        </a:effectStyle>
-      </a:effectStyleLst>
-      <a:bgFillStyleLst>
-        <a:solidFill>
-          <a:schemeClr val="phClr"/>
-        </a:solidFill>
-        <a:solidFill>
-          <a:schemeClr val="phClr">
-            <a:tint val="95000"/>
-            <a:satMod val="170000"/>
-          </a:schemeClr>
-        </a:solidFill>
-        <a:gradFill rotWithShape="1">
-          <a:gsLst>
-            <a:gs pos="0">
-              <a:schemeClr val="phClr">
-                <a:tint val="93000"/>
-                <a:satMod val="150000"/>
-                <a:shade val="98000"/>
-                <a:lumMod val="102000"/>
-              </a:schemeClr>
-            </a:gs>
-            <a:gs pos="50000">
-              <a:schemeClr val="phClr">
-                <a:tint val="98000"/>
-                <a:satMod val="130000"/>
-                <a:shade val="90000"/>
-                <a:lumMod val="103000"/>
-              </a:schemeClr>
-            </a:gs>
-            <a:gs pos="100000">
-              <a:schemeClr val="phClr">
-                <a:shade val="63000"/>
-                <a:satMod val="120000"/>
-              </a:schemeClr>
-            </a:gs>
-          </a:gsLst>
-          <a:lin ang="5400000" scaled="0"/>
-        </a:gradFill>
-      </a:bgFillStyleLst>
-    </a:fmtScheme>
-  </a:themeElements>
-  <a:objectDefaults/>
-  <a:extraClrSchemeLst/>
-  <a:extLst>
-    <a:ext uri="{05A4C25C-085E-4340-85A3-A5531E510DB2}">
-      <thm15:themeFamily xmlns:thm15="http://schemas.microsoft.com/office/thememl/2012/main" name="Office Theme" id="{62F939B6-93AF-4DB8-9C6B-D6C7DFDC589F}" vid="{4A3C46E8-61CC-4603-A589-7422A47A8E4A}"/>
-    </a:ext>
-  </a:extLst>
-</a:theme>
 </file>